--- a/02-INVESTOR-PRESENTATIONS/DLOOP_Pitch_Deck_2026.pptx
+++ b/02-INVESTOR-PRESENTATIONS/DLOOP_Pitch_Deck_2026.pptx
@@ -16,9 +16,10 @@
     <p:sldId id="264" r:id="rId10"/>
     <p:sldId id="265" r:id="rId11"/>
     <p:sldId id="266" r:id="rId12"/>
+    <p:sldId id="267" r:id="rId13"/>
   </p:sldIdLst>
   <p:notesMasterIdLst>
-    <p:notesMasterId r:id="rId13"/>
+    <p:notesMasterId r:id="rId14"/>
   </p:notesMasterIdLst>
   <p:sldSz cx="12192000" cy="6858000"/>
   <p:notesSz cx="6858000" cy="12192000"/>
@@ -730,6 +731,94 @@
 </p:notes>
 </file>
 
+<file path=ppt/notesSlides/notesSlide12.xml><?xml version="1.0" encoding="utf-8"?>
+<p:notes xmlns:a="http://schemas.openxmlformats.org/drawingml/2006/main" xmlns:r="http://schemas.openxmlformats.org/officeDocument/2006/relationships" xmlns:p="http://schemas.openxmlformats.org/presentationml/2006/main">
+  <p:cSld>
+    <p:spTree>
+      <p:nvGrpSpPr>
+        <p:cNvPr id="1" name=""/>
+        <p:cNvGrpSpPr/>
+        <p:nvPr/>
+      </p:nvGrpSpPr>
+      <p:grpSpPr>
+        <a:xfrm>
+          <a:off x="0" y="0"/>
+          <a:ext cx="0" cy="0"/>
+          <a:chOff x="0" y="0"/>
+          <a:chExt cx="0" cy="0"/>
+        </a:xfrm>
+      </p:grpSpPr>
+      <p:sp>
+        <p:nvSpPr>
+          <p:cNvPr id="2" name="Slide Image Placeholder 1"/>
+          <p:cNvSpPr>
+            <a:spLocks noGrp="1" noRot="1" noChangeAspect="1"/>
+          </p:cNvSpPr>
+          <p:nvPr>
+            <p:ph type="sldImg"/>
+          </p:nvPr>
+        </p:nvSpPr>
+        <p:spPr/>
+      </p:sp>
+      <p:sp>
+        <p:nvSpPr>
+          <p:cNvPr id="3" name="Notes Placeholder 2"/>
+          <p:cNvSpPr>
+            <a:spLocks noGrp="1"/>
+          </p:cNvSpPr>
+          <p:nvPr>
+            <p:ph type="body" idx="1"/>
+          </p:nvPr>
+        </p:nvSpPr>
+        <p:spPr/>
+        <p:txBody>
+          <a:bodyPr/>
+          <a:lstStyle/>
+          <a:p>
+            <a:r>
+              <a:rPr lang="en-US" dirty="0"/>
+              <a:t/>
+            </a:r>
+            <a:endParaRPr lang="en-US" dirty="0"/>
+          </a:p>
+        </p:txBody>
+      </p:sp>
+      <p:sp>
+        <p:nvSpPr>
+          <p:cNvPr id="4" name="Slide Number Placeholder 3"/>
+          <p:cNvSpPr>
+            <a:spLocks noGrp="1"/>
+          </p:cNvSpPr>
+          <p:nvPr>
+            <p:ph type="sldNum" sz="quarter" idx="10"/>
+          </p:nvPr>
+        </p:nvSpPr>
+        <p:spPr/>
+        <p:txBody>
+          <a:bodyPr/>
+          <a:lstStyle/>
+          <a:p>
+            <a:fld id="{F7021451-1387-4CA6-816F-3879F97B5CBC}" type="slidenum">
+              <a:rPr lang="en-US"/>
+              <a:t>12</a:t>
+            </a:fld>
+            <a:endParaRPr lang="en-US"/>
+          </a:p>
+        </p:txBody>
+      </p:sp>
+    </p:spTree>
+    <p:extLst>
+      <p:ext uri="{BB962C8B-B14F-4D97-AF65-F5344CB8AC3E}">
+        <p14:creationId xmlns:p14="http://schemas.microsoft.com/office/powerpoint/2010/main" val="1024086991"/>
+      </p:ext>
+    </p:extLst>
+  </p:cSld>
+  <p:clrMapOvr>
+    <a:masterClrMapping/>
+  </p:clrMapOvr>
+</p:notes>
+</file>
+
 <file path=ppt/notesSlides/notesSlide2.xml><?xml version="1.0" encoding="utf-8"?>
 <p:notes xmlns:a="http://schemas.openxmlformats.org/drawingml/2006/main" xmlns:r="http://schemas.openxmlformats.org/officeDocument/2006/relationships" xmlns:p="http://schemas.openxmlformats.org/presentationml/2006/main">
   <p:cSld>
@@ -2375,7 +2464,7 @@
                   <a:srgbClr val="FFFFFF"/>
                 </a:solidFill>
               </a:rPr>
-              <a:t>€ 50.000 – € 100.000</a:t>
+              <a:t>€ 80.000 – € 100.000</a:t>
             </a:r>
             <a:endParaRPr lang="en-US" sz="1000" dirty="0"/>
           </a:p>
@@ -2411,7 +2500,7 @@
                   <a:srgbClr val="334455"/>
                 </a:solidFill>
               </a:rPr>
-              <a:t>01 / 11</a:t>
+              <a:t>01 / 12</a:t>
             </a:r>
             <a:endParaRPr lang="en-US" sz="800" dirty="0"/>
           </a:p>
@@ -2428,6 +2517,818 @@
 <file path=ppt/slides/slide10.xml><?xml version="1.0" encoding="utf-8"?>
 <p:sld xmlns:a="http://schemas.openxmlformats.org/drawingml/2006/main" xmlns:r="http://schemas.openxmlformats.org/officeDocument/2006/relationships" xmlns:p="http://schemas.openxmlformats.org/presentationml/2006/main">
   <p:cSld name="Slide 10">
+    <p:bg>
+      <p:bgPr>
+        <a:solidFill>
+          <a:srgbClr val="0A1929"/>
+        </a:solidFill>
+      </p:bgPr>
+    </p:bg>
+    <p:spTree>
+      <p:nvGrpSpPr>
+        <p:cNvPr id="1" name=""/>
+        <p:cNvGrpSpPr/>
+        <p:nvPr/>
+      </p:nvGrpSpPr>
+      <p:grpSpPr>
+        <a:xfrm>
+          <a:off x="0" y="0"/>
+          <a:ext cx="0" cy="0"/>
+          <a:chOff x="0" y="0"/>
+          <a:chExt cx="0" cy="0"/>
+        </a:xfrm>
+      </p:grpSpPr>
+      <p:sp>
+        <p:nvSpPr>
+          <p:cNvPr id="2" name="Text 0"/>
+          <p:cNvSpPr/>
+          <p:nvPr/>
+        </p:nvSpPr>
+        <p:spPr>
+          <a:xfrm>
+            <a:off x="457200" y="365760"/>
+            <a:ext cx="3657600" cy="228600"/>
+          </a:xfrm>
+          <a:prstGeom prst="rect">
+            <a:avLst/>
+          </a:prstGeom>
+          <a:noFill/>
+          <a:ln/>
+        </p:spPr>
+        <p:txBody>
+          <a:bodyPr wrap="square" rtlCol="0" anchor="ctr"/>
+          <a:lstStyle/>
+          <a:p>
+            <a:pPr indent="0" marL="0">
+              <a:buNone/>
+            </a:pPr>
+            <a:r>
+              <a:rPr lang="en-US" sz="900" b="1" spc="300" kern="0" dirty="0">
+                <a:solidFill>
+                  <a:srgbClr val="14B8A6"/>
+                </a:solidFill>
+              </a:rPr>
+              <a:t>IL TEAM</a:t>
+            </a:r>
+            <a:endParaRPr lang="en-US" sz="900" dirty="0"/>
+          </a:p>
+        </p:txBody>
+      </p:sp>
+      <p:sp>
+        <p:nvSpPr>
+          <p:cNvPr id="3" name="Text 1"/>
+          <p:cNvSpPr/>
+          <p:nvPr/>
+        </p:nvSpPr>
+        <p:spPr>
+          <a:xfrm>
+            <a:off x="457200" y="640080"/>
+            <a:ext cx="8229600" cy="1005840"/>
+          </a:xfrm>
+          <a:prstGeom prst="rect">
+            <a:avLst/>
+          </a:prstGeom>
+          <a:noFill/>
+          <a:ln/>
+        </p:spPr>
+        <p:txBody>
+          <a:bodyPr wrap="square" rtlCol="0" anchor="ctr"/>
+          <a:lstStyle/>
+          <a:p>
+            <a:pPr indent="0" marL="0">
+              <a:lnSpc>
+                <a:spcPct val="110000"/>
+              </a:lnSpc>
+              <a:buNone/>
+            </a:pPr>
+            <a:r>
+              <a:rPr lang="en-US" sz="3400" b="1" dirty="0">
+                <a:solidFill>
+                  <a:srgbClr val="FFFFFF"/>
+                </a:solidFill>
+                <a:latin typeface="Georgia" pitchFamily="34" charset="0"/>
+                <a:ea typeface="Georgia" pitchFamily="34" charset="-122"/>
+                <a:cs typeface="Georgia" pitchFamily="34" charset="-120"/>
+              </a:rPr>
+              <a:t>Founder-led, asset-light,</a:t>
+            </a:r>
+            <a:endParaRPr lang="en-US" sz="3400" dirty="0"/>
+          </a:p>
+          <a:p>
+            <a:pPr indent="0" marL="0">
+              <a:lnSpc>
+                <a:spcPct val="110000"/>
+              </a:lnSpc>
+              <a:buNone/>
+            </a:pPr>
+            <a:r>
+              <a:rPr lang="en-US" sz="3400" b="1" dirty="0">
+                <a:solidFill>
+                  <a:srgbClr val="FFFFFF"/>
+                </a:solidFill>
+                <a:latin typeface="Georgia" pitchFamily="34" charset="0"/>
+                <a:ea typeface="Georgia" pitchFamily="34" charset="-122"/>
+                <a:cs typeface="Georgia" pitchFamily="34" charset="-120"/>
+              </a:rPr>
+              <a:t>esecuzione guerriglia.</a:t>
+            </a:r>
+            <a:endParaRPr lang="en-US" sz="3400" dirty="0"/>
+          </a:p>
+        </p:txBody>
+      </p:sp>
+      <p:sp>
+        <p:nvSpPr>
+          <p:cNvPr id="4" name="Shape 2"/>
+          <p:cNvSpPr/>
+          <p:nvPr/>
+        </p:nvSpPr>
+        <p:spPr>
+          <a:xfrm>
+            <a:off x="457200" y="1920240"/>
+            <a:ext cx="3520440" cy="3657600"/>
+          </a:xfrm>
+          <a:prstGeom prst="rect">
+            <a:avLst/>
+          </a:prstGeom>
+          <a:solidFill>
+            <a:srgbClr val="0F2535"/>
+          </a:solidFill>
+          <a:ln w="12700">
+            <a:solidFill>
+              <a:srgbClr val="1A3A50"/>
+            </a:solidFill>
+            <a:prstDash val="solid"/>
+          </a:ln>
+        </p:spPr>
+      </p:sp>
+      <p:sp>
+        <p:nvSpPr>
+          <p:cNvPr id="5" name="Shape 3"/>
+          <p:cNvSpPr/>
+          <p:nvPr/>
+        </p:nvSpPr>
+        <p:spPr>
+          <a:xfrm>
+            <a:off x="685800" y="2103120"/>
+            <a:ext cx="685800" cy="685800"/>
+          </a:xfrm>
+          <a:prstGeom prst="roundRect">
+            <a:avLst>
+              <a:gd name="adj" fmla="val 10667"/>
+            </a:avLst>
+          </a:prstGeom>
+          <a:solidFill>
+            <a:srgbClr val="0B7A75"/>
+          </a:solidFill>
+          <a:ln/>
+        </p:spPr>
+      </p:sp>
+      <p:sp>
+        <p:nvSpPr>
+          <p:cNvPr id="6" name="Text 4"/>
+          <p:cNvSpPr/>
+          <p:nvPr/>
+        </p:nvSpPr>
+        <p:spPr>
+          <a:xfrm>
+            <a:off x="685800" y="2103120"/>
+            <a:ext cx="685800" cy="685800"/>
+          </a:xfrm>
+          <a:prstGeom prst="rect">
+            <a:avLst/>
+          </a:prstGeom>
+          <a:noFill/>
+          <a:ln/>
+        </p:spPr>
+        <p:txBody>
+          <a:bodyPr wrap="square" lIns="0" tIns="0" rIns="0" bIns="0" rtlCol="0" anchor="ctr"/>
+          <a:lstStyle/>
+          <a:p>
+            <a:pPr algn="ctr" indent="0" marL="0">
+              <a:buNone/>
+            </a:pPr>
+            <a:r>
+              <a:rPr lang="en-US" sz="1600" b="1" dirty="0">
+                <a:solidFill>
+                  <a:srgbClr val="FFFFFF"/>
+                </a:solidFill>
+              </a:rPr>
+              <a:t>CA</a:t>
+            </a:r>
+            <a:endParaRPr lang="en-US" sz="1600" dirty="0"/>
+          </a:p>
+        </p:txBody>
+      </p:sp>
+      <p:sp>
+        <p:nvSpPr>
+          <p:cNvPr id="7" name="Text 5"/>
+          <p:cNvSpPr/>
+          <p:nvPr/>
+        </p:nvSpPr>
+        <p:spPr>
+          <a:xfrm>
+            <a:off x="640080" y="2926080"/>
+            <a:ext cx="3154680" cy="320040"/>
+          </a:xfrm>
+          <a:prstGeom prst="rect">
+            <a:avLst/>
+          </a:prstGeom>
+          <a:noFill/>
+          <a:ln/>
+        </p:spPr>
+        <p:txBody>
+          <a:bodyPr wrap="square" lIns="0" tIns="0" rIns="0" bIns="0" rtlCol="0" anchor="ctr"/>
+          <a:lstStyle/>
+          <a:p>
+            <a:pPr indent="0" marL="0">
+              <a:buNone/>
+            </a:pPr>
+            <a:r>
+              <a:rPr lang="en-US" sz="1300" b="1" dirty="0">
+                <a:solidFill>
+                  <a:srgbClr val="FFFFFF"/>
+                </a:solidFill>
+              </a:rPr>
+              <a:t>Crescenzo Amodio</a:t>
+            </a:r>
+            <a:endParaRPr lang="en-US" sz="1300" dirty="0"/>
+          </a:p>
+        </p:txBody>
+      </p:sp>
+      <p:sp>
+        <p:nvSpPr>
+          <p:cNvPr id="8" name="Text 6"/>
+          <p:cNvSpPr/>
+          <p:nvPr/>
+        </p:nvSpPr>
+        <p:spPr>
+          <a:xfrm>
+            <a:off x="640080" y="3246120"/>
+            <a:ext cx="3154680" cy="228600"/>
+          </a:xfrm>
+          <a:prstGeom prst="rect">
+            <a:avLst/>
+          </a:prstGeom>
+          <a:noFill/>
+          <a:ln/>
+        </p:spPr>
+        <p:txBody>
+          <a:bodyPr wrap="square" lIns="0" tIns="0" rIns="0" bIns="0" rtlCol="0" anchor="ctr"/>
+          <a:lstStyle/>
+          <a:p>
+            <a:pPr indent="0" marL="0">
+              <a:buNone/>
+            </a:pPr>
+            <a:r>
+              <a:rPr lang="en-US" sz="900" b="1" spc="100" kern="0" dirty="0">
+                <a:solidFill>
+                  <a:srgbClr val="14B8A6"/>
+                </a:solidFill>
+              </a:rPr>
+              <a:t>Founder &amp; CEO</a:t>
+            </a:r>
+            <a:endParaRPr lang="en-US" sz="900" dirty="0"/>
+          </a:p>
+        </p:txBody>
+      </p:sp>
+      <p:sp>
+        <p:nvSpPr>
+          <p:cNvPr id="9" name="Text 7"/>
+          <p:cNvSpPr/>
+          <p:nvPr/>
+        </p:nvSpPr>
+        <p:spPr>
+          <a:xfrm>
+            <a:off x="640080" y="3566160"/>
+            <a:ext cx="3154680" cy="1645920"/>
+          </a:xfrm>
+          <a:prstGeom prst="rect">
+            <a:avLst/>
+          </a:prstGeom>
+          <a:noFill/>
+          <a:ln/>
+        </p:spPr>
+        <p:txBody>
+          <a:bodyPr wrap="square" lIns="0" tIns="0" rIns="0" bIns="0" rtlCol="0" anchor="ctr"/>
+          <a:lstStyle/>
+          <a:p>
+            <a:pPr indent="0" marL="0">
+              <a:lnSpc>
+                <a:spcPct val="145000"/>
+              </a:lnSpc>
+              <a:buNone/>
+            </a:pPr>
+            <a:r>
+              <a:rPr lang="en-US" sz="1000" dirty="0">
+                <a:solidFill>
+                  <a:srgbClr val="8CB3CC"/>
+                </a:solidFill>
+              </a:rPr>
+              <a:t>Imprenditore seriale, Pomigliano d'Arco (NA). Gestisce CAV S.R.L. e B&amp;B Dloop. Fa sales direttamente M1-M4 (guerriglia). Coordina pitch MoodCapital.</a:t>
+            </a:r>
+            <a:endParaRPr lang="en-US" sz="1000" dirty="0"/>
+          </a:p>
+        </p:txBody>
+      </p:sp>
+      <p:sp>
+        <p:nvSpPr>
+          <p:cNvPr id="10" name="Shape 8"/>
+          <p:cNvSpPr/>
+          <p:nvPr/>
+        </p:nvSpPr>
+        <p:spPr>
+          <a:xfrm>
+            <a:off x="4297680" y="1920240"/>
+            <a:ext cx="3520440" cy="3657600"/>
+          </a:xfrm>
+          <a:prstGeom prst="rect">
+            <a:avLst/>
+          </a:prstGeom>
+          <a:solidFill>
+            <a:srgbClr val="0F2535"/>
+          </a:solidFill>
+          <a:ln w="12700">
+            <a:solidFill>
+              <a:srgbClr val="1A3A50"/>
+            </a:solidFill>
+            <a:prstDash val="solid"/>
+          </a:ln>
+        </p:spPr>
+      </p:sp>
+      <p:sp>
+        <p:nvSpPr>
+          <p:cNvPr id="11" name="Shape 9"/>
+          <p:cNvSpPr/>
+          <p:nvPr/>
+        </p:nvSpPr>
+        <p:spPr>
+          <a:xfrm>
+            <a:off x="4526280" y="2103120"/>
+            <a:ext cx="685800" cy="685800"/>
+          </a:xfrm>
+          <a:prstGeom prst="roundRect">
+            <a:avLst>
+              <a:gd name="adj" fmla="val 10667"/>
+            </a:avLst>
+          </a:prstGeom>
+          <a:solidFill>
+            <a:srgbClr val="0B7A75"/>
+          </a:solidFill>
+          <a:ln/>
+        </p:spPr>
+      </p:sp>
+      <p:sp>
+        <p:nvSpPr>
+          <p:cNvPr id="12" name="Text 10"/>
+          <p:cNvSpPr/>
+          <p:nvPr/>
+        </p:nvSpPr>
+        <p:spPr>
+          <a:xfrm>
+            <a:off x="4526280" y="2103120"/>
+            <a:ext cx="685800" cy="685800"/>
+          </a:xfrm>
+          <a:prstGeom prst="rect">
+            <a:avLst/>
+          </a:prstGeom>
+          <a:noFill/>
+          <a:ln/>
+        </p:spPr>
+        <p:txBody>
+          <a:bodyPr wrap="square" lIns="0" tIns="0" rIns="0" bIns="0" rtlCol="0" anchor="ctr"/>
+          <a:lstStyle/>
+          <a:p>
+            <a:pPr algn="ctr" indent="0" marL="0">
+              <a:buNone/>
+            </a:pPr>
+            <a:r>
+              <a:rPr lang="en-US" sz="1600" b="1" dirty="0">
+                <a:solidFill>
+                  <a:srgbClr val="FFFFFF"/>
+                </a:solidFill>
+              </a:rPr>
+              <a:t>SB</a:t>
+            </a:r>
+            <a:endParaRPr lang="en-US" sz="1600" dirty="0"/>
+          </a:p>
+        </p:txBody>
+      </p:sp>
+      <p:sp>
+        <p:nvSpPr>
+          <p:cNvPr id="13" name="Text 11"/>
+          <p:cNvSpPr/>
+          <p:nvPr/>
+        </p:nvSpPr>
+        <p:spPr>
+          <a:xfrm>
+            <a:off x="4480560" y="2926080"/>
+            <a:ext cx="3154680" cy="320040"/>
+          </a:xfrm>
+          <a:prstGeom prst="rect">
+            <a:avLst/>
+          </a:prstGeom>
+          <a:noFill/>
+          <a:ln/>
+        </p:spPr>
+        <p:txBody>
+          <a:bodyPr wrap="square" lIns="0" tIns="0" rIns="0" bIns="0" rtlCol="0" anchor="ctr"/>
+          <a:lstStyle/>
+          <a:p>
+            <a:pPr indent="0" marL="0">
+              <a:buNone/>
+            </a:pPr>
+            <a:r>
+              <a:rPr lang="en-US" sz="1300" b="1" dirty="0">
+                <a:solidFill>
+                  <a:srgbClr val="FFFFFF"/>
+                </a:solidFill>
+              </a:rPr>
+              <a:t>Saba</a:t>
+            </a:r>
+            <a:endParaRPr lang="en-US" sz="1300" dirty="0"/>
+          </a:p>
+        </p:txBody>
+      </p:sp>
+      <p:sp>
+        <p:nvSpPr>
+          <p:cNvPr id="14" name="Text 12"/>
+          <p:cNvSpPr/>
+          <p:nvPr/>
+        </p:nvSpPr>
+        <p:spPr>
+          <a:xfrm>
+            <a:off x="4480560" y="3246120"/>
+            <a:ext cx="3154680" cy="228600"/>
+          </a:xfrm>
+          <a:prstGeom prst="rect">
+            <a:avLst/>
+          </a:prstGeom>
+          <a:noFill/>
+          <a:ln/>
+        </p:spPr>
+        <p:txBody>
+          <a:bodyPr wrap="square" lIns="0" tIns="0" rIns="0" bIns="0" rtlCol="0" anchor="ctr"/>
+          <a:lstStyle/>
+          <a:p>
+            <a:pPr indent="0" marL="0">
+              <a:buNone/>
+            </a:pPr>
+            <a:r>
+              <a:rPr lang="en-US" sz="900" b="1" spc="100" kern="0" dirty="0">
+                <a:solidFill>
+                  <a:srgbClr val="14B8A6"/>
+                </a:solidFill>
+              </a:rPr>
+              <a:t>CTO / Lead Dev — P.IVA</a:t>
+            </a:r>
+            <a:endParaRPr lang="en-US" sz="900" dirty="0"/>
+          </a:p>
+        </p:txBody>
+      </p:sp>
+      <p:sp>
+        <p:nvSpPr>
+          <p:cNvPr id="15" name="Text 13"/>
+          <p:cNvSpPr/>
+          <p:nvPr/>
+        </p:nvSpPr>
+        <p:spPr>
+          <a:xfrm>
+            <a:off x="4480560" y="3566160"/>
+            <a:ext cx="3154680" cy="1645920"/>
+          </a:xfrm>
+          <a:prstGeom prst="rect">
+            <a:avLst/>
+          </a:prstGeom>
+          <a:noFill/>
+          <a:ln/>
+        </p:spPr>
+        <p:txBody>
+          <a:bodyPr wrap="square" lIns="0" tIns="0" rIns="0" bIns="0" rtlCol="0" anchor="ctr"/>
+          <a:lstStyle/>
+          <a:p>
+            <a:pPr indent="0" marL="0">
+              <a:lnSpc>
+                <a:spcPct val="145000"/>
+              </a:lnSpc>
+              <a:buNone/>
+            </a:pPr>
+            <a:r>
+              <a:rPr lang="en-US" sz="1000" dirty="0">
+                <a:solidFill>
+                  <a:srgbClr val="8CB3CC"/>
+                </a:solidFill>
+              </a:rPr>
+              <a:t>Imprenditore seriale e reduce da exit di successo nell'ambito digital. CTO e Lead Dev Dloop: ha progettato e sviluppato l'intera architettura Flutter + Supabase/PostGIS. Collabora come autonomo con comprovata expertise in prodotti SaaS scalabili.</a:t>
+            </a:r>
+            <a:endParaRPr lang="en-US" sz="1000" dirty="0"/>
+          </a:p>
+        </p:txBody>
+      </p:sp>
+      <p:sp>
+        <p:nvSpPr>
+          <p:cNvPr id="16" name="Shape 14"/>
+          <p:cNvSpPr/>
+          <p:nvPr/>
+        </p:nvSpPr>
+        <p:spPr>
+          <a:xfrm>
+            <a:off x="8138160" y="1920240"/>
+            <a:ext cx="3520440" cy="3657600"/>
+          </a:xfrm>
+          <a:prstGeom prst="rect">
+            <a:avLst/>
+          </a:prstGeom>
+          <a:solidFill>
+            <a:srgbClr val="0F2535"/>
+          </a:solidFill>
+          <a:ln w="12700">
+            <a:solidFill>
+              <a:srgbClr val="334455"/>
+            </a:solidFill>
+            <a:prstDash val="solid"/>
+          </a:ln>
+        </p:spPr>
+      </p:sp>
+      <p:sp>
+        <p:nvSpPr>
+          <p:cNvPr id="17" name="Shape 15"/>
+          <p:cNvSpPr/>
+          <p:nvPr/>
+        </p:nvSpPr>
+        <p:spPr>
+          <a:xfrm>
+            <a:off x="8366760" y="2103120"/>
+            <a:ext cx="685800" cy="685800"/>
+          </a:xfrm>
+          <a:prstGeom prst="roundRect">
+            <a:avLst>
+              <a:gd name="adj" fmla="val 10667"/>
+            </a:avLst>
+          </a:prstGeom>
+          <a:solidFill>
+            <a:srgbClr val="2D3748"/>
+          </a:solidFill>
+          <a:ln/>
+        </p:spPr>
+      </p:sp>
+      <p:sp>
+        <p:nvSpPr>
+          <p:cNvPr id="18" name="Text 16"/>
+          <p:cNvSpPr/>
+          <p:nvPr/>
+        </p:nvSpPr>
+        <p:spPr>
+          <a:xfrm>
+            <a:off x="8366760" y="2103120"/>
+            <a:ext cx="685800" cy="685800"/>
+          </a:xfrm>
+          <a:prstGeom prst="rect">
+            <a:avLst/>
+          </a:prstGeom>
+          <a:noFill/>
+          <a:ln/>
+        </p:spPr>
+        <p:txBody>
+          <a:bodyPr wrap="square" lIns="0" tIns="0" rIns="0" bIns="0" rtlCol="0" anchor="ctr"/>
+          <a:lstStyle/>
+          <a:p>
+            <a:pPr algn="ctr" indent="0" marL="0">
+              <a:buNone/>
+            </a:pPr>
+            <a:r>
+              <a:rPr lang="en-US" sz="1600" b="1" dirty="0">
+                <a:solidFill>
+                  <a:srgbClr val="FFFFFF"/>
+                </a:solidFill>
+              </a:rPr>
+              <a:t>+4</a:t>
+            </a:r>
+            <a:endParaRPr lang="en-US" sz="1600" dirty="0"/>
+          </a:p>
+        </p:txBody>
+      </p:sp>
+      <p:sp>
+        <p:nvSpPr>
+          <p:cNvPr id="19" name="Text 17"/>
+          <p:cNvSpPr/>
+          <p:nvPr/>
+        </p:nvSpPr>
+        <p:spPr>
+          <a:xfrm>
+            <a:off x="8321040" y="2926080"/>
+            <a:ext cx="3154680" cy="320040"/>
+          </a:xfrm>
+          <a:prstGeom prst="rect">
+            <a:avLst/>
+          </a:prstGeom>
+          <a:noFill/>
+          <a:ln/>
+        </p:spPr>
+        <p:txBody>
+          <a:bodyPr wrap="square" lIns="0" tIns="0" rIns="0" bIns="0" rtlCol="0" anchor="ctr"/>
+          <a:lstStyle/>
+          <a:p>
+            <a:pPr indent="0" marL="0">
+              <a:buNone/>
+            </a:pPr>
+            <a:r>
+              <a:rPr lang="en-US" sz="1300" b="1" dirty="0">
+                <a:solidFill>
+                  <a:srgbClr val="FFFFFF"/>
+                </a:solidFill>
+              </a:rPr>
+              <a:t>Hiring Plan 2026</a:t>
+            </a:r>
+            <a:endParaRPr lang="en-US" sz="1300" dirty="0"/>
+          </a:p>
+        </p:txBody>
+      </p:sp>
+      <p:sp>
+        <p:nvSpPr>
+          <p:cNvPr id="20" name="Text 18"/>
+          <p:cNvSpPr/>
+          <p:nvPr/>
+        </p:nvSpPr>
+        <p:spPr>
+          <a:xfrm>
+            <a:off x="8321040" y="3246120"/>
+            <a:ext cx="3154680" cy="228600"/>
+          </a:xfrm>
+          <a:prstGeom prst="rect">
+            <a:avLst/>
+          </a:prstGeom>
+          <a:noFill/>
+          <a:ln/>
+        </p:spPr>
+        <p:txBody>
+          <a:bodyPr wrap="square" lIns="0" tIns="0" rIns="0" bIns="0" rtlCol="0" anchor="ctr"/>
+          <a:lstStyle/>
+          <a:p>
+            <a:pPr indent="0" marL="0">
+              <a:buNone/>
+            </a:pPr>
+            <a:r>
+              <a:rPr lang="en-US" sz="900" b="1" spc="100" kern="0" dirty="0">
+                <a:solidFill>
+                  <a:srgbClr val="14B8A6"/>
+                </a:solidFill>
+              </a:rPr>
+              <a:t>Con il seed round</a:t>
+            </a:r>
+            <a:endParaRPr lang="en-US" sz="900" dirty="0"/>
+          </a:p>
+        </p:txBody>
+      </p:sp>
+      <p:sp>
+        <p:nvSpPr>
+          <p:cNvPr id="21" name="Text 19"/>
+          <p:cNvSpPr/>
+          <p:nvPr/>
+        </p:nvSpPr>
+        <p:spPr>
+          <a:xfrm>
+            <a:off x="8321040" y="3566160"/>
+            <a:ext cx="3154680" cy="1645920"/>
+          </a:xfrm>
+          <a:prstGeom prst="rect">
+            <a:avLst/>
+          </a:prstGeom>
+          <a:noFill/>
+          <a:ln/>
+        </p:spPr>
+        <p:txBody>
+          <a:bodyPr wrap="square" lIns="0" tIns="0" rIns="0" bIns="0" rtlCol="0" anchor="ctr"/>
+          <a:lstStyle/>
+          <a:p>
+            <a:pPr indent="0" marL="0">
+              <a:lnSpc>
+                <a:spcPct val="145000"/>
+              </a:lnSpc>
+              <a:buNone/>
+            </a:pPr>
+            <a:r>
+              <a:rPr lang="en-US" sz="1000" dirty="0">
+                <a:solidFill>
+                  <a:srgbClr val="8CB3CC"/>
+                </a:solidFill>
+              </a:rPr>
+              <a:t>Customer Success (M4), Marketing Exec (M4), Sales BDR (M5 — 3 mesi prima del Conservative), Dev Junior P.IVA (M7), Back Office (M6).</a:t>
+            </a:r>
+            <a:endParaRPr lang="en-US" sz="1000" dirty="0"/>
+          </a:p>
+        </p:txBody>
+      </p:sp>
+      <p:sp>
+        <p:nvSpPr>
+          <p:cNvPr id="22" name="Shape 20"/>
+          <p:cNvSpPr/>
+          <p:nvPr/>
+        </p:nvSpPr>
+        <p:spPr>
+          <a:xfrm>
+            <a:off x="457200" y="5806440"/>
+            <a:ext cx="11247120" cy="548640"/>
+          </a:xfrm>
+          <a:prstGeom prst="rect">
+            <a:avLst/>
+          </a:prstGeom>
+          <a:solidFill>
+            <a:srgbClr val="0A2A28"/>
+          </a:solidFill>
+          <a:ln w="12700">
+            <a:solidFill>
+              <a:srgbClr val="0B7A75"/>
+            </a:solidFill>
+            <a:prstDash val="solid"/>
+          </a:ln>
+        </p:spPr>
+      </p:sp>
+      <p:sp>
+        <p:nvSpPr>
+          <p:cNvPr id="23" name="Text 21"/>
+          <p:cNvSpPr/>
+          <p:nvPr/>
+        </p:nvSpPr>
+        <p:spPr>
+          <a:xfrm>
+            <a:off x="640080" y="5852160"/>
+            <a:ext cx="10881360" cy="457200"/>
+          </a:xfrm>
+          <a:prstGeom prst="rect">
+            <a:avLst/>
+          </a:prstGeom>
+          <a:noFill/>
+          <a:ln/>
+        </p:spPr>
+        <p:txBody>
+          <a:bodyPr wrap="square" lIns="0" tIns="0" rIns="0" bIns="0" rtlCol="0" anchor="ctr"/>
+          <a:lstStyle/>
+          <a:p>
+            <a:pPr indent="0" marL="0">
+              <a:lnSpc>
+                <a:spcPct val="130000"/>
+              </a:lnSpc>
+              <a:buNone/>
+            </a:pPr>
+            <a:r>
+              <a:rPr lang="en-US" sz="1000" dirty="0">
+                <a:solidFill>
+                  <a:srgbClr val="7EC8A0"/>
+                </a:solidFill>
+              </a:rPr>
+              <a:t>⚡  Vantaggio Guerriglia: CEO fa outreach M1-M4 (CAC €42/dealer). Sales BDR da M5 — 3 mesi prima del Conservative — anticipa il picco acquisizione.</a:t>
+            </a:r>
+            <a:endParaRPr lang="en-US" sz="1000" dirty="0"/>
+          </a:p>
+        </p:txBody>
+      </p:sp>
+      <p:sp>
+        <p:nvSpPr>
+          <p:cNvPr id="24" name="Text 22"/>
+          <p:cNvSpPr/>
+          <p:nvPr/>
+        </p:nvSpPr>
+        <p:spPr>
+          <a:xfrm>
+            <a:off x="10789920" y="6309360"/>
+            <a:ext cx="1097280" cy="274320"/>
+          </a:xfrm>
+          <a:prstGeom prst="rect">
+            <a:avLst/>
+          </a:prstGeom>
+          <a:noFill/>
+          <a:ln/>
+        </p:spPr>
+        <p:txBody>
+          <a:bodyPr wrap="square" rtlCol="0" anchor="ctr"/>
+          <a:lstStyle/>
+          <a:p>
+            <a:pPr algn="r" indent="0" marL="0">
+              <a:buNone/>
+            </a:pPr>
+            <a:r>
+              <a:rPr lang="en-US" sz="800" dirty="0">
+                <a:solidFill>
+                  <a:srgbClr val="334455"/>
+                </a:solidFill>
+              </a:rPr>
+              <a:t>10 / 12</a:t>
+            </a:r>
+            <a:endParaRPr lang="en-US" sz="800" dirty="0"/>
+          </a:p>
+        </p:txBody>
+      </p:sp>
+    </p:spTree>
+  </p:cSld>
+  <p:clrMapOvr>
+    <a:masterClrMapping/>
+  </p:clrMapOvr>
+</p:sld>
+</file>
+
+<file path=ppt/slides/slide11.xml><?xml version="1.0" encoding="utf-8"?>
+<p:sld xmlns:a="http://schemas.openxmlformats.org/drawingml/2006/main" xmlns:r="http://schemas.openxmlformats.org/officeDocument/2006/relationships" xmlns:p="http://schemas.openxmlformats.org/presentationml/2006/main">
+  <p:cSld name="Slide 11">
     <p:bg>
       <p:bgPr>
         <a:solidFill>
@@ -2521,7 +3422,7 @@
                 <a:ea typeface="Georgia" pitchFamily="34" charset="-122"/>
                 <a:cs typeface="Georgia" pitchFamily="34" charset="-120"/>
               </a:rPr>
-              <a:t>€50K–€100K seed.</a:t>
+              <a:t>€80K–€100K seed.</a:t>
             </a:r>
             <a:endParaRPr lang="en-US" sz="3400" dirty="0"/>
           </a:p>
@@ -2648,7 +3549,7 @@
                 <a:ea typeface="Georgia" pitchFamily="34" charset="-122"/>
                 <a:cs typeface="Georgia" pitchFamily="34" charset="-120"/>
               </a:rPr>
-              <a:t>€75.000</a:t>
+              <a:t>€90.000</a:t>
             </a:r>
             <a:endParaRPr lang="en-US" sz="4200" dirty="0"/>
           </a:p>
@@ -2684,7 +3585,7 @@
                   <a:srgbClr val="8CB3CC"/>
                 </a:solidFill>
               </a:rPr>
-              <a:t>(range €50K – €100K)</a:t>
+              <a:t>(range €80K – €100K)</a:t>
             </a:r>
             <a:endParaRPr lang="en-US" sz="1000" dirty="0"/>
           </a:p>
@@ -2887,7 +3788,7 @@
                   <a:srgbClr val="8CB3CC"/>
                 </a:solidFill>
               </a:rPr>
-              <a:t>Mario C.:</a:t>
+              <a:t>Angel Inv.:</a:t>
             </a:r>
             <a:endParaRPr lang="en-US" sz="1000" dirty="0"/>
           </a:p>
@@ -2923,7 +3824,7 @@
                   <a:srgbClr val="FFFFFF"/>
                 </a:solidFill>
               </a:rPr>
-              <a:t>€10-20K — Tier 1, marzo</a:t>
+              <a:t>Investor network Sud Italia</a:t>
             </a:r>
             <a:endParaRPr lang="en-US" sz="1000" dirty="0"/>
           </a:p>
@@ -3179,7 +4080,7 @@
         <p:spPr>
           <a:xfrm>
             <a:off x="4937760" y="2651760"/>
-            <a:ext cx="2176272" cy="201168"/>
+            <a:ext cx="1554480" cy="201168"/>
           </a:xfrm>
           <a:prstGeom prst="rect">
             <a:avLst/>
@@ -3225,7 +4126,7 @@
                   <a:srgbClr val="14B8A6"/>
                 </a:solidFill>
               </a:rPr>
-              <a:t>35%</a:t>
+              <a:t>25%</a:t>
             </a:r>
             <a:endParaRPr lang="en-US" sz="900" dirty="0"/>
           </a:p>
@@ -3261,7 +4162,7 @@
                   <a:srgbClr val="8CB3CC"/>
                 </a:solidFill>
               </a:rPr>
-              <a:t>Sales &amp; Marketing M1-M6</a:t>
+              <a:t>Sales &amp; Marketing M1-M8</a:t>
             </a:r>
             <a:endParaRPr lang="en-US" sz="1100" dirty="0"/>
           </a:p>
@@ -3301,7 +4202,7 @@
         <p:spPr>
           <a:xfrm>
             <a:off x="4937760" y="3337560"/>
-            <a:ext cx="1554480" cy="201168"/>
+            <a:ext cx="2176272" cy="201168"/>
           </a:xfrm>
           <a:prstGeom prst="rect">
             <a:avLst/>
@@ -3347,7 +4248,7 @@
                   <a:srgbClr val="14B8A6"/>
                 </a:solidFill>
               </a:rPr>
-              <a:t>25%</a:t>
+              <a:t>35%</a:t>
             </a:r>
             <a:endParaRPr lang="en-US" sz="900" dirty="0"/>
           </a:p>
@@ -3830,7 +4731,7 @@
                   <a:srgbClr val="334455"/>
                 </a:solidFill>
               </a:rPr>
-              <a:t>10 / 11</a:t>
+              <a:t>11 / 12</a:t>
             </a:r>
             <a:endParaRPr lang="en-US" sz="800" dirty="0"/>
           </a:p>
@@ -3844,9 +4745,9 @@
 </p:sld>
 </file>
 
-<file path=ppt/slides/slide11.xml><?xml version="1.0" encoding="utf-8"?>
+<file path=ppt/slides/slide12.xml><?xml version="1.0" encoding="utf-8"?>
 <p:sld xmlns:a="http://schemas.openxmlformats.org/drawingml/2006/main" xmlns:r="http://schemas.openxmlformats.org/officeDocument/2006/relationships" xmlns:p="http://schemas.openxmlformats.org/presentationml/2006/main">
-  <p:cSld name="Slide 11">
+  <p:cSld name="Slide 12">
     <p:bg>
       <p:bgPr>
         <a:solidFill>
@@ -4158,7 +5059,7 @@
         </p:nvSpPr>
         <p:spPr>
           <a:xfrm>
-            <a:off x="457200" y="4617720"/>
+            <a:off x="457200" y="4526280"/>
             <a:ext cx="2926080" cy="201168"/>
           </a:xfrm>
           <a:prstGeom prst="rect">
@@ -4194,7 +5095,7 @@
         </p:nvSpPr>
         <p:spPr>
           <a:xfrm>
-            <a:off x="457200" y="4818888"/>
+            <a:off x="457200" y="4727448"/>
             <a:ext cx="4114800" cy="256032"/>
           </a:xfrm>
           <a:prstGeom prst="rect">
@@ -4230,7 +5131,7 @@
         </p:nvSpPr>
         <p:spPr>
           <a:xfrm>
-            <a:off x="3657600" y="4617720"/>
+            <a:off x="3657600" y="4526280"/>
             <a:ext cx="2926080" cy="201168"/>
           </a:xfrm>
           <a:prstGeom prst="rect">
@@ -4266,7 +5167,7 @@
         </p:nvSpPr>
         <p:spPr>
           <a:xfrm>
-            <a:off x="3657600" y="4818888"/>
+            <a:off x="3657600" y="4727448"/>
             <a:ext cx="4114800" cy="256032"/>
           </a:xfrm>
           <a:prstGeom prst="rect">
@@ -4302,7 +5203,7 @@
         </p:nvSpPr>
         <p:spPr>
           <a:xfrm>
-            <a:off x="6858000" y="4617720"/>
+            <a:off x="6858000" y="4526280"/>
             <a:ext cx="2926080" cy="201168"/>
           </a:xfrm>
           <a:prstGeom prst="rect">
@@ -4338,7 +5239,7 @@
         </p:nvSpPr>
         <p:spPr>
           <a:xfrm>
-            <a:off x="6858000" y="4818888"/>
+            <a:off x="6858000" y="4727448"/>
             <a:ext cx="4114800" cy="256032"/>
           </a:xfrm>
           <a:prstGeom prst="rect">
@@ -4374,7 +5275,7 @@
         </p:nvSpPr>
         <p:spPr>
           <a:xfrm>
-            <a:off x="457200" y="5440680"/>
+            <a:off x="457200" y="5349240"/>
             <a:ext cx="2926080" cy="201168"/>
           </a:xfrm>
           <a:prstGeom prst="rect">
@@ -4410,7 +5311,7 @@
         </p:nvSpPr>
         <p:spPr>
           <a:xfrm>
-            <a:off x="457200" y="5641848"/>
+            <a:off x="457200" y="5550408"/>
             <a:ext cx="4114800" cy="256032"/>
           </a:xfrm>
           <a:prstGeom prst="rect">
@@ -4446,7 +5347,7 @@
         </p:nvSpPr>
         <p:spPr>
           <a:xfrm>
-            <a:off x="5486400" y="5440680"/>
+            <a:off x="4297680" y="5349240"/>
             <a:ext cx="2926080" cy="201168"/>
           </a:xfrm>
           <a:prstGeom prst="rect">
@@ -4482,7 +5383,7 @@
         </p:nvSpPr>
         <p:spPr>
           <a:xfrm>
-            <a:off x="5486400" y="5641848"/>
+            <a:off x="4297680" y="5550408"/>
             <a:ext cx="4114800" cy="256032"/>
           </a:xfrm>
           <a:prstGeom prst="rect">
@@ -4513,6 +5414,78 @@
       <p:sp>
         <p:nvSpPr>
           <p:cNvPr id="15" name="Text 13"/>
+          <p:cNvSpPr/>
+          <p:nvPr/>
+        </p:nvSpPr>
+        <p:spPr>
+          <a:xfrm>
+            <a:off x="8138160" y="5349240"/>
+            <a:ext cx="2926080" cy="201168"/>
+          </a:xfrm>
+          <a:prstGeom prst="rect">
+            <a:avLst/>
+          </a:prstGeom>
+          <a:noFill/>
+          <a:ln/>
+        </p:spPr>
+        <p:txBody>
+          <a:bodyPr wrap="square" lIns="0" tIns="0" rIns="0" bIns="0" rtlCol="0" anchor="ctr"/>
+          <a:lstStyle/>
+          <a:p>
+            <a:pPr indent="0" marL="0">
+              <a:buNone/>
+            </a:pPr>
+            <a:r>
+              <a:rPr lang="en-US" sz="800" spc="100" kern="0" dirty="0">
+                <a:solidFill>
+                  <a:srgbClr val="334455"/>
+                </a:solidFill>
+              </a:rPr>
+              <a:t>Telefono</a:t>
+            </a:r>
+            <a:endParaRPr lang="en-US" sz="800" dirty="0"/>
+          </a:p>
+        </p:txBody>
+      </p:sp>
+      <p:sp>
+        <p:nvSpPr>
+          <p:cNvPr id="16" name="Text 14"/>
+          <p:cNvSpPr/>
+          <p:nvPr/>
+        </p:nvSpPr>
+        <p:spPr>
+          <a:xfrm>
+            <a:off x="8138160" y="5550408"/>
+            <a:ext cx="4114800" cy="256032"/>
+          </a:xfrm>
+          <a:prstGeom prst="rect">
+            <a:avLst/>
+          </a:prstGeom>
+          <a:noFill/>
+          <a:ln/>
+        </p:spPr>
+        <p:txBody>
+          <a:bodyPr wrap="square" lIns="0" tIns="0" rIns="0" bIns="0" rtlCol="0" anchor="ctr"/>
+          <a:lstStyle/>
+          <a:p>
+            <a:pPr indent="0" marL="0">
+              <a:buNone/>
+            </a:pPr>
+            <a:r>
+              <a:rPr lang="en-US" sz="1100" b="1" dirty="0">
+                <a:solidFill>
+                  <a:srgbClr val="FFFFFF"/>
+                </a:solidFill>
+              </a:rPr>
+              <a:t>+39 373 790 2538</a:t>
+            </a:r>
+            <a:endParaRPr lang="en-US" sz="1100" dirty="0"/>
+          </a:p>
+        </p:txBody>
+      </p:sp>
+      <p:sp>
+        <p:nvSpPr>
+          <p:cNvPr id="17" name="Text 15"/>
           <p:cNvSpPr/>
           <p:nvPr/>
         </p:nvSpPr>
@@ -4548,7 +5521,7 @@
       </p:sp>
       <p:sp>
         <p:nvSpPr>
-          <p:cNvPr id="16" name="Text 14"/>
+          <p:cNvPr id="18" name="Text 16"/>
           <p:cNvSpPr/>
           <p:nvPr/>
         </p:nvSpPr>
@@ -4576,7 +5549,7 @@
                   <a:srgbClr val="334455"/>
                 </a:solidFill>
               </a:rPr>
-              <a:t>11 / 11</a:t>
+              <a:t>12 / 12</a:t>
             </a:r>
             <a:endParaRPr lang="en-US" sz="800" dirty="0"/>
           </a:p>
@@ -5244,7 +6217,7 @@
                   <a:srgbClr val="334455"/>
                 </a:solidFill>
               </a:rPr>
-              <a:t>02 / 11</a:t>
+              <a:t>02 / 12</a:t>
             </a:r>
             <a:endParaRPr lang="en-US" sz="800" dirty="0"/>
           </a:p>
@@ -6164,7 +7137,7 @@
                   <a:srgbClr val="334455"/>
                 </a:solidFill>
               </a:rPr>
-              <a:t>03 / 11</a:t>
+              <a:t>03 / 12</a:t>
             </a:r>
             <a:endParaRPr lang="en-US" sz="800" dirty="0"/>
           </a:p>
@@ -7073,7 +8046,7 @@
                   <a:srgbClr val="334455"/>
                 </a:solidFill>
               </a:rPr>
-              <a:t>04 / 11</a:t>
+              <a:t>04 / 12</a:t>
             </a:r>
             <a:endParaRPr lang="en-US" sz="800" dirty="0"/>
           </a:p>
@@ -7751,7 +8724,7 @@
         <p:spPr>
           <a:xfrm>
             <a:off x="457200" y="2240280"/>
-            <a:ext cx="2011680" cy="566928"/>
+            <a:ext cx="2011680" cy="475488"/>
           </a:xfrm>
           <a:prstGeom prst="rect">
             <a:avLst/>
@@ -7776,7 +8749,7 @@
         <p:spPr>
           <a:xfrm>
             <a:off x="457200" y="2240280"/>
-            <a:ext cx="54864" cy="566928"/>
+            <a:ext cx="54864" cy="475488"/>
           </a:xfrm>
           <a:prstGeom prst="rect">
             <a:avLst/>
@@ -7801,7 +8774,7 @@
         <p:spPr>
           <a:xfrm>
             <a:off x="457200" y="2240280"/>
-            <a:ext cx="2011680" cy="566928"/>
+            <a:ext cx="2011680" cy="475488"/>
           </a:xfrm>
           <a:prstGeom prst="rect">
             <a:avLst/>
@@ -7817,14 +8790,14 @@
               <a:buNone/>
             </a:pPr>
             <a:r>
-              <a:rPr lang="en-US" sz="1100" b="1" dirty="0">
+              <a:rPr lang="en-US" sz="1000" b="1" dirty="0">
                 <a:solidFill>
                   <a:srgbClr val="FFFFFF"/>
                 </a:solidFill>
               </a:rPr>
               <a:t>🟢 Dloop</a:t>
             </a:r>
-            <a:endParaRPr lang="en-US" sz="1100" dirty="0"/>
+            <a:endParaRPr lang="en-US" sz="1000" dirty="0"/>
           </a:p>
         </p:txBody>
       </p:sp>
@@ -7837,7 +8810,7 @@
         <p:spPr>
           <a:xfrm>
             <a:off x="2468880" y="2240280"/>
-            <a:ext cx="1554480" cy="566928"/>
+            <a:ext cx="1554480" cy="475488"/>
           </a:xfrm>
           <a:prstGeom prst="rect">
             <a:avLst/>
@@ -7862,7 +8835,7 @@
         <p:spPr>
           <a:xfrm>
             <a:off x="2468880" y="2240280"/>
-            <a:ext cx="1554480" cy="566928"/>
+            <a:ext cx="1554480" cy="475488"/>
           </a:xfrm>
           <a:prstGeom prst="rect">
             <a:avLst/>
@@ -7878,14 +8851,14 @@
               <a:buNone/>
             </a:pPr>
             <a:r>
-              <a:rPr lang="en-US" sz="1300" dirty="0">
+              <a:rPr lang="en-US" sz="1200" dirty="0">
                 <a:solidFill>
                   <a:srgbClr val="FFFFFF"/>
                 </a:solidFill>
               </a:rPr>
               <a:t>€39–€499/mese</a:t>
             </a:r>
-            <a:endParaRPr lang="en-US" sz="1300" dirty="0"/>
+            <a:endParaRPr lang="en-US" sz="1200" dirty="0"/>
           </a:p>
         </p:txBody>
       </p:sp>
@@ -7898,7 +8871,7 @@
         <p:spPr>
           <a:xfrm>
             <a:off x="4023360" y="2240280"/>
-            <a:ext cx="1234440" cy="566928"/>
+            <a:ext cx="1234440" cy="475488"/>
           </a:xfrm>
           <a:prstGeom prst="rect">
             <a:avLst/>
@@ -7923,7 +8896,7 @@
         <p:spPr>
           <a:xfrm>
             <a:off x="4023360" y="2240280"/>
-            <a:ext cx="1234440" cy="566928"/>
+            <a:ext cx="1234440" cy="475488"/>
           </a:xfrm>
           <a:prstGeom prst="rect">
             <a:avLst/>
@@ -7939,14 +8912,14 @@
               <a:buNone/>
             </a:pPr>
             <a:r>
-              <a:rPr lang="en-US" sz="1300" b="1" dirty="0">
+              <a:rPr lang="en-US" sz="1200" b="1" dirty="0">
                 <a:solidFill>
                   <a:srgbClr val="22C55E"/>
                 </a:solidFill>
               </a:rPr>
               <a:t>✓</a:t>
             </a:r>
-            <a:endParaRPr lang="en-US" sz="1300" dirty="0"/>
+            <a:endParaRPr lang="en-US" sz="1200" dirty="0"/>
           </a:p>
         </p:txBody>
       </p:sp>
@@ -7959,7 +8932,7 @@
         <p:spPr>
           <a:xfrm>
             <a:off x="5257800" y="2240280"/>
-            <a:ext cx="1234440" cy="566928"/>
+            <a:ext cx="1234440" cy="475488"/>
           </a:xfrm>
           <a:prstGeom prst="rect">
             <a:avLst/>
@@ -7984,7 +8957,7 @@
         <p:spPr>
           <a:xfrm>
             <a:off x="5257800" y="2240280"/>
-            <a:ext cx="1234440" cy="566928"/>
+            <a:ext cx="1234440" cy="475488"/>
           </a:xfrm>
           <a:prstGeom prst="rect">
             <a:avLst/>
@@ -8000,14 +8973,14 @@
               <a:buNone/>
             </a:pPr>
             <a:r>
-              <a:rPr lang="en-US" sz="1300" b="1" dirty="0">
+              <a:rPr lang="en-US" sz="1200" b="1" dirty="0">
                 <a:solidFill>
                   <a:srgbClr val="22C55E"/>
                 </a:solidFill>
               </a:rPr>
               <a:t>✓</a:t>
             </a:r>
-            <a:endParaRPr lang="en-US" sz="1300" dirty="0"/>
+            <a:endParaRPr lang="en-US" sz="1200" dirty="0"/>
           </a:p>
         </p:txBody>
       </p:sp>
@@ -8020,7 +8993,7 @@
         <p:spPr>
           <a:xfrm>
             <a:off x="6492240" y="2240280"/>
-            <a:ext cx="1097280" cy="566928"/>
+            <a:ext cx="1097280" cy="475488"/>
           </a:xfrm>
           <a:prstGeom prst="rect">
             <a:avLst/>
@@ -8045,7 +9018,7 @@
         <p:spPr>
           <a:xfrm>
             <a:off x="6492240" y="2240280"/>
-            <a:ext cx="1097280" cy="566928"/>
+            <a:ext cx="1097280" cy="475488"/>
           </a:xfrm>
           <a:prstGeom prst="rect">
             <a:avLst/>
@@ -8061,14 +9034,14 @@
               <a:buNone/>
             </a:pPr>
             <a:r>
-              <a:rPr lang="en-US" sz="1300" b="1" dirty="0">
+              <a:rPr lang="en-US" sz="1200" b="1" dirty="0">
                 <a:solidFill>
                   <a:srgbClr val="22C55E"/>
                 </a:solidFill>
               </a:rPr>
               <a:t>✓</a:t>
             </a:r>
-            <a:endParaRPr lang="en-US" sz="1300" dirty="0"/>
+            <a:endParaRPr lang="en-US" sz="1200" dirty="0"/>
           </a:p>
         </p:txBody>
       </p:sp>
@@ -8081,7 +9054,7 @@
         <p:spPr>
           <a:xfrm>
             <a:off x="7589520" y="2240280"/>
-            <a:ext cx="1097280" cy="566928"/>
+            <a:ext cx="1097280" cy="475488"/>
           </a:xfrm>
           <a:prstGeom prst="rect">
             <a:avLst/>
@@ -8106,7 +9079,7 @@
         <p:spPr>
           <a:xfrm>
             <a:off x="7589520" y="2240280"/>
-            <a:ext cx="1097280" cy="566928"/>
+            <a:ext cx="1097280" cy="475488"/>
           </a:xfrm>
           <a:prstGeom prst="rect">
             <a:avLst/>
@@ -8122,14 +9095,14 @@
               <a:buNone/>
             </a:pPr>
             <a:r>
-              <a:rPr lang="en-US" sz="1300" b="1" dirty="0">
+              <a:rPr lang="en-US" sz="1200" b="1" dirty="0">
                 <a:solidFill>
                   <a:srgbClr val="22C55E"/>
                 </a:solidFill>
               </a:rPr>
               <a:t>✓</a:t>
             </a:r>
-            <a:endParaRPr lang="en-US" sz="1300" dirty="0"/>
+            <a:endParaRPr lang="en-US" sz="1200" dirty="0"/>
           </a:p>
         </p:txBody>
       </p:sp>
@@ -8142,7 +9115,7 @@
         <p:spPr>
           <a:xfrm>
             <a:off x="8686800" y="2240280"/>
-            <a:ext cx="1097280" cy="566928"/>
+            <a:ext cx="1097280" cy="475488"/>
           </a:xfrm>
           <a:prstGeom prst="rect">
             <a:avLst/>
@@ -8167,7 +9140,7 @@
         <p:spPr>
           <a:xfrm>
             <a:off x="8686800" y="2240280"/>
-            <a:ext cx="1097280" cy="566928"/>
+            <a:ext cx="1097280" cy="475488"/>
           </a:xfrm>
           <a:prstGeom prst="rect">
             <a:avLst/>
@@ -8183,14 +9156,14 @@
               <a:buNone/>
             </a:pPr>
             <a:r>
-              <a:rPr lang="en-US" sz="1300" b="1" dirty="0">
+              <a:rPr lang="en-US" sz="1200" b="1" dirty="0">
                 <a:solidFill>
                   <a:srgbClr val="22C55E"/>
                 </a:solidFill>
               </a:rPr>
               <a:t>✓</a:t>
             </a:r>
-            <a:endParaRPr lang="en-US" sz="1300" dirty="0"/>
+            <a:endParaRPr lang="en-US" sz="1200" dirty="0"/>
           </a:p>
         </p:txBody>
       </p:sp>
@@ -8202,14 +9175,14 @@
         </p:nvSpPr>
         <p:spPr>
           <a:xfrm>
-            <a:off x="457200" y="2852928"/>
-            <a:ext cx="2011680" cy="566928"/>
-          </a:xfrm>
-          <a:prstGeom prst="rect">
-            <a:avLst/>
-          </a:prstGeom>
-          <a:solidFill>
-            <a:srgbClr val="0A1929"/>
+            <a:off x="457200" y="2715768"/>
+            <a:ext cx="11155680" cy="256032"/>
+          </a:xfrm>
+          <a:prstGeom prst="rect">
+            <a:avLst/>
+          </a:prstGeom>
+          <a:solidFill>
+            <a:srgbClr val="0A1520"/>
           </a:solidFill>
           <a:ln w="12700">
             <a:solidFill>
@@ -8227,31 +9200,31 @@
         </p:nvSpPr>
         <p:spPr>
           <a:xfrm>
-            <a:off x="457200" y="2852928"/>
-            <a:ext cx="2011680" cy="566928"/>
-          </a:xfrm>
-          <a:prstGeom prst="rect">
-            <a:avLst/>
-          </a:prstGeom>
-          <a:noFill/>
-          <a:ln/>
-        </p:spPr>
-        <p:txBody>
-          <a:bodyPr wrap="square" lIns="0" tIns="0" rIns="0" bIns="0" rtlCol="0" anchor="ctr"/>
-          <a:lstStyle/>
-          <a:p>
-            <a:pPr algn="ctr" indent="0" marL="0">
-              <a:buNone/>
-            </a:pPr>
-            <a:r>
-              <a:rPr lang="en-US" sz="1100" dirty="0">
-                <a:solidFill>
-                  <a:srgbClr val="8CB3CC"/>
-                </a:solidFill>
-              </a:rPr>
-              <a:t>Onfleet</a:t>
-            </a:r>
-            <a:endParaRPr lang="en-US" sz="1100" dirty="0"/>
+            <a:off x="548640" y="2715768"/>
+            <a:ext cx="10972800" cy="256032"/>
+          </a:xfrm>
+          <a:prstGeom prst="rect">
+            <a:avLst/>
+          </a:prstGeom>
+          <a:noFill/>
+          <a:ln/>
+        </p:spPr>
+        <p:txBody>
+          <a:bodyPr wrap="square" lIns="0" tIns="0" rIns="0" bIns="0" rtlCol="0" anchor="ctr"/>
+          <a:lstStyle/>
+          <a:p>
+            <a:pPr indent="0" marL="0">
+              <a:buNone/>
+            </a:pPr>
+            <a:r>
+              <a:rPr lang="en-US" sz="800" b="1" spc="200" kern="0" dirty="0">
+                <a:solidFill>
+                  <a:srgbClr val="4A8A9A"/>
+                </a:solidFill>
+              </a:rPr>
+              <a:t>— SaaS B2B —</a:t>
+            </a:r>
+            <a:endParaRPr lang="en-US" sz="800" dirty="0"/>
           </a:p>
         </p:txBody>
       </p:sp>
@@ -8263,14 +9236,14 @@
         </p:nvSpPr>
         <p:spPr>
           <a:xfrm>
-            <a:off x="2468880" y="2852928"/>
-            <a:ext cx="1554480" cy="566928"/>
-          </a:xfrm>
-          <a:prstGeom prst="rect">
-            <a:avLst/>
-          </a:prstGeom>
-          <a:solidFill>
-            <a:srgbClr val="0A1929"/>
+            <a:off x="457200" y="2971800"/>
+            <a:ext cx="2011680" cy="475488"/>
+          </a:xfrm>
+          <a:prstGeom prst="rect">
+            <a:avLst/>
+          </a:prstGeom>
+          <a:solidFill>
+            <a:srgbClr val="0F1E30"/>
           </a:solidFill>
           <a:ln w="12700">
             <a:solidFill>
@@ -8288,8 +9261,8 @@
         </p:nvSpPr>
         <p:spPr>
           <a:xfrm>
-            <a:off x="2468880" y="2852928"/>
-            <a:ext cx="1554480" cy="566928"/>
+            <a:off x="457200" y="2971800"/>
+            <a:ext cx="2011680" cy="475488"/>
           </a:xfrm>
           <a:prstGeom prst="rect">
             <a:avLst/>
@@ -8305,14 +9278,14 @@
               <a:buNone/>
             </a:pPr>
             <a:r>
-              <a:rPr lang="en-US" sz="1300" dirty="0">
+              <a:rPr lang="en-US" sz="1000" dirty="0">
                 <a:solidFill>
                   <a:srgbClr val="8CB3CC"/>
                 </a:solidFill>
               </a:rPr>
-              <a:t>$500+/mese</a:t>
-            </a:r>
-            <a:endParaRPr lang="en-US" sz="1300" dirty="0"/>
+              <a:t>Onfleet</a:t>
+            </a:r>
+            <a:endParaRPr lang="en-US" sz="1000" dirty="0"/>
           </a:p>
         </p:txBody>
       </p:sp>
@@ -8324,14 +9297,14 @@
         </p:nvSpPr>
         <p:spPr>
           <a:xfrm>
-            <a:off x="4023360" y="2852928"/>
-            <a:ext cx="1234440" cy="566928"/>
-          </a:xfrm>
-          <a:prstGeom prst="rect">
-            <a:avLst/>
-          </a:prstGeom>
-          <a:solidFill>
-            <a:srgbClr val="0A1929"/>
+            <a:off x="2468880" y="2971800"/>
+            <a:ext cx="1554480" cy="475488"/>
+          </a:xfrm>
+          <a:prstGeom prst="rect">
+            <a:avLst/>
+          </a:prstGeom>
+          <a:solidFill>
+            <a:srgbClr val="0F1E30"/>
           </a:solidFill>
           <a:ln w="12700">
             <a:solidFill>
@@ -8349,8 +9322,8 @@
         </p:nvSpPr>
         <p:spPr>
           <a:xfrm>
-            <a:off x="4023360" y="2852928"/>
-            <a:ext cx="1234440" cy="566928"/>
+            <a:off x="2468880" y="2971800"/>
+            <a:ext cx="1554480" cy="475488"/>
           </a:xfrm>
           <a:prstGeom prst="rect">
             <a:avLst/>
@@ -8366,14 +9339,14 @@
               <a:buNone/>
             </a:pPr>
             <a:r>
-              <a:rPr lang="en-US" sz="1300" dirty="0">
-                <a:solidFill>
-                  <a:srgbClr val="334455"/>
-                </a:solidFill>
-              </a:rPr>
-              <a:t>✗</a:t>
-            </a:r>
-            <a:endParaRPr lang="en-US" sz="1300" dirty="0"/>
+              <a:rPr lang="en-US" sz="1200" dirty="0">
+                <a:solidFill>
+                  <a:srgbClr val="8CB3CC"/>
+                </a:solidFill>
+              </a:rPr>
+              <a:t>$500+/mese</a:t>
+            </a:r>
+            <a:endParaRPr lang="en-US" sz="1200" dirty="0"/>
           </a:p>
         </p:txBody>
       </p:sp>
@@ -8385,14 +9358,14 @@
         </p:nvSpPr>
         <p:spPr>
           <a:xfrm>
-            <a:off x="5257800" y="2852928"/>
-            <a:ext cx="1234440" cy="566928"/>
-          </a:xfrm>
-          <a:prstGeom prst="rect">
-            <a:avLst/>
-          </a:prstGeom>
-          <a:solidFill>
-            <a:srgbClr val="0A1929"/>
+            <a:off x="4023360" y="2971800"/>
+            <a:ext cx="1234440" cy="475488"/>
+          </a:xfrm>
+          <a:prstGeom prst="rect">
+            <a:avLst/>
+          </a:prstGeom>
+          <a:solidFill>
+            <a:srgbClr val="0F1E30"/>
           </a:solidFill>
           <a:ln w="12700">
             <a:solidFill>
@@ -8410,8 +9383,8 @@
         </p:nvSpPr>
         <p:spPr>
           <a:xfrm>
-            <a:off x="5257800" y="2852928"/>
-            <a:ext cx="1234440" cy="566928"/>
+            <a:off x="4023360" y="2971800"/>
+            <a:ext cx="1234440" cy="475488"/>
           </a:xfrm>
           <a:prstGeom prst="rect">
             <a:avLst/>
@@ -8427,14 +9400,14 @@
               <a:buNone/>
             </a:pPr>
             <a:r>
-              <a:rPr lang="en-US" sz="1300" dirty="0">
+              <a:rPr lang="en-US" sz="1200" dirty="0">
                 <a:solidFill>
                   <a:srgbClr val="334455"/>
                 </a:solidFill>
               </a:rPr>
               <a:t>✗</a:t>
             </a:r>
-            <a:endParaRPr lang="en-US" sz="1300" dirty="0"/>
+            <a:endParaRPr lang="en-US" sz="1200" dirty="0"/>
           </a:p>
         </p:txBody>
       </p:sp>
@@ -8446,14 +9419,14 @@
         </p:nvSpPr>
         <p:spPr>
           <a:xfrm>
-            <a:off x="6492240" y="2852928"/>
-            <a:ext cx="1097280" cy="566928"/>
-          </a:xfrm>
-          <a:prstGeom prst="rect">
-            <a:avLst/>
-          </a:prstGeom>
-          <a:solidFill>
-            <a:srgbClr val="0A1929"/>
+            <a:off x="5257800" y="2971800"/>
+            <a:ext cx="1234440" cy="475488"/>
+          </a:xfrm>
+          <a:prstGeom prst="rect">
+            <a:avLst/>
+          </a:prstGeom>
+          <a:solidFill>
+            <a:srgbClr val="0F1E30"/>
           </a:solidFill>
           <a:ln w="12700">
             <a:solidFill>
@@ -8471,8 +9444,8 @@
         </p:nvSpPr>
         <p:spPr>
           <a:xfrm>
-            <a:off x="6492240" y="2852928"/>
-            <a:ext cx="1097280" cy="566928"/>
+            <a:off x="5257800" y="2971800"/>
+            <a:ext cx="1234440" cy="475488"/>
           </a:xfrm>
           <a:prstGeom prst="rect">
             <a:avLst/>
@@ -8488,14 +9461,14 @@
               <a:buNone/>
             </a:pPr>
             <a:r>
-              <a:rPr lang="en-US" sz="1300" dirty="0">
+              <a:rPr lang="en-US" sz="1200" dirty="0">
                 <a:solidFill>
                   <a:srgbClr val="334455"/>
                 </a:solidFill>
               </a:rPr>
               <a:t>✗</a:t>
             </a:r>
-            <a:endParaRPr lang="en-US" sz="1300" dirty="0"/>
+            <a:endParaRPr lang="en-US" sz="1200" dirty="0"/>
           </a:p>
         </p:txBody>
       </p:sp>
@@ -8507,14 +9480,14 @@
         </p:nvSpPr>
         <p:spPr>
           <a:xfrm>
-            <a:off x="7589520" y="2852928"/>
-            <a:ext cx="1097280" cy="566928"/>
-          </a:xfrm>
-          <a:prstGeom prst="rect">
-            <a:avLst/>
-          </a:prstGeom>
-          <a:solidFill>
-            <a:srgbClr val="0A1929"/>
+            <a:off x="6492240" y="2971800"/>
+            <a:ext cx="1097280" cy="475488"/>
+          </a:xfrm>
+          <a:prstGeom prst="rect">
+            <a:avLst/>
+          </a:prstGeom>
+          <a:solidFill>
+            <a:srgbClr val="0F1E30"/>
           </a:solidFill>
           <a:ln w="12700">
             <a:solidFill>
@@ -8532,8 +9505,8 @@
         </p:nvSpPr>
         <p:spPr>
           <a:xfrm>
-            <a:off x="7589520" y="2852928"/>
-            <a:ext cx="1097280" cy="566928"/>
+            <a:off x="6492240" y="2971800"/>
+            <a:ext cx="1097280" cy="475488"/>
           </a:xfrm>
           <a:prstGeom prst="rect">
             <a:avLst/>
@@ -8549,14 +9522,14 @@
               <a:buNone/>
             </a:pPr>
             <a:r>
-              <a:rPr lang="en-US" sz="1300" dirty="0">
+              <a:rPr lang="en-US" sz="1200" dirty="0">
                 <a:solidFill>
                   <a:srgbClr val="334455"/>
                 </a:solidFill>
               </a:rPr>
               <a:t>✗</a:t>
             </a:r>
-            <a:endParaRPr lang="en-US" sz="1300" dirty="0"/>
+            <a:endParaRPr lang="en-US" sz="1200" dirty="0"/>
           </a:p>
         </p:txBody>
       </p:sp>
@@ -8568,14 +9541,14 @@
         </p:nvSpPr>
         <p:spPr>
           <a:xfrm>
-            <a:off x="8686800" y="2852928"/>
-            <a:ext cx="1097280" cy="566928"/>
-          </a:xfrm>
-          <a:prstGeom prst="rect">
-            <a:avLst/>
-          </a:prstGeom>
-          <a:solidFill>
-            <a:srgbClr val="0A1929"/>
+            <a:off x="7589520" y="2971800"/>
+            <a:ext cx="1097280" cy="475488"/>
+          </a:xfrm>
+          <a:prstGeom prst="rect">
+            <a:avLst/>
+          </a:prstGeom>
+          <a:solidFill>
+            <a:srgbClr val="0F1E30"/>
           </a:solidFill>
           <a:ln w="12700">
             <a:solidFill>
@@ -8593,8 +9566,8 @@
         </p:nvSpPr>
         <p:spPr>
           <a:xfrm>
-            <a:off x="8686800" y="2852928"/>
-            <a:ext cx="1097280" cy="566928"/>
+            <a:off x="7589520" y="2971800"/>
+            <a:ext cx="1097280" cy="475488"/>
           </a:xfrm>
           <a:prstGeom prst="rect">
             <a:avLst/>
@@ -8610,14 +9583,14 @@
               <a:buNone/>
             </a:pPr>
             <a:r>
-              <a:rPr lang="en-US" sz="1300" b="1" dirty="0">
-                <a:solidFill>
-                  <a:srgbClr val="22C55E"/>
-                </a:solidFill>
-              </a:rPr>
-              <a:t>✓</a:t>
-            </a:r>
-            <a:endParaRPr lang="en-US" sz="1300" dirty="0"/>
+              <a:rPr lang="en-US" sz="1200" dirty="0">
+                <a:solidFill>
+                  <a:srgbClr val="334455"/>
+                </a:solidFill>
+              </a:rPr>
+              <a:t>✗</a:t>
+            </a:r>
+            <a:endParaRPr lang="en-US" sz="1200" dirty="0"/>
           </a:p>
         </p:txBody>
       </p:sp>
@@ -8629,8 +9602,8 @@
         </p:nvSpPr>
         <p:spPr>
           <a:xfrm>
-            <a:off x="457200" y="3465576"/>
-            <a:ext cx="2011680" cy="566928"/>
+            <a:off x="8686800" y="2971800"/>
+            <a:ext cx="1097280" cy="475488"/>
           </a:xfrm>
           <a:prstGeom prst="rect">
             <a:avLst/>
@@ -8654,8 +9627,8 @@
         </p:nvSpPr>
         <p:spPr>
           <a:xfrm>
-            <a:off x="457200" y="3465576"/>
-            <a:ext cx="2011680" cy="566928"/>
+            <a:off x="8686800" y="2971800"/>
+            <a:ext cx="1097280" cy="475488"/>
           </a:xfrm>
           <a:prstGeom prst="rect">
             <a:avLst/>
@@ -8671,14 +9644,14 @@
               <a:buNone/>
             </a:pPr>
             <a:r>
-              <a:rPr lang="en-US" sz="1100" dirty="0">
-                <a:solidFill>
-                  <a:srgbClr val="8CB3CC"/>
-                </a:solidFill>
-              </a:rPr>
-              <a:t>Tookan</a:t>
-            </a:r>
-            <a:endParaRPr lang="en-US" sz="1100" dirty="0"/>
+              <a:rPr lang="en-US" sz="1200" b="1" dirty="0">
+                <a:solidFill>
+                  <a:srgbClr val="22C55E"/>
+                </a:solidFill>
+              </a:rPr>
+              <a:t>✓</a:t>
+            </a:r>
+            <a:endParaRPr lang="en-US" sz="1200" dirty="0"/>
           </a:p>
         </p:txBody>
       </p:sp>
@@ -8690,14 +9663,14 @@
         </p:nvSpPr>
         <p:spPr>
           <a:xfrm>
-            <a:off x="2468880" y="3465576"/>
-            <a:ext cx="1554480" cy="566928"/>
-          </a:xfrm>
-          <a:prstGeom prst="rect">
-            <a:avLst/>
-          </a:prstGeom>
-          <a:solidFill>
-            <a:srgbClr val="0F1E30"/>
+            <a:off x="457200" y="3447288"/>
+            <a:ext cx="2011680" cy="475488"/>
+          </a:xfrm>
+          <a:prstGeom prst="rect">
+            <a:avLst/>
+          </a:prstGeom>
+          <a:solidFill>
+            <a:srgbClr val="0A1929"/>
           </a:solidFill>
           <a:ln w="12700">
             <a:solidFill>
@@ -8715,8 +9688,8 @@
         </p:nvSpPr>
         <p:spPr>
           <a:xfrm>
-            <a:off x="2468880" y="3465576"/>
-            <a:ext cx="1554480" cy="566928"/>
+            <a:off x="457200" y="3447288"/>
+            <a:ext cx="2011680" cy="475488"/>
           </a:xfrm>
           <a:prstGeom prst="rect">
             <a:avLst/>
@@ -8732,14 +9705,14 @@
               <a:buNone/>
             </a:pPr>
             <a:r>
-              <a:rPr lang="en-US" sz="1300" dirty="0">
+              <a:rPr lang="en-US" sz="1000" dirty="0">
                 <a:solidFill>
                   <a:srgbClr val="8CB3CC"/>
                 </a:solidFill>
               </a:rPr>
-              <a:t>$99–$299/mese</a:t>
-            </a:r>
-            <a:endParaRPr lang="en-US" sz="1300" dirty="0"/>
+              <a:t>Tookan</a:t>
+            </a:r>
+            <a:endParaRPr lang="en-US" sz="1000" dirty="0"/>
           </a:p>
         </p:txBody>
       </p:sp>
@@ -8751,14 +9724,14 @@
         </p:nvSpPr>
         <p:spPr>
           <a:xfrm>
-            <a:off x="4023360" y="3465576"/>
-            <a:ext cx="1234440" cy="566928"/>
-          </a:xfrm>
-          <a:prstGeom prst="rect">
-            <a:avLst/>
-          </a:prstGeom>
-          <a:solidFill>
-            <a:srgbClr val="0F1E30"/>
+            <a:off x="2468880" y="3447288"/>
+            <a:ext cx="1554480" cy="475488"/>
+          </a:xfrm>
+          <a:prstGeom prst="rect">
+            <a:avLst/>
+          </a:prstGeom>
+          <a:solidFill>
+            <a:srgbClr val="0A1929"/>
           </a:solidFill>
           <a:ln w="12700">
             <a:solidFill>
@@ -8776,8 +9749,8 @@
         </p:nvSpPr>
         <p:spPr>
           <a:xfrm>
-            <a:off x="4023360" y="3465576"/>
-            <a:ext cx="1234440" cy="566928"/>
+            <a:off x="2468880" y="3447288"/>
+            <a:ext cx="1554480" cy="475488"/>
           </a:xfrm>
           <a:prstGeom prst="rect">
             <a:avLst/>
@@ -8793,14 +9766,14 @@
               <a:buNone/>
             </a:pPr>
             <a:r>
-              <a:rPr lang="en-US" sz="1300" dirty="0">
-                <a:solidFill>
-                  <a:srgbClr val="334455"/>
-                </a:solidFill>
-              </a:rPr>
-              <a:t>✗</a:t>
-            </a:r>
-            <a:endParaRPr lang="en-US" sz="1300" dirty="0"/>
+              <a:rPr lang="en-US" sz="1200" dirty="0">
+                <a:solidFill>
+                  <a:srgbClr val="8CB3CC"/>
+                </a:solidFill>
+              </a:rPr>
+              <a:t>$99–$299/mese</a:t>
+            </a:r>
+            <a:endParaRPr lang="en-US" sz="1200" dirty="0"/>
           </a:p>
         </p:txBody>
       </p:sp>
@@ -8812,14 +9785,14 @@
         </p:nvSpPr>
         <p:spPr>
           <a:xfrm>
-            <a:off x="5257800" y="3465576"/>
-            <a:ext cx="1234440" cy="566928"/>
-          </a:xfrm>
-          <a:prstGeom prst="rect">
-            <a:avLst/>
-          </a:prstGeom>
-          <a:solidFill>
-            <a:srgbClr val="0F1E30"/>
+            <a:off x="4023360" y="3447288"/>
+            <a:ext cx="1234440" cy="475488"/>
+          </a:xfrm>
+          <a:prstGeom prst="rect">
+            <a:avLst/>
+          </a:prstGeom>
+          <a:solidFill>
+            <a:srgbClr val="0A1929"/>
           </a:solidFill>
           <a:ln w="12700">
             <a:solidFill>
@@ -8837,8 +9810,8 @@
         </p:nvSpPr>
         <p:spPr>
           <a:xfrm>
-            <a:off x="5257800" y="3465576"/>
-            <a:ext cx="1234440" cy="566928"/>
+            <a:off x="4023360" y="3447288"/>
+            <a:ext cx="1234440" cy="475488"/>
           </a:xfrm>
           <a:prstGeom prst="rect">
             <a:avLst/>
@@ -8854,14 +9827,14 @@
               <a:buNone/>
             </a:pPr>
             <a:r>
-              <a:rPr lang="en-US" sz="1300" dirty="0">
+              <a:rPr lang="en-US" sz="1200" dirty="0">
                 <a:solidFill>
                   <a:srgbClr val="334455"/>
                 </a:solidFill>
               </a:rPr>
               <a:t>✗</a:t>
             </a:r>
-            <a:endParaRPr lang="en-US" sz="1300" dirty="0"/>
+            <a:endParaRPr lang="en-US" sz="1200" dirty="0"/>
           </a:p>
         </p:txBody>
       </p:sp>
@@ -8873,14 +9846,14 @@
         </p:nvSpPr>
         <p:spPr>
           <a:xfrm>
-            <a:off x="6492240" y="3465576"/>
-            <a:ext cx="1097280" cy="566928"/>
-          </a:xfrm>
-          <a:prstGeom prst="rect">
-            <a:avLst/>
-          </a:prstGeom>
-          <a:solidFill>
-            <a:srgbClr val="0F1E30"/>
+            <a:off x="5257800" y="3447288"/>
+            <a:ext cx="1234440" cy="475488"/>
+          </a:xfrm>
+          <a:prstGeom prst="rect">
+            <a:avLst/>
+          </a:prstGeom>
+          <a:solidFill>
+            <a:srgbClr val="0A1929"/>
           </a:solidFill>
           <a:ln w="12700">
             <a:solidFill>
@@ -8898,8 +9871,8 @@
         </p:nvSpPr>
         <p:spPr>
           <a:xfrm>
-            <a:off x="6492240" y="3465576"/>
-            <a:ext cx="1097280" cy="566928"/>
+            <a:off x="5257800" y="3447288"/>
+            <a:ext cx="1234440" cy="475488"/>
           </a:xfrm>
           <a:prstGeom prst="rect">
             <a:avLst/>
@@ -8915,14 +9888,14 @@
               <a:buNone/>
             </a:pPr>
             <a:r>
-              <a:rPr lang="en-US" sz="1300" dirty="0">
+              <a:rPr lang="en-US" sz="1200" dirty="0">
                 <a:solidFill>
                   <a:srgbClr val="334455"/>
                 </a:solidFill>
               </a:rPr>
               <a:t>✗</a:t>
             </a:r>
-            <a:endParaRPr lang="en-US" sz="1300" dirty="0"/>
+            <a:endParaRPr lang="en-US" sz="1200" dirty="0"/>
           </a:p>
         </p:txBody>
       </p:sp>
@@ -8934,14 +9907,14 @@
         </p:nvSpPr>
         <p:spPr>
           <a:xfrm>
-            <a:off x="7589520" y="3465576"/>
-            <a:ext cx="1097280" cy="566928"/>
-          </a:xfrm>
-          <a:prstGeom prst="rect">
-            <a:avLst/>
-          </a:prstGeom>
-          <a:solidFill>
-            <a:srgbClr val="0F1E30"/>
+            <a:off x="6492240" y="3447288"/>
+            <a:ext cx="1097280" cy="475488"/>
+          </a:xfrm>
+          <a:prstGeom prst="rect">
+            <a:avLst/>
+          </a:prstGeom>
+          <a:solidFill>
+            <a:srgbClr val="0A1929"/>
           </a:solidFill>
           <a:ln w="12700">
             <a:solidFill>
@@ -8959,8 +9932,8 @@
         </p:nvSpPr>
         <p:spPr>
           <a:xfrm>
-            <a:off x="7589520" y="3465576"/>
-            <a:ext cx="1097280" cy="566928"/>
+            <a:off x="6492240" y="3447288"/>
+            <a:ext cx="1097280" cy="475488"/>
           </a:xfrm>
           <a:prstGeom prst="rect">
             <a:avLst/>
@@ -8976,14 +9949,14 @@
               <a:buNone/>
             </a:pPr>
             <a:r>
-              <a:rPr lang="en-US" sz="1300" dirty="0">
-                <a:solidFill>
-                  <a:srgbClr val="F59E0B"/>
-                </a:solidFill>
-              </a:rPr>
-              <a:t>~</a:t>
-            </a:r>
-            <a:endParaRPr lang="en-US" sz="1300" dirty="0"/>
+              <a:rPr lang="en-US" sz="1200" dirty="0">
+                <a:solidFill>
+                  <a:srgbClr val="334455"/>
+                </a:solidFill>
+              </a:rPr>
+              <a:t>✗</a:t>
+            </a:r>
+            <a:endParaRPr lang="en-US" sz="1200" dirty="0"/>
           </a:p>
         </p:txBody>
       </p:sp>
@@ -8995,14 +9968,14 @@
         </p:nvSpPr>
         <p:spPr>
           <a:xfrm>
-            <a:off x="8686800" y="3465576"/>
-            <a:ext cx="1097280" cy="566928"/>
-          </a:xfrm>
-          <a:prstGeom prst="rect">
-            <a:avLst/>
-          </a:prstGeom>
-          <a:solidFill>
-            <a:srgbClr val="0F1E30"/>
+            <a:off x="7589520" y="3447288"/>
+            <a:ext cx="1097280" cy="475488"/>
+          </a:xfrm>
+          <a:prstGeom prst="rect">
+            <a:avLst/>
+          </a:prstGeom>
+          <a:solidFill>
+            <a:srgbClr val="0A1929"/>
           </a:solidFill>
           <a:ln w="12700">
             <a:solidFill>
@@ -9020,8 +9993,8 @@
         </p:nvSpPr>
         <p:spPr>
           <a:xfrm>
-            <a:off x="8686800" y="3465576"/>
-            <a:ext cx="1097280" cy="566928"/>
+            <a:off x="7589520" y="3447288"/>
+            <a:ext cx="1097280" cy="475488"/>
           </a:xfrm>
           <a:prstGeom prst="rect">
             <a:avLst/>
@@ -9037,14 +10010,14 @@
               <a:buNone/>
             </a:pPr>
             <a:r>
-              <a:rPr lang="en-US" sz="1300" b="1" dirty="0">
-                <a:solidFill>
-                  <a:srgbClr val="22C55E"/>
-                </a:solidFill>
-              </a:rPr>
-              <a:t>✓</a:t>
-            </a:r>
-            <a:endParaRPr lang="en-US" sz="1300" dirty="0"/>
+              <a:rPr lang="en-US" sz="1200" dirty="0">
+                <a:solidFill>
+                  <a:srgbClr val="F59E0B"/>
+                </a:solidFill>
+              </a:rPr>
+              <a:t>~</a:t>
+            </a:r>
+            <a:endParaRPr lang="en-US" sz="1200" dirty="0"/>
           </a:p>
         </p:txBody>
       </p:sp>
@@ -9056,8 +10029,8 @@
         </p:nvSpPr>
         <p:spPr>
           <a:xfrm>
-            <a:off x="457200" y="4078224"/>
-            <a:ext cx="2011680" cy="566928"/>
+            <a:off x="8686800" y="3447288"/>
+            <a:ext cx="1097280" cy="475488"/>
           </a:xfrm>
           <a:prstGeom prst="rect">
             <a:avLst/>
@@ -9081,8 +10054,8 @@
         </p:nvSpPr>
         <p:spPr>
           <a:xfrm>
-            <a:off x="457200" y="4078224"/>
-            <a:ext cx="2011680" cy="566928"/>
+            <a:off x="8686800" y="3447288"/>
+            <a:ext cx="1097280" cy="475488"/>
           </a:xfrm>
           <a:prstGeom prst="rect">
             <a:avLst/>
@@ -9098,14 +10071,14 @@
               <a:buNone/>
             </a:pPr>
             <a:r>
-              <a:rPr lang="en-US" sz="1100" dirty="0">
-                <a:solidFill>
-                  <a:srgbClr val="8CB3CC"/>
-                </a:solidFill>
-              </a:rPr>
-              <a:t>LogiNext Mile</a:t>
-            </a:r>
-            <a:endParaRPr lang="en-US" sz="1100" dirty="0"/>
+              <a:rPr lang="en-US" sz="1200" b="1" dirty="0">
+                <a:solidFill>
+                  <a:srgbClr val="22C55E"/>
+                </a:solidFill>
+              </a:rPr>
+              <a:t>✓</a:t>
+            </a:r>
+            <a:endParaRPr lang="en-US" sz="1200" dirty="0"/>
           </a:p>
         </p:txBody>
       </p:sp>
@@ -9117,14 +10090,14 @@
         </p:nvSpPr>
         <p:spPr>
           <a:xfrm>
-            <a:off x="2468880" y="4078224"/>
-            <a:ext cx="1554480" cy="566928"/>
-          </a:xfrm>
-          <a:prstGeom prst="rect">
-            <a:avLst/>
-          </a:prstGeom>
-          <a:solidFill>
-            <a:srgbClr val="0A1929"/>
+            <a:off x="457200" y="3922776"/>
+            <a:ext cx="2011680" cy="475488"/>
+          </a:xfrm>
+          <a:prstGeom prst="rect">
+            <a:avLst/>
+          </a:prstGeom>
+          <a:solidFill>
+            <a:srgbClr val="0F1E30"/>
           </a:solidFill>
           <a:ln w="12700">
             <a:solidFill>
@@ -9142,8 +10115,8 @@
         </p:nvSpPr>
         <p:spPr>
           <a:xfrm>
-            <a:off x="2468880" y="4078224"/>
-            <a:ext cx="1554480" cy="566928"/>
+            <a:off x="457200" y="3922776"/>
+            <a:ext cx="2011680" cy="475488"/>
           </a:xfrm>
           <a:prstGeom prst="rect">
             <a:avLst/>
@@ -9159,14 +10132,14 @@
               <a:buNone/>
             </a:pPr>
             <a:r>
-              <a:rPr lang="en-US" sz="1300" dirty="0">
+              <a:rPr lang="en-US" sz="1000" dirty="0">
                 <a:solidFill>
                   <a:srgbClr val="8CB3CC"/>
                 </a:solidFill>
               </a:rPr>
-              <a:t>Enterprise</a:t>
-            </a:r>
-            <a:endParaRPr lang="en-US" sz="1300" dirty="0"/>
+              <a:t>LogiNext</a:t>
+            </a:r>
+            <a:endParaRPr lang="en-US" sz="1000" dirty="0"/>
           </a:p>
         </p:txBody>
       </p:sp>
@@ -9178,14 +10151,14 @@
         </p:nvSpPr>
         <p:spPr>
           <a:xfrm>
-            <a:off x="4023360" y="4078224"/>
-            <a:ext cx="1234440" cy="566928"/>
-          </a:xfrm>
-          <a:prstGeom prst="rect">
-            <a:avLst/>
-          </a:prstGeom>
-          <a:solidFill>
-            <a:srgbClr val="0A1929"/>
+            <a:off x="2468880" y="3922776"/>
+            <a:ext cx="1554480" cy="475488"/>
+          </a:xfrm>
+          <a:prstGeom prst="rect">
+            <a:avLst/>
+          </a:prstGeom>
+          <a:solidFill>
+            <a:srgbClr val="0F1E30"/>
           </a:solidFill>
           <a:ln w="12700">
             <a:solidFill>
@@ -9203,8 +10176,8 @@
         </p:nvSpPr>
         <p:spPr>
           <a:xfrm>
-            <a:off x="4023360" y="4078224"/>
-            <a:ext cx="1234440" cy="566928"/>
+            <a:off x="2468880" y="3922776"/>
+            <a:ext cx="1554480" cy="475488"/>
           </a:xfrm>
           <a:prstGeom prst="rect">
             <a:avLst/>
@@ -9220,14 +10193,14 @@
               <a:buNone/>
             </a:pPr>
             <a:r>
-              <a:rPr lang="en-US" sz="1300" dirty="0">
-                <a:solidFill>
-                  <a:srgbClr val="334455"/>
-                </a:solidFill>
-              </a:rPr>
-              <a:t>✗</a:t>
-            </a:r>
-            <a:endParaRPr lang="en-US" sz="1300" dirty="0"/>
+              <a:rPr lang="en-US" sz="1200" dirty="0">
+                <a:solidFill>
+                  <a:srgbClr val="8CB3CC"/>
+                </a:solidFill>
+              </a:rPr>
+              <a:t>Enterprise</a:t>
+            </a:r>
+            <a:endParaRPr lang="en-US" sz="1200" dirty="0"/>
           </a:p>
         </p:txBody>
       </p:sp>
@@ -9239,14 +10212,14 @@
         </p:nvSpPr>
         <p:spPr>
           <a:xfrm>
-            <a:off x="5257800" y="4078224"/>
-            <a:ext cx="1234440" cy="566928"/>
-          </a:xfrm>
-          <a:prstGeom prst="rect">
-            <a:avLst/>
-          </a:prstGeom>
-          <a:solidFill>
-            <a:srgbClr val="0A1929"/>
+            <a:off x="4023360" y="3922776"/>
+            <a:ext cx="1234440" cy="475488"/>
+          </a:xfrm>
+          <a:prstGeom prst="rect">
+            <a:avLst/>
+          </a:prstGeom>
+          <a:solidFill>
+            <a:srgbClr val="0F1E30"/>
           </a:solidFill>
           <a:ln w="12700">
             <a:solidFill>
@@ -9264,8 +10237,8 @@
         </p:nvSpPr>
         <p:spPr>
           <a:xfrm>
-            <a:off x="5257800" y="4078224"/>
-            <a:ext cx="1234440" cy="566928"/>
+            <a:off x="4023360" y="3922776"/>
+            <a:ext cx="1234440" cy="475488"/>
           </a:xfrm>
           <a:prstGeom prst="rect">
             <a:avLst/>
@@ -9281,14 +10254,14 @@
               <a:buNone/>
             </a:pPr>
             <a:r>
-              <a:rPr lang="en-US" sz="1300" dirty="0">
+              <a:rPr lang="en-US" sz="1200" dirty="0">
                 <a:solidFill>
                   <a:srgbClr val="334455"/>
                 </a:solidFill>
               </a:rPr>
               <a:t>✗</a:t>
             </a:r>
-            <a:endParaRPr lang="en-US" sz="1300" dirty="0"/>
+            <a:endParaRPr lang="en-US" sz="1200" dirty="0"/>
           </a:p>
         </p:txBody>
       </p:sp>
@@ -9300,14 +10273,14 @@
         </p:nvSpPr>
         <p:spPr>
           <a:xfrm>
-            <a:off x="6492240" y="4078224"/>
-            <a:ext cx="1097280" cy="566928"/>
-          </a:xfrm>
-          <a:prstGeom prst="rect">
-            <a:avLst/>
-          </a:prstGeom>
-          <a:solidFill>
-            <a:srgbClr val="0A1929"/>
+            <a:off x="5257800" y="3922776"/>
+            <a:ext cx="1234440" cy="475488"/>
+          </a:xfrm>
+          <a:prstGeom prst="rect">
+            <a:avLst/>
+          </a:prstGeom>
+          <a:solidFill>
+            <a:srgbClr val="0F1E30"/>
           </a:solidFill>
           <a:ln w="12700">
             <a:solidFill>
@@ -9325,8 +10298,8 @@
         </p:nvSpPr>
         <p:spPr>
           <a:xfrm>
-            <a:off x="6492240" y="4078224"/>
-            <a:ext cx="1097280" cy="566928"/>
+            <a:off x="5257800" y="3922776"/>
+            <a:ext cx="1234440" cy="475488"/>
           </a:xfrm>
           <a:prstGeom prst="rect">
             <a:avLst/>
@@ -9342,14 +10315,14 @@
               <a:buNone/>
             </a:pPr>
             <a:r>
-              <a:rPr lang="en-US" sz="1300" dirty="0">
+              <a:rPr lang="en-US" sz="1200" dirty="0">
                 <a:solidFill>
                   <a:srgbClr val="334455"/>
                 </a:solidFill>
               </a:rPr>
               <a:t>✗</a:t>
             </a:r>
-            <a:endParaRPr lang="en-US" sz="1300" dirty="0"/>
+            <a:endParaRPr lang="en-US" sz="1200" dirty="0"/>
           </a:p>
         </p:txBody>
       </p:sp>
@@ -9361,14 +10334,14 @@
         </p:nvSpPr>
         <p:spPr>
           <a:xfrm>
-            <a:off x="7589520" y="4078224"/>
-            <a:ext cx="1097280" cy="566928"/>
-          </a:xfrm>
-          <a:prstGeom prst="rect">
-            <a:avLst/>
-          </a:prstGeom>
-          <a:solidFill>
-            <a:srgbClr val="0A1929"/>
+            <a:off x="6492240" y="3922776"/>
+            <a:ext cx="1097280" cy="475488"/>
+          </a:xfrm>
+          <a:prstGeom prst="rect">
+            <a:avLst/>
+          </a:prstGeom>
+          <a:solidFill>
+            <a:srgbClr val="0F1E30"/>
           </a:solidFill>
           <a:ln w="12700">
             <a:solidFill>
@@ -9386,8 +10359,8 @@
         </p:nvSpPr>
         <p:spPr>
           <a:xfrm>
-            <a:off x="7589520" y="4078224"/>
-            <a:ext cx="1097280" cy="566928"/>
+            <a:off x="6492240" y="3922776"/>
+            <a:ext cx="1097280" cy="475488"/>
           </a:xfrm>
           <a:prstGeom prst="rect">
             <a:avLst/>
@@ -9403,14 +10376,14 @@
               <a:buNone/>
             </a:pPr>
             <a:r>
-              <a:rPr lang="en-US" sz="1300" dirty="0">
+              <a:rPr lang="en-US" sz="1200" dirty="0">
                 <a:solidFill>
                   <a:srgbClr val="334455"/>
                 </a:solidFill>
               </a:rPr>
               <a:t>✗</a:t>
             </a:r>
-            <a:endParaRPr lang="en-US" sz="1300" dirty="0"/>
+            <a:endParaRPr lang="en-US" sz="1200" dirty="0"/>
           </a:p>
         </p:txBody>
       </p:sp>
@@ -9422,14 +10395,14 @@
         </p:nvSpPr>
         <p:spPr>
           <a:xfrm>
-            <a:off x="8686800" y="4078224"/>
-            <a:ext cx="1097280" cy="566928"/>
-          </a:xfrm>
-          <a:prstGeom prst="rect">
-            <a:avLst/>
-          </a:prstGeom>
-          <a:solidFill>
-            <a:srgbClr val="0A1929"/>
+            <a:off x="7589520" y="3922776"/>
+            <a:ext cx="1097280" cy="475488"/>
+          </a:xfrm>
+          <a:prstGeom prst="rect">
+            <a:avLst/>
+          </a:prstGeom>
+          <a:solidFill>
+            <a:srgbClr val="0F1E30"/>
           </a:solidFill>
           <a:ln w="12700">
             <a:solidFill>
@@ -9447,8 +10420,8 @@
         </p:nvSpPr>
         <p:spPr>
           <a:xfrm>
-            <a:off x="8686800" y="4078224"/>
-            <a:ext cx="1097280" cy="566928"/>
+            <a:off x="7589520" y="3922776"/>
+            <a:ext cx="1097280" cy="475488"/>
           </a:xfrm>
           <a:prstGeom prst="rect">
             <a:avLst/>
@@ -9464,14 +10437,14 @@
               <a:buNone/>
             </a:pPr>
             <a:r>
-              <a:rPr lang="en-US" sz="1300" b="1" dirty="0">
-                <a:solidFill>
-                  <a:srgbClr val="22C55E"/>
-                </a:solidFill>
-              </a:rPr>
-              <a:t>✓</a:t>
-            </a:r>
-            <a:endParaRPr lang="en-US" sz="1300" dirty="0"/>
+              <a:rPr lang="en-US" sz="1200" dirty="0">
+                <a:solidFill>
+                  <a:srgbClr val="334455"/>
+                </a:solidFill>
+              </a:rPr>
+              <a:t>✗</a:t>
+            </a:r>
+            <a:endParaRPr lang="en-US" sz="1200" dirty="0"/>
           </a:p>
         </p:txBody>
       </p:sp>
@@ -9483,8 +10456,8 @@
         </p:nvSpPr>
         <p:spPr>
           <a:xfrm>
-            <a:off x="457200" y="4690872"/>
-            <a:ext cx="2011680" cy="566928"/>
+            <a:off x="8686800" y="3922776"/>
+            <a:ext cx="1097280" cy="475488"/>
           </a:xfrm>
           <a:prstGeom prst="rect">
             <a:avLst/>
@@ -9508,8 +10481,8 @@
         </p:nvSpPr>
         <p:spPr>
           <a:xfrm>
-            <a:off x="457200" y="4690872"/>
-            <a:ext cx="2011680" cy="566928"/>
+            <a:off x="8686800" y="3922776"/>
+            <a:ext cx="1097280" cy="475488"/>
           </a:xfrm>
           <a:prstGeom prst="rect">
             <a:avLst/>
@@ -9525,14 +10498,14 @@
               <a:buNone/>
             </a:pPr>
             <a:r>
-              <a:rPr lang="en-US" sz="1100" dirty="0">
-                <a:solidFill>
-                  <a:srgbClr val="8CB3CC"/>
-                </a:solidFill>
-              </a:rPr>
-              <a:t>Alfonsino</a:t>
-            </a:r>
-            <a:endParaRPr lang="en-US" sz="1100" dirty="0"/>
+              <a:rPr lang="en-US" sz="1200" b="1" dirty="0">
+                <a:solidFill>
+                  <a:srgbClr val="22C55E"/>
+                </a:solidFill>
+              </a:rPr>
+              <a:t>✓</a:t>
+            </a:r>
+            <a:endParaRPr lang="en-US" sz="1200" dirty="0"/>
           </a:p>
         </p:txBody>
       </p:sp>
@@ -9544,14 +10517,14 @@
         </p:nvSpPr>
         <p:spPr>
           <a:xfrm>
-            <a:off x="2468880" y="4690872"/>
-            <a:ext cx="1554480" cy="566928"/>
-          </a:xfrm>
-          <a:prstGeom prst="rect">
-            <a:avLst/>
-          </a:prstGeom>
-          <a:solidFill>
-            <a:srgbClr val="0F1E30"/>
+            <a:off x="457200" y="4398264"/>
+            <a:ext cx="11155680" cy="256032"/>
+          </a:xfrm>
+          <a:prstGeom prst="rect">
+            <a:avLst/>
+          </a:prstGeom>
+          <a:solidFill>
+            <a:srgbClr val="0A1520"/>
           </a:solidFill>
           <a:ln w="12700">
             <a:solidFill>
@@ -9569,31 +10542,31 @@
         </p:nvSpPr>
         <p:spPr>
           <a:xfrm>
-            <a:off x="2468880" y="4690872"/>
-            <a:ext cx="1554480" cy="566928"/>
-          </a:xfrm>
-          <a:prstGeom prst="rect">
-            <a:avLst/>
-          </a:prstGeom>
-          <a:noFill/>
-          <a:ln/>
-        </p:spPr>
-        <p:txBody>
-          <a:bodyPr wrap="square" lIns="0" tIns="0" rIns="0" bIns="0" rtlCol="0" anchor="ctr"/>
-          <a:lstStyle/>
-          <a:p>
-            <a:pPr algn="ctr" indent="0" marL="0">
-              <a:buNone/>
-            </a:pPr>
-            <a:r>
-              <a:rPr lang="en-US" sz="1300" dirty="0">
-                <a:solidFill>
-                  <a:srgbClr val="8CB3CC"/>
-                </a:solidFill>
-              </a:rPr>
-              <a:t>25-30% comm.</a:t>
-            </a:r>
-            <a:endParaRPr lang="en-US" sz="1300" dirty="0"/>
+            <a:off x="548640" y="4398264"/>
+            <a:ext cx="10972800" cy="256032"/>
+          </a:xfrm>
+          <a:prstGeom prst="rect">
+            <a:avLst/>
+          </a:prstGeom>
+          <a:noFill/>
+          <a:ln/>
+        </p:spPr>
+        <p:txBody>
+          <a:bodyPr wrap="square" lIns="0" tIns="0" rIns="0" bIns="0" rtlCol="0" anchor="ctr"/>
+          <a:lstStyle/>
+          <a:p>
+            <a:pPr indent="0" marL="0">
+              <a:buNone/>
+            </a:pPr>
+            <a:r>
+              <a:rPr lang="en-US" sz="800" b="1" spc="200" kern="0" dirty="0">
+                <a:solidFill>
+                  <a:srgbClr val="4A8A9A"/>
+                </a:solidFill>
+              </a:rPr>
+              <a:t>— Marketplace —</a:t>
+            </a:r>
+            <a:endParaRPr lang="en-US" sz="800" dirty="0"/>
           </a:p>
         </p:txBody>
       </p:sp>
@@ -9605,8 +10578,8 @@
         </p:nvSpPr>
         <p:spPr>
           <a:xfrm>
-            <a:off x="4023360" y="4690872"/>
-            <a:ext cx="1234440" cy="566928"/>
+            <a:off x="457200" y="4654296"/>
+            <a:ext cx="2011680" cy="475488"/>
           </a:xfrm>
           <a:prstGeom prst="rect">
             <a:avLst/>
@@ -9630,8 +10603,8 @@
         </p:nvSpPr>
         <p:spPr>
           <a:xfrm>
-            <a:off x="4023360" y="4690872"/>
-            <a:ext cx="1234440" cy="566928"/>
+            <a:off x="457200" y="4654296"/>
+            <a:ext cx="2011680" cy="475488"/>
           </a:xfrm>
           <a:prstGeom prst="rect">
             <a:avLst/>
@@ -9647,14 +10620,14 @@
               <a:buNone/>
             </a:pPr>
             <a:r>
-              <a:rPr lang="en-US" sz="1300" dirty="0">
-                <a:solidFill>
-                  <a:srgbClr val="F59E0B"/>
-                </a:solidFill>
-              </a:rPr>
-              <a:t>~</a:t>
-            </a:r>
-            <a:endParaRPr lang="en-US" sz="1300" dirty="0"/>
+              <a:rPr lang="en-US" sz="1000" dirty="0">
+                <a:solidFill>
+                  <a:srgbClr val="8CB3CC"/>
+                </a:solidFill>
+              </a:rPr>
+              <a:t>Glovo</a:t>
+            </a:r>
+            <a:endParaRPr lang="en-US" sz="1000" dirty="0"/>
           </a:p>
         </p:txBody>
       </p:sp>
@@ -9666,8 +10639,8 @@
         </p:nvSpPr>
         <p:spPr>
           <a:xfrm>
-            <a:off x="5257800" y="4690872"/>
-            <a:ext cx="1234440" cy="566928"/>
+            <a:off x="2468880" y="4654296"/>
+            <a:ext cx="1554480" cy="475488"/>
           </a:xfrm>
           <a:prstGeom prst="rect">
             <a:avLst/>
@@ -9691,8 +10664,8 @@
         </p:nvSpPr>
         <p:spPr>
           <a:xfrm>
-            <a:off x="5257800" y="4690872"/>
-            <a:ext cx="1234440" cy="566928"/>
+            <a:off x="2468880" y="4654296"/>
+            <a:ext cx="1554480" cy="475488"/>
           </a:xfrm>
           <a:prstGeom prst="rect">
             <a:avLst/>
@@ -9708,14 +10681,14 @@
               <a:buNone/>
             </a:pPr>
             <a:r>
-              <a:rPr lang="en-US" sz="1300" dirty="0">
-                <a:solidFill>
-                  <a:srgbClr val="334455"/>
-                </a:solidFill>
-              </a:rPr>
-              <a:t>✗</a:t>
-            </a:r>
-            <a:endParaRPr lang="en-US" sz="1300" dirty="0"/>
+              <a:rPr lang="en-US" sz="1200" dirty="0">
+                <a:solidFill>
+                  <a:srgbClr val="8CB3CC"/>
+                </a:solidFill>
+              </a:rPr>
+              <a:t>25-30% comm.</a:t>
+            </a:r>
+            <a:endParaRPr lang="en-US" sz="1200" dirty="0"/>
           </a:p>
         </p:txBody>
       </p:sp>
@@ -9727,8 +10700,8 @@
         </p:nvSpPr>
         <p:spPr>
           <a:xfrm>
-            <a:off x="6492240" y="4690872"/>
-            <a:ext cx="1097280" cy="566928"/>
+            <a:off x="4023360" y="4654296"/>
+            <a:ext cx="1234440" cy="475488"/>
           </a:xfrm>
           <a:prstGeom prst="rect">
             <a:avLst/>
@@ -9752,8 +10725,8 @@
         </p:nvSpPr>
         <p:spPr>
           <a:xfrm>
-            <a:off x="6492240" y="4690872"/>
-            <a:ext cx="1097280" cy="566928"/>
+            <a:off x="4023360" y="4654296"/>
+            <a:ext cx="1234440" cy="475488"/>
           </a:xfrm>
           <a:prstGeom prst="rect">
             <a:avLst/>
@@ -9769,14 +10742,14 @@
               <a:buNone/>
             </a:pPr>
             <a:r>
-              <a:rPr lang="en-US" sz="1300" b="1" dirty="0">
-                <a:solidFill>
-                  <a:srgbClr val="22C55E"/>
-                </a:solidFill>
-              </a:rPr>
-              <a:t>✓</a:t>
-            </a:r>
-            <a:endParaRPr lang="en-US" sz="1300" dirty="0"/>
+              <a:rPr lang="en-US" sz="1200" dirty="0">
+                <a:solidFill>
+                  <a:srgbClr val="F59E0B"/>
+                </a:solidFill>
+              </a:rPr>
+              <a:t>~</a:t>
+            </a:r>
+            <a:endParaRPr lang="en-US" sz="1200" dirty="0"/>
           </a:p>
         </p:txBody>
       </p:sp>
@@ -9788,8 +10761,8 @@
         </p:nvSpPr>
         <p:spPr>
           <a:xfrm>
-            <a:off x="7589520" y="4690872"/>
-            <a:ext cx="1097280" cy="566928"/>
+            <a:off x="5257800" y="4654296"/>
+            <a:ext cx="1234440" cy="475488"/>
           </a:xfrm>
           <a:prstGeom prst="rect">
             <a:avLst/>
@@ -9813,8 +10786,8 @@
         </p:nvSpPr>
         <p:spPr>
           <a:xfrm>
-            <a:off x="7589520" y="4690872"/>
-            <a:ext cx="1097280" cy="566928"/>
+            <a:off x="5257800" y="4654296"/>
+            <a:ext cx="1234440" cy="475488"/>
           </a:xfrm>
           <a:prstGeom prst="rect">
             <a:avLst/>
@@ -9830,14 +10803,14 @@
               <a:buNone/>
             </a:pPr>
             <a:r>
-              <a:rPr lang="en-US" sz="1300" dirty="0">
-                <a:solidFill>
-                  <a:srgbClr val="F59E0B"/>
-                </a:solidFill>
-              </a:rPr>
-              <a:t>~</a:t>
-            </a:r>
-            <a:endParaRPr lang="en-US" sz="1300" dirty="0"/>
+              <a:rPr lang="en-US" sz="1200" dirty="0">
+                <a:solidFill>
+                  <a:srgbClr val="334455"/>
+                </a:solidFill>
+              </a:rPr>
+              <a:t>✗</a:t>
+            </a:r>
+            <a:endParaRPr lang="en-US" sz="1200" dirty="0"/>
           </a:p>
         </p:txBody>
       </p:sp>
@@ -9849,8 +10822,8 @@
         </p:nvSpPr>
         <p:spPr>
           <a:xfrm>
-            <a:off x="8686800" y="4690872"/>
-            <a:ext cx="1097280" cy="566928"/>
+            <a:off x="6492240" y="4654296"/>
+            <a:ext cx="1097280" cy="475488"/>
           </a:xfrm>
           <a:prstGeom prst="rect">
             <a:avLst/>
@@ -9874,8 +10847,8 @@
         </p:nvSpPr>
         <p:spPr>
           <a:xfrm>
-            <a:off x="8686800" y="4690872"/>
-            <a:ext cx="1097280" cy="566928"/>
+            <a:off x="6492240" y="4654296"/>
+            <a:ext cx="1097280" cy="475488"/>
           </a:xfrm>
           <a:prstGeom prst="rect">
             <a:avLst/>
@@ -9891,14 +10864,14 @@
               <a:buNone/>
             </a:pPr>
             <a:r>
-              <a:rPr lang="en-US" sz="1300" dirty="0">
-                <a:solidFill>
-                  <a:srgbClr val="334455"/>
-                </a:solidFill>
-              </a:rPr>
-              <a:t>✗</a:t>
-            </a:r>
-            <a:endParaRPr lang="en-US" sz="1300" dirty="0"/>
+              <a:rPr lang="en-US" sz="1200" b="1" dirty="0">
+                <a:solidFill>
+                  <a:srgbClr val="22C55E"/>
+                </a:solidFill>
+              </a:rPr>
+              <a:t>✓</a:t>
+            </a:r>
+            <a:endParaRPr lang="en-US" sz="1200" dirty="0"/>
           </a:p>
         </p:txBody>
       </p:sp>
@@ -9910,14 +10883,14 @@
         </p:nvSpPr>
         <p:spPr>
           <a:xfrm>
-            <a:off x="457200" y="5303520"/>
-            <a:ext cx="2011680" cy="566928"/>
-          </a:xfrm>
-          <a:prstGeom prst="rect">
-            <a:avLst/>
-          </a:prstGeom>
-          <a:solidFill>
-            <a:srgbClr val="0A1929"/>
+            <a:off x="7589520" y="4654296"/>
+            <a:ext cx="1097280" cy="475488"/>
+          </a:xfrm>
+          <a:prstGeom prst="rect">
+            <a:avLst/>
+          </a:prstGeom>
+          <a:solidFill>
+            <a:srgbClr val="0F1E30"/>
           </a:solidFill>
           <a:ln w="12700">
             <a:solidFill>
@@ -9935,8 +10908,8 @@
         </p:nvSpPr>
         <p:spPr>
           <a:xfrm>
-            <a:off x="457200" y="5303520"/>
-            <a:ext cx="2011680" cy="566928"/>
+            <a:off x="7589520" y="4654296"/>
+            <a:ext cx="1097280" cy="475488"/>
           </a:xfrm>
           <a:prstGeom prst="rect">
             <a:avLst/>
@@ -9952,14 +10925,14 @@
               <a:buNone/>
             </a:pPr>
             <a:r>
-              <a:rPr lang="en-US" sz="1100" dirty="0">
-                <a:solidFill>
-                  <a:srgbClr val="8CB3CC"/>
-                </a:solidFill>
-              </a:rPr>
-              <a:t>Bringg / eLogii</a:t>
-            </a:r>
-            <a:endParaRPr lang="en-US" sz="1100" dirty="0"/>
+              <a:rPr lang="en-US" sz="1200" dirty="0">
+                <a:solidFill>
+                  <a:srgbClr val="F59E0B"/>
+                </a:solidFill>
+              </a:rPr>
+              <a:t>~</a:t>
+            </a:r>
+            <a:endParaRPr lang="en-US" sz="1200" dirty="0"/>
           </a:p>
         </p:txBody>
       </p:sp>
@@ -9971,14 +10944,14 @@
         </p:nvSpPr>
         <p:spPr>
           <a:xfrm>
-            <a:off x="2468880" y="5303520"/>
-            <a:ext cx="1554480" cy="566928"/>
-          </a:xfrm>
-          <a:prstGeom prst="rect">
-            <a:avLst/>
-          </a:prstGeom>
-          <a:solidFill>
-            <a:srgbClr val="0A1929"/>
+            <a:off x="8686800" y="4654296"/>
+            <a:ext cx="1097280" cy="475488"/>
+          </a:xfrm>
+          <a:prstGeom prst="rect">
+            <a:avLst/>
+          </a:prstGeom>
+          <a:solidFill>
+            <a:srgbClr val="0F1E30"/>
           </a:solidFill>
           <a:ln w="12700">
             <a:solidFill>
@@ -9996,8 +10969,8 @@
         </p:nvSpPr>
         <p:spPr>
           <a:xfrm>
-            <a:off x="2468880" y="5303520"/>
-            <a:ext cx="1554480" cy="566928"/>
+            <a:off x="8686800" y="4654296"/>
+            <a:ext cx="1097280" cy="475488"/>
           </a:xfrm>
           <a:prstGeom prst="rect">
             <a:avLst/>
@@ -10013,14 +10986,14 @@
               <a:buNone/>
             </a:pPr>
             <a:r>
-              <a:rPr lang="en-US" sz="1300" dirty="0">
-                <a:solidFill>
-                  <a:srgbClr val="8CB3CC"/>
-                </a:solidFill>
-              </a:rPr>
-              <a:t>Enterprise</a:t>
-            </a:r>
-            <a:endParaRPr lang="en-US" sz="1300" dirty="0"/>
+              <a:rPr lang="en-US" sz="1200" dirty="0">
+                <a:solidFill>
+                  <a:srgbClr val="334455"/>
+                </a:solidFill>
+              </a:rPr>
+              <a:t>✗</a:t>
+            </a:r>
+            <a:endParaRPr lang="en-US" sz="1200" dirty="0"/>
           </a:p>
         </p:txBody>
       </p:sp>
@@ -10032,8 +11005,8 @@
         </p:nvSpPr>
         <p:spPr>
           <a:xfrm>
-            <a:off x="4023360" y="5303520"/>
-            <a:ext cx="1234440" cy="566928"/>
+            <a:off x="457200" y="5129784"/>
+            <a:ext cx="2011680" cy="475488"/>
           </a:xfrm>
           <a:prstGeom prst="rect">
             <a:avLst/>
@@ -10057,8 +11030,8 @@
         </p:nvSpPr>
         <p:spPr>
           <a:xfrm>
-            <a:off x="4023360" y="5303520"/>
-            <a:ext cx="1234440" cy="566928"/>
+            <a:off x="457200" y="5129784"/>
+            <a:ext cx="2011680" cy="475488"/>
           </a:xfrm>
           <a:prstGeom prst="rect">
             <a:avLst/>
@@ -10074,14 +11047,14 @@
               <a:buNone/>
             </a:pPr>
             <a:r>
-              <a:rPr lang="en-US" sz="1300" dirty="0">
-                <a:solidFill>
-                  <a:srgbClr val="334455"/>
-                </a:solidFill>
-              </a:rPr>
-              <a:t>✗</a:t>
-            </a:r>
-            <a:endParaRPr lang="en-US" sz="1300" dirty="0"/>
+              <a:rPr lang="en-US" sz="1000" dirty="0">
+                <a:solidFill>
+                  <a:srgbClr val="8CB3CC"/>
+                </a:solidFill>
+              </a:rPr>
+              <a:t>Deliveroo / Just Eat</a:t>
+            </a:r>
+            <a:endParaRPr lang="en-US" sz="1000" dirty="0"/>
           </a:p>
         </p:txBody>
       </p:sp>
@@ -10093,8 +11066,8 @@
         </p:nvSpPr>
         <p:spPr>
           <a:xfrm>
-            <a:off x="5257800" y="5303520"/>
-            <a:ext cx="1234440" cy="566928"/>
+            <a:off x="2468880" y="5129784"/>
+            <a:ext cx="1554480" cy="475488"/>
           </a:xfrm>
           <a:prstGeom prst="rect">
             <a:avLst/>
@@ -10118,8 +11091,8 @@
         </p:nvSpPr>
         <p:spPr>
           <a:xfrm>
-            <a:off x="5257800" y="5303520"/>
-            <a:ext cx="1234440" cy="566928"/>
+            <a:off x="2468880" y="5129784"/>
+            <a:ext cx="1554480" cy="475488"/>
           </a:xfrm>
           <a:prstGeom prst="rect">
             <a:avLst/>
@@ -10135,14 +11108,14 @@
               <a:buNone/>
             </a:pPr>
             <a:r>
-              <a:rPr lang="en-US" sz="1300" dirty="0">
-                <a:solidFill>
-                  <a:srgbClr val="334455"/>
-                </a:solidFill>
-              </a:rPr>
-              <a:t>✗</a:t>
-            </a:r>
-            <a:endParaRPr lang="en-US" sz="1300" dirty="0"/>
+              <a:rPr lang="en-US" sz="1200" dirty="0">
+                <a:solidFill>
+                  <a:srgbClr val="8CB3CC"/>
+                </a:solidFill>
+              </a:rPr>
+              <a:t>25-30% comm.</a:t>
+            </a:r>
+            <a:endParaRPr lang="en-US" sz="1200" dirty="0"/>
           </a:p>
         </p:txBody>
       </p:sp>
@@ -10154,8 +11127,8 @@
         </p:nvSpPr>
         <p:spPr>
           <a:xfrm>
-            <a:off x="6492240" y="5303520"/>
-            <a:ext cx="1097280" cy="566928"/>
+            <a:off x="4023360" y="5129784"/>
+            <a:ext cx="1234440" cy="475488"/>
           </a:xfrm>
           <a:prstGeom prst="rect">
             <a:avLst/>
@@ -10179,8 +11152,8 @@
         </p:nvSpPr>
         <p:spPr>
           <a:xfrm>
-            <a:off x="6492240" y="5303520"/>
-            <a:ext cx="1097280" cy="566928"/>
+            <a:off x="4023360" y="5129784"/>
+            <a:ext cx="1234440" cy="475488"/>
           </a:xfrm>
           <a:prstGeom prst="rect">
             <a:avLst/>
@@ -10196,14 +11169,14 @@
               <a:buNone/>
             </a:pPr>
             <a:r>
-              <a:rPr lang="en-US" sz="1300" dirty="0">
+              <a:rPr lang="en-US" sz="1200" dirty="0">
                 <a:solidFill>
                   <a:srgbClr val="334455"/>
                 </a:solidFill>
               </a:rPr>
               <a:t>✗</a:t>
             </a:r>
-            <a:endParaRPr lang="en-US" sz="1300" dirty="0"/>
+            <a:endParaRPr lang="en-US" sz="1200" dirty="0"/>
           </a:p>
         </p:txBody>
       </p:sp>
@@ -10215,8 +11188,8 @@
         </p:nvSpPr>
         <p:spPr>
           <a:xfrm>
-            <a:off x="7589520" y="5303520"/>
-            <a:ext cx="1097280" cy="566928"/>
+            <a:off x="5257800" y="5129784"/>
+            <a:ext cx="1234440" cy="475488"/>
           </a:xfrm>
           <a:prstGeom prst="rect">
             <a:avLst/>
@@ -10240,8 +11213,8 @@
         </p:nvSpPr>
         <p:spPr>
           <a:xfrm>
-            <a:off x="7589520" y="5303520"/>
-            <a:ext cx="1097280" cy="566928"/>
+            <a:off x="5257800" y="5129784"/>
+            <a:ext cx="1234440" cy="475488"/>
           </a:xfrm>
           <a:prstGeom prst="rect">
             <a:avLst/>
@@ -10257,14 +11230,14 @@
               <a:buNone/>
             </a:pPr>
             <a:r>
-              <a:rPr lang="en-US" sz="1300" dirty="0">
+              <a:rPr lang="en-US" sz="1200" dirty="0">
                 <a:solidFill>
                   <a:srgbClr val="334455"/>
                 </a:solidFill>
               </a:rPr>
               <a:t>✗</a:t>
             </a:r>
-            <a:endParaRPr lang="en-US" sz="1300" dirty="0"/>
+            <a:endParaRPr lang="en-US" sz="1200" dirty="0"/>
           </a:p>
         </p:txBody>
       </p:sp>
@@ -10276,8 +11249,8 @@
         </p:nvSpPr>
         <p:spPr>
           <a:xfrm>
-            <a:off x="8686800" y="5303520"/>
-            <a:ext cx="1097280" cy="566928"/>
+            <a:off x="6492240" y="5129784"/>
+            <a:ext cx="1097280" cy="475488"/>
           </a:xfrm>
           <a:prstGeom prst="rect">
             <a:avLst/>
@@ -10301,8 +11274,8 @@
         </p:nvSpPr>
         <p:spPr>
           <a:xfrm>
-            <a:off x="8686800" y="5303520"/>
-            <a:ext cx="1097280" cy="566928"/>
+            <a:off x="6492240" y="5129784"/>
+            <a:ext cx="1097280" cy="475488"/>
           </a:xfrm>
           <a:prstGeom prst="rect">
             <a:avLst/>
@@ -10318,20 +11291,996 @@
               <a:buNone/>
             </a:pPr>
             <a:r>
-              <a:rPr lang="en-US" sz="1300" b="1" dirty="0">
+              <a:rPr lang="en-US" sz="1200" b="1" dirty="0">
                 <a:solidFill>
                   <a:srgbClr val="22C55E"/>
                 </a:solidFill>
               </a:rPr>
               <a:t>✓</a:t>
             </a:r>
-            <a:endParaRPr lang="en-US" sz="1300" dirty="0"/>
-          </a:p>
-        </p:txBody>
-      </p:sp>
-      <p:sp>
-        <p:nvSpPr>
-          <p:cNvPr id="103" name="Text 101"/>
+            <a:endParaRPr lang="en-US" sz="1200" dirty="0"/>
+          </a:p>
+        </p:txBody>
+      </p:sp>
+      <p:sp>
+        <p:nvSpPr>
+          <p:cNvPr id="103" name="Shape 101"/>
+          <p:cNvSpPr/>
+          <p:nvPr/>
+        </p:nvSpPr>
+        <p:spPr>
+          <a:xfrm>
+            <a:off x="7589520" y="5129784"/>
+            <a:ext cx="1097280" cy="475488"/>
+          </a:xfrm>
+          <a:prstGeom prst="rect">
+            <a:avLst/>
+          </a:prstGeom>
+          <a:solidFill>
+            <a:srgbClr val="0A1929"/>
+          </a:solidFill>
+          <a:ln w="12700">
+            <a:solidFill>
+              <a:srgbClr val="1A3A50"/>
+            </a:solidFill>
+            <a:prstDash val="solid"/>
+          </a:ln>
+        </p:spPr>
+      </p:sp>
+      <p:sp>
+        <p:nvSpPr>
+          <p:cNvPr id="104" name="Text 102"/>
+          <p:cNvSpPr/>
+          <p:nvPr/>
+        </p:nvSpPr>
+        <p:spPr>
+          <a:xfrm>
+            <a:off x="7589520" y="5129784"/>
+            <a:ext cx="1097280" cy="475488"/>
+          </a:xfrm>
+          <a:prstGeom prst="rect">
+            <a:avLst/>
+          </a:prstGeom>
+          <a:noFill/>
+          <a:ln/>
+        </p:spPr>
+        <p:txBody>
+          <a:bodyPr wrap="square" lIns="0" tIns="0" rIns="0" bIns="0" rtlCol="0" anchor="ctr"/>
+          <a:lstStyle/>
+          <a:p>
+            <a:pPr algn="ctr" indent="0" marL="0">
+              <a:buNone/>
+            </a:pPr>
+            <a:r>
+              <a:rPr lang="en-US" sz="1200" dirty="0">
+                <a:solidFill>
+                  <a:srgbClr val="F59E0B"/>
+                </a:solidFill>
+              </a:rPr>
+              <a:t>~</a:t>
+            </a:r>
+            <a:endParaRPr lang="en-US" sz="1200" dirty="0"/>
+          </a:p>
+        </p:txBody>
+      </p:sp>
+      <p:sp>
+        <p:nvSpPr>
+          <p:cNvPr id="105" name="Shape 103"/>
+          <p:cNvSpPr/>
+          <p:nvPr/>
+        </p:nvSpPr>
+        <p:spPr>
+          <a:xfrm>
+            <a:off x="8686800" y="5129784"/>
+            <a:ext cx="1097280" cy="475488"/>
+          </a:xfrm>
+          <a:prstGeom prst="rect">
+            <a:avLst/>
+          </a:prstGeom>
+          <a:solidFill>
+            <a:srgbClr val="0A1929"/>
+          </a:solidFill>
+          <a:ln w="12700">
+            <a:solidFill>
+              <a:srgbClr val="1A3A50"/>
+            </a:solidFill>
+            <a:prstDash val="solid"/>
+          </a:ln>
+        </p:spPr>
+      </p:sp>
+      <p:sp>
+        <p:nvSpPr>
+          <p:cNvPr id="106" name="Text 104"/>
+          <p:cNvSpPr/>
+          <p:nvPr/>
+        </p:nvSpPr>
+        <p:spPr>
+          <a:xfrm>
+            <a:off x="8686800" y="5129784"/>
+            <a:ext cx="1097280" cy="475488"/>
+          </a:xfrm>
+          <a:prstGeom prst="rect">
+            <a:avLst/>
+          </a:prstGeom>
+          <a:noFill/>
+          <a:ln/>
+        </p:spPr>
+        <p:txBody>
+          <a:bodyPr wrap="square" lIns="0" tIns="0" rIns="0" bIns="0" rtlCol="0" anchor="ctr"/>
+          <a:lstStyle/>
+          <a:p>
+            <a:pPr algn="ctr" indent="0" marL="0">
+              <a:buNone/>
+            </a:pPr>
+            <a:r>
+              <a:rPr lang="en-US" sz="1200" dirty="0">
+                <a:solidFill>
+                  <a:srgbClr val="334455"/>
+                </a:solidFill>
+              </a:rPr>
+              <a:t>✗</a:t>
+            </a:r>
+            <a:endParaRPr lang="en-US" sz="1200" dirty="0"/>
+          </a:p>
+        </p:txBody>
+      </p:sp>
+      <p:sp>
+        <p:nvSpPr>
+          <p:cNvPr id="107" name="Shape 105"/>
+          <p:cNvSpPr/>
+          <p:nvPr/>
+        </p:nvSpPr>
+        <p:spPr>
+          <a:xfrm>
+            <a:off x="457200" y="5605272"/>
+            <a:ext cx="2011680" cy="475488"/>
+          </a:xfrm>
+          <a:prstGeom prst="rect">
+            <a:avLst/>
+          </a:prstGeom>
+          <a:solidFill>
+            <a:srgbClr val="0F1E30"/>
+          </a:solidFill>
+          <a:ln w="12700">
+            <a:solidFill>
+              <a:srgbClr val="1A3A50"/>
+            </a:solidFill>
+            <a:prstDash val="solid"/>
+          </a:ln>
+        </p:spPr>
+      </p:sp>
+      <p:sp>
+        <p:nvSpPr>
+          <p:cNvPr id="108" name="Text 106"/>
+          <p:cNvSpPr/>
+          <p:nvPr/>
+        </p:nvSpPr>
+        <p:spPr>
+          <a:xfrm>
+            <a:off x="457200" y="5605272"/>
+            <a:ext cx="2011680" cy="475488"/>
+          </a:xfrm>
+          <a:prstGeom prst="rect">
+            <a:avLst/>
+          </a:prstGeom>
+          <a:noFill/>
+          <a:ln/>
+        </p:spPr>
+        <p:txBody>
+          <a:bodyPr wrap="square" lIns="0" tIns="0" rIns="0" bIns="0" rtlCol="0" anchor="ctr"/>
+          <a:lstStyle/>
+          <a:p>
+            <a:pPr algn="ctr" indent="0" marL="0">
+              <a:buNone/>
+            </a:pPr>
+            <a:r>
+              <a:rPr lang="en-US" sz="1000" dirty="0">
+                <a:solidFill>
+                  <a:srgbClr val="8CB3CC"/>
+                </a:solidFill>
+              </a:rPr>
+              <a:t>Alfonsino</a:t>
+            </a:r>
+            <a:endParaRPr lang="en-US" sz="1000" dirty="0"/>
+          </a:p>
+        </p:txBody>
+      </p:sp>
+      <p:sp>
+        <p:nvSpPr>
+          <p:cNvPr id="109" name="Shape 107"/>
+          <p:cNvSpPr/>
+          <p:nvPr/>
+        </p:nvSpPr>
+        <p:spPr>
+          <a:xfrm>
+            <a:off x="2468880" y="5605272"/>
+            <a:ext cx="1554480" cy="475488"/>
+          </a:xfrm>
+          <a:prstGeom prst="rect">
+            <a:avLst/>
+          </a:prstGeom>
+          <a:solidFill>
+            <a:srgbClr val="0F1E30"/>
+          </a:solidFill>
+          <a:ln w="12700">
+            <a:solidFill>
+              <a:srgbClr val="1A3A50"/>
+            </a:solidFill>
+            <a:prstDash val="solid"/>
+          </a:ln>
+        </p:spPr>
+      </p:sp>
+      <p:sp>
+        <p:nvSpPr>
+          <p:cNvPr id="110" name="Text 108"/>
+          <p:cNvSpPr/>
+          <p:nvPr/>
+        </p:nvSpPr>
+        <p:spPr>
+          <a:xfrm>
+            <a:off x="2468880" y="5605272"/>
+            <a:ext cx="1554480" cy="475488"/>
+          </a:xfrm>
+          <a:prstGeom prst="rect">
+            <a:avLst/>
+          </a:prstGeom>
+          <a:noFill/>
+          <a:ln/>
+        </p:spPr>
+        <p:txBody>
+          <a:bodyPr wrap="square" lIns="0" tIns="0" rIns="0" bIns="0" rtlCol="0" anchor="ctr"/>
+          <a:lstStyle/>
+          <a:p>
+            <a:pPr algn="ctr" indent="0" marL="0">
+              <a:buNone/>
+            </a:pPr>
+            <a:r>
+              <a:rPr lang="en-US" sz="1200" dirty="0">
+                <a:solidFill>
+                  <a:srgbClr val="8CB3CC"/>
+                </a:solidFill>
+              </a:rPr>
+              <a:t>25-30% comm.</a:t>
+            </a:r>
+            <a:endParaRPr lang="en-US" sz="1200" dirty="0"/>
+          </a:p>
+        </p:txBody>
+      </p:sp>
+      <p:sp>
+        <p:nvSpPr>
+          <p:cNvPr id="111" name="Shape 109"/>
+          <p:cNvSpPr/>
+          <p:nvPr/>
+        </p:nvSpPr>
+        <p:spPr>
+          <a:xfrm>
+            <a:off x="4023360" y="5605272"/>
+            <a:ext cx="1234440" cy="475488"/>
+          </a:xfrm>
+          <a:prstGeom prst="rect">
+            <a:avLst/>
+          </a:prstGeom>
+          <a:solidFill>
+            <a:srgbClr val="0F1E30"/>
+          </a:solidFill>
+          <a:ln w="12700">
+            <a:solidFill>
+              <a:srgbClr val="1A3A50"/>
+            </a:solidFill>
+            <a:prstDash val="solid"/>
+          </a:ln>
+        </p:spPr>
+      </p:sp>
+      <p:sp>
+        <p:nvSpPr>
+          <p:cNvPr id="112" name="Text 110"/>
+          <p:cNvSpPr/>
+          <p:nvPr/>
+        </p:nvSpPr>
+        <p:spPr>
+          <a:xfrm>
+            <a:off x="4023360" y="5605272"/>
+            <a:ext cx="1234440" cy="475488"/>
+          </a:xfrm>
+          <a:prstGeom prst="rect">
+            <a:avLst/>
+          </a:prstGeom>
+          <a:noFill/>
+          <a:ln/>
+        </p:spPr>
+        <p:txBody>
+          <a:bodyPr wrap="square" lIns="0" tIns="0" rIns="0" bIns="0" rtlCol="0" anchor="ctr"/>
+          <a:lstStyle/>
+          <a:p>
+            <a:pPr algn="ctr" indent="0" marL="0">
+              <a:buNone/>
+            </a:pPr>
+            <a:r>
+              <a:rPr lang="en-US" sz="1200" dirty="0">
+                <a:solidFill>
+                  <a:srgbClr val="F59E0B"/>
+                </a:solidFill>
+              </a:rPr>
+              <a:t>~</a:t>
+            </a:r>
+            <a:endParaRPr lang="en-US" sz="1200" dirty="0"/>
+          </a:p>
+        </p:txBody>
+      </p:sp>
+      <p:sp>
+        <p:nvSpPr>
+          <p:cNvPr id="113" name="Shape 111"/>
+          <p:cNvSpPr/>
+          <p:nvPr/>
+        </p:nvSpPr>
+        <p:spPr>
+          <a:xfrm>
+            <a:off x="5257800" y="5605272"/>
+            <a:ext cx="1234440" cy="475488"/>
+          </a:xfrm>
+          <a:prstGeom prst="rect">
+            <a:avLst/>
+          </a:prstGeom>
+          <a:solidFill>
+            <a:srgbClr val="0F1E30"/>
+          </a:solidFill>
+          <a:ln w="12700">
+            <a:solidFill>
+              <a:srgbClr val="1A3A50"/>
+            </a:solidFill>
+            <a:prstDash val="solid"/>
+          </a:ln>
+        </p:spPr>
+      </p:sp>
+      <p:sp>
+        <p:nvSpPr>
+          <p:cNvPr id="114" name="Text 112"/>
+          <p:cNvSpPr/>
+          <p:nvPr/>
+        </p:nvSpPr>
+        <p:spPr>
+          <a:xfrm>
+            <a:off x="5257800" y="5605272"/>
+            <a:ext cx="1234440" cy="475488"/>
+          </a:xfrm>
+          <a:prstGeom prst="rect">
+            <a:avLst/>
+          </a:prstGeom>
+          <a:noFill/>
+          <a:ln/>
+        </p:spPr>
+        <p:txBody>
+          <a:bodyPr wrap="square" lIns="0" tIns="0" rIns="0" bIns="0" rtlCol="0" anchor="ctr"/>
+          <a:lstStyle/>
+          <a:p>
+            <a:pPr algn="ctr" indent="0" marL="0">
+              <a:buNone/>
+            </a:pPr>
+            <a:r>
+              <a:rPr lang="en-US" sz="1200" dirty="0">
+                <a:solidFill>
+                  <a:srgbClr val="334455"/>
+                </a:solidFill>
+              </a:rPr>
+              <a:t>✗</a:t>
+            </a:r>
+            <a:endParaRPr lang="en-US" sz="1200" dirty="0"/>
+          </a:p>
+        </p:txBody>
+      </p:sp>
+      <p:sp>
+        <p:nvSpPr>
+          <p:cNvPr id="115" name="Shape 113"/>
+          <p:cNvSpPr/>
+          <p:nvPr/>
+        </p:nvSpPr>
+        <p:spPr>
+          <a:xfrm>
+            <a:off x="6492240" y="5605272"/>
+            <a:ext cx="1097280" cy="475488"/>
+          </a:xfrm>
+          <a:prstGeom prst="rect">
+            <a:avLst/>
+          </a:prstGeom>
+          <a:solidFill>
+            <a:srgbClr val="0F1E30"/>
+          </a:solidFill>
+          <a:ln w="12700">
+            <a:solidFill>
+              <a:srgbClr val="1A3A50"/>
+            </a:solidFill>
+            <a:prstDash val="solid"/>
+          </a:ln>
+        </p:spPr>
+      </p:sp>
+      <p:sp>
+        <p:nvSpPr>
+          <p:cNvPr id="116" name="Text 114"/>
+          <p:cNvSpPr/>
+          <p:nvPr/>
+        </p:nvSpPr>
+        <p:spPr>
+          <a:xfrm>
+            <a:off x="6492240" y="5605272"/>
+            <a:ext cx="1097280" cy="475488"/>
+          </a:xfrm>
+          <a:prstGeom prst="rect">
+            <a:avLst/>
+          </a:prstGeom>
+          <a:noFill/>
+          <a:ln/>
+        </p:spPr>
+        <p:txBody>
+          <a:bodyPr wrap="square" lIns="0" tIns="0" rIns="0" bIns="0" rtlCol="0" anchor="ctr"/>
+          <a:lstStyle/>
+          <a:p>
+            <a:pPr algn="ctr" indent="0" marL="0">
+              <a:buNone/>
+            </a:pPr>
+            <a:r>
+              <a:rPr lang="en-US" sz="1200" b="1" dirty="0">
+                <a:solidFill>
+                  <a:srgbClr val="22C55E"/>
+                </a:solidFill>
+              </a:rPr>
+              <a:t>✓</a:t>
+            </a:r>
+            <a:endParaRPr lang="en-US" sz="1200" dirty="0"/>
+          </a:p>
+        </p:txBody>
+      </p:sp>
+      <p:sp>
+        <p:nvSpPr>
+          <p:cNvPr id="117" name="Shape 115"/>
+          <p:cNvSpPr/>
+          <p:nvPr/>
+        </p:nvSpPr>
+        <p:spPr>
+          <a:xfrm>
+            <a:off x="7589520" y="5605272"/>
+            <a:ext cx="1097280" cy="475488"/>
+          </a:xfrm>
+          <a:prstGeom prst="rect">
+            <a:avLst/>
+          </a:prstGeom>
+          <a:solidFill>
+            <a:srgbClr val="0F1E30"/>
+          </a:solidFill>
+          <a:ln w="12700">
+            <a:solidFill>
+              <a:srgbClr val="1A3A50"/>
+            </a:solidFill>
+            <a:prstDash val="solid"/>
+          </a:ln>
+        </p:spPr>
+      </p:sp>
+      <p:sp>
+        <p:nvSpPr>
+          <p:cNvPr id="118" name="Text 116"/>
+          <p:cNvSpPr/>
+          <p:nvPr/>
+        </p:nvSpPr>
+        <p:spPr>
+          <a:xfrm>
+            <a:off x="7589520" y="5605272"/>
+            <a:ext cx="1097280" cy="475488"/>
+          </a:xfrm>
+          <a:prstGeom prst="rect">
+            <a:avLst/>
+          </a:prstGeom>
+          <a:noFill/>
+          <a:ln/>
+        </p:spPr>
+        <p:txBody>
+          <a:bodyPr wrap="square" lIns="0" tIns="0" rIns="0" bIns="0" rtlCol="0" anchor="ctr"/>
+          <a:lstStyle/>
+          <a:p>
+            <a:pPr algn="ctr" indent="0" marL="0">
+              <a:buNone/>
+            </a:pPr>
+            <a:r>
+              <a:rPr lang="en-US" sz="1200" dirty="0">
+                <a:solidFill>
+                  <a:srgbClr val="F59E0B"/>
+                </a:solidFill>
+              </a:rPr>
+              <a:t>~</a:t>
+            </a:r>
+            <a:endParaRPr lang="en-US" sz="1200" dirty="0"/>
+          </a:p>
+        </p:txBody>
+      </p:sp>
+      <p:sp>
+        <p:nvSpPr>
+          <p:cNvPr id="119" name="Shape 117"/>
+          <p:cNvSpPr/>
+          <p:nvPr/>
+        </p:nvSpPr>
+        <p:spPr>
+          <a:xfrm>
+            <a:off x="8686800" y="5605272"/>
+            <a:ext cx="1097280" cy="475488"/>
+          </a:xfrm>
+          <a:prstGeom prst="rect">
+            <a:avLst/>
+          </a:prstGeom>
+          <a:solidFill>
+            <a:srgbClr val="0F1E30"/>
+          </a:solidFill>
+          <a:ln w="12700">
+            <a:solidFill>
+              <a:srgbClr val="1A3A50"/>
+            </a:solidFill>
+            <a:prstDash val="solid"/>
+          </a:ln>
+        </p:spPr>
+      </p:sp>
+      <p:sp>
+        <p:nvSpPr>
+          <p:cNvPr id="120" name="Text 118"/>
+          <p:cNvSpPr/>
+          <p:nvPr/>
+        </p:nvSpPr>
+        <p:spPr>
+          <a:xfrm>
+            <a:off x="8686800" y="5605272"/>
+            <a:ext cx="1097280" cy="475488"/>
+          </a:xfrm>
+          <a:prstGeom prst="rect">
+            <a:avLst/>
+          </a:prstGeom>
+          <a:noFill/>
+          <a:ln/>
+        </p:spPr>
+        <p:txBody>
+          <a:bodyPr wrap="square" lIns="0" tIns="0" rIns="0" bIns="0" rtlCol="0" anchor="ctr"/>
+          <a:lstStyle/>
+          <a:p>
+            <a:pPr algn="ctr" indent="0" marL="0">
+              <a:buNone/>
+            </a:pPr>
+            <a:r>
+              <a:rPr lang="en-US" sz="1200" dirty="0">
+                <a:solidFill>
+                  <a:srgbClr val="334455"/>
+                </a:solidFill>
+              </a:rPr>
+              <a:t>✗</a:t>
+            </a:r>
+            <a:endParaRPr lang="en-US" sz="1200" dirty="0"/>
+          </a:p>
+        </p:txBody>
+      </p:sp>
+      <p:sp>
+        <p:nvSpPr>
+          <p:cNvPr id="121" name="Shape 119"/>
+          <p:cNvSpPr/>
+          <p:nvPr/>
+        </p:nvSpPr>
+        <p:spPr>
+          <a:xfrm>
+            <a:off x="457200" y="6080760"/>
+            <a:ext cx="2011680" cy="475488"/>
+          </a:xfrm>
+          <a:prstGeom prst="rect">
+            <a:avLst/>
+          </a:prstGeom>
+          <a:solidFill>
+            <a:srgbClr val="0A1929"/>
+          </a:solidFill>
+          <a:ln w="12700">
+            <a:solidFill>
+              <a:srgbClr val="1A3A50"/>
+            </a:solidFill>
+            <a:prstDash val="solid"/>
+          </a:ln>
+        </p:spPr>
+      </p:sp>
+      <p:sp>
+        <p:nvSpPr>
+          <p:cNvPr id="122" name="Text 120"/>
+          <p:cNvSpPr/>
+          <p:nvPr/>
+        </p:nvSpPr>
+        <p:spPr>
+          <a:xfrm>
+            <a:off x="457200" y="6080760"/>
+            <a:ext cx="2011680" cy="475488"/>
+          </a:xfrm>
+          <a:prstGeom prst="rect">
+            <a:avLst/>
+          </a:prstGeom>
+          <a:noFill/>
+          <a:ln/>
+        </p:spPr>
+        <p:txBody>
+          <a:bodyPr wrap="square" lIns="0" tIns="0" rIns="0" bIns="0" rtlCol="0" anchor="ctr"/>
+          <a:lstStyle/>
+          <a:p>
+            <a:pPr algn="ctr" indent="0" marL="0">
+              <a:buNone/>
+            </a:pPr>
+            <a:r>
+              <a:rPr lang="en-US" sz="1000" dirty="0">
+                <a:solidFill>
+                  <a:srgbClr val="8CB3CC"/>
+                </a:solidFill>
+              </a:rPr>
+              <a:t>Uber Eats</a:t>
+            </a:r>
+            <a:endParaRPr lang="en-US" sz="1000" dirty="0"/>
+          </a:p>
+        </p:txBody>
+      </p:sp>
+      <p:sp>
+        <p:nvSpPr>
+          <p:cNvPr id="123" name="Shape 121"/>
+          <p:cNvSpPr/>
+          <p:nvPr/>
+        </p:nvSpPr>
+        <p:spPr>
+          <a:xfrm>
+            <a:off x="2468880" y="6080760"/>
+            <a:ext cx="1554480" cy="475488"/>
+          </a:xfrm>
+          <a:prstGeom prst="rect">
+            <a:avLst/>
+          </a:prstGeom>
+          <a:solidFill>
+            <a:srgbClr val="0A1929"/>
+          </a:solidFill>
+          <a:ln w="12700">
+            <a:solidFill>
+              <a:srgbClr val="1A3A50"/>
+            </a:solidFill>
+            <a:prstDash val="solid"/>
+          </a:ln>
+        </p:spPr>
+      </p:sp>
+      <p:sp>
+        <p:nvSpPr>
+          <p:cNvPr id="124" name="Text 122"/>
+          <p:cNvSpPr/>
+          <p:nvPr/>
+        </p:nvSpPr>
+        <p:spPr>
+          <a:xfrm>
+            <a:off x="2468880" y="6080760"/>
+            <a:ext cx="1554480" cy="475488"/>
+          </a:xfrm>
+          <a:prstGeom prst="rect">
+            <a:avLst/>
+          </a:prstGeom>
+          <a:noFill/>
+          <a:ln/>
+        </p:spPr>
+        <p:txBody>
+          <a:bodyPr wrap="square" lIns="0" tIns="0" rIns="0" bIns="0" rtlCol="0" anchor="ctr"/>
+          <a:lstStyle/>
+          <a:p>
+            <a:pPr algn="ctr" indent="0" marL="0">
+              <a:buNone/>
+            </a:pPr>
+            <a:r>
+              <a:rPr lang="en-US" sz="1200" dirty="0">
+                <a:solidFill>
+                  <a:srgbClr val="8CB3CC"/>
+                </a:solidFill>
+              </a:rPr>
+              <a:t>25-30% comm.</a:t>
+            </a:r>
+            <a:endParaRPr lang="en-US" sz="1200" dirty="0"/>
+          </a:p>
+        </p:txBody>
+      </p:sp>
+      <p:sp>
+        <p:nvSpPr>
+          <p:cNvPr id="125" name="Shape 123"/>
+          <p:cNvSpPr/>
+          <p:nvPr/>
+        </p:nvSpPr>
+        <p:spPr>
+          <a:xfrm>
+            <a:off x="4023360" y="6080760"/>
+            <a:ext cx="1234440" cy="475488"/>
+          </a:xfrm>
+          <a:prstGeom prst="rect">
+            <a:avLst/>
+          </a:prstGeom>
+          <a:solidFill>
+            <a:srgbClr val="0A1929"/>
+          </a:solidFill>
+          <a:ln w="12700">
+            <a:solidFill>
+              <a:srgbClr val="1A3A50"/>
+            </a:solidFill>
+            <a:prstDash val="solid"/>
+          </a:ln>
+        </p:spPr>
+      </p:sp>
+      <p:sp>
+        <p:nvSpPr>
+          <p:cNvPr id="126" name="Text 124"/>
+          <p:cNvSpPr/>
+          <p:nvPr/>
+        </p:nvSpPr>
+        <p:spPr>
+          <a:xfrm>
+            <a:off x="4023360" y="6080760"/>
+            <a:ext cx="1234440" cy="475488"/>
+          </a:xfrm>
+          <a:prstGeom prst="rect">
+            <a:avLst/>
+          </a:prstGeom>
+          <a:noFill/>
+          <a:ln/>
+        </p:spPr>
+        <p:txBody>
+          <a:bodyPr wrap="square" lIns="0" tIns="0" rIns="0" bIns="0" rtlCol="0" anchor="ctr"/>
+          <a:lstStyle/>
+          <a:p>
+            <a:pPr algn="ctr" indent="0" marL="0">
+              <a:buNone/>
+            </a:pPr>
+            <a:r>
+              <a:rPr lang="en-US" sz="1200" dirty="0">
+                <a:solidFill>
+                  <a:srgbClr val="334455"/>
+                </a:solidFill>
+              </a:rPr>
+              <a:t>✗</a:t>
+            </a:r>
+            <a:endParaRPr lang="en-US" sz="1200" dirty="0"/>
+          </a:p>
+        </p:txBody>
+      </p:sp>
+      <p:sp>
+        <p:nvSpPr>
+          <p:cNvPr id="127" name="Shape 125"/>
+          <p:cNvSpPr/>
+          <p:nvPr/>
+        </p:nvSpPr>
+        <p:spPr>
+          <a:xfrm>
+            <a:off x="5257800" y="6080760"/>
+            <a:ext cx="1234440" cy="475488"/>
+          </a:xfrm>
+          <a:prstGeom prst="rect">
+            <a:avLst/>
+          </a:prstGeom>
+          <a:solidFill>
+            <a:srgbClr val="0A1929"/>
+          </a:solidFill>
+          <a:ln w="12700">
+            <a:solidFill>
+              <a:srgbClr val="1A3A50"/>
+            </a:solidFill>
+            <a:prstDash val="solid"/>
+          </a:ln>
+        </p:spPr>
+      </p:sp>
+      <p:sp>
+        <p:nvSpPr>
+          <p:cNvPr id="128" name="Text 126"/>
+          <p:cNvSpPr/>
+          <p:nvPr/>
+        </p:nvSpPr>
+        <p:spPr>
+          <a:xfrm>
+            <a:off x="5257800" y="6080760"/>
+            <a:ext cx="1234440" cy="475488"/>
+          </a:xfrm>
+          <a:prstGeom prst="rect">
+            <a:avLst/>
+          </a:prstGeom>
+          <a:noFill/>
+          <a:ln/>
+        </p:spPr>
+        <p:txBody>
+          <a:bodyPr wrap="square" lIns="0" tIns="0" rIns="0" bIns="0" rtlCol="0" anchor="ctr"/>
+          <a:lstStyle/>
+          <a:p>
+            <a:pPr algn="ctr" indent="0" marL="0">
+              <a:buNone/>
+            </a:pPr>
+            <a:r>
+              <a:rPr lang="en-US" sz="1200" dirty="0">
+                <a:solidFill>
+                  <a:srgbClr val="334455"/>
+                </a:solidFill>
+              </a:rPr>
+              <a:t>✗</a:t>
+            </a:r>
+            <a:endParaRPr lang="en-US" sz="1200" dirty="0"/>
+          </a:p>
+        </p:txBody>
+      </p:sp>
+      <p:sp>
+        <p:nvSpPr>
+          <p:cNvPr id="129" name="Shape 127"/>
+          <p:cNvSpPr/>
+          <p:nvPr/>
+        </p:nvSpPr>
+        <p:spPr>
+          <a:xfrm>
+            <a:off x="6492240" y="6080760"/>
+            <a:ext cx="1097280" cy="475488"/>
+          </a:xfrm>
+          <a:prstGeom prst="rect">
+            <a:avLst/>
+          </a:prstGeom>
+          <a:solidFill>
+            <a:srgbClr val="0A1929"/>
+          </a:solidFill>
+          <a:ln w="12700">
+            <a:solidFill>
+              <a:srgbClr val="1A3A50"/>
+            </a:solidFill>
+            <a:prstDash val="solid"/>
+          </a:ln>
+        </p:spPr>
+      </p:sp>
+      <p:sp>
+        <p:nvSpPr>
+          <p:cNvPr id="130" name="Text 128"/>
+          <p:cNvSpPr/>
+          <p:nvPr/>
+        </p:nvSpPr>
+        <p:spPr>
+          <a:xfrm>
+            <a:off x="6492240" y="6080760"/>
+            <a:ext cx="1097280" cy="475488"/>
+          </a:xfrm>
+          <a:prstGeom prst="rect">
+            <a:avLst/>
+          </a:prstGeom>
+          <a:noFill/>
+          <a:ln/>
+        </p:spPr>
+        <p:txBody>
+          <a:bodyPr wrap="square" lIns="0" tIns="0" rIns="0" bIns="0" rtlCol="0" anchor="ctr"/>
+          <a:lstStyle/>
+          <a:p>
+            <a:pPr algn="ctr" indent="0" marL="0">
+              <a:buNone/>
+            </a:pPr>
+            <a:r>
+              <a:rPr lang="en-US" sz="1200" b="1" dirty="0">
+                <a:solidFill>
+                  <a:srgbClr val="22C55E"/>
+                </a:solidFill>
+              </a:rPr>
+              <a:t>✓</a:t>
+            </a:r>
+            <a:endParaRPr lang="en-US" sz="1200" dirty="0"/>
+          </a:p>
+        </p:txBody>
+      </p:sp>
+      <p:sp>
+        <p:nvSpPr>
+          <p:cNvPr id="131" name="Shape 129"/>
+          <p:cNvSpPr/>
+          <p:nvPr/>
+        </p:nvSpPr>
+        <p:spPr>
+          <a:xfrm>
+            <a:off x="7589520" y="6080760"/>
+            <a:ext cx="1097280" cy="475488"/>
+          </a:xfrm>
+          <a:prstGeom prst="rect">
+            <a:avLst/>
+          </a:prstGeom>
+          <a:solidFill>
+            <a:srgbClr val="0A1929"/>
+          </a:solidFill>
+          <a:ln w="12700">
+            <a:solidFill>
+              <a:srgbClr val="1A3A50"/>
+            </a:solidFill>
+            <a:prstDash val="solid"/>
+          </a:ln>
+        </p:spPr>
+      </p:sp>
+      <p:sp>
+        <p:nvSpPr>
+          <p:cNvPr id="132" name="Text 130"/>
+          <p:cNvSpPr/>
+          <p:nvPr/>
+        </p:nvSpPr>
+        <p:spPr>
+          <a:xfrm>
+            <a:off x="7589520" y="6080760"/>
+            <a:ext cx="1097280" cy="475488"/>
+          </a:xfrm>
+          <a:prstGeom prst="rect">
+            <a:avLst/>
+          </a:prstGeom>
+          <a:noFill/>
+          <a:ln/>
+        </p:spPr>
+        <p:txBody>
+          <a:bodyPr wrap="square" lIns="0" tIns="0" rIns="0" bIns="0" rtlCol="0" anchor="ctr"/>
+          <a:lstStyle/>
+          <a:p>
+            <a:pPr algn="ctr" indent="0" marL="0">
+              <a:buNone/>
+            </a:pPr>
+            <a:r>
+              <a:rPr lang="en-US" sz="1200" dirty="0">
+                <a:solidFill>
+                  <a:srgbClr val="334455"/>
+                </a:solidFill>
+              </a:rPr>
+              <a:t>✗</a:t>
+            </a:r>
+            <a:endParaRPr lang="en-US" sz="1200" dirty="0"/>
+          </a:p>
+        </p:txBody>
+      </p:sp>
+      <p:sp>
+        <p:nvSpPr>
+          <p:cNvPr id="133" name="Shape 131"/>
+          <p:cNvSpPr/>
+          <p:nvPr/>
+        </p:nvSpPr>
+        <p:spPr>
+          <a:xfrm>
+            <a:off x="8686800" y="6080760"/>
+            <a:ext cx="1097280" cy="475488"/>
+          </a:xfrm>
+          <a:prstGeom prst="rect">
+            <a:avLst/>
+          </a:prstGeom>
+          <a:solidFill>
+            <a:srgbClr val="0A1929"/>
+          </a:solidFill>
+          <a:ln w="12700">
+            <a:solidFill>
+              <a:srgbClr val="1A3A50"/>
+            </a:solidFill>
+            <a:prstDash val="solid"/>
+          </a:ln>
+        </p:spPr>
+      </p:sp>
+      <p:sp>
+        <p:nvSpPr>
+          <p:cNvPr id="134" name="Text 132"/>
+          <p:cNvSpPr/>
+          <p:nvPr/>
+        </p:nvSpPr>
+        <p:spPr>
+          <a:xfrm>
+            <a:off x="8686800" y="6080760"/>
+            <a:ext cx="1097280" cy="475488"/>
+          </a:xfrm>
+          <a:prstGeom prst="rect">
+            <a:avLst/>
+          </a:prstGeom>
+          <a:noFill/>
+          <a:ln/>
+        </p:spPr>
+        <p:txBody>
+          <a:bodyPr wrap="square" lIns="0" tIns="0" rIns="0" bIns="0" rtlCol="0" anchor="ctr"/>
+          <a:lstStyle/>
+          <a:p>
+            <a:pPr algn="ctr" indent="0" marL="0">
+              <a:buNone/>
+            </a:pPr>
+            <a:r>
+              <a:rPr lang="en-US" sz="1200" dirty="0">
+                <a:solidFill>
+                  <a:srgbClr val="334455"/>
+                </a:solidFill>
+              </a:rPr>
+              <a:t>✗</a:t>
+            </a:r>
+            <a:endParaRPr lang="en-US" sz="1200" dirty="0"/>
+          </a:p>
+        </p:txBody>
+      </p:sp>
+      <p:sp>
+        <p:nvSpPr>
+          <p:cNvPr id="135" name="Text 133"/>
           <p:cNvSpPr/>
           <p:nvPr/>
         </p:nvSpPr>
@@ -10367,7 +12316,7 @@
       </p:sp>
       <p:sp>
         <p:nvSpPr>
-          <p:cNvPr id="104" name="Text 102"/>
+          <p:cNvPr id="136" name="Text 134"/>
           <p:cNvSpPr/>
           <p:nvPr/>
         </p:nvSpPr>
@@ -10395,7 +12344,7 @@
                   <a:srgbClr val="334455"/>
                 </a:solidFill>
               </a:rPr>
-              <a:t>05 / 11</a:t>
+              <a:t>05 / 12</a:t>
             </a:r>
             <a:endParaRPr lang="en-US" sz="800" dirty="0"/>
           </a:p>
@@ -10412,6 +12361,1426 @@
 <file path=ppt/slides/slide6.xml><?xml version="1.0" encoding="utf-8"?>
 <p:sld xmlns:a="http://schemas.openxmlformats.org/drawingml/2006/main" xmlns:r="http://schemas.openxmlformats.org/officeDocument/2006/relationships" xmlns:p="http://schemas.openxmlformats.org/presentationml/2006/main">
   <p:cSld name="Slide 6">
+    <p:bg>
+      <p:bgPr>
+        <a:solidFill>
+          <a:srgbClr val="0A1929"/>
+        </a:solidFill>
+      </p:bgPr>
+    </p:bg>
+    <p:spTree>
+      <p:nvGrpSpPr>
+        <p:cNvPr id="1" name=""/>
+        <p:cNvGrpSpPr/>
+        <p:nvPr/>
+      </p:nvGrpSpPr>
+      <p:grpSpPr>
+        <a:xfrm>
+          <a:off x="0" y="0"/>
+          <a:ext cx="0" cy="0"/>
+          <a:chOff x="0" y="0"/>
+          <a:chExt cx="0" cy="0"/>
+        </a:xfrm>
+      </p:grpSpPr>
+      <p:sp>
+        <p:nvSpPr>
+          <p:cNvPr id="2" name="Text 0"/>
+          <p:cNvSpPr/>
+          <p:nvPr/>
+        </p:nvSpPr>
+        <p:spPr>
+          <a:xfrm>
+            <a:off x="457200" y="365760"/>
+            <a:ext cx="4572000" cy="228600"/>
+          </a:xfrm>
+          <a:prstGeom prst="rect">
+            <a:avLst/>
+          </a:prstGeom>
+          <a:noFill/>
+          <a:ln/>
+        </p:spPr>
+        <p:txBody>
+          <a:bodyPr wrap="square" rtlCol="0" anchor="ctr"/>
+          <a:lstStyle/>
+          <a:p>
+            <a:pPr indent="0" marL="0">
+              <a:buNone/>
+            </a:pPr>
+            <a:r>
+              <a:rPr lang="en-US" sz="900" b="1" spc="300" kern="0" dirty="0">
+                <a:solidFill>
+                  <a:srgbClr val="14B8A6"/>
+                </a:solidFill>
+              </a:rPr>
+              <a:t>POSIZIONAMENTO</a:t>
+            </a:r>
+            <a:endParaRPr lang="en-US" sz="900" dirty="0"/>
+          </a:p>
+        </p:txBody>
+      </p:sp>
+      <p:sp>
+        <p:nvSpPr>
+          <p:cNvPr id="3" name="Text 1"/>
+          <p:cNvSpPr/>
+          <p:nvPr/>
+        </p:nvSpPr>
+        <p:spPr>
+          <a:xfrm>
+            <a:off x="457200" y="685800"/>
+            <a:ext cx="10972800" cy="594360"/>
+          </a:xfrm>
+          <a:prstGeom prst="rect">
+            <a:avLst/>
+          </a:prstGeom>
+          <a:noFill/>
+          <a:ln/>
+        </p:spPr>
+        <p:txBody>
+          <a:bodyPr wrap="square" rtlCol="0" anchor="ctr"/>
+          <a:lstStyle/>
+          <a:p>
+            <a:pPr indent="0" marL="0">
+              <a:buNone/>
+            </a:pPr>
+            <a:r>
+              <a:rPr lang="en-US" sz="2200" b="1" dirty="0">
+                <a:solidFill>
+                  <a:srgbClr val="FFFFFF"/>
+                </a:solidFill>
+                <a:latin typeface="Georgia" pitchFamily="34" charset="0"/>
+                <a:ea typeface="Georgia" pitchFamily="34" charset="-122"/>
+                <a:cs typeface="Georgia" pitchFamily="34" charset="-120"/>
+              </a:rPr>
+              <a:t>Dloop occupa il quadrante unico non presidiato da nessun competitor</a:t>
+            </a:r>
+            <a:endParaRPr lang="en-US" sz="2200" dirty="0"/>
+          </a:p>
+        </p:txBody>
+      </p:sp>
+      <p:sp>
+        <p:nvSpPr>
+          <p:cNvPr id="4" name="Shape 2"/>
+          <p:cNvSpPr/>
+          <p:nvPr/>
+        </p:nvSpPr>
+        <p:spPr>
+          <a:xfrm>
+            <a:off x="457200" y="1417320"/>
+            <a:ext cx="5623560" cy="2286000"/>
+          </a:xfrm>
+          <a:prstGeom prst="rect">
+            <a:avLst/>
+          </a:prstGeom>
+          <a:solidFill>
+            <a:srgbClr val="0F2535"/>
+          </a:solidFill>
+          <a:ln w="12700">
+            <a:solidFill>
+              <a:srgbClr val="1A3A50"/>
+            </a:solidFill>
+            <a:prstDash val="solid"/>
+          </a:ln>
+        </p:spPr>
+      </p:sp>
+      <p:sp>
+        <p:nvSpPr>
+          <p:cNvPr id="5" name="Shape 3"/>
+          <p:cNvSpPr/>
+          <p:nvPr/>
+        </p:nvSpPr>
+        <p:spPr>
+          <a:xfrm>
+            <a:off x="6080760" y="1417320"/>
+            <a:ext cx="5623560" cy="2286000"/>
+          </a:xfrm>
+          <a:prstGeom prst="rect">
+            <a:avLst/>
+          </a:prstGeom>
+          <a:solidFill>
+            <a:srgbClr val="0A2A28"/>
+          </a:solidFill>
+          <a:ln w="12700">
+            <a:solidFill>
+              <a:srgbClr val="0B7A75"/>
+            </a:solidFill>
+            <a:prstDash val="solid"/>
+          </a:ln>
+        </p:spPr>
+      </p:sp>
+      <p:sp>
+        <p:nvSpPr>
+          <p:cNvPr id="6" name="Shape 4"/>
+          <p:cNvSpPr/>
+          <p:nvPr/>
+        </p:nvSpPr>
+        <p:spPr>
+          <a:xfrm>
+            <a:off x="457200" y="3703320"/>
+            <a:ext cx="5623560" cy="2286000"/>
+          </a:xfrm>
+          <a:prstGeom prst="rect">
+            <a:avLst/>
+          </a:prstGeom>
+          <a:solidFill>
+            <a:srgbClr val="0A1520"/>
+          </a:solidFill>
+          <a:ln w="12700">
+            <a:solidFill>
+              <a:srgbClr val="1A3A50"/>
+            </a:solidFill>
+            <a:prstDash val="solid"/>
+          </a:ln>
+        </p:spPr>
+      </p:sp>
+      <p:sp>
+        <p:nvSpPr>
+          <p:cNvPr id="7" name="Shape 5"/>
+          <p:cNvSpPr/>
+          <p:nvPr/>
+        </p:nvSpPr>
+        <p:spPr>
+          <a:xfrm>
+            <a:off x="6080760" y="3703320"/>
+            <a:ext cx="5623560" cy="2286000"/>
+          </a:xfrm>
+          <a:prstGeom prst="rect">
+            <a:avLst/>
+          </a:prstGeom>
+          <a:solidFill>
+            <a:srgbClr val="0A1929"/>
+          </a:solidFill>
+          <a:ln w="12700">
+            <a:solidFill>
+              <a:srgbClr val="1A3A50"/>
+            </a:solidFill>
+            <a:prstDash val="solid"/>
+          </a:ln>
+        </p:spPr>
+      </p:sp>
+      <p:sp>
+        <p:nvSpPr>
+          <p:cNvPr id="8" name="Text 6"/>
+          <p:cNvSpPr/>
+          <p:nvPr/>
+        </p:nvSpPr>
+        <p:spPr>
+          <a:xfrm>
+            <a:off x="594360" y="1508760"/>
+            <a:ext cx="3200400" cy="256032"/>
+          </a:xfrm>
+          <a:prstGeom prst="rect">
+            <a:avLst/>
+          </a:prstGeom>
+          <a:noFill/>
+          <a:ln/>
+        </p:spPr>
+        <p:txBody>
+          <a:bodyPr wrap="square" lIns="0" tIns="0" rIns="0" bIns="0" rtlCol="0" anchor="ctr"/>
+          <a:lstStyle/>
+          <a:p>
+            <a:pPr indent="0" marL="0">
+              <a:buNone/>
+            </a:pPr>
+            <a:r>
+              <a:rPr lang="en-US" sz="800" b="1" spc="100" kern="0" dirty="0">
+                <a:solidFill>
+                  <a:srgbClr val="334455"/>
+                </a:solidFill>
+              </a:rPr>
+              <a:t>MARKETPLACE LOCALE</a:t>
+            </a:r>
+            <a:endParaRPr lang="en-US" sz="800" dirty="0"/>
+          </a:p>
+        </p:txBody>
+      </p:sp>
+      <p:sp>
+        <p:nvSpPr>
+          <p:cNvPr id="9" name="Text 7"/>
+          <p:cNvSpPr/>
+          <p:nvPr/>
+        </p:nvSpPr>
+        <p:spPr>
+          <a:xfrm>
+            <a:off x="6217920" y="1508760"/>
+            <a:ext cx="2743200" cy="256032"/>
+          </a:xfrm>
+          <a:prstGeom prst="rect">
+            <a:avLst/>
+          </a:prstGeom>
+          <a:noFill/>
+          <a:ln/>
+        </p:spPr>
+        <p:txBody>
+          <a:bodyPr wrap="square" lIns="0" tIns="0" rIns="0" bIns="0" rtlCol="0" anchor="ctr"/>
+          <a:lstStyle/>
+          <a:p>
+            <a:pPr indent="0" marL="0">
+              <a:buNone/>
+            </a:pPr>
+            <a:r>
+              <a:rPr lang="en-US" sz="800" b="1" spc="100" kern="0" dirty="0">
+                <a:solidFill>
+                  <a:srgbClr val="0B7A75"/>
+                </a:solidFill>
+              </a:rPr>
+              <a:t>SaaS LOCALE  ★</a:t>
+            </a:r>
+            <a:endParaRPr lang="en-US" sz="800" dirty="0"/>
+          </a:p>
+        </p:txBody>
+      </p:sp>
+      <p:sp>
+        <p:nvSpPr>
+          <p:cNvPr id="10" name="Text 8"/>
+          <p:cNvSpPr/>
+          <p:nvPr/>
+        </p:nvSpPr>
+        <p:spPr>
+          <a:xfrm>
+            <a:off x="594360" y="3794760"/>
+            <a:ext cx="3200400" cy="256032"/>
+          </a:xfrm>
+          <a:prstGeom prst="rect">
+            <a:avLst/>
+          </a:prstGeom>
+          <a:noFill/>
+          <a:ln/>
+        </p:spPr>
+        <p:txBody>
+          <a:bodyPr wrap="square" lIns="0" tIns="0" rIns="0" bIns="0" rtlCol="0" anchor="ctr"/>
+          <a:lstStyle/>
+          <a:p>
+            <a:pPr indent="0" marL="0">
+              <a:buNone/>
+            </a:pPr>
+            <a:r>
+              <a:rPr lang="en-US" sz="800" b="1" spc="100" kern="0" dirty="0">
+                <a:solidFill>
+                  <a:srgbClr val="334455"/>
+                </a:solidFill>
+              </a:rPr>
+              <a:t>MARKETPLACE GLOBALE</a:t>
+            </a:r>
+            <a:endParaRPr lang="en-US" sz="800" dirty="0"/>
+          </a:p>
+        </p:txBody>
+      </p:sp>
+      <p:sp>
+        <p:nvSpPr>
+          <p:cNvPr id="11" name="Text 9"/>
+          <p:cNvSpPr/>
+          <p:nvPr/>
+        </p:nvSpPr>
+        <p:spPr>
+          <a:xfrm>
+            <a:off x="6217920" y="3794760"/>
+            <a:ext cx="2743200" cy="256032"/>
+          </a:xfrm>
+          <a:prstGeom prst="rect">
+            <a:avLst/>
+          </a:prstGeom>
+          <a:noFill/>
+          <a:ln/>
+        </p:spPr>
+        <p:txBody>
+          <a:bodyPr wrap="square" lIns="0" tIns="0" rIns="0" bIns="0" rtlCol="0" anchor="ctr"/>
+          <a:lstStyle/>
+          <a:p>
+            <a:pPr indent="0" marL="0">
+              <a:buNone/>
+            </a:pPr>
+            <a:r>
+              <a:rPr lang="en-US" sz="800" b="1" spc="100" kern="0" dirty="0">
+                <a:solidFill>
+                  <a:srgbClr val="334455"/>
+                </a:solidFill>
+              </a:rPr>
+              <a:t>SAAS GLOBALE</a:t>
+            </a:r>
+            <a:endParaRPr lang="en-US" sz="800" dirty="0"/>
+          </a:p>
+        </p:txBody>
+      </p:sp>
+      <p:sp>
+        <p:nvSpPr>
+          <p:cNvPr id="12" name="Shape 10"/>
+          <p:cNvSpPr/>
+          <p:nvPr/>
+        </p:nvSpPr>
+        <p:spPr>
+          <a:xfrm>
+            <a:off x="457200" y="3703320"/>
+            <a:ext cx="11247120" cy="0"/>
+          </a:xfrm>
+          <a:prstGeom prst="line">
+            <a:avLst/>
+          </a:prstGeom>
+          <a:noFill/>
+          <a:ln w="12700">
+            <a:solidFill>
+              <a:srgbClr val="2A4A5A"/>
+            </a:solidFill>
+            <a:prstDash val="solid"/>
+          </a:ln>
+        </p:spPr>
+      </p:sp>
+      <p:sp>
+        <p:nvSpPr>
+          <p:cNvPr id="13" name="Shape 11"/>
+          <p:cNvSpPr/>
+          <p:nvPr/>
+        </p:nvSpPr>
+        <p:spPr>
+          <a:xfrm>
+            <a:off x="6080760" y="1417320"/>
+            <a:ext cx="0" cy="4572000"/>
+          </a:xfrm>
+          <a:prstGeom prst="line">
+            <a:avLst/>
+          </a:prstGeom>
+          <a:noFill/>
+          <a:ln w="12700">
+            <a:solidFill>
+              <a:srgbClr val="2A4A5A"/>
+            </a:solidFill>
+            <a:prstDash val="solid"/>
+          </a:ln>
+        </p:spPr>
+      </p:sp>
+      <p:sp>
+        <p:nvSpPr>
+          <p:cNvPr id="14" name="Text 12"/>
+          <p:cNvSpPr/>
+          <p:nvPr/>
+        </p:nvSpPr>
+        <p:spPr>
+          <a:xfrm>
+            <a:off x="457200" y="3447288"/>
+            <a:ext cx="11247120" cy="201168"/>
+          </a:xfrm>
+          <a:prstGeom prst="rect">
+            <a:avLst/>
+          </a:prstGeom>
+          <a:noFill/>
+          <a:ln/>
+        </p:spPr>
+        <p:txBody>
+          <a:bodyPr wrap="square" lIns="0" tIns="0" rIns="0" bIns="0" rtlCol="0" anchor="ctr"/>
+          <a:lstStyle/>
+          <a:p>
+            <a:pPr algn="ctr" indent="0" marL="0">
+              <a:buNone/>
+            </a:pPr>
+            <a:r>
+              <a:rPr lang="en-US" sz="800" spc="100" kern="0" dirty="0">
+                <a:solidFill>
+                  <a:srgbClr val="4A6A7A"/>
+                </a:solidFill>
+              </a:rPr>
+              <a:t>← MARKETPLACE          MODELLO          SAAS PURO →</a:t>
+            </a:r>
+            <a:endParaRPr lang="en-US" sz="800" dirty="0"/>
+          </a:p>
+        </p:txBody>
+      </p:sp>
+      <p:sp>
+        <p:nvSpPr>
+          <p:cNvPr id="15" name="Text 13"/>
+          <p:cNvSpPr/>
+          <p:nvPr/>
+        </p:nvSpPr>
+        <p:spPr>
+          <a:xfrm>
+            <a:off x="6172200" y="1801368"/>
+            <a:ext cx="2286000" cy="201168"/>
+          </a:xfrm>
+          <a:prstGeom prst="rect">
+            <a:avLst/>
+          </a:prstGeom>
+          <a:noFill/>
+          <a:ln/>
+        </p:spPr>
+        <p:txBody>
+          <a:bodyPr wrap="square" lIns="0" tIns="0" rIns="0" bIns="0" rtlCol="0" anchor="ctr"/>
+          <a:lstStyle/>
+          <a:p>
+            <a:pPr indent="0" marL="0">
+              <a:buNone/>
+            </a:pPr>
+            <a:r>
+              <a:rPr lang="en-US" sz="800" dirty="0">
+                <a:solidFill>
+                  <a:srgbClr val="4A6A7A"/>
+                </a:solidFill>
+              </a:rPr>
+              <a:t>↑ LOCALE / PMI</a:t>
+            </a:r>
+            <a:endParaRPr lang="en-US" sz="800" dirty="0"/>
+          </a:p>
+        </p:txBody>
+      </p:sp>
+      <p:sp>
+        <p:nvSpPr>
+          <p:cNvPr id="16" name="Text 14"/>
+          <p:cNvSpPr/>
+          <p:nvPr/>
+        </p:nvSpPr>
+        <p:spPr>
+          <a:xfrm>
+            <a:off x="6172200" y="4050792"/>
+            <a:ext cx="2743200" cy="201168"/>
+          </a:xfrm>
+          <a:prstGeom prst="rect">
+            <a:avLst/>
+          </a:prstGeom>
+          <a:noFill/>
+          <a:ln/>
+        </p:spPr>
+        <p:txBody>
+          <a:bodyPr wrap="square" lIns="0" tIns="0" rIns="0" bIns="0" rtlCol="0" anchor="ctr"/>
+          <a:lstStyle/>
+          <a:p>
+            <a:pPr indent="0" marL="0">
+              <a:buNone/>
+            </a:pPr>
+            <a:r>
+              <a:rPr lang="en-US" sz="800" dirty="0">
+                <a:solidFill>
+                  <a:srgbClr val="4A6A7A"/>
+                </a:solidFill>
+              </a:rPr>
+              <a:t>↓ GLOBALE / ENTERPRISE</a:t>
+            </a:r>
+            <a:endParaRPr lang="en-US" sz="800" dirty="0"/>
+          </a:p>
+        </p:txBody>
+      </p:sp>
+      <p:sp>
+        <p:nvSpPr>
+          <p:cNvPr id="17" name="Shape 15"/>
+          <p:cNvSpPr/>
+          <p:nvPr/>
+        </p:nvSpPr>
+        <p:spPr>
+          <a:xfrm>
+            <a:off x="10009937" y="2265883"/>
+            <a:ext cx="201168" cy="201168"/>
+          </a:xfrm>
+          <a:prstGeom prst="ellipse">
+            <a:avLst/>
+          </a:prstGeom>
+          <a:solidFill>
+            <a:srgbClr val="14B8A6"/>
+          </a:solidFill>
+          <a:ln w="12700">
+            <a:solidFill>
+              <a:srgbClr val="14B8A6"/>
+            </a:solidFill>
+            <a:prstDash val="solid"/>
+          </a:ln>
+        </p:spPr>
+      </p:sp>
+      <p:sp>
+        <p:nvSpPr>
+          <p:cNvPr id="18" name="Text 16"/>
+          <p:cNvSpPr/>
+          <p:nvPr/>
+        </p:nvSpPr>
+        <p:spPr>
+          <a:xfrm>
+            <a:off x="10238537" y="2201875"/>
+            <a:ext cx="1645920" cy="256032"/>
+          </a:xfrm>
+          <a:prstGeom prst="rect">
+            <a:avLst/>
+          </a:prstGeom>
+          <a:noFill/>
+          <a:ln/>
+        </p:spPr>
+        <p:txBody>
+          <a:bodyPr wrap="square" lIns="0" tIns="0" rIns="0" bIns="0" rtlCol="0" anchor="ctr"/>
+          <a:lstStyle/>
+          <a:p>
+            <a:pPr indent="0" marL="0">
+              <a:buNone/>
+            </a:pPr>
+            <a:r>
+              <a:rPr lang="en-US" sz="1400" b="1" dirty="0">
+                <a:solidFill>
+                  <a:srgbClr val="14B8A6"/>
+                </a:solidFill>
+              </a:rPr>
+              <a:t>🟢 DLOOP</a:t>
+            </a:r>
+            <a:endParaRPr lang="en-US" sz="1400" dirty="0"/>
+          </a:p>
+        </p:txBody>
+      </p:sp>
+      <p:sp>
+        <p:nvSpPr>
+          <p:cNvPr id="19" name="Shape 17"/>
+          <p:cNvSpPr/>
+          <p:nvPr/>
+        </p:nvSpPr>
+        <p:spPr>
+          <a:xfrm>
+            <a:off x="8862822" y="4725162"/>
+            <a:ext cx="118872" cy="118872"/>
+          </a:xfrm>
+          <a:prstGeom prst="ellipse">
+            <a:avLst/>
+          </a:prstGeom>
+          <a:solidFill>
+            <a:srgbClr val="8CB3CC"/>
+          </a:solidFill>
+          <a:ln w="12700">
+            <a:solidFill>
+              <a:srgbClr val="8CB3CC"/>
+            </a:solidFill>
+            <a:prstDash val="solid"/>
+          </a:ln>
+        </p:spPr>
+      </p:sp>
+      <p:sp>
+        <p:nvSpPr>
+          <p:cNvPr id="20" name="Text 18"/>
+          <p:cNvSpPr/>
+          <p:nvPr/>
+        </p:nvSpPr>
+        <p:spPr>
+          <a:xfrm>
+            <a:off x="9013698" y="4620006"/>
+            <a:ext cx="1645920" cy="256032"/>
+          </a:xfrm>
+          <a:prstGeom prst="rect">
+            <a:avLst/>
+          </a:prstGeom>
+          <a:noFill/>
+          <a:ln/>
+        </p:spPr>
+        <p:txBody>
+          <a:bodyPr wrap="square" lIns="0" tIns="0" rIns="0" bIns="0" rtlCol="0" anchor="ctr"/>
+          <a:lstStyle/>
+          <a:p>
+            <a:pPr indent="0" marL="0">
+              <a:buNone/>
+            </a:pPr>
+            <a:r>
+              <a:rPr lang="en-US" sz="1000" dirty="0">
+                <a:solidFill>
+                  <a:srgbClr val="8CB3CC"/>
+                </a:solidFill>
+              </a:rPr>
+              <a:t>Onfleet</a:t>
+            </a:r>
+            <a:endParaRPr lang="en-US" sz="1000" dirty="0"/>
+          </a:p>
+        </p:txBody>
+      </p:sp>
+      <p:sp>
+        <p:nvSpPr>
+          <p:cNvPr id="21" name="Shape 19"/>
+          <p:cNvSpPr/>
+          <p:nvPr/>
+        </p:nvSpPr>
+        <p:spPr>
+          <a:xfrm>
+            <a:off x="8087868" y="4233672"/>
+            <a:ext cx="118872" cy="118872"/>
+          </a:xfrm>
+          <a:prstGeom prst="ellipse">
+            <a:avLst/>
+          </a:prstGeom>
+          <a:solidFill>
+            <a:srgbClr val="8CB3CC"/>
+          </a:solidFill>
+          <a:ln w="12700">
+            <a:solidFill>
+              <a:srgbClr val="8CB3CC"/>
+            </a:solidFill>
+            <a:prstDash val="solid"/>
+          </a:ln>
+        </p:spPr>
+      </p:sp>
+      <p:sp>
+        <p:nvSpPr>
+          <p:cNvPr id="22" name="Text 20"/>
+          <p:cNvSpPr/>
+          <p:nvPr/>
+        </p:nvSpPr>
+        <p:spPr>
+          <a:xfrm>
+            <a:off x="8238744" y="4128516"/>
+            <a:ext cx="1645920" cy="256032"/>
+          </a:xfrm>
+          <a:prstGeom prst="rect">
+            <a:avLst/>
+          </a:prstGeom>
+          <a:noFill/>
+          <a:ln/>
+        </p:spPr>
+        <p:txBody>
+          <a:bodyPr wrap="square" lIns="0" tIns="0" rIns="0" bIns="0" rtlCol="0" anchor="ctr"/>
+          <a:lstStyle/>
+          <a:p>
+            <a:pPr indent="0" marL="0">
+              <a:buNone/>
+            </a:pPr>
+            <a:r>
+              <a:rPr lang="en-US" sz="1000" dirty="0">
+                <a:solidFill>
+                  <a:srgbClr val="8CB3CC"/>
+                </a:solidFill>
+              </a:rPr>
+              <a:t>Tookan</a:t>
+            </a:r>
+            <a:endParaRPr lang="en-US" sz="1000" dirty="0"/>
+          </a:p>
+        </p:txBody>
+      </p:sp>
+      <p:sp>
+        <p:nvSpPr>
+          <p:cNvPr id="23" name="Shape 21"/>
+          <p:cNvSpPr/>
+          <p:nvPr/>
+        </p:nvSpPr>
+        <p:spPr>
+          <a:xfrm>
+            <a:off x="9121140" y="5059375"/>
+            <a:ext cx="118872" cy="118872"/>
+          </a:xfrm>
+          <a:prstGeom prst="ellipse">
+            <a:avLst/>
+          </a:prstGeom>
+          <a:solidFill>
+            <a:srgbClr val="8CB3CC"/>
+          </a:solidFill>
+          <a:ln w="12700">
+            <a:solidFill>
+              <a:srgbClr val="8CB3CC"/>
+            </a:solidFill>
+            <a:prstDash val="solid"/>
+          </a:ln>
+        </p:spPr>
+      </p:sp>
+      <p:sp>
+        <p:nvSpPr>
+          <p:cNvPr id="24" name="Text 22"/>
+          <p:cNvSpPr/>
+          <p:nvPr/>
+        </p:nvSpPr>
+        <p:spPr>
+          <a:xfrm>
+            <a:off x="9272016" y="4954219"/>
+            <a:ext cx="1645920" cy="256032"/>
+          </a:xfrm>
+          <a:prstGeom prst="rect">
+            <a:avLst/>
+          </a:prstGeom>
+          <a:noFill/>
+          <a:ln/>
+        </p:spPr>
+        <p:txBody>
+          <a:bodyPr wrap="square" lIns="0" tIns="0" rIns="0" bIns="0" rtlCol="0" anchor="ctr"/>
+          <a:lstStyle/>
+          <a:p>
+            <a:pPr indent="0" marL="0">
+              <a:buNone/>
+            </a:pPr>
+            <a:r>
+              <a:rPr lang="en-US" sz="1000" dirty="0">
+                <a:solidFill>
+                  <a:srgbClr val="8CB3CC"/>
+                </a:solidFill>
+              </a:rPr>
+              <a:t>LogiNext</a:t>
+            </a:r>
+            <a:endParaRPr lang="en-US" sz="1000" dirty="0"/>
+          </a:p>
+        </p:txBody>
+      </p:sp>
+      <p:sp>
+        <p:nvSpPr>
+          <p:cNvPr id="25" name="Shape 23"/>
+          <p:cNvSpPr/>
+          <p:nvPr/>
+        </p:nvSpPr>
+        <p:spPr>
+          <a:xfrm>
+            <a:off x="2818181" y="4528566"/>
+            <a:ext cx="118872" cy="118872"/>
+          </a:xfrm>
+          <a:prstGeom prst="ellipse">
+            <a:avLst/>
+          </a:prstGeom>
+          <a:solidFill>
+            <a:srgbClr val="8899AA"/>
+          </a:solidFill>
+          <a:ln w="12700">
+            <a:solidFill>
+              <a:srgbClr val="8899AA"/>
+            </a:solidFill>
+            <a:prstDash val="solid"/>
+          </a:ln>
+        </p:spPr>
+      </p:sp>
+      <p:sp>
+        <p:nvSpPr>
+          <p:cNvPr id="26" name="Text 24"/>
+          <p:cNvSpPr/>
+          <p:nvPr/>
+        </p:nvSpPr>
+        <p:spPr>
+          <a:xfrm>
+            <a:off x="2969057" y="4423410"/>
+            <a:ext cx="1645920" cy="256032"/>
+          </a:xfrm>
+          <a:prstGeom prst="rect">
+            <a:avLst/>
+          </a:prstGeom>
+          <a:noFill/>
+          <a:ln/>
+        </p:spPr>
+        <p:txBody>
+          <a:bodyPr wrap="square" lIns="0" tIns="0" rIns="0" bIns="0" rtlCol="0" anchor="ctr"/>
+          <a:lstStyle/>
+          <a:p>
+            <a:pPr indent="0" marL="0">
+              <a:buNone/>
+            </a:pPr>
+            <a:r>
+              <a:rPr lang="en-US" sz="1000" dirty="0">
+                <a:solidFill>
+                  <a:srgbClr val="8899AA"/>
+                </a:solidFill>
+              </a:rPr>
+              <a:t>Glovo</a:t>
+            </a:r>
+            <a:endParaRPr lang="en-US" sz="1000" dirty="0"/>
+          </a:p>
+        </p:txBody>
+      </p:sp>
+      <p:sp>
+        <p:nvSpPr>
+          <p:cNvPr id="27" name="Shape 25"/>
+          <p:cNvSpPr/>
+          <p:nvPr/>
+        </p:nvSpPr>
+        <p:spPr>
+          <a:xfrm>
+            <a:off x="3024835" y="4823460"/>
+            <a:ext cx="118872" cy="118872"/>
+          </a:xfrm>
+          <a:prstGeom prst="ellipse">
+            <a:avLst/>
+          </a:prstGeom>
+          <a:solidFill>
+            <a:srgbClr val="8899AA"/>
+          </a:solidFill>
+          <a:ln w="12700">
+            <a:solidFill>
+              <a:srgbClr val="8899AA"/>
+            </a:solidFill>
+            <a:prstDash val="solid"/>
+          </a:ln>
+        </p:spPr>
+      </p:sp>
+      <p:sp>
+        <p:nvSpPr>
+          <p:cNvPr id="28" name="Text 26"/>
+          <p:cNvSpPr/>
+          <p:nvPr/>
+        </p:nvSpPr>
+        <p:spPr>
+          <a:xfrm>
+            <a:off x="3175711" y="4718304"/>
+            <a:ext cx="1645920" cy="256032"/>
+          </a:xfrm>
+          <a:prstGeom prst="rect">
+            <a:avLst/>
+          </a:prstGeom>
+          <a:noFill/>
+          <a:ln/>
+        </p:spPr>
+        <p:txBody>
+          <a:bodyPr wrap="square" lIns="0" tIns="0" rIns="0" bIns="0" rtlCol="0" anchor="ctr"/>
+          <a:lstStyle/>
+          <a:p>
+            <a:pPr indent="0" marL="0">
+              <a:buNone/>
+            </a:pPr>
+            <a:r>
+              <a:rPr lang="en-US" sz="1000" dirty="0">
+                <a:solidFill>
+                  <a:srgbClr val="8899AA"/>
+                </a:solidFill>
+              </a:rPr>
+              <a:t>Deliveroo</a:t>
+            </a:r>
+            <a:endParaRPr lang="en-US" sz="1000" dirty="0"/>
+          </a:p>
+        </p:txBody>
+      </p:sp>
+      <p:sp>
+        <p:nvSpPr>
+          <p:cNvPr id="29" name="Shape 27"/>
+          <p:cNvSpPr/>
+          <p:nvPr/>
+        </p:nvSpPr>
+        <p:spPr>
+          <a:xfrm>
+            <a:off x="3179826" y="5059375"/>
+            <a:ext cx="118872" cy="118872"/>
+          </a:xfrm>
+          <a:prstGeom prst="ellipse">
+            <a:avLst/>
+          </a:prstGeom>
+          <a:solidFill>
+            <a:srgbClr val="8899AA"/>
+          </a:solidFill>
+          <a:ln w="12700">
+            <a:solidFill>
+              <a:srgbClr val="8899AA"/>
+            </a:solidFill>
+            <a:prstDash val="solid"/>
+          </a:ln>
+        </p:spPr>
+      </p:sp>
+      <p:sp>
+        <p:nvSpPr>
+          <p:cNvPr id="30" name="Text 28"/>
+          <p:cNvSpPr/>
+          <p:nvPr/>
+        </p:nvSpPr>
+        <p:spPr>
+          <a:xfrm>
+            <a:off x="3330702" y="4954219"/>
+            <a:ext cx="1645920" cy="256032"/>
+          </a:xfrm>
+          <a:prstGeom prst="rect">
+            <a:avLst/>
+          </a:prstGeom>
+          <a:noFill/>
+          <a:ln/>
+        </p:spPr>
+        <p:txBody>
+          <a:bodyPr wrap="square" lIns="0" tIns="0" rIns="0" bIns="0" rtlCol="0" anchor="ctr"/>
+          <a:lstStyle/>
+          <a:p>
+            <a:pPr indent="0" marL="0">
+              <a:buNone/>
+            </a:pPr>
+            <a:r>
+              <a:rPr lang="en-US" sz="1000" dirty="0">
+                <a:solidFill>
+                  <a:srgbClr val="8899AA"/>
+                </a:solidFill>
+              </a:rPr>
+              <a:t>Uber Eats</a:t>
+            </a:r>
+            <a:endParaRPr lang="en-US" sz="1000" dirty="0"/>
+          </a:p>
+        </p:txBody>
+      </p:sp>
+      <p:sp>
+        <p:nvSpPr>
+          <p:cNvPr id="31" name="Shape 29"/>
+          <p:cNvSpPr/>
+          <p:nvPr/>
+        </p:nvSpPr>
+        <p:spPr>
+          <a:xfrm>
+            <a:off x="3438144" y="4725162"/>
+            <a:ext cx="118872" cy="118872"/>
+          </a:xfrm>
+          <a:prstGeom prst="ellipse">
+            <a:avLst/>
+          </a:prstGeom>
+          <a:solidFill>
+            <a:srgbClr val="8899AA"/>
+          </a:solidFill>
+          <a:ln w="12700">
+            <a:solidFill>
+              <a:srgbClr val="8899AA"/>
+            </a:solidFill>
+            <a:prstDash val="solid"/>
+          </a:ln>
+        </p:spPr>
+      </p:sp>
+      <p:sp>
+        <p:nvSpPr>
+          <p:cNvPr id="32" name="Text 30"/>
+          <p:cNvSpPr/>
+          <p:nvPr/>
+        </p:nvSpPr>
+        <p:spPr>
+          <a:xfrm>
+            <a:off x="3589020" y="4620006"/>
+            <a:ext cx="1645920" cy="256032"/>
+          </a:xfrm>
+          <a:prstGeom prst="rect">
+            <a:avLst/>
+          </a:prstGeom>
+          <a:noFill/>
+          <a:ln/>
+        </p:spPr>
+        <p:txBody>
+          <a:bodyPr wrap="square" lIns="0" tIns="0" rIns="0" bIns="0" rtlCol="0" anchor="ctr"/>
+          <a:lstStyle/>
+          <a:p>
+            <a:pPr indent="0" marL="0">
+              <a:buNone/>
+            </a:pPr>
+            <a:r>
+              <a:rPr lang="en-US" sz="1000" dirty="0">
+                <a:solidFill>
+                  <a:srgbClr val="8899AA"/>
+                </a:solidFill>
+              </a:rPr>
+              <a:t>Just Eat</a:t>
+            </a:r>
+            <a:endParaRPr lang="en-US" sz="1000" dirty="0"/>
+          </a:p>
+        </p:txBody>
+      </p:sp>
+      <p:sp>
+        <p:nvSpPr>
+          <p:cNvPr id="33" name="Shape 31"/>
+          <p:cNvSpPr/>
+          <p:nvPr/>
+        </p:nvSpPr>
+        <p:spPr>
+          <a:xfrm>
+            <a:off x="4213098" y="3054096"/>
+            <a:ext cx="118872" cy="118872"/>
+          </a:xfrm>
+          <a:prstGeom prst="ellipse">
+            <a:avLst/>
+          </a:prstGeom>
+          <a:solidFill>
+            <a:srgbClr val="F59E0B"/>
+          </a:solidFill>
+          <a:ln w="12700">
+            <a:solidFill>
+              <a:srgbClr val="F59E0B"/>
+            </a:solidFill>
+            <a:prstDash val="solid"/>
+          </a:ln>
+        </p:spPr>
+      </p:sp>
+      <p:sp>
+        <p:nvSpPr>
+          <p:cNvPr id="34" name="Text 32"/>
+          <p:cNvSpPr/>
+          <p:nvPr/>
+        </p:nvSpPr>
+        <p:spPr>
+          <a:xfrm>
+            <a:off x="4363974" y="2948940"/>
+            <a:ext cx="1645920" cy="256032"/>
+          </a:xfrm>
+          <a:prstGeom prst="rect">
+            <a:avLst/>
+          </a:prstGeom>
+          <a:noFill/>
+          <a:ln/>
+        </p:spPr>
+        <p:txBody>
+          <a:bodyPr wrap="square" lIns="0" tIns="0" rIns="0" bIns="0" rtlCol="0" anchor="ctr"/>
+          <a:lstStyle/>
+          <a:p>
+            <a:pPr indent="0" marL="0">
+              <a:buNone/>
+            </a:pPr>
+            <a:r>
+              <a:rPr lang="en-US" sz="1000" dirty="0">
+                <a:solidFill>
+                  <a:srgbClr val="F59E0B"/>
+                </a:solidFill>
+              </a:rPr>
+              <a:t>Alfonsino</a:t>
+            </a:r>
+            <a:endParaRPr lang="en-US" sz="1000" dirty="0"/>
+          </a:p>
+        </p:txBody>
+      </p:sp>
+      <p:sp>
+        <p:nvSpPr>
+          <p:cNvPr id="35" name="Shape 33"/>
+          <p:cNvSpPr/>
+          <p:nvPr/>
+        </p:nvSpPr>
+        <p:spPr>
+          <a:xfrm>
+            <a:off x="9379458" y="4921758"/>
+            <a:ext cx="118872" cy="118872"/>
+          </a:xfrm>
+          <a:prstGeom prst="ellipse">
+            <a:avLst/>
+          </a:prstGeom>
+          <a:solidFill>
+            <a:srgbClr val="8CB3CC"/>
+          </a:solidFill>
+          <a:ln w="12700">
+            <a:solidFill>
+              <a:srgbClr val="8CB3CC"/>
+            </a:solidFill>
+            <a:prstDash val="solid"/>
+          </a:ln>
+        </p:spPr>
+      </p:sp>
+      <p:sp>
+        <p:nvSpPr>
+          <p:cNvPr id="36" name="Text 34"/>
+          <p:cNvSpPr/>
+          <p:nvPr/>
+        </p:nvSpPr>
+        <p:spPr>
+          <a:xfrm>
+            <a:off x="9530334" y="4816602"/>
+            <a:ext cx="1645920" cy="256032"/>
+          </a:xfrm>
+          <a:prstGeom prst="rect">
+            <a:avLst/>
+          </a:prstGeom>
+          <a:noFill/>
+          <a:ln/>
+        </p:spPr>
+        <p:txBody>
+          <a:bodyPr wrap="square" lIns="0" tIns="0" rIns="0" bIns="0" rtlCol="0" anchor="ctr"/>
+          <a:lstStyle/>
+          <a:p>
+            <a:pPr indent="0" marL="0">
+              <a:buNone/>
+            </a:pPr>
+            <a:r>
+              <a:rPr lang="en-US" sz="1000" dirty="0">
+                <a:solidFill>
+                  <a:srgbClr val="8CB3CC"/>
+                </a:solidFill>
+              </a:rPr>
+              <a:t>Bringg</a:t>
+            </a:r>
+            <a:endParaRPr lang="en-US" sz="1000" dirty="0"/>
+          </a:p>
+        </p:txBody>
+      </p:sp>
+      <p:sp>
+        <p:nvSpPr>
+          <p:cNvPr id="37" name="Shape 35"/>
+          <p:cNvSpPr/>
+          <p:nvPr/>
+        </p:nvSpPr>
+        <p:spPr>
+          <a:xfrm>
+            <a:off x="457200" y="6126480"/>
+            <a:ext cx="11247120" cy="475488"/>
+          </a:xfrm>
+          <a:prstGeom prst="rect">
+            <a:avLst/>
+          </a:prstGeom>
+          <a:solidFill>
+            <a:srgbClr val="0A1929"/>
+          </a:solidFill>
+          <a:ln w="12700">
+            <a:solidFill>
+              <a:srgbClr val="1A3A50"/>
+            </a:solidFill>
+            <a:prstDash val="solid"/>
+          </a:ln>
+        </p:spPr>
+      </p:sp>
+      <p:sp>
+        <p:nvSpPr>
+          <p:cNvPr id="38" name="Shape 36"/>
+          <p:cNvSpPr/>
+          <p:nvPr/>
+        </p:nvSpPr>
+        <p:spPr>
+          <a:xfrm>
+            <a:off x="640080" y="6254496"/>
+            <a:ext cx="109728" cy="109728"/>
+          </a:xfrm>
+          <a:prstGeom prst="ellipse">
+            <a:avLst/>
+          </a:prstGeom>
+          <a:solidFill>
+            <a:srgbClr val="14B8A6"/>
+          </a:solidFill>
+          <a:ln w="12700">
+            <a:solidFill>
+              <a:srgbClr val="14B8A6"/>
+            </a:solidFill>
+            <a:prstDash val="solid"/>
+          </a:ln>
+        </p:spPr>
+      </p:sp>
+      <p:sp>
+        <p:nvSpPr>
+          <p:cNvPr id="39" name="Text 37"/>
+          <p:cNvSpPr/>
+          <p:nvPr/>
+        </p:nvSpPr>
+        <p:spPr>
+          <a:xfrm>
+            <a:off x="804672" y="6217920"/>
+            <a:ext cx="2240280" cy="256032"/>
+          </a:xfrm>
+          <a:prstGeom prst="rect">
+            <a:avLst/>
+          </a:prstGeom>
+          <a:noFill/>
+          <a:ln/>
+        </p:spPr>
+        <p:txBody>
+          <a:bodyPr wrap="square" lIns="0" tIns="0" rIns="0" bIns="0" rtlCol="0" anchor="ctr"/>
+          <a:lstStyle/>
+          <a:p>
+            <a:pPr indent="0" marL="0">
+              <a:buNone/>
+            </a:pPr>
+            <a:r>
+              <a:rPr lang="en-US" sz="800" dirty="0">
+                <a:solidFill>
+                  <a:srgbClr val="14B8A6"/>
+                </a:solidFill>
+              </a:rPr>
+              <a:t>Dloop — SaaS locale PMI (posizione unica)</a:t>
+            </a:r>
+            <a:endParaRPr lang="en-US" sz="800" dirty="0"/>
+          </a:p>
+        </p:txBody>
+      </p:sp>
+      <p:sp>
+        <p:nvSpPr>
+          <p:cNvPr id="40" name="Shape 38"/>
+          <p:cNvSpPr/>
+          <p:nvPr/>
+        </p:nvSpPr>
+        <p:spPr>
+          <a:xfrm>
+            <a:off x="3108960" y="6254496"/>
+            <a:ext cx="109728" cy="109728"/>
+          </a:xfrm>
+          <a:prstGeom prst="ellipse">
+            <a:avLst/>
+          </a:prstGeom>
+          <a:solidFill>
+            <a:srgbClr val="8CB3CC"/>
+          </a:solidFill>
+          <a:ln w="12700">
+            <a:solidFill>
+              <a:srgbClr val="8CB3CC"/>
+            </a:solidFill>
+            <a:prstDash val="solid"/>
+          </a:ln>
+        </p:spPr>
+      </p:sp>
+      <p:sp>
+        <p:nvSpPr>
+          <p:cNvPr id="41" name="Text 39"/>
+          <p:cNvSpPr/>
+          <p:nvPr/>
+        </p:nvSpPr>
+        <p:spPr>
+          <a:xfrm>
+            <a:off x="3273552" y="6217920"/>
+            <a:ext cx="2240280" cy="256032"/>
+          </a:xfrm>
+          <a:prstGeom prst="rect">
+            <a:avLst/>
+          </a:prstGeom>
+          <a:noFill/>
+          <a:ln/>
+        </p:spPr>
+        <p:txBody>
+          <a:bodyPr wrap="square" lIns="0" tIns="0" rIns="0" bIns="0" rtlCol="0" anchor="ctr"/>
+          <a:lstStyle/>
+          <a:p>
+            <a:pPr indent="0" marL="0">
+              <a:buNone/>
+            </a:pPr>
+            <a:r>
+              <a:rPr lang="en-US" sz="800" dirty="0">
+                <a:solidFill>
+                  <a:srgbClr val="8CB3CC"/>
+                </a:solidFill>
+              </a:rPr>
+              <a:t>SaaS B2B delivery (Onfleet, Tookan, LogiNext, Bringg)</a:t>
+            </a:r>
+            <a:endParaRPr lang="en-US" sz="800" dirty="0"/>
+          </a:p>
+        </p:txBody>
+      </p:sp>
+      <p:sp>
+        <p:nvSpPr>
+          <p:cNvPr id="42" name="Shape 40"/>
+          <p:cNvSpPr/>
+          <p:nvPr/>
+        </p:nvSpPr>
+        <p:spPr>
+          <a:xfrm>
+            <a:off x="5577840" y="6254496"/>
+            <a:ext cx="109728" cy="109728"/>
+          </a:xfrm>
+          <a:prstGeom prst="ellipse">
+            <a:avLst/>
+          </a:prstGeom>
+          <a:solidFill>
+            <a:srgbClr val="8899AA"/>
+          </a:solidFill>
+          <a:ln w="12700">
+            <a:solidFill>
+              <a:srgbClr val="8899AA"/>
+            </a:solidFill>
+            <a:prstDash val="solid"/>
+          </a:ln>
+        </p:spPr>
+      </p:sp>
+      <p:sp>
+        <p:nvSpPr>
+          <p:cNvPr id="43" name="Text 41"/>
+          <p:cNvSpPr/>
+          <p:nvPr/>
+        </p:nvSpPr>
+        <p:spPr>
+          <a:xfrm>
+            <a:off x="5742432" y="6217920"/>
+            <a:ext cx="2240280" cy="256032"/>
+          </a:xfrm>
+          <a:prstGeom prst="rect">
+            <a:avLst/>
+          </a:prstGeom>
+          <a:noFill/>
+          <a:ln/>
+        </p:spPr>
+        <p:txBody>
+          <a:bodyPr wrap="square" lIns="0" tIns="0" rIns="0" bIns="0" rtlCol="0" anchor="ctr"/>
+          <a:lstStyle/>
+          <a:p>
+            <a:pPr indent="0" marL="0">
+              <a:buNone/>
+            </a:pPr>
+            <a:r>
+              <a:rPr lang="en-US" sz="800" dirty="0">
+                <a:solidFill>
+                  <a:srgbClr val="8899AA"/>
+                </a:solidFill>
+              </a:rPr>
+              <a:t>Marketplace globali (Glovo, Deliveroo, Uber Eats, Just Eat)</a:t>
+            </a:r>
+            <a:endParaRPr lang="en-US" sz="800" dirty="0"/>
+          </a:p>
+        </p:txBody>
+      </p:sp>
+      <p:sp>
+        <p:nvSpPr>
+          <p:cNvPr id="44" name="Shape 42"/>
+          <p:cNvSpPr/>
+          <p:nvPr/>
+        </p:nvSpPr>
+        <p:spPr>
+          <a:xfrm>
+            <a:off x="8046720" y="6254496"/>
+            <a:ext cx="109728" cy="109728"/>
+          </a:xfrm>
+          <a:prstGeom prst="ellipse">
+            <a:avLst/>
+          </a:prstGeom>
+          <a:solidFill>
+            <a:srgbClr val="F59E0B"/>
+          </a:solidFill>
+          <a:ln w="12700">
+            <a:solidFill>
+              <a:srgbClr val="F59E0B"/>
+            </a:solidFill>
+            <a:prstDash val="solid"/>
+          </a:ln>
+        </p:spPr>
+      </p:sp>
+      <p:sp>
+        <p:nvSpPr>
+          <p:cNvPr id="45" name="Text 43"/>
+          <p:cNvSpPr/>
+          <p:nvPr/>
+        </p:nvSpPr>
+        <p:spPr>
+          <a:xfrm>
+            <a:off x="8211312" y="6217920"/>
+            <a:ext cx="2240280" cy="256032"/>
+          </a:xfrm>
+          <a:prstGeom prst="rect">
+            <a:avLst/>
+          </a:prstGeom>
+          <a:noFill/>
+          <a:ln/>
+        </p:spPr>
+        <p:txBody>
+          <a:bodyPr wrap="square" lIns="0" tIns="0" rIns="0" bIns="0" rtlCol="0" anchor="ctr"/>
+          <a:lstStyle/>
+          <a:p>
+            <a:pPr indent="0" marL="0">
+              <a:buNone/>
+            </a:pPr>
+            <a:r>
+              <a:rPr lang="en-US" sz="800" dirty="0">
+                <a:solidFill>
+                  <a:srgbClr val="F59E0B"/>
+                </a:solidFill>
+              </a:rPr>
+              <a:t>Marketplace locale (Alfonsino)</a:t>
+            </a:r>
+            <a:endParaRPr lang="en-US" sz="800" dirty="0"/>
+          </a:p>
+        </p:txBody>
+      </p:sp>
+      <p:sp>
+        <p:nvSpPr>
+          <p:cNvPr id="46" name="Text 44"/>
+          <p:cNvSpPr/>
+          <p:nvPr/>
+        </p:nvSpPr>
+        <p:spPr>
+          <a:xfrm>
+            <a:off x="10789920" y="6492240"/>
+            <a:ext cx="1097280" cy="256032"/>
+          </a:xfrm>
+          <a:prstGeom prst="rect">
+            <a:avLst/>
+          </a:prstGeom>
+          <a:noFill/>
+          <a:ln/>
+        </p:spPr>
+        <p:txBody>
+          <a:bodyPr wrap="square" rtlCol="0" anchor="ctr"/>
+          <a:lstStyle/>
+          <a:p>
+            <a:pPr algn="r" indent="0" marL="0">
+              <a:buNone/>
+            </a:pPr>
+            <a:r>
+              <a:rPr lang="en-US" sz="800" dirty="0">
+                <a:solidFill>
+                  <a:srgbClr val="334455"/>
+                </a:solidFill>
+              </a:rPr>
+              <a:t>06 / 12</a:t>
+            </a:r>
+            <a:endParaRPr lang="en-US" sz="800" dirty="0"/>
+          </a:p>
+        </p:txBody>
+      </p:sp>
+    </p:spTree>
+  </p:cSld>
+  <p:clrMapOvr>
+    <a:masterClrMapping/>
+  </p:clrMapOvr>
+</p:sld>
+</file>
+
+<file path=ppt/slides/slide7.xml><?xml version="1.0" encoding="utf-8"?>
+<p:sld xmlns:a="http://schemas.openxmlformats.org/drawingml/2006/main" xmlns:r="http://schemas.openxmlformats.org/officeDocument/2006/relationships" xmlns:p="http://schemas.openxmlformats.org/presentationml/2006/main">
+  <p:cSld name="Slide 7">
     <p:bg>
       <p:bgPr>
         <a:solidFill>
@@ -12195,7 +15564,7 @@
                   <a:srgbClr val="334455"/>
                 </a:solidFill>
               </a:rPr>
-              <a:t>06 / 11</a:t>
+              <a:t>07 / 12</a:t>
             </a:r>
             <a:endParaRPr lang="en-US" sz="800" dirty="0"/>
           </a:p>
@@ -12209,9 +15578,9 @@
 </p:sld>
 </file>
 
-<file path=ppt/slides/slide7.xml><?xml version="1.0" encoding="utf-8"?>
+<file path=ppt/slides/slide8.xml><?xml version="1.0" encoding="utf-8"?>
 <p:sld xmlns:a="http://schemas.openxmlformats.org/drawingml/2006/main" xmlns:r="http://schemas.openxmlformats.org/officeDocument/2006/relationships" xmlns:p="http://schemas.openxmlformats.org/presentationml/2006/main">
-  <p:cSld name="Slide 7">
+  <p:cSld name="Slide 8">
     <p:bg>
       <p:bgPr>
         <a:solidFill>
@@ -13921,7 +17290,7 @@
                   <a:srgbClr val="334455"/>
                 </a:solidFill>
               </a:rPr>
-              <a:t>07 / 11</a:t>
+              <a:t>08 / 12</a:t>
             </a:r>
             <a:endParaRPr lang="en-US" sz="800" dirty="0"/>
           </a:p>
@@ -13935,9 +17304,9 @@
 </p:sld>
 </file>
 
-<file path=ppt/slides/slide8.xml><?xml version="1.0" encoding="utf-8"?>
+<file path=ppt/slides/slide9.xml><?xml version="1.0" encoding="utf-8"?>
 <p:sld xmlns:a="http://schemas.openxmlformats.org/drawingml/2006/main" xmlns:r="http://schemas.openxmlformats.org/officeDocument/2006/relationships" xmlns:p="http://schemas.openxmlformats.org/presentationml/2006/main">
-  <p:cSld name="Slide 8">
+  <p:cSld name="Slide 9">
     <p:bg>
       <p:bgPr>
         <a:solidFill>
@@ -14847,6 +18216,381 @@
             <a:avLst/>
           </a:prstGeom>
           <a:solidFill>
+            <a:srgbClr val="0B7A75"/>
+          </a:solidFill>
+          <a:ln w="12700">
+            <a:solidFill>
+              <a:srgbClr val="0B7A75"/>
+            </a:solidFill>
+            <a:prstDash val="solid"/>
+          </a:ln>
+        </p:spPr>
+      </p:sp>
+      <p:sp>
+        <p:nvSpPr>
+          <p:cNvPr id="30" name="Text 28"/>
+          <p:cNvSpPr/>
+          <p:nvPr/>
+        </p:nvSpPr>
+        <p:spPr>
+          <a:xfrm>
+            <a:off x="6629400" y="4032504"/>
+            <a:ext cx="4937760" cy="274320"/>
+          </a:xfrm>
+          <a:prstGeom prst="rect">
+            <a:avLst/>
+          </a:prstGeom>
+          <a:noFill/>
+          <a:ln/>
+        </p:spPr>
+        <p:txBody>
+          <a:bodyPr wrap="square" lIns="0" tIns="0" rIns="0" bIns="0" rtlCol="0" anchor="ctr"/>
+          <a:lstStyle/>
+          <a:p>
+            <a:pPr indent="0" marL="0">
+              <a:buNone/>
+            </a:pPr>
+            <a:r>
+              <a:rPr lang="en-US" sz="1000" b="1" dirty="0">
+                <a:solidFill>
+                  <a:srgbClr val="FFFFFF"/>
+                </a:solidFill>
+              </a:rPr>
+              <a:t>Gruppo Amodio — Supermercati Pam (Pomigliano/Napoli)</a:t>
+            </a:r>
+            <a:endParaRPr lang="en-US" sz="1000" dirty="0"/>
+          </a:p>
+        </p:txBody>
+      </p:sp>
+      <p:sp>
+        <p:nvSpPr>
+          <p:cNvPr id="31" name="Text 29"/>
+          <p:cNvSpPr/>
+          <p:nvPr/>
+        </p:nvSpPr>
+        <p:spPr>
+          <a:xfrm>
+            <a:off x="6629400" y="4325112"/>
+            <a:ext cx="4937760" cy="512064"/>
+          </a:xfrm>
+          <a:prstGeom prst="rect">
+            <a:avLst/>
+          </a:prstGeom>
+          <a:noFill/>
+          <a:ln/>
+        </p:spPr>
+        <p:txBody>
+          <a:bodyPr wrap="square" lIns="0" tIns="0" rIns="0" bIns="0" rtlCol="0" anchor="ctr"/>
+          <a:lstStyle/>
+          <a:p>
+            <a:pPr indent="0" marL="0">
+              <a:lnSpc>
+                <a:spcPct val="135000"/>
+              </a:lnSpc>
+              <a:buNone/>
+            </a:pPr>
+            <a:r>
+              <a:rPr lang="en-US" sz="900" dirty="0">
+                <a:solidFill>
+                  <a:srgbClr val="8CB3CC"/>
+                </a:solidFill>
+              </a:rPr>
+              <a:t>Grocery: supermercati catena Pam sul territorio. Pipeline B2B Operator, alto volume ordini.</a:t>
+            </a:r>
+            <a:endParaRPr lang="en-US" sz="900" dirty="0"/>
+          </a:p>
+        </p:txBody>
+      </p:sp>
+      <p:sp>
+        <p:nvSpPr>
+          <p:cNvPr id="32" name="Shape 30"/>
+          <p:cNvSpPr/>
+          <p:nvPr/>
+        </p:nvSpPr>
+        <p:spPr>
+          <a:xfrm>
+            <a:off x="6217920" y="5029200"/>
+            <a:ext cx="5486400" cy="960120"/>
+          </a:xfrm>
+          <a:prstGeom prst="rect">
+            <a:avLst/>
+          </a:prstGeom>
+          <a:solidFill>
+            <a:srgbClr val="0F2535"/>
+          </a:solidFill>
+          <a:ln w="12700">
+            <a:solidFill>
+              <a:srgbClr val="1A3A50"/>
+            </a:solidFill>
+            <a:prstDash val="solid"/>
+          </a:ln>
+        </p:spPr>
+      </p:sp>
+      <p:sp>
+        <p:nvSpPr>
+          <p:cNvPr id="33" name="Shape 31"/>
+          <p:cNvSpPr/>
+          <p:nvPr/>
+        </p:nvSpPr>
+        <p:spPr>
+          <a:xfrm>
+            <a:off x="6355080" y="5321808"/>
+            <a:ext cx="164592" cy="164592"/>
+          </a:xfrm>
+          <a:prstGeom prst="ellipse">
+            <a:avLst/>
+          </a:prstGeom>
+          <a:solidFill>
+            <a:srgbClr val="0B7A75"/>
+          </a:solidFill>
+          <a:ln w="12700">
+            <a:solidFill>
+              <a:srgbClr val="0B7A75"/>
+            </a:solidFill>
+            <a:prstDash val="solid"/>
+          </a:ln>
+        </p:spPr>
+      </p:sp>
+      <p:sp>
+        <p:nvSpPr>
+          <p:cNvPr id="34" name="Text 32"/>
+          <p:cNvSpPr/>
+          <p:nvPr/>
+        </p:nvSpPr>
+        <p:spPr>
+          <a:xfrm>
+            <a:off x="6629400" y="5084064"/>
+            <a:ext cx="4937760" cy="274320"/>
+          </a:xfrm>
+          <a:prstGeom prst="rect">
+            <a:avLst/>
+          </a:prstGeom>
+          <a:noFill/>
+          <a:ln/>
+        </p:spPr>
+        <p:txBody>
+          <a:bodyPr wrap="square" lIns="0" tIns="0" rIns="0" bIns="0" rtlCol="0" anchor="ctr"/>
+          <a:lstStyle/>
+          <a:p>
+            <a:pPr indent="0" marL="0">
+              <a:buNone/>
+            </a:pPr>
+            <a:r>
+              <a:rPr lang="en-US" sz="1000" b="1" dirty="0">
+                <a:solidFill>
+                  <a:srgbClr val="FFFFFF"/>
+                </a:solidFill>
+              </a:rPr>
+              <a:t>Farmacia Tanzilo · Pomigliano d'Arco / Napoli</a:t>
+            </a:r>
+            <a:endParaRPr lang="en-US" sz="1000" dirty="0"/>
+          </a:p>
+        </p:txBody>
+      </p:sp>
+      <p:sp>
+        <p:nvSpPr>
+          <p:cNvPr id="35" name="Text 33"/>
+          <p:cNvSpPr/>
+          <p:nvPr/>
+        </p:nvSpPr>
+        <p:spPr>
+          <a:xfrm>
+            <a:off x="6629400" y="5376672"/>
+            <a:ext cx="4937760" cy="512064"/>
+          </a:xfrm>
+          <a:prstGeom prst="rect">
+            <a:avLst/>
+          </a:prstGeom>
+          <a:noFill/>
+          <a:ln/>
+        </p:spPr>
+        <p:txBody>
+          <a:bodyPr wrap="square" lIns="0" tIns="0" rIns="0" bIns="0" rtlCol="0" anchor="ctr"/>
+          <a:lstStyle/>
+          <a:p>
+            <a:pPr indent="0" marL="0">
+              <a:lnSpc>
+                <a:spcPct val="135000"/>
+              </a:lnSpc>
+              <a:buNone/>
+            </a:pPr>
+            <a:r>
+              <a:rPr lang="en-US" sz="900" dirty="0">
+                <a:solidFill>
+                  <a:srgbClr val="8CB3CC"/>
+                </a:solidFill>
+              </a:rPr>
+              <a:t>Farmacie con delivery medicine e parafarmaci. Tier SMB Pro — validazione verticale healthcare locale.</a:t>
+            </a:r>
+            <a:endParaRPr lang="en-US" sz="900" dirty="0"/>
+          </a:p>
+        </p:txBody>
+      </p:sp>
+      <p:sp>
+        <p:nvSpPr>
+          <p:cNvPr id="36" name="Shape 34"/>
+          <p:cNvSpPr/>
+          <p:nvPr/>
+        </p:nvSpPr>
+        <p:spPr>
+          <a:xfrm>
+            <a:off x="6217920" y="6080760"/>
+            <a:ext cx="5486400" cy="960120"/>
+          </a:xfrm>
+          <a:prstGeom prst="rect">
+            <a:avLst/>
+          </a:prstGeom>
+          <a:solidFill>
+            <a:srgbClr val="0F2535"/>
+          </a:solidFill>
+          <a:ln w="12700">
+            <a:solidFill>
+              <a:srgbClr val="1A3A50"/>
+            </a:solidFill>
+            <a:prstDash val="solid"/>
+          </a:ln>
+        </p:spPr>
+      </p:sp>
+      <p:sp>
+        <p:nvSpPr>
+          <p:cNvPr id="37" name="Shape 35"/>
+          <p:cNvSpPr/>
+          <p:nvPr/>
+        </p:nvSpPr>
+        <p:spPr>
+          <a:xfrm>
+            <a:off x="6355080" y="6373368"/>
+            <a:ext cx="164592" cy="164592"/>
+          </a:xfrm>
+          <a:prstGeom prst="ellipse">
+            <a:avLst/>
+          </a:prstGeom>
+          <a:solidFill>
+            <a:srgbClr val="0B7A75"/>
+          </a:solidFill>
+          <a:ln w="12700">
+            <a:solidFill>
+              <a:srgbClr val="0B7A75"/>
+            </a:solidFill>
+            <a:prstDash val="solid"/>
+          </a:ln>
+        </p:spPr>
+      </p:sp>
+      <p:sp>
+        <p:nvSpPr>
+          <p:cNvPr id="38" name="Text 36"/>
+          <p:cNvSpPr/>
+          <p:nvPr/>
+        </p:nvSpPr>
+        <p:spPr>
+          <a:xfrm>
+            <a:off x="6629400" y="6135624"/>
+            <a:ext cx="4937760" cy="274320"/>
+          </a:xfrm>
+          <a:prstGeom prst="rect">
+            <a:avLst/>
+          </a:prstGeom>
+          <a:noFill/>
+          <a:ln/>
+        </p:spPr>
+        <p:txBody>
+          <a:bodyPr wrap="square" lIns="0" tIns="0" rIns="0" bIns="0" rtlCol="0" anchor="ctr"/>
+          <a:lstStyle/>
+          <a:p>
+            <a:pPr indent="0" marL="0">
+              <a:buNone/>
+            </a:pPr>
+            <a:r>
+              <a:rPr lang="en-US" sz="1000" b="1" dirty="0">
+                <a:solidFill>
+                  <a:srgbClr val="FFFFFF"/>
+                </a:solidFill>
+              </a:rPr>
+              <a:t>NaturaSì Vomero · Napoli  +  PiuMe prodotti casa</a:t>
+            </a:r>
+            <a:endParaRPr lang="en-US" sz="1000" dirty="0"/>
+          </a:p>
+        </p:txBody>
+      </p:sp>
+      <p:sp>
+        <p:nvSpPr>
+          <p:cNvPr id="39" name="Text 37"/>
+          <p:cNvSpPr/>
+          <p:nvPr/>
+        </p:nvSpPr>
+        <p:spPr>
+          <a:xfrm>
+            <a:off x="6629400" y="6428232"/>
+            <a:ext cx="4937760" cy="512064"/>
+          </a:xfrm>
+          <a:prstGeom prst="rect">
+            <a:avLst/>
+          </a:prstGeom>
+          <a:noFill/>
+          <a:ln/>
+        </p:spPr>
+        <p:txBody>
+          <a:bodyPr wrap="square" lIns="0" tIns="0" rIns="0" bIns="0" rtlCol="0" anchor="ctr"/>
+          <a:lstStyle/>
+          <a:p>
+            <a:pPr indent="0" marL="0">
+              <a:lnSpc>
+                <a:spcPct val="135000"/>
+              </a:lnSpc>
+              <a:buNone/>
+            </a:pPr>
+            <a:r>
+              <a:rPr lang="en-US" sz="900" dirty="0">
+                <a:solidFill>
+                  <a:srgbClr val="8CB3CC"/>
+                </a:solidFill>
+              </a:rPr>
+              <a:t>Bio/organico e prodotti per la casa: due verticali distinti, alto valore scontrino, Napoli centro.</a:t>
+            </a:r>
+            <a:endParaRPr lang="en-US" sz="900" dirty="0"/>
+          </a:p>
+        </p:txBody>
+      </p:sp>
+      <p:sp>
+        <p:nvSpPr>
+          <p:cNvPr id="40" name="Shape 38"/>
+          <p:cNvSpPr/>
+          <p:nvPr/>
+        </p:nvSpPr>
+        <p:spPr>
+          <a:xfrm>
+            <a:off x="6217920" y="7132320"/>
+            <a:ext cx="5486400" cy="960120"/>
+          </a:xfrm>
+          <a:prstGeom prst="rect">
+            <a:avLst/>
+          </a:prstGeom>
+          <a:solidFill>
+            <a:srgbClr val="0F2535"/>
+          </a:solidFill>
+          <a:ln w="12700">
+            <a:solidFill>
+              <a:srgbClr val="1A3A50"/>
+            </a:solidFill>
+            <a:prstDash val="solid"/>
+          </a:ln>
+        </p:spPr>
+      </p:sp>
+      <p:sp>
+        <p:nvSpPr>
+          <p:cNvPr id="41" name="Shape 39"/>
+          <p:cNvSpPr/>
+          <p:nvPr/>
+        </p:nvSpPr>
+        <p:spPr>
+          <a:xfrm>
+            <a:off x="6355080" y="7424928"/>
+            <a:ext cx="164592" cy="164592"/>
+          </a:xfrm>
+          <a:prstGeom prst="ellipse">
+            <a:avLst/>
+          </a:prstGeom>
+          <a:solidFill>
             <a:srgbClr val="F59E0B"/>
           </a:solidFill>
           <a:ln w="12700">
@@ -14859,13 +18603,13 @@
       </p:sp>
       <p:sp>
         <p:nvSpPr>
-          <p:cNvPr id="30" name="Text 28"/>
-          <p:cNvSpPr/>
-          <p:nvPr/>
-        </p:nvSpPr>
-        <p:spPr>
-          <a:xfrm>
-            <a:off x="6629400" y="4032504"/>
+          <p:cNvPr id="42" name="Text 40"/>
+          <p:cNvSpPr/>
+          <p:nvPr/>
+        </p:nvSpPr>
+        <p:spPr>
+          <a:xfrm>
+            <a:off x="6629400" y="7187184"/>
             <a:ext cx="4937760" cy="274320"/>
           </a:xfrm>
           <a:prstGeom prst="rect">
@@ -14895,13 +18639,13 @@
       </p:sp>
       <p:sp>
         <p:nvSpPr>
-          <p:cNvPr id="31" name="Text 29"/>
-          <p:cNvSpPr/>
-          <p:nvPr/>
-        </p:nvSpPr>
-        <p:spPr>
-          <a:xfrm>
-            <a:off x="6629400" y="4325112"/>
+          <p:cNvPr id="43" name="Text 41"/>
+          <p:cNvSpPr/>
+          <p:nvPr/>
+        </p:nvSpPr>
+        <p:spPr>
+          <a:xfrm>
+            <a:off x="6629400" y="7479792"/>
             <a:ext cx="4937760" cy="512064"/>
           </a:xfrm>
           <a:prstGeom prst="rect">
@@ -14934,13 +18678,13 @@
       </p:sp>
       <p:sp>
         <p:nvSpPr>
-          <p:cNvPr id="32" name="Shape 30"/>
-          <p:cNvSpPr/>
-          <p:nvPr/>
-        </p:nvSpPr>
-        <p:spPr>
-          <a:xfrm>
-            <a:off x="6217920" y="5029200"/>
+          <p:cNvPr id="44" name="Shape 42"/>
+          <p:cNvSpPr/>
+          <p:nvPr/>
+        </p:nvSpPr>
+        <p:spPr>
+          <a:xfrm>
+            <a:off x="6217920" y="8183880"/>
             <a:ext cx="5486400" cy="960120"/>
           </a:xfrm>
           <a:prstGeom prst="rect">
@@ -14959,13 +18703,13 @@
       </p:sp>
       <p:sp>
         <p:nvSpPr>
-          <p:cNvPr id="33" name="Shape 31"/>
-          <p:cNvSpPr/>
-          <p:nvPr/>
-        </p:nvSpPr>
-        <p:spPr>
-          <a:xfrm>
-            <a:off x="6355080" y="5321808"/>
+          <p:cNvPr id="45" name="Shape 43"/>
+          <p:cNvSpPr/>
+          <p:nvPr/>
+        </p:nvSpPr>
+        <p:spPr>
+          <a:xfrm>
+            <a:off x="6355080" y="8476488"/>
             <a:ext cx="164592" cy="164592"/>
           </a:xfrm>
           <a:prstGeom prst="ellipse">
@@ -14984,13 +18728,13 @@
       </p:sp>
       <p:sp>
         <p:nvSpPr>
-          <p:cNvPr id="34" name="Text 32"/>
-          <p:cNvSpPr/>
-          <p:nvPr/>
-        </p:nvSpPr>
-        <p:spPr>
-          <a:xfrm>
-            <a:off x="6629400" y="5084064"/>
+          <p:cNvPr id="46" name="Text 44"/>
+          <p:cNvSpPr/>
+          <p:nvPr/>
+        </p:nvSpPr>
+        <p:spPr>
+          <a:xfrm>
+            <a:off x="6629400" y="8238744"/>
             <a:ext cx="4937760" cy="274320"/>
           </a:xfrm>
           <a:prstGeom prst="rect">
@@ -15020,13 +18764,13 @@
       </p:sp>
       <p:sp>
         <p:nvSpPr>
-          <p:cNvPr id="35" name="Text 33"/>
-          <p:cNvSpPr/>
-          <p:nvPr/>
-        </p:nvSpPr>
-        <p:spPr>
-          <a:xfrm>
-            <a:off x="6629400" y="5376672"/>
+          <p:cNvPr id="47" name="Text 45"/>
+          <p:cNvSpPr/>
+          <p:nvPr/>
+        </p:nvSpPr>
+        <p:spPr>
+          <a:xfrm>
+            <a:off x="6629400" y="8531352"/>
             <a:ext cx="4937760" cy="512064"/>
           </a:xfrm>
           <a:prstGeom prst="rect">
@@ -15059,7 +18803,7 @@
       </p:sp>
       <p:sp>
         <p:nvSpPr>
-          <p:cNvPr id="36" name="Text 34"/>
+          <p:cNvPr id="48" name="Text 46"/>
           <p:cNvSpPr/>
           <p:nvPr/>
         </p:nvSpPr>
@@ -15087,819 +18831,7 @@
                   <a:srgbClr val="334455"/>
                 </a:solidFill>
               </a:rPr>
-              <a:t>08 / 11</a:t>
-            </a:r>
-            <a:endParaRPr lang="en-US" sz="800" dirty="0"/>
-          </a:p>
-        </p:txBody>
-      </p:sp>
-    </p:spTree>
-  </p:cSld>
-  <p:clrMapOvr>
-    <a:masterClrMapping/>
-  </p:clrMapOvr>
-</p:sld>
-</file>
-
-<file path=ppt/slides/slide9.xml><?xml version="1.0" encoding="utf-8"?>
-<p:sld xmlns:a="http://schemas.openxmlformats.org/drawingml/2006/main" xmlns:r="http://schemas.openxmlformats.org/officeDocument/2006/relationships" xmlns:p="http://schemas.openxmlformats.org/presentationml/2006/main">
-  <p:cSld name="Slide 9">
-    <p:bg>
-      <p:bgPr>
-        <a:solidFill>
-          <a:srgbClr val="0A1929"/>
-        </a:solidFill>
-      </p:bgPr>
-    </p:bg>
-    <p:spTree>
-      <p:nvGrpSpPr>
-        <p:cNvPr id="1" name=""/>
-        <p:cNvGrpSpPr/>
-        <p:nvPr/>
-      </p:nvGrpSpPr>
-      <p:grpSpPr>
-        <a:xfrm>
-          <a:off x="0" y="0"/>
-          <a:ext cx="0" cy="0"/>
-          <a:chOff x="0" y="0"/>
-          <a:chExt cx="0" cy="0"/>
-        </a:xfrm>
-      </p:grpSpPr>
-      <p:sp>
-        <p:nvSpPr>
-          <p:cNvPr id="2" name="Text 0"/>
-          <p:cNvSpPr/>
-          <p:nvPr/>
-        </p:nvSpPr>
-        <p:spPr>
-          <a:xfrm>
-            <a:off x="457200" y="365760"/>
-            <a:ext cx="3657600" cy="228600"/>
-          </a:xfrm>
-          <a:prstGeom prst="rect">
-            <a:avLst/>
-          </a:prstGeom>
-          <a:noFill/>
-          <a:ln/>
-        </p:spPr>
-        <p:txBody>
-          <a:bodyPr wrap="square" rtlCol="0" anchor="ctr"/>
-          <a:lstStyle/>
-          <a:p>
-            <a:pPr indent="0" marL="0">
-              <a:buNone/>
-            </a:pPr>
-            <a:r>
-              <a:rPr lang="en-US" sz="900" b="1" spc="300" kern="0" dirty="0">
-                <a:solidFill>
-                  <a:srgbClr val="14B8A6"/>
-                </a:solidFill>
-              </a:rPr>
-              <a:t>IL TEAM</a:t>
-            </a:r>
-            <a:endParaRPr lang="en-US" sz="900" dirty="0"/>
-          </a:p>
-        </p:txBody>
-      </p:sp>
-      <p:sp>
-        <p:nvSpPr>
-          <p:cNvPr id="3" name="Text 1"/>
-          <p:cNvSpPr/>
-          <p:nvPr/>
-        </p:nvSpPr>
-        <p:spPr>
-          <a:xfrm>
-            <a:off x="457200" y="640080"/>
-            <a:ext cx="8229600" cy="1005840"/>
-          </a:xfrm>
-          <a:prstGeom prst="rect">
-            <a:avLst/>
-          </a:prstGeom>
-          <a:noFill/>
-          <a:ln/>
-        </p:spPr>
-        <p:txBody>
-          <a:bodyPr wrap="square" rtlCol="0" anchor="ctr"/>
-          <a:lstStyle/>
-          <a:p>
-            <a:pPr indent="0" marL="0">
-              <a:lnSpc>
-                <a:spcPct val="110000"/>
-              </a:lnSpc>
-              <a:buNone/>
-            </a:pPr>
-            <a:r>
-              <a:rPr lang="en-US" sz="3400" b="1" dirty="0">
-                <a:solidFill>
-                  <a:srgbClr val="FFFFFF"/>
-                </a:solidFill>
-                <a:latin typeface="Georgia" pitchFamily="34" charset="0"/>
-                <a:ea typeface="Georgia" pitchFamily="34" charset="-122"/>
-                <a:cs typeface="Georgia" pitchFamily="34" charset="-120"/>
-              </a:rPr>
-              <a:t>Founder-led, asset-light,</a:t>
-            </a:r>
-            <a:endParaRPr lang="en-US" sz="3400" dirty="0"/>
-          </a:p>
-          <a:p>
-            <a:pPr indent="0" marL="0">
-              <a:lnSpc>
-                <a:spcPct val="110000"/>
-              </a:lnSpc>
-              <a:buNone/>
-            </a:pPr>
-            <a:r>
-              <a:rPr lang="en-US" sz="3400" b="1" dirty="0">
-                <a:solidFill>
-                  <a:srgbClr val="FFFFFF"/>
-                </a:solidFill>
-                <a:latin typeface="Georgia" pitchFamily="34" charset="0"/>
-                <a:ea typeface="Georgia" pitchFamily="34" charset="-122"/>
-                <a:cs typeface="Georgia" pitchFamily="34" charset="-120"/>
-              </a:rPr>
-              <a:t>esecuzione guerriglia.</a:t>
-            </a:r>
-            <a:endParaRPr lang="en-US" sz="3400" dirty="0"/>
-          </a:p>
-        </p:txBody>
-      </p:sp>
-      <p:sp>
-        <p:nvSpPr>
-          <p:cNvPr id="4" name="Shape 2"/>
-          <p:cNvSpPr/>
-          <p:nvPr/>
-        </p:nvSpPr>
-        <p:spPr>
-          <a:xfrm>
-            <a:off x="457200" y="1920240"/>
-            <a:ext cx="3520440" cy="3657600"/>
-          </a:xfrm>
-          <a:prstGeom prst="rect">
-            <a:avLst/>
-          </a:prstGeom>
-          <a:solidFill>
-            <a:srgbClr val="0F2535"/>
-          </a:solidFill>
-          <a:ln w="12700">
-            <a:solidFill>
-              <a:srgbClr val="1A3A50"/>
-            </a:solidFill>
-            <a:prstDash val="solid"/>
-          </a:ln>
-        </p:spPr>
-      </p:sp>
-      <p:sp>
-        <p:nvSpPr>
-          <p:cNvPr id="5" name="Shape 3"/>
-          <p:cNvSpPr/>
-          <p:nvPr/>
-        </p:nvSpPr>
-        <p:spPr>
-          <a:xfrm>
-            <a:off x="685800" y="2103120"/>
-            <a:ext cx="685800" cy="685800"/>
-          </a:xfrm>
-          <a:prstGeom prst="roundRect">
-            <a:avLst>
-              <a:gd name="adj" fmla="val 10667"/>
-            </a:avLst>
-          </a:prstGeom>
-          <a:solidFill>
-            <a:srgbClr val="0B7A75"/>
-          </a:solidFill>
-          <a:ln/>
-        </p:spPr>
-      </p:sp>
-      <p:sp>
-        <p:nvSpPr>
-          <p:cNvPr id="6" name="Text 4"/>
-          <p:cNvSpPr/>
-          <p:nvPr/>
-        </p:nvSpPr>
-        <p:spPr>
-          <a:xfrm>
-            <a:off x="685800" y="2103120"/>
-            <a:ext cx="685800" cy="685800"/>
-          </a:xfrm>
-          <a:prstGeom prst="rect">
-            <a:avLst/>
-          </a:prstGeom>
-          <a:noFill/>
-          <a:ln/>
-        </p:spPr>
-        <p:txBody>
-          <a:bodyPr wrap="square" lIns="0" tIns="0" rIns="0" bIns="0" rtlCol="0" anchor="ctr"/>
-          <a:lstStyle/>
-          <a:p>
-            <a:pPr algn="ctr" indent="0" marL="0">
-              <a:buNone/>
-            </a:pPr>
-            <a:r>
-              <a:rPr lang="en-US" sz="1600" b="1" dirty="0">
-                <a:solidFill>
-                  <a:srgbClr val="FFFFFF"/>
-                </a:solidFill>
-              </a:rPr>
-              <a:t>CA</a:t>
-            </a:r>
-            <a:endParaRPr lang="en-US" sz="1600" dirty="0"/>
-          </a:p>
-        </p:txBody>
-      </p:sp>
-      <p:sp>
-        <p:nvSpPr>
-          <p:cNvPr id="7" name="Text 5"/>
-          <p:cNvSpPr/>
-          <p:nvPr/>
-        </p:nvSpPr>
-        <p:spPr>
-          <a:xfrm>
-            <a:off x="640080" y="2926080"/>
-            <a:ext cx="3154680" cy="320040"/>
-          </a:xfrm>
-          <a:prstGeom prst="rect">
-            <a:avLst/>
-          </a:prstGeom>
-          <a:noFill/>
-          <a:ln/>
-        </p:spPr>
-        <p:txBody>
-          <a:bodyPr wrap="square" lIns="0" tIns="0" rIns="0" bIns="0" rtlCol="0" anchor="ctr"/>
-          <a:lstStyle/>
-          <a:p>
-            <a:pPr indent="0" marL="0">
-              <a:buNone/>
-            </a:pPr>
-            <a:r>
-              <a:rPr lang="en-US" sz="1300" b="1" dirty="0">
-                <a:solidFill>
-                  <a:srgbClr val="FFFFFF"/>
-                </a:solidFill>
-              </a:rPr>
-              <a:t>Crescenzo Amodio</a:t>
-            </a:r>
-            <a:endParaRPr lang="en-US" sz="1300" dirty="0"/>
-          </a:p>
-        </p:txBody>
-      </p:sp>
-      <p:sp>
-        <p:nvSpPr>
-          <p:cNvPr id="8" name="Text 6"/>
-          <p:cNvSpPr/>
-          <p:nvPr/>
-        </p:nvSpPr>
-        <p:spPr>
-          <a:xfrm>
-            <a:off x="640080" y="3246120"/>
-            <a:ext cx="3154680" cy="228600"/>
-          </a:xfrm>
-          <a:prstGeom prst="rect">
-            <a:avLst/>
-          </a:prstGeom>
-          <a:noFill/>
-          <a:ln/>
-        </p:spPr>
-        <p:txBody>
-          <a:bodyPr wrap="square" lIns="0" tIns="0" rIns="0" bIns="0" rtlCol="0" anchor="ctr"/>
-          <a:lstStyle/>
-          <a:p>
-            <a:pPr indent="0" marL="0">
-              <a:buNone/>
-            </a:pPr>
-            <a:r>
-              <a:rPr lang="en-US" sz="900" b="1" spc="100" kern="0" dirty="0">
-                <a:solidFill>
-                  <a:srgbClr val="14B8A6"/>
-                </a:solidFill>
-              </a:rPr>
-              <a:t>Founder &amp; CEO</a:t>
-            </a:r>
-            <a:endParaRPr lang="en-US" sz="900" dirty="0"/>
-          </a:p>
-        </p:txBody>
-      </p:sp>
-      <p:sp>
-        <p:nvSpPr>
-          <p:cNvPr id="9" name="Text 7"/>
-          <p:cNvSpPr/>
-          <p:nvPr/>
-        </p:nvSpPr>
-        <p:spPr>
-          <a:xfrm>
-            <a:off x="640080" y="3566160"/>
-            <a:ext cx="3154680" cy="1645920"/>
-          </a:xfrm>
-          <a:prstGeom prst="rect">
-            <a:avLst/>
-          </a:prstGeom>
-          <a:noFill/>
-          <a:ln/>
-        </p:spPr>
-        <p:txBody>
-          <a:bodyPr wrap="square" lIns="0" tIns="0" rIns="0" bIns="0" rtlCol="0" anchor="ctr"/>
-          <a:lstStyle/>
-          <a:p>
-            <a:pPr indent="0" marL="0">
-              <a:lnSpc>
-                <a:spcPct val="145000"/>
-              </a:lnSpc>
-              <a:buNone/>
-            </a:pPr>
-            <a:r>
-              <a:rPr lang="en-US" sz="1000" dirty="0">
-                <a:solidFill>
-                  <a:srgbClr val="8CB3CC"/>
-                </a:solidFill>
-              </a:rPr>
-              <a:t>Imprenditore seriale, Pomigliano d'Arco (NA). Gestisce CAV S.R.L. e B&amp;B Dloop. Fa sales direttamente M1-M4 (guerriglia). Coordina pitch MoodCapital.</a:t>
-            </a:r>
-            <a:endParaRPr lang="en-US" sz="1000" dirty="0"/>
-          </a:p>
-        </p:txBody>
-      </p:sp>
-      <p:sp>
-        <p:nvSpPr>
-          <p:cNvPr id="10" name="Shape 8"/>
-          <p:cNvSpPr/>
-          <p:nvPr/>
-        </p:nvSpPr>
-        <p:spPr>
-          <a:xfrm>
-            <a:off x="4297680" y="1920240"/>
-            <a:ext cx="3520440" cy="3657600"/>
-          </a:xfrm>
-          <a:prstGeom prst="rect">
-            <a:avLst/>
-          </a:prstGeom>
-          <a:solidFill>
-            <a:srgbClr val="0F2535"/>
-          </a:solidFill>
-          <a:ln w="12700">
-            <a:solidFill>
-              <a:srgbClr val="1A3A50"/>
-            </a:solidFill>
-            <a:prstDash val="solid"/>
-          </a:ln>
-        </p:spPr>
-      </p:sp>
-      <p:sp>
-        <p:nvSpPr>
-          <p:cNvPr id="11" name="Shape 9"/>
-          <p:cNvSpPr/>
-          <p:nvPr/>
-        </p:nvSpPr>
-        <p:spPr>
-          <a:xfrm>
-            <a:off x="4526280" y="2103120"/>
-            <a:ext cx="685800" cy="685800"/>
-          </a:xfrm>
-          <a:prstGeom prst="roundRect">
-            <a:avLst>
-              <a:gd name="adj" fmla="val 10667"/>
-            </a:avLst>
-          </a:prstGeom>
-          <a:solidFill>
-            <a:srgbClr val="0B7A75"/>
-          </a:solidFill>
-          <a:ln/>
-        </p:spPr>
-      </p:sp>
-      <p:sp>
-        <p:nvSpPr>
-          <p:cNvPr id="12" name="Text 10"/>
-          <p:cNvSpPr/>
-          <p:nvPr/>
-        </p:nvSpPr>
-        <p:spPr>
-          <a:xfrm>
-            <a:off x="4526280" y="2103120"/>
-            <a:ext cx="685800" cy="685800"/>
-          </a:xfrm>
-          <a:prstGeom prst="rect">
-            <a:avLst/>
-          </a:prstGeom>
-          <a:noFill/>
-          <a:ln/>
-        </p:spPr>
-        <p:txBody>
-          <a:bodyPr wrap="square" lIns="0" tIns="0" rIns="0" bIns="0" rtlCol="0" anchor="ctr"/>
-          <a:lstStyle/>
-          <a:p>
-            <a:pPr algn="ctr" indent="0" marL="0">
-              <a:buNone/>
-            </a:pPr>
-            <a:r>
-              <a:rPr lang="en-US" sz="1600" b="1" dirty="0">
-                <a:solidFill>
-                  <a:srgbClr val="FFFFFF"/>
-                </a:solidFill>
-              </a:rPr>
-              <a:t>SB</a:t>
-            </a:r>
-            <a:endParaRPr lang="en-US" sz="1600" dirty="0"/>
-          </a:p>
-        </p:txBody>
-      </p:sp>
-      <p:sp>
-        <p:nvSpPr>
-          <p:cNvPr id="13" name="Text 11"/>
-          <p:cNvSpPr/>
-          <p:nvPr/>
-        </p:nvSpPr>
-        <p:spPr>
-          <a:xfrm>
-            <a:off x="4480560" y="2926080"/>
-            <a:ext cx="3154680" cy="320040"/>
-          </a:xfrm>
-          <a:prstGeom prst="rect">
-            <a:avLst/>
-          </a:prstGeom>
-          <a:noFill/>
-          <a:ln/>
-        </p:spPr>
-        <p:txBody>
-          <a:bodyPr wrap="square" lIns="0" tIns="0" rIns="0" bIns="0" rtlCol="0" anchor="ctr"/>
-          <a:lstStyle/>
-          <a:p>
-            <a:pPr indent="0" marL="0">
-              <a:buNone/>
-            </a:pPr>
-            <a:r>
-              <a:rPr lang="en-US" sz="1300" b="1" dirty="0">
-                <a:solidFill>
-                  <a:srgbClr val="FFFFFF"/>
-                </a:solidFill>
-              </a:rPr>
-              <a:t>Saba</a:t>
-            </a:r>
-            <a:endParaRPr lang="en-US" sz="1300" dirty="0"/>
-          </a:p>
-        </p:txBody>
-      </p:sp>
-      <p:sp>
-        <p:nvSpPr>
-          <p:cNvPr id="14" name="Text 12"/>
-          <p:cNvSpPr/>
-          <p:nvPr/>
-        </p:nvSpPr>
-        <p:spPr>
-          <a:xfrm>
-            <a:off x="4480560" y="3246120"/>
-            <a:ext cx="3154680" cy="228600"/>
-          </a:xfrm>
-          <a:prstGeom prst="rect">
-            <a:avLst/>
-          </a:prstGeom>
-          <a:noFill/>
-          <a:ln/>
-        </p:spPr>
-        <p:txBody>
-          <a:bodyPr wrap="square" lIns="0" tIns="0" rIns="0" bIns="0" rtlCol="0" anchor="ctr"/>
-          <a:lstStyle/>
-          <a:p>
-            <a:pPr indent="0" marL="0">
-              <a:buNone/>
-            </a:pPr>
-            <a:r>
-              <a:rPr lang="en-US" sz="900" b="1" spc="100" kern="0" dirty="0">
-                <a:solidFill>
-                  <a:srgbClr val="14B8A6"/>
-                </a:solidFill>
-              </a:rPr>
-              <a:t>CTO / Lead Dev — P.IVA</a:t>
-            </a:r>
-            <a:endParaRPr lang="en-US" sz="900" dirty="0"/>
-          </a:p>
-        </p:txBody>
-      </p:sp>
-      <p:sp>
-        <p:nvSpPr>
-          <p:cNvPr id="15" name="Text 13"/>
-          <p:cNvSpPr/>
-          <p:nvPr/>
-        </p:nvSpPr>
-        <p:spPr>
-          <a:xfrm>
-            <a:off x="4480560" y="3566160"/>
-            <a:ext cx="3154680" cy="1645920"/>
-          </a:xfrm>
-          <a:prstGeom prst="rect">
-            <a:avLst/>
-          </a:prstGeom>
-          <a:noFill/>
-          <a:ln/>
-        </p:spPr>
-        <p:txBody>
-          <a:bodyPr wrap="square" lIns="0" tIns="0" rIns="0" bIns="0" rtlCol="0" anchor="ctr"/>
-          <a:lstStyle/>
-          <a:p>
-            <a:pPr indent="0" marL="0">
-              <a:lnSpc>
-                <a:spcPct val="145000"/>
-              </a:lnSpc>
-              <a:buNone/>
-            </a:pPr>
-            <a:r>
-              <a:rPr lang="en-US" sz="1000" dirty="0">
-                <a:solidFill>
-                  <a:srgbClr val="8CB3CC"/>
-                </a:solidFill>
-              </a:rPr>
-              <a:t>Sviluppatore Flutter senior. Ha costruito il prototipo Rider App e architettura Supabase/PostGIS. Collaborazione continuativa come autonomo.</a:t>
-            </a:r>
-            <a:endParaRPr lang="en-US" sz="1000" dirty="0"/>
-          </a:p>
-        </p:txBody>
-      </p:sp>
-      <p:sp>
-        <p:nvSpPr>
-          <p:cNvPr id="16" name="Shape 14"/>
-          <p:cNvSpPr/>
-          <p:nvPr/>
-        </p:nvSpPr>
-        <p:spPr>
-          <a:xfrm>
-            <a:off x="8138160" y="1920240"/>
-            <a:ext cx="3520440" cy="3657600"/>
-          </a:xfrm>
-          <a:prstGeom prst="rect">
-            <a:avLst/>
-          </a:prstGeom>
-          <a:solidFill>
-            <a:srgbClr val="0F2535"/>
-          </a:solidFill>
-          <a:ln w="12700">
-            <a:solidFill>
-              <a:srgbClr val="334455"/>
-            </a:solidFill>
-            <a:prstDash val="solid"/>
-          </a:ln>
-        </p:spPr>
-      </p:sp>
-      <p:sp>
-        <p:nvSpPr>
-          <p:cNvPr id="17" name="Shape 15"/>
-          <p:cNvSpPr/>
-          <p:nvPr/>
-        </p:nvSpPr>
-        <p:spPr>
-          <a:xfrm>
-            <a:off x="8366760" y="2103120"/>
-            <a:ext cx="685800" cy="685800"/>
-          </a:xfrm>
-          <a:prstGeom prst="roundRect">
-            <a:avLst>
-              <a:gd name="adj" fmla="val 10667"/>
-            </a:avLst>
-          </a:prstGeom>
-          <a:solidFill>
-            <a:srgbClr val="2D3748"/>
-          </a:solidFill>
-          <a:ln/>
-        </p:spPr>
-      </p:sp>
-      <p:sp>
-        <p:nvSpPr>
-          <p:cNvPr id="18" name="Text 16"/>
-          <p:cNvSpPr/>
-          <p:nvPr/>
-        </p:nvSpPr>
-        <p:spPr>
-          <a:xfrm>
-            <a:off x="8366760" y="2103120"/>
-            <a:ext cx="685800" cy="685800"/>
-          </a:xfrm>
-          <a:prstGeom prst="rect">
-            <a:avLst/>
-          </a:prstGeom>
-          <a:noFill/>
-          <a:ln/>
-        </p:spPr>
-        <p:txBody>
-          <a:bodyPr wrap="square" lIns="0" tIns="0" rIns="0" bIns="0" rtlCol="0" anchor="ctr"/>
-          <a:lstStyle/>
-          <a:p>
-            <a:pPr algn="ctr" indent="0" marL="0">
-              <a:buNone/>
-            </a:pPr>
-            <a:r>
-              <a:rPr lang="en-US" sz="1600" b="1" dirty="0">
-                <a:solidFill>
-                  <a:srgbClr val="FFFFFF"/>
-                </a:solidFill>
-              </a:rPr>
-              <a:t>+4</a:t>
-            </a:r>
-            <a:endParaRPr lang="en-US" sz="1600" dirty="0"/>
-          </a:p>
-        </p:txBody>
-      </p:sp>
-      <p:sp>
-        <p:nvSpPr>
-          <p:cNvPr id="19" name="Text 17"/>
-          <p:cNvSpPr/>
-          <p:nvPr/>
-        </p:nvSpPr>
-        <p:spPr>
-          <a:xfrm>
-            <a:off x="8321040" y="2926080"/>
-            <a:ext cx="3154680" cy="320040"/>
-          </a:xfrm>
-          <a:prstGeom prst="rect">
-            <a:avLst/>
-          </a:prstGeom>
-          <a:noFill/>
-          <a:ln/>
-        </p:spPr>
-        <p:txBody>
-          <a:bodyPr wrap="square" lIns="0" tIns="0" rIns="0" bIns="0" rtlCol="0" anchor="ctr"/>
-          <a:lstStyle/>
-          <a:p>
-            <a:pPr indent="0" marL="0">
-              <a:buNone/>
-            </a:pPr>
-            <a:r>
-              <a:rPr lang="en-US" sz="1300" b="1" dirty="0">
-                <a:solidFill>
-                  <a:srgbClr val="FFFFFF"/>
-                </a:solidFill>
-              </a:rPr>
-              <a:t>Hiring Plan 2026</a:t>
-            </a:r>
-            <a:endParaRPr lang="en-US" sz="1300" dirty="0"/>
-          </a:p>
-        </p:txBody>
-      </p:sp>
-      <p:sp>
-        <p:nvSpPr>
-          <p:cNvPr id="20" name="Text 18"/>
-          <p:cNvSpPr/>
-          <p:nvPr/>
-        </p:nvSpPr>
-        <p:spPr>
-          <a:xfrm>
-            <a:off x="8321040" y="3246120"/>
-            <a:ext cx="3154680" cy="228600"/>
-          </a:xfrm>
-          <a:prstGeom prst="rect">
-            <a:avLst/>
-          </a:prstGeom>
-          <a:noFill/>
-          <a:ln/>
-        </p:spPr>
-        <p:txBody>
-          <a:bodyPr wrap="square" lIns="0" tIns="0" rIns="0" bIns="0" rtlCol="0" anchor="ctr"/>
-          <a:lstStyle/>
-          <a:p>
-            <a:pPr indent="0" marL="0">
-              <a:buNone/>
-            </a:pPr>
-            <a:r>
-              <a:rPr lang="en-US" sz="900" b="1" spc="100" kern="0" dirty="0">
-                <a:solidFill>
-                  <a:srgbClr val="14B8A6"/>
-                </a:solidFill>
-              </a:rPr>
-              <a:t>Con il seed round</a:t>
-            </a:r>
-            <a:endParaRPr lang="en-US" sz="900" dirty="0"/>
-          </a:p>
-        </p:txBody>
-      </p:sp>
-      <p:sp>
-        <p:nvSpPr>
-          <p:cNvPr id="21" name="Text 19"/>
-          <p:cNvSpPr/>
-          <p:nvPr/>
-        </p:nvSpPr>
-        <p:spPr>
-          <a:xfrm>
-            <a:off x="8321040" y="3566160"/>
-            <a:ext cx="3154680" cy="1645920"/>
-          </a:xfrm>
-          <a:prstGeom prst="rect">
-            <a:avLst/>
-          </a:prstGeom>
-          <a:noFill/>
-          <a:ln/>
-        </p:spPr>
-        <p:txBody>
-          <a:bodyPr wrap="square" lIns="0" tIns="0" rIns="0" bIns="0" rtlCol="0" anchor="ctr"/>
-          <a:lstStyle/>
-          <a:p>
-            <a:pPr indent="0" marL="0">
-              <a:lnSpc>
-                <a:spcPct val="145000"/>
-              </a:lnSpc>
-              <a:buNone/>
-            </a:pPr>
-            <a:r>
-              <a:rPr lang="en-US" sz="1000" dirty="0">
-                <a:solidFill>
-                  <a:srgbClr val="8CB3CC"/>
-                </a:solidFill>
-              </a:rPr>
-              <a:t>Customer Success (M4), Marketing Exec (M4), Sales BDR (M5 — 3 mesi prima del Conservative), Dev Junior P.IVA (M7), Back Office (M6).</a:t>
-            </a:r>
-            <a:endParaRPr lang="en-US" sz="1000" dirty="0"/>
-          </a:p>
-        </p:txBody>
-      </p:sp>
-      <p:sp>
-        <p:nvSpPr>
-          <p:cNvPr id="22" name="Shape 20"/>
-          <p:cNvSpPr/>
-          <p:nvPr/>
-        </p:nvSpPr>
-        <p:spPr>
-          <a:xfrm>
-            <a:off x="457200" y="5806440"/>
-            <a:ext cx="11247120" cy="548640"/>
-          </a:xfrm>
-          <a:prstGeom prst="rect">
-            <a:avLst/>
-          </a:prstGeom>
-          <a:solidFill>
-            <a:srgbClr val="0A2A28"/>
-          </a:solidFill>
-          <a:ln w="12700">
-            <a:solidFill>
-              <a:srgbClr val="0B7A75"/>
-            </a:solidFill>
-            <a:prstDash val="solid"/>
-          </a:ln>
-        </p:spPr>
-      </p:sp>
-      <p:sp>
-        <p:nvSpPr>
-          <p:cNvPr id="23" name="Text 21"/>
-          <p:cNvSpPr/>
-          <p:nvPr/>
-        </p:nvSpPr>
-        <p:spPr>
-          <a:xfrm>
-            <a:off x="640080" y="5852160"/>
-            <a:ext cx="10881360" cy="457200"/>
-          </a:xfrm>
-          <a:prstGeom prst="rect">
-            <a:avLst/>
-          </a:prstGeom>
-          <a:noFill/>
-          <a:ln/>
-        </p:spPr>
-        <p:txBody>
-          <a:bodyPr wrap="square" lIns="0" tIns="0" rIns="0" bIns="0" rtlCol="0" anchor="ctr"/>
-          <a:lstStyle/>
-          <a:p>
-            <a:pPr indent="0" marL="0">
-              <a:lnSpc>
-                <a:spcPct val="130000"/>
-              </a:lnSpc>
-              <a:buNone/>
-            </a:pPr>
-            <a:r>
-              <a:rPr lang="en-US" sz="1000" dirty="0">
-                <a:solidFill>
-                  <a:srgbClr val="7EC8A0"/>
-                </a:solidFill>
-              </a:rPr>
-              <a:t>⚡  Vantaggio Guerriglia: CEO fa outreach M1-M4 (CAC €42/dealer). Sales BDR da M5 — 3 mesi prima del Conservative — anticipa il picco acquisizione.</a:t>
-            </a:r>
-            <a:endParaRPr lang="en-US" sz="1000" dirty="0"/>
-          </a:p>
-        </p:txBody>
-      </p:sp>
-      <p:sp>
-        <p:nvSpPr>
-          <p:cNvPr id="24" name="Text 22"/>
-          <p:cNvSpPr/>
-          <p:nvPr/>
-        </p:nvSpPr>
-        <p:spPr>
-          <a:xfrm>
-            <a:off x="10789920" y="6309360"/>
-            <a:ext cx="1097280" cy="274320"/>
-          </a:xfrm>
-          <a:prstGeom prst="rect">
-            <a:avLst/>
-          </a:prstGeom>
-          <a:noFill/>
-          <a:ln/>
-        </p:spPr>
-        <p:txBody>
-          <a:bodyPr wrap="square" rtlCol="0" anchor="ctr"/>
-          <a:lstStyle/>
-          <a:p>
-            <a:pPr algn="r" indent="0" marL="0">
-              <a:buNone/>
-            </a:pPr>
-            <a:r>
-              <a:rPr lang="en-US" sz="800" dirty="0">
-                <a:solidFill>
-                  <a:srgbClr val="334455"/>
-                </a:solidFill>
-              </a:rPr>
-              <a:t>09 / 11</a:t>
+              <a:t>09 / 12</a:t>
             </a:r>
             <a:endParaRPr lang="en-US" sz="800" dirty="0"/>
           </a:p>

--- a/02-INVESTOR-PRESENTATIONS/DLOOP_Pitch_Deck_2026.pptx
+++ b/02-INVESTOR-PRESENTATIONS/DLOOP_Pitch_Deck_2026.pptx
@@ -2464,7 +2464,7 @@
                   <a:srgbClr val="FFFFFF"/>
                 </a:solidFill>
               </a:rPr>
-              <a:t>€ 80.000 – € 100.000</a:t>
+              <a:t>€ 90.000 – € 150.000</a:t>
             </a:r>
             <a:endParaRPr lang="en-US" sz="1000" dirty="0"/>
           </a:p>
@@ -3422,27 +3422,7 @@
                 <a:ea typeface="Georgia" pitchFamily="34" charset="-122"/>
                 <a:cs typeface="Georgia" pitchFamily="34" charset="-120"/>
               </a:rPr>
-              <a:t>€80K–€100K seed.</a:t>
-            </a:r>
-            <a:endParaRPr lang="en-US" sz="3400" dirty="0"/>
-          </a:p>
-          <a:p>
-            <a:pPr indent="0" marL="0">
-              <a:lnSpc>
-                <a:spcPct val="110000"/>
-              </a:lnSpc>
-              <a:buNone/>
-            </a:pPr>
-            <a:r>
-              <a:rPr lang="en-US" sz="3400" b="1" dirty="0">
-                <a:solidFill>
-                  <a:srgbClr val="FFFFFF"/>
-                </a:solidFill>
-                <a:latin typeface="Georgia" pitchFamily="34" charset="0"/>
-                <a:ea typeface="Georgia" pitchFamily="34" charset="-122"/>
-                <a:cs typeface="Georgia" pitchFamily="34" charset="-120"/>
-              </a:rPr>
-              <a:t>Runway 16 mesi verso break-even.</a:t>
+              <a:t>€100K seed  |  Range €90K–€150K  |  Runway 16 mesi</a:t>
             </a:r>
             <a:endParaRPr lang="en-US" sz="3400" dirty="0"/>
           </a:p>
@@ -3541,7 +3521,7 @@
               <a:buNone/>
             </a:pPr>
             <a:r>
-              <a:rPr lang="en-US" sz="4200" b="1" dirty="0">
+              <a:rPr lang="en-US" sz="3800" b="1" dirty="0">
                 <a:solidFill>
                   <a:srgbClr val="14B8A6"/>
                 </a:solidFill>
@@ -3549,9 +3529,9 @@
                 <a:ea typeface="Georgia" pitchFamily="34" charset="-122"/>
                 <a:cs typeface="Georgia" pitchFamily="34" charset="-120"/>
               </a:rPr>
-              <a:t>€90.000</a:t>
-            </a:r>
-            <a:endParaRPr lang="en-US" sz="4200" dirty="0"/>
+              <a:t>€100.000</a:t>
+            </a:r>
+            <a:endParaRPr lang="en-US" sz="3800" dirty="0"/>
           </a:p>
         </p:txBody>
       </p:sp>
@@ -3585,7 +3565,7 @@
                   <a:srgbClr val="8CB3CC"/>
                 </a:solidFill>
               </a:rPr>
-              <a:t>(range €80K – €100K)</a:t>
+              <a:t>(range €90K – €150K)</a:t>
             </a:r>
             <a:endParaRPr lang="en-US" sz="1000" dirty="0"/>
           </a:p>
@@ -17756,7 +17736,7 @@
                   <a:srgbClr val="FFFFFF"/>
                 </a:solidFill>
               </a:rPr>
-              <a:t>Pipeline warm: 3-5 merchant certi a M1</a:t>
+              <a:t>Pipeline warm: 6+ merchant certi a M1</a:t>
             </a:r>
             <a:endParaRPr lang="en-US" sz="1000" dirty="0"/>
           </a:p>
@@ -17795,7 +17775,7 @@
                   <a:srgbClr val="8CB3CC"/>
                 </a:solidFill>
               </a:rPr>
-              <a:t>CEO outreach diretto. Mario Cucciolito (Pet) e rete personale Pomigliano/Napoli. Zero paid ads M1-M4.</a:t>
+              <a:t>Mario Cucciolito (Pet Shop) · Gruppo Amodio (Supermercati Pam) · Farmacia Tanzillo · NaturaSì Vomero. Rete personale Pomigliano/Napoli. Zero paid ads M1-M4.</a:t>
             </a:r>
             <a:endParaRPr lang="en-US" sz="900" dirty="0"/>
           </a:p>
@@ -18216,6 +18196,131 @@
             <a:avLst/>
           </a:prstGeom>
           <a:solidFill>
+            <a:srgbClr val="F59E0B"/>
+          </a:solidFill>
+          <a:ln w="12700">
+            <a:solidFill>
+              <a:srgbClr val="F59E0B"/>
+            </a:solidFill>
+            <a:prstDash val="solid"/>
+          </a:ln>
+        </p:spPr>
+      </p:sp>
+      <p:sp>
+        <p:nvSpPr>
+          <p:cNvPr id="30" name="Text 28"/>
+          <p:cNvSpPr/>
+          <p:nvPr/>
+        </p:nvSpPr>
+        <p:spPr>
+          <a:xfrm>
+            <a:off x="6629400" y="4032504"/>
+            <a:ext cx="4937760" cy="274320"/>
+          </a:xfrm>
+          <a:prstGeom prst="rect">
+            <a:avLst/>
+          </a:prstGeom>
+          <a:noFill/>
+          <a:ln/>
+        </p:spPr>
+        <p:txBody>
+          <a:bodyPr wrap="square" lIns="0" tIns="0" rIns="0" bIns="0" rtlCol="0" anchor="ctr"/>
+          <a:lstStyle/>
+          <a:p>
+            <a:pPr indent="0" marL="0">
+              <a:buNone/>
+            </a:pPr>
+            <a:r>
+              <a:rPr lang="en-US" sz="1000" b="1" dirty="0">
+                <a:solidFill>
+                  <a:srgbClr val="FFFFFF"/>
+                </a:solidFill>
+              </a:rPr>
+              <a:t>Verifica Twilio in corso (Case #1380112390587406)</a:t>
+            </a:r>
+            <a:endParaRPr lang="en-US" sz="1000" dirty="0"/>
+          </a:p>
+        </p:txBody>
+      </p:sp>
+      <p:sp>
+        <p:nvSpPr>
+          <p:cNvPr id="31" name="Text 29"/>
+          <p:cNvSpPr/>
+          <p:nvPr/>
+        </p:nvSpPr>
+        <p:spPr>
+          <a:xfrm>
+            <a:off x="6629400" y="4325112"/>
+            <a:ext cx="4937760" cy="512064"/>
+          </a:xfrm>
+          <a:prstGeom prst="rect">
+            <a:avLst/>
+          </a:prstGeom>
+          <a:noFill/>
+          <a:ln/>
+        </p:spPr>
+        <p:txBody>
+          <a:bodyPr wrap="square" lIns="0" tIns="0" rIns="0" bIns="0" rtlCol="0" anchor="ctr"/>
+          <a:lstStyle/>
+          <a:p>
+            <a:pPr indent="0" marL="0">
+              <a:lnSpc>
+                <a:spcPct val="135000"/>
+              </a:lnSpc>
+              <a:buNone/>
+            </a:pPr>
+            <a:r>
+              <a:rPr lang="en-US" sz="900" dirty="0">
+                <a:solidFill>
+                  <a:srgbClr val="8CB3CC"/>
+                </a:solidFill>
+              </a:rPr>
+              <a:t>Documentazione inviata. Fallback alternativo pronto. WhatsApp Business API operativa entro 15gg.</a:t>
+            </a:r>
+            <a:endParaRPr lang="en-US" sz="900" dirty="0"/>
+          </a:p>
+        </p:txBody>
+      </p:sp>
+      <p:sp>
+        <p:nvSpPr>
+          <p:cNvPr id="32" name="Shape 30"/>
+          <p:cNvSpPr/>
+          <p:nvPr/>
+        </p:nvSpPr>
+        <p:spPr>
+          <a:xfrm>
+            <a:off x="6217920" y="5029200"/>
+            <a:ext cx="5486400" cy="960120"/>
+          </a:xfrm>
+          <a:prstGeom prst="rect">
+            <a:avLst/>
+          </a:prstGeom>
+          <a:solidFill>
+            <a:srgbClr val="0F2535"/>
+          </a:solidFill>
+          <a:ln w="12700">
+            <a:solidFill>
+              <a:srgbClr val="1A3A50"/>
+            </a:solidFill>
+            <a:prstDash val="solid"/>
+          </a:ln>
+        </p:spPr>
+      </p:sp>
+      <p:sp>
+        <p:nvSpPr>
+          <p:cNvPr id="33" name="Shape 31"/>
+          <p:cNvSpPr/>
+          <p:nvPr/>
+        </p:nvSpPr>
+        <p:spPr>
+          <a:xfrm>
+            <a:off x="6355080" y="5321808"/>
+            <a:ext cx="164592" cy="164592"/>
+          </a:xfrm>
+          <a:prstGeom prst="ellipse">
+            <a:avLst/>
+          </a:prstGeom>
+          <a:solidFill>
             <a:srgbClr val="0B7A75"/>
           </a:solidFill>
           <a:ln w="12700">
@@ -18228,13 +18333,13 @@
       </p:sp>
       <p:sp>
         <p:nvSpPr>
-          <p:cNvPr id="30" name="Text 28"/>
-          <p:cNvSpPr/>
-          <p:nvPr/>
-        </p:nvSpPr>
-        <p:spPr>
-          <a:xfrm>
-            <a:off x="6629400" y="4032504"/>
+          <p:cNvPr id="34" name="Text 32"/>
+          <p:cNvSpPr/>
+          <p:nvPr/>
+        </p:nvSpPr>
+        <p:spPr>
+          <a:xfrm>
+            <a:off x="6629400" y="5084064"/>
             <a:ext cx="4937760" cy="274320"/>
           </a:xfrm>
           <a:prstGeom prst="rect">
@@ -18256,7 +18361,7 @@
                   <a:srgbClr val="FFFFFF"/>
                 </a:solidFill>
               </a:rPr>
-              <a:t>Gruppo Amodio — Supermercati Pam (Pomigliano/Napoli)</a:t>
+              <a:t>GitHub pubblico con pitch deck live</a:t>
             </a:r>
             <a:endParaRPr lang="en-US" sz="1000" dirty="0"/>
           </a:p>
@@ -18264,13 +18369,13 @@
       </p:sp>
       <p:sp>
         <p:nvSpPr>
-          <p:cNvPr id="31" name="Text 29"/>
-          <p:cNvSpPr/>
-          <p:nvPr/>
-        </p:nvSpPr>
-        <p:spPr>
-          <a:xfrm>
-            <a:off x="6629400" y="4325112"/>
+          <p:cNvPr id="35" name="Text 33"/>
+          <p:cNvSpPr/>
+          <p:nvPr/>
+        </p:nvSpPr>
+        <p:spPr>
+          <a:xfrm>
+            <a:off x="6629400" y="5376672"/>
             <a:ext cx="4937760" cy="512064"/>
           </a:xfrm>
           <a:prstGeom prst="rect">
@@ -18295,7 +18400,7 @@
                   <a:srgbClr val="8CB3CC"/>
                 </a:solidFill>
               </a:rPr>
-              <a:t>Grocery: supermercati catena Pam sul territorio. Pipeline B2B Operator, alto volume ordini.</a:t>
+              <a:t>github.com/creamoj-ai/dloop-pitch-deck — due diligence tecnica aperta. GitHub Pages attivo.</a:t>
             </a:r>
             <a:endParaRPr lang="en-US" sz="900" dirty="0"/>
           </a:p>
@@ -18303,507 +18408,7 @@
       </p:sp>
       <p:sp>
         <p:nvSpPr>
-          <p:cNvPr id="32" name="Shape 30"/>
-          <p:cNvSpPr/>
-          <p:nvPr/>
-        </p:nvSpPr>
-        <p:spPr>
-          <a:xfrm>
-            <a:off x="6217920" y="5029200"/>
-            <a:ext cx="5486400" cy="960120"/>
-          </a:xfrm>
-          <a:prstGeom prst="rect">
-            <a:avLst/>
-          </a:prstGeom>
-          <a:solidFill>
-            <a:srgbClr val="0F2535"/>
-          </a:solidFill>
-          <a:ln w="12700">
-            <a:solidFill>
-              <a:srgbClr val="1A3A50"/>
-            </a:solidFill>
-            <a:prstDash val="solid"/>
-          </a:ln>
-        </p:spPr>
-      </p:sp>
-      <p:sp>
-        <p:nvSpPr>
-          <p:cNvPr id="33" name="Shape 31"/>
-          <p:cNvSpPr/>
-          <p:nvPr/>
-        </p:nvSpPr>
-        <p:spPr>
-          <a:xfrm>
-            <a:off x="6355080" y="5321808"/>
-            <a:ext cx="164592" cy="164592"/>
-          </a:xfrm>
-          <a:prstGeom prst="ellipse">
-            <a:avLst/>
-          </a:prstGeom>
-          <a:solidFill>
-            <a:srgbClr val="0B7A75"/>
-          </a:solidFill>
-          <a:ln w="12700">
-            <a:solidFill>
-              <a:srgbClr val="0B7A75"/>
-            </a:solidFill>
-            <a:prstDash val="solid"/>
-          </a:ln>
-        </p:spPr>
-      </p:sp>
-      <p:sp>
-        <p:nvSpPr>
-          <p:cNvPr id="34" name="Text 32"/>
-          <p:cNvSpPr/>
-          <p:nvPr/>
-        </p:nvSpPr>
-        <p:spPr>
-          <a:xfrm>
-            <a:off x="6629400" y="5084064"/>
-            <a:ext cx="4937760" cy="274320"/>
-          </a:xfrm>
-          <a:prstGeom prst="rect">
-            <a:avLst/>
-          </a:prstGeom>
-          <a:noFill/>
-          <a:ln/>
-        </p:spPr>
-        <p:txBody>
-          <a:bodyPr wrap="square" lIns="0" tIns="0" rIns="0" bIns="0" rtlCol="0" anchor="ctr"/>
-          <a:lstStyle/>
-          <a:p>
-            <a:pPr indent="0" marL="0">
-              <a:buNone/>
-            </a:pPr>
-            <a:r>
-              <a:rPr lang="en-US" sz="1000" b="1" dirty="0">
-                <a:solidFill>
-                  <a:srgbClr val="FFFFFF"/>
-                </a:solidFill>
-              </a:rPr>
-              <a:t>Farmacia Tanzilo · Pomigliano d'Arco / Napoli</a:t>
-            </a:r>
-            <a:endParaRPr lang="en-US" sz="1000" dirty="0"/>
-          </a:p>
-        </p:txBody>
-      </p:sp>
-      <p:sp>
-        <p:nvSpPr>
-          <p:cNvPr id="35" name="Text 33"/>
-          <p:cNvSpPr/>
-          <p:nvPr/>
-        </p:nvSpPr>
-        <p:spPr>
-          <a:xfrm>
-            <a:off x="6629400" y="5376672"/>
-            <a:ext cx="4937760" cy="512064"/>
-          </a:xfrm>
-          <a:prstGeom prst="rect">
-            <a:avLst/>
-          </a:prstGeom>
-          <a:noFill/>
-          <a:ln/>
-        </p:spPr>
-        <p:txBody>
-          <a:bodyPr wrap="square" lIns="0" tIns="0" rIns="0" bIns="0" rtlCol="0" anchor="ctr"/>
-          <a:lstStyle/>
-          <a:p>
-            <a:pPr indent="0" marL="0">
-              <a:lnSpc>
-                <a:spcPct val="135000"/>
-              </a:lnSpc>
-              <a:buNone/>
-            </a:pPr>
-            <a:r>
-              <a:rPr lang="en-US" sz="900" dirty="0">
-                <a:solidFill>
-                  <a:srgbClr val="8CB3CC"/>
-                </a:solidFill>
-              </a:rPr>
-              <a:t>Farmacie con delivery medicine e parafarmaci. Tier SMB Pro — validazione verticale healthcare locale.</a:t>
-            </a:r>
-            <a:endParaRPr lang="en-US" sz="900" dirty="0"/>
-          </a:p>
-        </p:txBody>
-      </p:sp>
-      <p:sp>
-        <p:nvSpPr>
-          <p:cNvPr id="36" name="Shape 34"/>
-          <p:cNvSpPr/>
-          <p:nvPr/>
-        </p:nvSpPr>
-        <p:spPr>
-          <a:xfrm>
-            <a:off x="6217920" y="6080760"/>
-            <a:ext cx="5486400" cy="960120"/>
-          </a:xfrm>
-          <a:prstGeom prst="rect">
-            <a:avLst/>
-          </a:prstGeom>
-          <a:solidFill>
-            <a:srgbClr val="0F2535"/>
-          </a:solidFill>
-          <a:ln w="12700">
-            <a:solidFill>
-              <a:srgbClr val="1A3A50"/>
-            </a:solidFill>
-            <a:prstDash val="solid"/>
-          </a:ln>
-        </p:spPr>
-      </p:sp>
-      <p:sp>
-        <p:nvSpPr>
-          <p:cNvPr id="37" name="Shape 35"/>
-          <p:cNvSpPr/>
-          <p:nvPr/>
-        </p:nvSpPr>
-        <p:spPr>
-          <a:xfrm>
-            <a:off x="6355080" y="6373368"/>
-            <a:ext cx="164592" cy="164592"/>
-          </a:xfrm>
-          <a:prstGeom prst="ellipse">
-            <a:avLst/>
-          </a:prstGeom>
-          <a:solidFill>
-            <a:srgbClr val="0B7A75"/>
-          </a:solidFill>
-          <a:ln w="12700">
-            <a:solidFill>
-              <a:srgbClr val="0B7A75"/>
-            </a:solidFill>
-            <a:prstDash val="solid"/>
-          </a:ln>
-        </p:spPr>
-      </p:sp>
-      <p:sp>
-        <p:nvSpPr>
-          <p:cNvPr id="38" name="Text 36"/>
-          <p:cNvSpPr/>
-          <p:nvPr/>
-        </p:nvSpPr>
-        <p:spPr>
-          <a:xfrm>
-            <a:off x="6629400" y="6135624"/>
-            <a:ext cx="4937760" cy="274320"/>
-          </a:xfrm>
-          <a:prstGeom prst="rect">
-            <a:avLst/>
-          </a:prstGeom>
-          <a:noFill/>
-          <a:ln/>
-        </p:spPr>
-        <p:txBody>
-          <a:bodyPr wrap="square" lIns="0" tIns="0" rIns="0" bIns="0" rtlCol="0" anchor="ctr"/>
-          <a:lstStyle/>
-          <a:p>
-            <a:pPr indent="0" marL="0">
-              <a:buNone/>
-            </a:pPr>
-            <a:r>
-              <a:rPr lang="en-US" sz="1000" b="1" dirty="0">
-                <a:solidFill>
-                  <a:srgbClr val="FFFFFF"/>
-                </a:solidFill>
-              </a:rPr>
-              <a:t>NaturaSì Vomero · Napoli  +  PiuMe prodotti casa</a:t>
-            </a:r>
-            <a:endParaRPr lang="en-US" sz="1000" dirty="0"/>
-          </a:p>
-        </p:txBody>
-      </p:sp>
-      <p:sp>
-        <p:nvSpPr>
-          <p:cNvPr id="39" name="Text 37"/>
-          <p:cNvSpPr/>
-          <p:nvPr/>
-        </p:nvSpPr>
-        <p:spPr>
-          <a:xfrm>
-            <a:off x="6629400" y="6428232"/>
-            <a:ext cx="4937760" cy="512064"/>
-          </a:xfrm>
-          <a:prstGeom prst="rect">
-            <a:avLst/>
-          </a:prstGeom>
-          <a:noFill/>
-          <a:ln/>
-        </p:spPr>
-        <p:txBody>
-          <a:bodyPr wrap="square" lIns="0" tIns="0" rIns="0" bIns="0" rtlCol="0" anchor="ctr"/>
-          <a:lstStyle/>
-          <a:p>
-            <a:pPr indent="0" marL="0">
-              <a:lnSpc>
-                <a:spcPct val="135000"/>
-              </a:lnSpc>
-              <a:buNone/>
-            </a:pPr>
-            <a:r>
-              <a:rPr lang="en-US" sz="900" dirty="0">
-                <a:solidFill>
-                  <a:srgbClr val="8CB3CC"/>
-                </a:solidFill>
-              </a:rPr>
-              <a:t>Bio/organico e prodotti per la casa: due verticali distinti, alto valore scontrino, Napoli centro.</a:t>
-            </a:r>
-            <a:endParaRPr lang="en-US" sz="900" dirty="0"/>
-          </a:p>
-        </p:txBody>
-      </p:sp>
-      <p:sp>
-        <p:nvSpPr>
-          <p:cNvPr id="40" name="Shape 38"/>
-          <p:cNvSpPr/>
-          <p:nvPr/>
-        </p:nvSpPr>
-        <p:spPr>
-          <a:xfrm>
-            <a:off x="6217920" y="7132320"/>
-            <a:ext cx="5486400" cy="960120"/>
-          </a:xfrm>
-          <a:prstGeom prst="rect">
-            <a:avLst/>
-          </a:prstGeom>
-          <a:solidFill>
-            <a:srgbClr val="0F2535"/>
-          </a:solidFill>
-          <a:ln w="12700">
-            <a:solidFill>
-              <a:srgbClr val="1A3A50"/>
-            </a:solidFill>
-            <a:prstDash val="solid"/>
-          </a:ln>
-        </p:spPr>
-      </p:sp>
-      <p:sp>
-        <p:nvSpPr>
-          <p:cNvPr id="41" name="Shape 39"/>
-          <p:cNvSpPr/>
-          <p:nvPr/>
-        </p:nvSpPr>
-        <p:spPr>
-          <a:xfrm>
-            <a:off x="6355080" y="7424928"/>
-            <a:ext cx="164592" cy="164592"/>
-          </a:xfrm>
-          <a:prstGeom prst="ellipse">
-            <a:avLst/>
-          </a:prstGeom>
-          <a:solidFill>
-            <a:srgbClr val="F59E0B"/>
-          </a:solidFill>
-          <a:ln w="12700">
-            <a:solidFill>
-              <a:srgbClr val="F59E0B"/>
-            </a:solidFill>
-            <a:prstDash val="solid"/>
-          </a:ln>
-        </p:spPr>
-      </p:sp>
-      <p:sp>
-        <p:nvSpPr>
-          <p:cNvPr id="42" name="Text 40"/>
-          <p:cNvSpPr/>
-          <p:nvPr/>
-        </p:nvSpPr>
-        <p:spPr>
-          <a:xfrm>
-            <a:off x="6629400" y="7187184"/>
-            <a:ext cx="4937760" cy="274320"/>
-          </a:xfrm>
-          <a:prstGeom prst="rect">
-            <a:avLst/>
-          </a:prstGeom>
-          <a:noFill/>
-          <a:ln/>
-        </p:spPr>
-        <p:txBody>
-          <a:bodyPr wrap="square" lIns="0" tIns="0" rIns="0" bIns="0" rtlCol="0" anchor="ctr"/>
-          <a:lstStyle/>
-          <a:p>
-            <a:pPr indent="0" marL="0">
-              <a:buNone/>
-            </a:pPr>
-            <a:r>
-              <a:rPr lang="en-US" sz="1000" b="1" dirty="0">
-                <a:solidFill>
-                  <a:srgbClr val="FFFFFF"/>
-                </a:solidFill>
-              </a:rPr>
-              <a:t>Verifica Twilio in corso (Case #1380112390587406)</a:t>
-            </a:r>
-            <a:endParaRPr lang="en-US" sz="1000" dirty="0"/>
-          </a:p>
-        </p:txBody>
-      </p:sp>
-      <p:sp>
-        <p:nvSpPr>
-          <p:cNvPr id="43" name="Text 41"/>
-          <p:cNvSpPr/>
-          <p:nvPr/>
-        </p:nvSpPr>
-        <p:spPr>
-          <a:xfrm>
-            <a:off x="6629400" y="7479792"/>
-            <a:ext cx="4937760" cy="512064"/>
-          </a:xfrm>
-          <a:prstGeom prst="rect">
-            <a:avLst/>
-          </a:prstGeom>
-          <a:noFill/>
-          <a:ln/>
-        </p:spPr>
-        <p:txBody>
-          <a:bodyPr wrap="square" lIns="0" tIns="0" rIns="0" bIns="0" rtlCol="0" anchor="ctr"/>
-          <a:lstStyle/>
-          <a:p>
-            <a:pPr indent="0" marL="0">
-              <a:lnSpc>
-                <a:spcPct val="135000"/>
-              </a:lnSpc>
-              <a:buNone/>
-            </a:pPr>
-            <a:r>
-              <a:rPr lang="en-US" sz="900" dirty="0">
-                <a:solidFill>
-                  <a:srgbClr val="8CB3CC"/>
-                </a:solidFill>
-              </a:rPr>
-              <a:t>Documentazione inviata. Fallback alternativo pronto. WhatsApp Business API operativa entro 15gg.</a:t>
-            </a:r>
-            <a:endParaRPr lang="en-US" sz="900" dirty="0"/>
-          </a:p>
-        </p:txBody>
-      </p:sp>
-      <p:sp>
-        <p:nvSpPr>
-          <p:cNvPr id="44" name="Shape 42"/>
-          <p:cNvSpPr/>
-          <p:nvPr/>
-        </p:nvSpPr>
-        <p:spPr>
-          <a:xfrm>
-            <a:off x="6217920" y="8183880"/>
-            <a:ext cx="5486400" cy="960120"/>
-          </a:xfrm>
-          <a:prstGeom prst="rect">
-            <a:avLst/>
-          </a:prstGeom>
-          <a:solidFill>
-            <a:srgbClr val="0F2535"/>
-          </a:solidFill>
-          <a:ln w="12700">
-            <a:solidFill>
-              <a:srgbClr val="1A3A50"/>
-            </a:solidFill>
-            <a:prstDash val="solid"/>
-          </a:ln>
-        </p:spPr>
-      </p:sp>
-      <p:sp>
-        <p:nvSpPr>
-          <p:cNvPr id="45" name="Shape 43"/>
-          <p:cNvSpPr/>
-          <p:nvPr/>
-        </p:nvSpPr>
-        <p:spPr>
-          <a:xfrm>
-            <a:off x="6355080" y="8476488"/>
-            <a:ext cx="164592" cy="164592"/>
-          </a:xfrm>
-          <a:prstGeom prst="ellipse">
-            <a:avLst/>
-          </a:prstGeom>
-          <a:solidFill>
-            <a:srgbClr val="0B7A75"/>
-          </a:solidFill>
-          <a:ln w="12700">
-            <a:solidFill>
-              <a:srgbClr val="0B7A75"/>
-            </a:solidFill>
-            <a:prstDash val="solid"/>
-          </a:ln>
-        </p:spPr>
-      </p:sp>
-      <p:sp>
-        <p:nvSpPr>
-          <p:cNvPr id="46" name="Text 44"/>
-          <p:cNvSpPr/>
-          <p:nvPr/>
-        </p:nvSpPr>
-        <p:spPr>
-          <a:xfrm>
-            <a:off x="6629400" y="8238744"/>
-            <a:ext cx="4937760" cy="274320"/>
-          </a:xfrm>
-          <a:prstGeom prst="rect">
-            <a:avLst/>
-          </a:prstGeom>
-          <a:noFill/>
-          <a:ln/>
-        </p:spPr>
-        <p:txBody>
-          <a:bodyPr wrap="square" lIns="0" tIns="0" rIns="0" bIns="0" rtlCol="0" anchor="ctr"/>
-          <a:lstStyle/>
-          <a:p>
-            <a:pPr indent="0" marL="0">
-              <a:buNone/>
-            </a:pPr>
-            <a:r>
-              <a:rPr lang="en-US" sz="1000" b="1" dirty="0">
-                <a:solidFill>
-                  <a:srgbClr val="FFFFFF"/>
-                </a:solidFill>
-              </a:rPr>
-              <a:t>GitHub pubblico con pitch deck live</a:t>
-            </a:r>
-            <a:endParaRPr lang="en-US" sz="1000" dirty="0"/>
-          </a:p>
-        </p:txBody>
-      </p:sp>
-      <p:sp>
-        <p:nvSpPr>
-          <p:cNvPr id="47" name="Text 45"/>
-          <p:cNvSpPr/>
-          <p:nvPr/>
-        </p:nvSpPr>
-        <p:spPr>
-          <a:xfrm>
-            <a:off x="6629400" y="8531352"/>
-            <a:ext cx="4937760" cy="512064"/>
-          </a:xfrm>
-          <a:prstGeom prst="rect">
-            <a:avLst/>
-          </a:prstGeom>
-          <a:noFill/>
-          <a:ln/>
-        </p:spPr>
-        <p:txBody>
-          <a:bodyPr wrap="square" lIns="0" tIns="0" rIns="0" bIns="0" rtlCol="0" anchor="ctr"/>
-          <a:lstStyle/>
-          <a:p>
-            <a:pPr indent="0" marL="0">
-              <a:lnSpc>
-                <a:spcPct val="135000"/>
-              </a:lnSpc>
-              <a:buNone/>
-            </a:pPr>
-            <a:r>
-              <a:rPr lang="en-US" sz="900" dirty="0">
-                <a:solidFill>
-                  <a:srgbClr val="8CB3CC"/>
-                </a:solidFill>
-              </a:rPr>
-              <a:t>github.com/creamoj-ai/dloop-pitch-deck — due diligence tecnica aperta. GitHub Pages attivo.</a:t>
-            </a:r>
-            <a:endParaRPr lang="en-US" sz="900" dirty="0"/>
-          </a:p>
-        </p:txBody>
-      </p:sp>
-      <p:sp>
-        <p:nvSpPr>
-          <p:cNvPr id="48" name="Text 46"/>
+          <p:cNvPr id="36" name="Text 34"/>
           <p:cNvSpPr/>
           <p:nvPr/>
         </p:nvSpPr>

--- a/02-INVESTOR-PRESENTATIONS/DLOOP_Pitch_Deck_2026.pptx
+++ b/02-INVESTOR-PRESENTATIONS/DLOOP_Pitch_Deck_2026.pptx
@@ -1836,7 +1836,7 @@
     <p:bg>
       <p:bgPr>
         <a:solidFill>
-          <a:srgbClr val="0D1F35"/>
+          <a:srgbClr val="1C1C1E"/>
         </a:solidFill>
       </p:bgPr>
     </p:bg>
@@ -1871,7 +1871,7 @@
             </a:avLst>
           </a:prstGeom>
           <a:solidFill>
-            <a:srgbClr val="0B7A75"/>
+            <a:srgbClr val="0D8A82"/>
           </a:solidFill>
           <a:ln/>
         </p:spPr>
@@ -1903,7 +1903,7 @@
             <a:r>
               <a:rPr lang="en-US" sz="1800" b="1" dirty="0">
                 <a:solidFill>
-                  <a:srgbClr val="FFFFFF"/>
+                  <a:srgbClr val="F0EDE8"/>
                 </a:solidFill>
               </a:rPr>
               <a:t>Dl</a:t>
@@ -1939,7 +1939,7 @@
             <a:r>
               <a:rPr lang="en-US" sz="900" spc="300" kern="0" dirty="0">
                 <a:solidFill>
-                  <a:srgbClr val="14B8A6"/>
+                  <a:srgbClr val="2DD4BF"/>
                 </a:solidFill>
               </a:rPr>
               <a:t>SEED PITCH · 2026 · RISERVATO</a:t>
@@ -1978,7 +1978,7 @@
             <a:r>
               <a:rPr lang="en-US" sz="4400" b="1" dirty="0">
                 <a:solidFill>
-                  <a:srgbClr val="FFFFFF"/>
+                  <a:srgbClr val="F0EDE8"/>
                 </a:solidFill>
                 <a:latin typeface="Georgia" pitchFamily="34" charset="0"/>
                 <a:ea typeface="Georgia" pitchFamily="34" charset="-122"/>
@@ -2014,7 +2014,7 @@
             <a:r>
               <a:rPr lang="en-US" sz="4400" b="1" dirty="0">
                 <a:solidFill>
-                  <a:srgbClr val="FFFFFF"/>
+                  <a:srgbClr val="F0EDE8"/>
                 </a:solidFill>
                 <a:latin typeface="Georgia" pitchFamily="34" charset="0"/>
                 <a:ea typeface="Georgia" pitchFamily="34" charset="-122"/>
@@ -2056,7 +2056,7 @@
             <a:r>
               <a:rPr lang="en-US" sz="1300" dirty="0">
                 <a:solidFill>
-                  <a:srgbClr val="8CB3CC"/>
+                  <a:srgbClr val="A89F98"/>
                 </a:solidFill>
               </a:rPr>
               <a:t>Dloop è la piattaforma SaaS B2B per operatori di delivery locale in Italia.</a:t>
@@ -2073,7 +2073,7 @@
             <a:r>
               <a:rPr lang="en-US" sz="1300" dirty="0">
                 <a:solidFill>
-                  <a:srgbClr val="8CB3CC"/>
+                  <a:srgbClr val="A89F98"/>
                 </a:solidFill>
               </a:rPr>
               <a:t>WhatsApp nativo · Modello P.IVA · Pricing accessibile alle PMI.</a:t>
@@ -2097,11 +2097,11 @@
             <a:avLst/>
           </a:prstGeom>
           <a:solidFill>
-            <a:srgbClr val="0D2D4A"/>
+            <a:srgbClr val="252220"/>
           </a:solidFill>
           <a:ln w="12700">
             <a:solidFill>
-              <a:srgbClr val="0B7A75"/>
+              <a:srgbClr val="0D8A82"/>
             </a:solidFill>
             <a:prstDash val="solid"/>
           </a:ln>
@@ -2134,7 +2134,7 @@
             <a:r>
               <a:rPr lang="en-US" sz="800" b="1" spc="200" kern="0" dirty="0">
                 <a:solidFill>
-                  <a:srgbClr val="14B8A6"/>
+                  <a:srgbClr val="2DD4BF"/>
                 </a:solidFill>
               </a:rPr>
               <a:t>Azienda</a:t>
@@ -2170,7 +2170,7 @@
             <a:r>
               <a:rPr lang="en-US" sz="1000" b="1" dirty="0">
                 <a:solidFill>
-                  <a:srgbClr val="FFFFFF"/>
+                  <a:srgbClr val="F0EDE8"/>
                 </a:solidFill>
               </a:rPr>
               <a:t>CAV S.R.L. — Startup Innovativa</a:t>
@@ -2194,11 +2194,11 @@
             <a:avLst/>
           </a:prstGeom>
           <a:solidFill>
-            <a:srgbClr val="0D2D4A"/>
+            <a:srgbClr val="252220"/>
           </a:solidFill>
           <a:ln w="12700">
             <a:solidFill>
-              <a:srgbClr val="0B7A75"/>
+              <a:srgbClr val="0D8A82"/>
             </a:solidFill>
             <a:prstDash val="solid"/>
           </a:ln>
@@ -2231,7 +2231,7 @@
             <a:r>
               <a:rPr lang="en-US" sz="800" b="1" spc="200" kern="0" dirty="0">
                 <a:solidFill>
-                  <a:srgbClr val="14B8A6"/>
+                  <a:srgbClr val="2DD4BF"/>
                 </a:solidFill>
               </a:rPr>
               <a:t>Mercato</a:t>
@@ -2267,7 +2267,7 @@
             <a:r>
               <a:rPr lang="en-US" sz="1000" b="1" dirty="0">
                 <a:solidFill>
-                  <a:srgbClr val="FFFFFF"/>
+                  <a:srgbClr val="F0EDE8"/>
                 </a:solidFill>
               </a:rPr>
               <a:t>Italia · Campania first</a:t>
@@ -2291,11 +2291,11 @@
             <a:avLst/>
           </a:prstGeom>
           <a:solidFill>
-            <a:srgbClr val="0D2D4A"/>
+            <a:srgbClr val="252220"/>
           </a:solidFill>
           <a:ln w="12700">
             <a:solidFill>
-              <a:srgbClr val="0B7A75"/>
+              <a:srgbClr val="0D8A82"/>
             </a:solidFill>
             <a:prstDash val="solid"/>
           </a:ln>
@@ -2328,7 +2328,7 @@
             <a:r>
               <a:rPr lang="en-US" sz="800" b="1" spc="200" kern="0" dirty="0">
                 <a:solidFill>
-                  <a:srgbClr val="14B8A6"/>
+                  <a:srgbClr val="2DD4BF"/>
                 </a:solidFill>
               </a:rPr>
               <a:t>Fase</a:t>
@@ -2364,7 +2364,7 @@
             <a:r>
               <a:rPr lang="en-US" sz="1000" b="1" dirty="0">
                 <a:solidFill>
-                  <a:srgbClr val="FFFFFF"/>
+                  <a:srgbClr val="F0EDE8"/>
                 </a:solidFill>
               </a:rPr>
               <a:t>Pre-revenue · MVP pronto</a:t>
@@ -2388,11 +2388,11 @@
             <a:avLst/>
           </a:prstGeom>
           <a:solidFill>
-            <a:srgbClr val="0D2D4A"/>
+            <a:srgbClr val="252220"/>
           </a:solidFill>
           <a:ln w="12700">
             <a:solidFill>
-              <a:srgbClr val="0B7A75"/>
+              <a:srgbClr val="0D8A82"/>
             </a:solidFill>
             <a:prstDash val="solid"/>
           </a:ln>
@@ -2425,7 +2425,7 @@
             <a:r>
               <a:rPr lang="en-US" sz="800" b="1" spc="200" kern="0" dirty="0">
                 <a:solidFill>
-                  <a:srgbClr val="14B8A6"/>
+                  <a:srgbClr val="2DD4BF"/>
                 </a:solidFill>
               </a:rPr>
               <a:t>Ask</a:t>
@@ -2461,7 +2461,7 @@
             <a:r>
               <a:rPr lang="en-US" sz="1000" b="1" dirty="0">
                 <a:solidFill>
-                  <a:srgbClr val="FFFFFF"/>
+                  <a:srgbClr val="F0EDE8"/>
                 </a:solidFill>
               </a:rPr>
               <a:t>€ 90.000 – € 150.000</a:t>
@@ -2497,7 +2497,7 @@
             <a:r>
               <a:rPr lang="en-US" sz="800" dirty="0">
                 <a:solidFill>
-                  <a:srgbClr val="334455"/>
+                  <a:srgbClr val="4A4540"/>
                 </a:solidFill>
               </a:rPr>
               <a:t>01 / 12</a:t>
@@ -2520,7 +2520,7 @@
     <p:bg>
       <p:bgPr>
         <a:solidFill>
-          <a:srgbClr val="0A1929"/>
+          <a:srgbClr val="141412"/>
         </a:solidFill>
       </p:bgPr>
     </p:bg>
@@ -2565,7 +2565,7 @@
             <a:r>
               <a:rPr lang="en-US" sz="900" b="1" spc="300" kern="0" dirty="0">
                 <a:solidFill>
-                  <a:srgbClr val="14B8A6"/>
+                  <a:srgbClr val="2DD4BF"/>
                 </a:solidFill>
               </a:rPr>
               <a:t>IL TEAM</a:t>
@@ -2604,7 +2604,7 @@
             <a:r>
               <a:rPr lang="en-US" sz="3400" b="1" dirty="0">
                 <a:solidFill>
-                  <a:srgbClr val="FFFFFF"/>
+                  <a:srgbClr val="F0EDE8"/>
                 </a:solidFill>
                 <a:latin typeface="Georgia" pitchFamily="34" charset="0"/>
                 <a:ea typeface="Georgia" pitchFamily="34" charset="-122"/>
@@ -2624,7 +2624,7 @@
             <a:r>
               <a:rPr lang="en-US" sz="3400" b="1" dirty="0">
                 <a:solidFill>
-                  <a:srgbClr val="FFFFFF"/>
+                  <a:srgbClr val="F0EDE8"/>
                 </a:solidFill>
                 <a:latin typeface="Georgia" pitchFamily="34" charset="0"/>
                 <a:ea typeface="Georgia" pitchFamily="34" charset="-122"/>
@@ -2651,7 +2651,7 @@
             <a:avLst/>
           </a:prstGeom>
           <a:solidFill>
-            <a:srgbClr val="0F2535"/>
+            <a:srgbClr val="201E1B"/>
           </a:solidFill>
           <a:ln w="12700">
             <a:solidFill>
@@ -2678,7 +2678,7 @@
             </a:avLst>
           </a:prstGeom>
           <a:solidFill>
-            <a:srgbClr val="0B7A75"/>
+            <a:srgbClr val="0D8A82"/>
           </a:solidFill>
           <a:ln/>
         </p:spPr>
@@ -2710,7 +2710,7 @@
             <a:r>
               <a:rPr lang="en-US" sz="1600" b="1" dirty="0">
                 <a:solidFill>
-                  <a:srgbClr val="FFFFFF"/>
+                  <a:srgbClr val="F0EDE8"/>
                 </a:solidFill>
               </a:rPr>
               <a:t>CA</a:t>
@@ -2746,7 +2746,7 @@
             <a:r>
               <a:rPr lang="en-US" sz="1300" b="1" dirty="0">
                 <a:solidFill>
-                  <a:srgbClr val="FFFFFF"/>
+                  <a:srgbClr val="F0EDE8"/>
                 </a:solidFill>
               </a:rPr>
               <a:t>Crescenzo Amodio</a:t>
@@ -2782,7 +2782,7 @@
             <a:r>
               <a:rPr lang="en-US" sz="900" b="1" spc="100" kern="0" dirty="0">
                 <a:solidFill>
-                  <a:srgbClr val="14B8A6"/>
+                  <a:srgbClr val="2DD4BF"/>
                 </a:solidFill>
               </a:rPr>
               <a:t>Founder &amp; CEO</a:t>
@@ -2821,7 +2821,7 @@
             <a:r>
               <a:rPr lang="en-US" sz="1000" dirty="0">
                 <a:solidFill>
-                  <a:srgbClr val="8CB3CC"/>
+                  <a:srgbClr val="A89F98"/>
                 </a:solidFill>
               </a:rPr>
               <a:t>Imprenditore seriale, Pomigliano d'Arco (NA). Gestisce CAV S.R.L. e B&amp;B Dloop. Fa sales direttamente M1-M4 (guerriglia). Coordina pitch MoodCapital.</a:t>
@@ -2845,7 +2845,7 @@
             <a:avLst/>
           </a:prstGeom>
           <a:solidFill>
-            <a:srgbClr val="0F2535"/>
+            <a:srgbClr val="201E1B"/>
           </a:solidFill>
           <a:ln w="12700">
             <a:solidFill>
@@ -2872,7 +2872,7 @@
             </a:avLst>
           </a:prstGeom>
           <a:solidFill>
-            <a:srgbClr val="0B7A75"/>
+            <a:srgbClr val="0D8A82"/>
           </a:solidFill>
           <a:ln/>
         </p:spPr>
@@ -2904,7 +2904,7 @@
             <a:r>
               <a:rPr lang="en-US" sz="1600" b="1" dirty="0">
                 <a:solidFill>
-                  <a:srgbClr val="FFFFFF"/>
+                  <a:srgbClr val="F0EDE8"/>
                 </a:solidFill>
               </a:rPr>
               <a:t>SB</a:t>
@@ -2940,7 +2940,7 @@
             <a:r>
               <a:rPr lang="en-US" sz="1300" b="1" dirty="0">
                 <a:solidFill>
-                  <a:srgbClr val="FFFFFF"/>
+                  <a:srgbClr val="F0EDE8"/>
                 </a:solidFill>
               </a:rPr>
               <a:t>Saba</a:t>
@@ -2976,7 +2976,7 @@
             <a:r>
               <a:rPr lang="en-US" sz="900" b="1" spc="100" kern="0" dirty="0">
                 <a:solidFill>
-                  <a:srgbClr val="14B8A6"/>
+                  <a:srgbClr val="2DD4BF"/>
                 </a:solidFill>
               </a:rPr>
               <a:t>CTO / Lead Dev — P.IVA</a:t>
@@ -3015,7 +3015,7 @@
             <a:r>
               <a:rPr lang="en-US" sz="1000" dirty="0">
                 <a:solidFill>
-                  <a:srgbClr val="8CB3CC"/>
+                  <a:srgbClr val="A89F98"/>
                 </a:solidFill>
               </a:rPr>
               <a:t>Imprenditore seriale e reduce da exit di successo nell'ambito digital. CTO e Lead Dev Dloop: ha progettato e sviluppato l'intera architettura Flutter + Supabase/PostGIS. Collabora come autonomo con comprovata expertise in prodotti SaaS scalabili.</a:t>
@@ -3039,7 +3039,7 @@
             <a:avLst/>
           </a:prstGeom>
           <a:solidFill>
-            <a:srgbClr val="0F2535"/>
+            <a:srgbClr val="201E1B"/>
           </a:solidFill>
           <a:ln w="12700">
             <a:solidFill>
@@ -3098,7 +3098,7 @@
             <a:r>
               <a:rPr lang="en-US" sz="1600" b="1" dirty="0">
                 <a:solidFill>
-                  <a:srgbClr val="FFFFFF"/>
+                  <a:srgbClr val="F0EDE8"/>
                 </a:solidFill>
               </a:rPr>
               <a:t>+4</a:t>
@@ -3134,7 +3134,7 @@
             <a:r>
               <a:rPr lang="en-US" sz="1300" b="1" dirty="0">
                 <a:solidFill>
-                  <a:srgbClr val="FFFFFF"/>
+                  <a:srgbClr val="F0EDE8"/>
                 </a:solidFill>
               </a:rPr>
               <a:t>Hiring Plan 2026</a:t>
@@ -3170,7 +3170,7 @@
             <a:r>
               <a:rPr lang="en-US" sz="900" b="1" spc="100" kern="0" dirty="0">
                 <a:solidFill>
-                  <a:srgbClr val="14B8A6"/>
+                  <a:srgbClr val="2DD4BF"/>
                 </a:solidFill>
               </a:rPr>
               <a:t>Con il seed round</a:t>
@@ -3209,7 +3209,7 @@
             <a:r>
               <a:rPr lang="en-US" sz="1000" dirty="0">
                 <a:solidFill>
-                  <a:srgbClr val="8CB3CC"/>
+                  <a:srgbClr val="A89F98"/>
                 </a:solidFill>
               </a:rPr>
               <a:t>Customer Success (M4), Marketing Exec (M4), Sales BDR (M5 — 3 mesi prima del Conservative), Dev Junior P.IVA (M7), Back Office (M6).</a:t>
@@ -3233,11 +3233,11 @@
             <a:avLst/>
           </a:prstGeom>
           <a:solidFill>
-            <a:srgbClr val="0A2A28"/>
+            <a:srgbClr val="1A1E1C"/>
           </a:solidFill>
           <a:ln w="12700">
             <a:solidFill>
-              <a:srgbClr val="0B7A75"/>
+              <a:srgbClr val="0D8A82"/>
             </a:solidFill>
             <a:prstDash val="solid"/>
           </a:ln>
@@ -3309,7 +3309,7 @@
             <a:r>
               <a:rPr lang="en-US" sz="800" dirty="0">
                 <a:solidFill>
-                  <a:srgbClr val="334455"/>
+                  <a:srgbClr val="4A4540"/>
                 </a:solidFill>
               </a:rPr>
               <a:t>10 / 12</a:t>
@@ -3332,7 +3332,7 @@
     <p:bg>
       <p:bgPr>
         <a:solidFill>
-          <a:srgbClr val="0A2A28"/>
+          <a:srgbClr val="141E1C"/>
         </a:solidFill>
       </p:bgPr>
     </p:bg>
@@ -3377,7 +3377,7 @@
             <a:r>
               <a:rPr lang="en-US" sz="900" b="1" spc="300" kern="0" dirty="0">
                 <a:solidFill>
-                  <a:srgbClr val="14B8A6"/>
+                  <a:srgbClr val="2DD4BF"/>
                 </a:solidFill>
               </a:rPr>
               <a:t>FUNDRAISING</a:t>
@@ -3416,7 +3416,7 @@
             <a:r>
               <a:rPr lang="en-US" sz="3400" b="1" dirty="0">
                 <a:solidFill>
-                  <a:srgbClr val="FFFFFF"/>
+                  <a:srgbClr val="F0EDE8"/>
                 </a:solidFill>
                 <a:latin typeface="Georgia" pitchFamily="34" charset="0"/>
                 <a:ea typeface="Georgia" pitchFamily="34" charset="-122"/>
@@ -3443,11 +3443,11 @@
             <a:avLst/>
           </a:prstGeom>
           <a:solidFill>
-            <a:srgbClr val="0A3030"/>
+            <a:srgbClr val="1A1E1C"/>
           </a:solidFill>
           <a:ln w="12700">
             <a:solidFill>
-              <a:srgbClr val="0B7A75"/>
+              <a:srgbClr val="0D8A82"/>
             </a:solidFill>
             <a:prstDash val="solid"/>
           </a:ln>
@@ -3487,7 +3487,7 @@
             <a:r>
               <a:rPr lang="en-US" sz="900" b="1" spc="300" kern="0" dirty="0">
                 <a:solidFill>
-                  <a:srgbClr val="14B8A6"/>
+                  <a:srgbClr val="2DD4BF"/>
                 </a:solidFill>
               </a:rPr>
               <a:t>ASK</a:t>
@@ -3523,7 +3523,7 @@
             <a:r>
               <a:rPr lang="en-US" sz="3800" b="1" dirty="0">
                 <a:solidFill>
-                  <a:srgbClr val="14B8A6"/>
+                  <a:srgbClr val="2DD4BF"/>
                 </a:solidFill>
                 <a:latin typeface="Georgia" pitchFamily="34" charset="0"/>
                 <a:ea typeface="Georgia" pitchFamily="34" charset="-122"/>
@@ -3562,7 +3562,7 @@
             <a:r>
               <a:rPr lang="en-US" sz="1000" dirty="0">
                 <a:solidFill>
-                  <a:srgbClr val="8CB3CC"/>
+                  <a:srgbClr val="A89F98"/>
                 </a:solidFill>
               </a:rPr>
               <a:t>(range €90K – €150K)</a:t>
@@ -3588,7 +3588,7 @@
           <a:noFill/>
           <a:ln w="12700">
             <a:solidFill>
-              <a:srgbClr val="0B7A75"/>
+              <a:srgbClr val="0D8A82"/>
             </a:solidFill>
             <a:prstDash val="dash"/>
           </a:ln>
@@ -3621,7 +3621,7 @@
             <a:r>
               <a:rPr lang="en-US" sz="1000" dirty="0">
                 <a:solidFill>
-                  <a:srgbClr val="8CB3CC"/>
+                  <a:srgbClr val="A89F98"/>
                 </a:solidFill>
               </a:rPr>
               <a:t>Struttura:</a:t>
@@ -3657,7 +3657,7 @@
             <a:r>
               <a:rPr lang="en-US" sz="1000" b="1" dirty="0">
                 <a:solidFill>
-                  <a:srgbClr val="FFFFFF"/>
+                  <a:srgbClr val="F0EDE8"/>
                 </a:solidFill>
               </a:rPr>
               <a:t>Pure equity / SAFE note</a:t>
@@ -3693,7 +3693,7 @@
             <a:r>
               <a:rPr lang="en-US" sz="1000" dirty="0">
                 <a:solidFill>
-                  <a:srgbClr val="8CB3CC"/>
+                  <a:srgbClr val="A89F98"/>
                 </a:solidFill>
               </a:rPr>
               <a:t>MoodCapital:</a:t>
@@ -3729,7 +3729,7 @@
             <a:r>
               <a:rPr lang="en-US" sz="1000" b="1" dirty="0">
                 <a:solidFill>
-                  <a:srgbClr val="FFFFFF"/>
+                  <a:srgbClr val="F0EDE8"/>
                 </a:solidFill>
               </a:rPr>
               <a:t>Contatto attivo</a:t>
@@ -3765,7 +3765,7 @@
             <a:r>
               <a:rPr lang="en-US" sz="1000" dirty="0">
                 <a:solidFill>
-                  <a:srgbClr val="8CB3CC"/>
+                  <a:srgbClr val="A89F98"/>
                 </a:solidFill>
               </a:rPr>
               <a:t>Angel Inv.:</a:t>
@@ -3801,7 +3801,7 @@
             <a:r>
               <a:rPr lang="en-US" sz="1000" b="1" dirty="0">
                 <a:solidFill>
-                  <a:srgbClr val="FFFFFF"/>
+                  <a:srgbClr val="F0EDE8"/>
                 </a:solidFill>
               </a:rPr>
               <a:t>Investor network Sud Italia</a:t>
@@ -3837,7 +3837,7 @@
             <a:r>
               <a:rPr lang="en-US" sz="1000" dirty="0">
                 <a:solidFill>
-                  <a:srgbClr val="8CB3CC"/>
+                  <a:srgbClr val="A89F98"/>
                 </a:solidFill>
               </a:rPr>
               <a:t>M3:</a:t>
@@ -3873,7 +3873,7 @@
             <a:r>
               <a:rPr lang="en-US" sz="1000" b="1" dirty="0">
                 <a:solidFill>
-                  <a:srgbClr val="FFFFFF"/>
+                  <a:srgbClr val="F0EDE8"/>
                 </a:solidFill>
               </a:rPr>
               <a:t>Primo batch 5 merchant</a:t>
@@ -3909,7 +3909,7 @@
             <a:r>
               <a:rPr lang="en-US" sz="1000" dirty="0">
                 <a:solidFill>
-                  <a:srgbClr val="8CB3CC"/>
+                  <a:srgbClr val="A89F98"/>
                 </a:solidFill>
               </a:rPr>
               <a:t>M11:</a:t>
@@ -3945,7 +3945,7 @@
             <a:r>
               <a:rPr lang="en-US" sz="1000" b="1" dirty="0">
                 <a:solidFill>
-                  <a:srgbClr val="FFFFFF"/>
+                  <a:srgbClr val="F0EDE8"/>
                 </a:solidFill>
               </a:rPr>
               <a:t>Break-even @ 61 dealer</a:t>
@@ -3981,7 +3981,7 @@
             <a:r>
               <a:rPr lang="en-US" sz="900" b="1" spc="200" kern="0" dirty="0">
                 <a:solidFill>
-                  <a:srgbClr val="14B8A6"/>
+                  <a:srgbClr val="2DD4BF"/>
                 </a:solidFill>
               </a:rPr>
               <a:t>USO DEI FONDI</a:t>
@@ -4017,7 +4017,7 @@
             <a:r>
               <a:rPr lang="en-US" sz="1100" dirty="0">
                 <a:solidFill>
-                  <a:srgbClr val="8CB3CC"/>
+                  <a:srgbClr val="A89F98"/>
                 </a:solidFill>
               </a:rPr>
               <a:t>Sviluppo prodotto (Saba)</a:t>
@@ -4041,11 +4041,11 @@
             <a:avLst/>
           </a:prstGeom>
           <a:solidFill>
-            <a:srgbClr val="0A1929"/>
+            <a:srgbClr val="181614"/>
           </a:solidFill>
           <a:ln w="12700">
             <a:solidFill>
-              <a:srgbClr val="1A3A50"/>
+              <a:srgbClr val="3A3530"/>
             </a:solidFill>
             <a:prstDash val="solid"/>
           </a:ln>
@@ -4066,11 +4066,11 @@
             <a:avLst/>
           </a:prstGeom>
           <a:solidFill>
-            <a:srgbClr val="0B7A75"/>
+            <a:srgbClr val="0D8A82"/>
           </a:solidFill>
           <a:ln w="12700">
             <a:solidFill>
-              <a:srgbClr val="0B7A75"/>
+              <a:srgbClr val="0D8A82"/>
             </a:solidFill>
             <a:prstDash val="solid"/>
           </a:ln>
@@ -4103,7 +4103,7 @@
             <a:r>
               <a:rPr lang="en-US" sz="900" b="1" dirty="0">
                 <a:solidFill>
-                  <a:srgbClr val="14B8A6"/>
+                  <a:srgbClr val="2DD4BF"/>
                 </a:solidFill>
               </a:rPr>
               <a:t>25%</a:t>
@@ -4139,7 +4139,7 @@
             <a:r>
               <a:rPr lang="en-US" sz="1100" dirty="0">
                 <a:solidFill>
-                  <a:srgbClr val="8CB3CC"/>
+                  <a:srgbClr val="A89F98"/>
                 </a:solidFill>
               </a:rPr>
               <a:t>Sales &amp; Marketing M1-M8</a:t>
@@ -4163,11 +4163,11 @@
             <a:avLst/>
           </a:prstGeom>
           <a:solidFill>
-            <a:srgbClr val="0A1929"/>
+            <a:srgbClr val="181614"/>
           </a:solidFill>
           <a:ln w="12700">
             <a:solidFill>
-              <a:srgbClr val="1A3A50"/>
+              <a:srgbClr val="3A3530"/>
             </a:solidFill>
             <a:prstDash val="solid"/>
           </a:ln>
@@ -4188,11 +4188,11 @@
             <a:avLst/>
           </a:prstGeom>
           <a:solidFill>
-            <a:srgbClr val="0B7A75"/>
+            <a:srgbClr val="0D8A82"/>
           </a:solidFill>
           <a:ln w="12700">
             <a:solidFill>
-              <a:srgbClr val="0B7A75"/>
+              <a:srgbClr val="0D8A82"/>
             </a:solidFill>
             <a:prstDash val="solid"/>
           </a:ln>
@@ -4225,7 +4225,7 @@
             <a:r>
               <a:rPr lang="en-US" sz="900" b="1" dirty="0">
                 <a:solidFill>
-                  <a:srgbClr val="14B8A6"/>
+                  <a:srgbClr val="2DD4BF"/>
                 </a:solidFill>
               </a:rPr>
               <a:t>35%</a:t>
@@ -4261,7 +4261,7 @@
             <a:r>
               <a:rPr lang="en-US" sz="1100" dirty="0">
                 <a:solidFill>
-                  <a:srgbClr val="8CB3CC"/>
+                  <a:srgbClr val="A89F98"/>
                 </a:solidFill>
               </a:rPr>
               <a:t>CEO + Operations M1-M6</a:t>
@@ -4285,11 +4285,11 @@
             <a:avLst/>
           </a:prstGeom>
           <a:solidFill>
-            <a:srgbClr val="0A1929"/>
+            <a:srgbClr val="181614"/>
           </a:solidFill>
           <a:ln w="12700">
             <a:solidFill>
-              <a:srgbClr val="1A3A50"/>
+              <a:srgbClr val="3A3530"/>
             </a:solidFill>
             <a:prstDash val="solid"/>
           </a:ln>
@@ -4310,11 +4310,11 @@
             <a:avLst/>
           </a:prstGeom>
           <a:solidFill>
-            <a:srgbClr val="0B7A75"/>
+            <a:srgbClr val="0D8A82"/>
           </a:solidFill>
           <a:ln w="12700">
             <a:solidFill>
-              <a:srgbClr val="0B7A75"/>
+              <a:srgbClr val="0D8A82"/>
             </a:solidFill>
             <a:prstDash val="solid"/>
           </a:ln>
@@ -4347,7 +4347,7 @@
             <a:r>
               <a:rPr lang="en-US" sz="900" b="1" dirty="0">
                 <a:solidFill>
-                  <a:srgbClr val="14B8A6"/>
+                  <a:srgbClr val="2DD4BF"/>
                 </a:solidFill>
               </a:rPr>
               <a:t>20%</a:t>
@@ -4383,7 +4383,7 @@
             <a:r>
               <a:rPr lang="en-US" sz="1100" dirty="0">
                 <a:solidFill>
-                  <a:srgbClr val="8CB3CC"/>
+                  <a:srgbClr val="A89F98"/>
                 </a:solidFill>
               </a:rPr>
               <a:t>Infrastruttura cloud</a:t>
@@ -4407,11 +4407,11 @@
             <a:avLst/>
           </a:prstGeom>
           <a:solidFill>
-            <a:srgbClr val="0A1929"/>
+            <a:srgbClr val="181614"/>
           </a:solidFill>
           <a:ln w="12700">
             <a:solidFill>
-              <a:srgbClr val="1A3A50"/>
+              <a:srgbClr val="3A3530"/>
             </a:solidFill>
             <a:prstDash val="solid"/>
           </a:ln>
@@ -4432,11 +4432,11 @@
             <a:avLst/>
           </a:prstGeom>
           <a:solidFill>
-            <a:srgbClr val="0B7A75"/>
+            <a:srgbClr val="0D8A82"/>
           </a:solidFill>
           <a:ln w="12700">
             <a:solidFill>
-              <a:srgbClr val="0B7A75"/>
+              <a:srgbClr val="0D8A82"/>
             </a:solidFill>
             <a:prstDash val="solid"/>
           </a:ln>
@@ -4469,7 +4469,7 @@
             <a:r>
               <a:rPr lang="en-US" sz="900" b="1" dirty="0">
                 <a:solidFill>
-                  <a:srgbClr val="14B8A6"/>
+                  <a:srgbClr val="2DD4BF"/>
                 </a:solidFill>
               </a:rPr>
               <a:t>12%</a:t>
@@ -4505,7 +4505,7 @@
             <a:r>
               <a:rPr lang="en-US" sz="1100" dirty="0">
                 <a:solidFill>
-                  <a:srgbClr val="8CB3CC"/>
+                  <a:srgbClr val="A89F98"/>
                 </a:solidFill>
               </a:rPr>
               <a:t>Legale, GDPR, Iubenda</a:t>
@@ -4529,11 +4529,11 @@
             <a:avLst/>
           </a:prstGeom>
           <a:solidFill>
-            <a:srgbClr val="0A1929"/>
+            <a:srgbClr val="181614"/>
           </a:solidFill>
           <a:ln w="12700">
             <a:solidFill>
-              <a:srgbClr val="1A3A50"/>
+              <a:srgbClr val="3A3530"/>
             </a:solidFill>
             <a:prstDash val="solid"/>
           </a:ln>
@@ -4554,11 +4554,11 @@
             <a:avLst/>
           </a:prstGeom>
           <a:solidFill>
-            <a:srgbClr val="0B7A75"/>
+            <a:srgbClr val="0D8A82"/>
           </a:solidFill>
           <a:ln w="12700">
             <a:solidFill>
-              <a:srgbClr val="0B7A75"/>
+              <a:srgbClr val="0D8A82"/>
             </a:solidFill>
             <a:prstDash val="solid"/>
           </a:ln>
@@ -4591,7 +4591,7 @@
             <a:r>
               <a:rPr lang="en-US" sz="900" b="1" dirty="0">
                 <a:solidFill>
-                  <a:srgbClr val="14B8A6"/>
+                  <a:srgbClr val="2DD4BF"/>
                 </a:solidFill>
               </a:rPr>
               <a:t>8%</a:t>
@@ -4615,11 +4615,11 @@
             <a:avLst/>
           </a:prstGeom>
           <a:solidFill>
-            <a:srgbClr val="1A2D20"/>
+            <a:srgbClr val="1A1E1A"/>
           </a:solidFill>
           <a:ln w="12700">
             <a:solidFill>
-              <a:srgbClr val="10B981"/>
+              <a:srgbClr val="34D399"/>
             </a:solidFill>
             <a:prstDash val="solid"/>
           </a:ln>
@@ -4708,7 +4708,7 @@
             <a:r>
               <a:rPr lang="en-US" sz="800" dirty="0">
                 <a:solidFill>
-                  <a:srgbClr val="334455"/>
+                  <a:srgbClr val="4A4540"/>
                 </a:solidFill>
               </a:rPr>
               <a:t>11 / 12</a:t>
@@ -4731,7 +4731,7 @@
     <p:bg>
       <p:bgPr>
         <a:solidFill>
-          <a:srgbClr val="0D1F35"/>
+          <a:srgbClr val="1C1C1E"/>
         </a:solidFill>
       </p:bgPr>
     </p:bg>
@@ -4776,7 +4776,7 @@
             <a:r>
               <a:rPr lang="en-US" sz="900" b="1" spc="300" kern="0" dirty="0">
                 <a:solidFill>
-                  <a:srgbClr val="14B8A6"/>
+                  <a:srgbClr val="2DD4BF"/>
                 </a:solidFill>
               </a:rPr>
               <a:t>IL PROSSIMO PASSO</a:t>
@@ -4815,7 +4815,7 @@
             <a:r>
               <a:rPr lang="en-US" sz="3600" b="1" dirty="0">
                 <a:solidFill>
-                  <a:srgbClr val="FFFFFF"/>
+                  <a:srgbClr val="F0EDE8"/>
                 </a:solidFill>
                 <a:latin typeface="Georgia" pitchFamily="34" charset="0"/>
                 <a:ea typeface="Georgia" pitchFamily="34" charset="-122"/>
@@ -4849,7 +4849,7 @@
             <a:r>
               <a:rPr lang="en-US" sz="3600" b="1" dirty="0">
                 <a:solidFill>
-                  <a:srgbClr val="FFFFFF"/>
+                  <a:srgbClr val="F0EDE8"/>
                 </a:solidFill>
                 <a:latin typeface="Georgia" pitchFamily="34" charset="0"/>
                 <a:ea typeface="Georgia" pitchFamily="34" charset="-122"/>
@@ -4869,7 +4869,7 @@
             <a:r>
               <a:rPr lang="en-US" sz="3600" b="1" dirty="0">
                 <a:solidFill>
-                  <a:srgbClr val="FFFFFF"/>
+                  <a:srgbClr val="F0EDE8"/>
                 </a:solidFill>
                 <a:latin typeface="Georgia" pitchFamily="34" charset="0"/>
                 <a:ea typeface="Georgia" pitchFamily="34" charset="-122"/>
@@ -4889,7 +4889,7 @@
             <a:r>
               <a:rPr lang="en-US" sz="3600" b="1" dirty="0">
                 <a:solidFill>
-                  <a:srgbClr val="14B8A6"/>
+                  <a:srgbClr val="2DD4BF"/>
                 </a:solidFill>
                 <a:latin typeface="Georgia" pitchFamily="34" charset="0"/>
                 <a:ea typeface="Georgia" pitchFamily="34" charset="-122"/>
@@ -4906,7 +4906,7 @@
             <a:r>
               <a:rPr lang="en-US" sz="3600" b="1" dirty="0">
                 <a:solidFill>
-                  <a:srgbClr val="FFFFFF"/>
+                  <a:srgbClr val="F0EDE8"/>
                 </a:solidFill>
                 <a:latin typeface="Georgia" pitchFamily="34" charset="0"/>
                 <a:ea typeface="Georgia" pitchFamily="34" charset="-122"/>
@@ -4926,7 +4926,7 @@
             <a:r>
               <a:rPr lang="en-US" sz="3600" b="1" dirty="0">
                 <a:solidFill>
-                  <a:srgbClr val="FFFFFF"/>
+                  <a:srgbClr val="F0EDE8"/>
                 </a:solidFill>
                 <a:latin typeface="Georgia" pitchFamily="34" charset="0"/>
                 <a:ea typeface="Georgia" pitchFamily="34" charset="-122"/>
@@ -4946,7 +4946,7 @@
             <a:r>
               <a:rPr lang="en-US" sz="3600" b="1" dirty="0">
                 <a:solidFill>
-                  <a:srgbClr val="10B981"/>
+                  <a:srgbClr val="34D399"/>
                 </a:solidFill>
                 <a:latin typeface="Georgia" pitchFamily="34" charset="0"/>
                 <a:ea typeface="Georgia" pitchFamily="34" charset="-122"/>
@@ -4988,7 +4988,7 @@
             <a:r>
               <a:rPr lang="en-US" sz="1300" dirty="0">
                 <a:solidFill>
-                  <a:srgbClr val="8CB3CC"/>
+                  <a:srgbClr val="A89F98"/>
                 </a:solidFill>
               </a:rPr>
               <a:t>Cerchiamo €50K–€100K per portare Dloop ai primi 61 merchant,</a:t>
@@ -5005,7 +5005,7 @@
             <a:r>
               <a:rPr lang="en-US" sz="1300" dirty="0">
                 <a:solidFill>
-                  <a:srgbClr val="8CB3CC"/>
+                  <a:srgbClr val="A89F98"/>
                 </a:solidFill>
               </a:rPr>
               <a:t>raggiungere il break-even a M11 e costruire il leader verticale</a:t>
@@ -5022,7 +5022,7 @@
             <a:r>
               <a:rPr lang="en-US" sz="1300" dirty="0">
                 <a:solidFill>
-                  <a:srgbClr val="8CB3CC"/>
+                  <a:srgbClr val="A89F98"/>
                 </a:solidFill>
               </a:rPr>
               <a:t>del delivery locale italiano.</a:t>
@@ -5058,7 +5058,7 @@
             <a:r>
               <a:rPr lang="en-US" sz="800" spc="100" kern="0" dirty="0">
                 <a:solidFill>
-                  <a:srgbClr val="334455"/>
+                  <a:srgbClr val="4A4540"/>
                 </a:solidFill>
               </a:rPr>
               <a:t>Founder &amp; CEO</a:t>
@@ -5094,7 +5094,7 @@
             <a:r>
               <a:rPr lang="en-US" sz="1100" b="1" dirty="0">
                 <a:solidFill>
-                  <a:srgbClr val="FFFFFF"/>
+                  <a:srgbClr val="F0EDE8"/>
                 </a:solidFill>
               </a:rPr>
               <a:t>Crescenzo Amodio</a:t>
@@ -5130,7 +5130,7 @@
             <a:r>
               <a:rPr lang="en-US" sz="800" spc="100" kern="0" dirty="0">
                 <a:solidFill>
-                  <a:srgbClr val="334455"/>
+                  <a:srgbClr val="4A4540"/>
                 </a:solidFill>
               </a:rPr>
               <a:t>Email</a:t>
@@ -5166,7 +5166,7 @@
             <a:r>
               <a:rPr lang="en-US" sz="1100" b="1" dirty="0">
                 <a:solidFill>
-                  <a:srgbClr val="FFFFFF"/>
+                  <a:srgbClr val="F0EDE8"/>
                 </a:solidFill>
               </a:rPr>
               <a:t>info@dloop.it</a:t>
@@ -5202,7 +5202,7 @@
             <a:r>
               <a:rPr lang="en-US" sz="800" spc="100" kern="0" dirty="0">
                 <a:solidFill>
-                  <a:srgbClr val="334455"/>
+                  <a:srgbClr val="4A4540"/>
                 </a:solidFill>
               </a:rPr>
               <a:t>Sito</a:t>
@@ -5238,7 +5238,7 @@
             <a:r>
               <a:rPr lang="en-US" sz="1100" b="1" dirty="0">
                 <a:solidFill>
-                  <a:srgbClr val="FFFFFF"/>
+                  <a:srgbClr val="F0EDE8"/>
                 </a:solidFill>
               </a:rPr>
               <a:t>www.dloop.it</a:t>
@@ -5274,7 +5274,7 @@
             <a:r>
               <a:rPr lang="en-US" sz="800" spc="100" kern="0" dirty="0">
                 <a:solidFill>
-                  <a:srgbClr val="334455"/>
+                  <a:srgbClr val="4A4540"/>
                 </a:solidFill>
               </a:rPr>
               <a:t>Pitch live</a:t>
@@ -5310,7 +5310,7 @@
             <a:r>
               <a:rPr lang="en-US" sz="1100" b="1" dirty="0">
                 <a:solidFill>
-                  <a:srgbClr val="14B8A6"/>
+                  <a:srgbClr val="2DD4BF"/>
                 </a:solidFill>
               </a:rPr>
               <a:t>creamoj-ai.github.io/dloop-pitch-deck</a:t>
@@ -5346,7 +5346,7 @@
             <a:r>
               <a:rPr lang="en-US" sz="800" spc="100" kern="0" dirty="0">
                 <a:solidFill>
-                  <a:srgbClr val="334455"/>
+                  <a:srgbClr val="4A4540"/>
                 </a:solidFill>
               </a:rPr>
               <a:t>P.IVA</a:t>
@@ -5382,7 +5382,7 @@
             <a:r>
               <a:rPr lang="en-US" sz="1100" b="1" dirty="0">
                 <a:solidFill>
-                  <a:srgbClr val="FFFFFF"/>
+                  <a:srgbClr val="F0EDE8"/>
                 </a:solidFill>
               </a:rPr>
               <a:t>IT 09532291219</a:t>
@@ -5418,7 +5418,7 @@
             <a:r>
               <a:rPr lang="en-US" sz="800" spc="100" kern="0" dirty="0">
                 <a:solidFill>
-                  <a:srgbClr val="334455"/>
+                  <a:srgbClr val="4A4540"/>
                 </a:solidFill>
               </a:rPr>
               <a:t>Telefono</a:t>
@@ -5454,7 +5454,7 @@
             <a:r>
               <a:rPr lang="en-US" sz="1100" b="1" dirty="0">
                 <a:solidFill>
-                  <a:srgbClr val="FFFFFF"/>
+                  <a:srgbClr val="F0EDE8"/>
                 </a:solidFill>
               </a:rPr>
               <a:t>+39 373 790 2538</a:t>
@@ -5490,7 +5490,7 @@
             <a:r>
               <a:rPr lang="en-US" sz="700" dirty="0">
                 <a:solidFill>
-                  <a:srgbClr val="2A3A4A"/>
+                  <a:srgbClr val="3A3530"/>
                 </a:solidFill>
               </a:rPr>
               <a:t>RISERVATO · CAV S.R.L. · Startup Innovativa ex D.L. 3/2015 · Napoli · 2026</a:t>
@@ -5526,7 +5526,7 @@
             <a:r>
               <a:rPr lang="en-US" sz="800" dirty="0">
                 <a:solidFill>
-                  <a:srgbClr val="334455"/>
+                  <a:srgbClr val="4A4540"/>
                 </a:solidFill>
               </a:rPr>
               <a:t>12 / 12</a:t>
@@ -5549,7 +5549,7 @@
     <p:bg>
       <p:bgPr>
         <a:solidFill>
-          <a:srgbClr val="0A1929"/>
+          <a:srgbClr val="141412"/>
         </a:solidFill>
       </p:bgPr>
     </p:bg>
@@ -5594,7 +5594,7 @@
             <a:r>
               <a:rPr lang="en-US" sz="900" b="1" spc="300" kern="0" dirty="0">
                 <a:solidFill>
-                  <a:srgbClr val="14B8A6"/>
+                  <a:srgbClr val="2DD4BF"/>
                 </a:solidFill>
               </a:rPr>
               <a:t>IL PROBLEMA</a:t>
@@ -5633,7 +5633,7 @@
             <a:r>
               <a:rPr lang="en-US" sz="3400" b="1" dirty="0">
                 <a:solidFill>
-                  <a:srgbClr val="FFFFFF"/>
+                  <a:srgbClr val="F0EDE8"/>
                 </a:solidFill>
                 <a:latin typeface="Georgia" pitchFamily="34" charset="0"/>
                 <a:ea typeface="Georgia" pitchFamily="34" charset="-122"/>
@@ -5653,7 +5653,7 @@
             <a:r>
               <a:rPr lang="en-US" sz="3400" b="1" dirty="0">
                 <a:solidFill>
-                  <a:srgbClr val="FFFFFF"/>
+                  <a:srgbClr val="F0EDE8"/>
                 </a:solidFill>
                 <a:latin typeface="Georgia" pitchFamily="34" charset="0"/>
                 <a:ea typeface="Georgia" pitchFamily="34" charset="-122"/>
@@ -5680,11 +5680,11 @@
             <a:avLst/>
           </a:prstGeom>
           <a:solidFill>
-            <a:srgbClr val="0F2535"/>
+            <a:srgbClr val="201E1B"/>
           </a:solidFill>
           <a:ln w="12700">
             <a:solidFill>
-              <a:srgbClr val="1A3A50"/>
+              <a:srgbClr val="3A3530"/>
             </a:solidFill>
             <a:prstDash val="solid"/>
           </a:ln>
@@ -5760,7 +5760,7 @@
             <a:r>
               <a:rPr lang="en-US" sz="1400" b="1" dirty="0">
                 <a:solidFill>
-                  <a:srgbClr val="FFFFFF"/>
+                  <a:srgbClr val="F0EDE8"/>
                 </a:solidFill>
                 <a:latin typeface="Georgia" pitchFamily="34" charset="0"/>
                 <a:ea typeface="Georgia" pitchFamily="34" charset="-122"/>
@@ -5802,7 +5802,7 @@
             <a:r>
               <a:rPr lang="en-US" sz="1100" dirty="0">
                 <a:solidFill>
-                  <a:srgbClr val="8CB3CC"/>
+                  <a:srgbClr val="A89F98"/>
                 </a:solidFill>
               </a:rPr>
               <a:t>Merchant gestiscono ordini via WhatsApp personale, telefono e carta. Zero tracciabilità, zero analytics, errori continui.</a:t>
@@ -5826,11 +5826,11 @@
             <a:avLst/>
           </a:prstGeom>
           <a:solidFill>
-            <a:srgbClr val="0F2535"/>
+            <a:srgbClr val="201E1B"/>
           </a:solidFill>
           <a:ln w="12700">
             <a:solidFill>
-              <a:srgbClr val="1A3A50"/>
+              <a:srgbClr val="3A3530"/>
             </a:solidFill>
             <a:prstDash val="solid"/>
           </a:ln>
@@ -5906,7 +5906,7 @@
             <a:r>
               <a:rPr lang="en-US" sz="1400" b="1" dirty="0">
                 <a:solidFill>
-                  <a:srgbClr val="FFFFFF"/>
+                  <a:srgbClr val="F0EDE8"/>
                 </a:solidFill>
                 <a:latin typeface="Georgia" pitchFamily="34" charset="0"/>
                 <a:ea typeface="Georgia" pitchFamily="34" charset="-122"/>
@@ -5948,7 +5948,7 @@
             <a:r>
               <a:rPr lang="en-US" sz="1100" dirty="0">
                 <a:solidFill>
-                  <a:srgbClr val="8CB3CC"/>
+                  <a:srgbClr val="A89F98"/>
                 </a:solidFill>
               </a:rPr>
               <a:t>I rider P.IVA ricevono incarichi via messaggi informali. Nessuna app, nessuna prova di consegna, nessun percorso ottimizzato.</a:t>
@@ -5972,11 +5972,11 @@
             <a:avLst/>
           </a:prstGeom>
           <a:solidFill>
-            <a:srgbClr val="0F2535"/>
+            <a:srgbClr val="201E1B"/>
           </a:solidFill>
           <a:ln w="12700">
             <a:solidFill>
-              <a:srgbClr val="1A3A50"/>
+              <a:srgbClr val="3A3530"/>
             </a:solidFill>
             <a:prstDash val="solid"/>
           </a:ln>
@@ -6052,7 +6052,7 @@
             <a:r>
               <a:rPr lang="en-US" sz="1400" b="1" dirty="0">
                 <a:solidFill>
-                  <a:srgbClr val="FFFFFF"/>
+                  <a:srgbClr val="F0EDE8"/>
                 </a:solidFill>
                 <a:latin typeface="Georgia" pitchFamily="34" charset="0"/>
                 <a:ea typeface="Georgia" pitchFamily="34" charset="-122"/>
@@ -6094,7 +6094,7 @@
             <a:r>
               <a:rPr lang="en-US" sz="1100" dirty="0">
                 <a:solidFill>
-                  <a:srgbClr val="8CB3CC"/>
+                  <a:srgbClr val="A89F98"/>
                 </a:solidFill>
               </a:rPr>
               <a:t>Onfleet, Tookan, LogiNext: $500+/mese in inglese, zero localizzazione IT, nessun supporto al modello P.IVA autonomo.</a:t>
@@ -6118,7 +6118,7 @@
             <a:avLst/>
           </a:prstGeom>
           <a:solidFill>
-            <a:srgbClr val="1A2D20"/>
+            <a:srgbClr val="1A1E1A"/>
           </a:solidFill>
           <a:ln w="12700">
             <a:solidFill>
@@ -6194,7 +6194,7 @@
             <a:r>
               <a:rPr lang="en-US" sz="800" dirty="0">
                 <a:solidFill>
-                  <a:srgbClr val="334455"/>
+                  <a:srgbClr val="4A4540"/>
                 </a:solidFill>
               </a:rPr>
               <a:t>02 / 12</a:t>
@@ -6217,7 +6217,7 @@
     <p:bg>
       <p:bgPr>
         <a:solidFill>
-          <a:srgbClr val="0D1F35"/>
+          <a:srgbClr val="1C1C1E"/>
         </a:solidFill>
       </p:bgPr>
     </p:bg>
@@ -6262,7 +6262,7 @@
             <a:r>
               <a:rPr lang="en-US" sz="900" b="1" spc="300" kern="0" dirty="0">
                 <a:solidFill>
-                  <a:srgbClr val="14B8A6"/>
+                  <a:srgbClr val="2DD4BF"/>
                 </a:solidFill>
               </a:rPr>
               <a:t>LA SOLUZIONE</a:t>
@@ -6301,7 +6301,7 @@
             <a:r>
               <a:rPr lang="en-US" sz="3400" b="1" dirty="0">
                 <a:solidFill>
-                  <a:srgbClr val="FFFFFF"/>
+                  <a:srgbClr val="F0EDE8"/>
                 </a:solidFill>
                 <a:latin typeface="Georgia" pitchFamily="34" charset="0"/>
                 <a:ea typeface="Georgia" pitchFamily="34" charset="-122"/>
@@ -6321,7 +6321,7 @@
             <a:r>
               <a:rPr lang="en-US" sz="3400" b="1" dirty="0">
                 <a:solidFill>
-                  <a:srgbClr val="FFFFFF"/>
+                  <a:srgbClr val="F0EDE8"/>
                 </a:solidFill>
                 <a:latin typeface="Georgia" pitchFamily="34" charset="0"/>
                 <a:ea typeface="Georgia" pitchFamily="34" charset="-122"/>
@@ -6348,11 +6348,11 @@
             <a:avLst/>
           </a:prstGeom>
           <a:solidFill>
-            <a:srgbClr val="14B8A6"/>
+            <a:srgbClr val="2DD4BF"/>
           </a:solidFill>
           <a:ln w="12700">
             <a:solidFill>
-              <a:srgbClr val="14B8A6"/>
+              <a:srgbClr val="2DD4BF"/>
             </a:solidFill>
             <a:prstDash val="solid"/>
           </a:ln>
@@ -6412,11 +6412,11 @@
             <a:avLst/>
           </a:prstGeom>
           <a:solidFill>
-            <a:srgbClr val="14B8A6"/>
+            <a:srgbClr val="2DD4BF"/>
           </a:solidFill>
           <a:ln w="12700">
             <a:solidFill>
-              <a:srgbClr val="14B8A6"/>
+              <a:srgbClr val="2DD4BF"/>
             </a:solidFill>
             <a:prstDash val="solid"/>
           </a:ln>
@@ -6476,11 +6476,11 @@
             <a:avLst/>
           </a:prstGeom>
           <a:solidFill>
-            <a:srgbClr val="14B8A6"/>
+            <a:srgbClr val="2DD4BF"/>
           </a:solidFill>
           <a:ln w="12700">
             <a:solidFill>
-              <a:srgbClr val="14B8A6"/>
+              <a:srgbClr val="2DD4BF"/>
             </a:solidFill>
             <a:prstDash val="solid"/>
           </a:ln>
@@ -6540,11 +6540,11 @@
             <a:avLst/>
           </a:prstGeom>
           <a:solidFill>
-            <a:srgbClr val="14B8A6"/>
+            <a:srgbClr val="2DD4BF"/>
           </a:solidFill>
           <a:ln w="12700">
             <a:solidFill>
-              <a:srgbClr val="14B8A6"/>
+              <a:srgbClr val="2DD4BF"/>
             </a:solidFill>
             <a:prstDash val="solid"/>
           </a:ln>
@@ -6604,11 +6604,11 @@
             <a:avLst/>
           </a:prstGeom>
           <a:solidFill>
-            <a:srgbClr val="14B8A6"/>
+            <a:srgbClr val="2DD4BF"/>
           </a:solidFill>
           <a:ln w="12700">
             <a:solidFill>
-              <a:srgbClr val="14B8A6"/>
+              <a:srgbClr val="2DD4BF"/>
             </a:solidFill>
             <a:prstDash val="solid"/>
           </a:ln>
@@ -6668,11 +6668,11 @@
             <a:avLst/>
           </a:prstGeom>
           <a:solidFill>
-            <a:srgbClr val="0A2A28"/>
+            <a:srgbClr val="1A1E1C"/>
           </a:solidFill>
           <a:ln w="12700">
             <a:solidFill>
-              <a:srgbClr val="0B7A75"/>
+              <a:srgbClr val="0D8A82"/>
             </a:solidFill>
             <a:prstDash val="solid"/>
           </a:ln>
@@ -6751,11 +6751,11 @@
             </a:avLst>
           </a:prstGeom>
           <a:solidFill>
-            <a:srgbClr val="0A1929"/>
+            <a:srgbClr val="181614"/>
           </a:solidFill>
           <a:ln w="12700">
             <a:solidFill>
-              <a:srgbClr val="1A3A50"/>
+              <a:srgbClr val="3A3530"/>
             </a:solidFill>
             <a:prstDash val="solid"/>
           </a:ln>
@@ -6795,7 +6795,7 @@
             <a:r>
               <a:rPr lang="en-US" sz="800" spc="200" kern="0" dirty="0">
                 <a:solidFill>
-                  <a:srgbClr val="14B8A6"/>
+                  <a:srgbClr val="2DD4BF"/>
                 </a:solidFill>
               </a:rPr>
               <a:t>DLOOP · NOTIFICA ORDINE</a:t>
@@ -6819,11 +6819,11 @@
             <a:avLst/>
           </a:prstGeom>
           <a:solidFill>
-            <a:srgbClr val="0D2D3A"/>
+            <a:srgbClr val="201E1A"/>
           </a:solidFill>
           <a:ln w="12700">
             <a:solidFill>
-              <a:srgbClr val="0B7A75"/>
+              <a:srgbClr val="0D8A82"/>
             </a:solidFill>
             <a:prstDash val="solid"/>
           </a:ln>
@@ -6844,11 +6844,11 @@
             <a:avLst/>
           </a:prstGeom>
           <a:solidFill>
-            <a:srgbClr val="0B7A75"/>
+            <a:srgbClr val="0D8A82"/>
           </a:solidFill>
           <a:ln w="12700">
             <a:solidFill>
-              <a:srgbClr val="0B7A75"/>
+              <a:srgbClr val="0D8A82"/>
             </a:solidFill>
             <a:prstDash val="solid"/>
           </a:ln>
@@ -6985,11 +6985,11 @@
             <a:avLst/>
           </a:prstGeom>
           <a:solidFill>
-            <a:srgbClr val="1A2535"/>
+            <a:srgbClr val="201E1C"/>
           </a:solidFill>
           <a:ln w="12700">
             <a:solidFill>
-              <a:srgbClr val="334455"/>
+              <a:srgbClr val="4A4540"/>
             </a:solidFill>
             <a:prstDash val="solid"/>
           </a:ln>
@@ -7078,7 +7078,7 @@
             <a:r>
               <a:rPr lang="en-US" sz="800" dirty="0">
                 <a:solidFill>
-                  <a:srgbClr val="334455"/>
+                  <a:srgbClr val="4A4540"/>
                 </a:solidFill>
               </a:rPr>
               <a:t>via Twilio · WhatsApp Business API</a:t>
@@ -7114,7 +7114,7 @@
             <a:r>
               <a:rPr lang="en-US" sz="800" dirty="0">
                 <a:solidFill>
-                  <a:srgbClr val="334455"/>
+                  <a:srgbClr val="4A4540"/>
                 </a:solidFill>
               </a:rPr>
               <a:t>03 / 12</a:t>
@@ -7137,7 +7137,7 @@
     <p:bg>
       <p:bgPr>
         <a:solidFill>
-          <a:srgbClr val="0A1929"/>
+          <a:srgbClr val="141412"/>
         </a:solidFill>
       </p:bgPr>
     </p:bg>
@@ -7182,7 +7182,7 @@
             <a:r>
               <a:rPr lang="en-US" sz="900" b="1" spc="300" kern="0" dirty="0">
                 <a:solidFill>
-                  <a:srgbClr val="14B8A6"/>
+                  <a:srgbClr val="2DD4BF"/>
                 </a:solidFill>
               </a:rPr>
               <a:t>MERCATO</a:t>
@@ -7221,7 +7221,7 @@
             <a:r>
               <a:rPr lang="en-US" sz="3400" b="1" dirty="0">
                 <a:solidFill>
-                  <a:srgbClr val="FFFFFF"/>
+                  <a:srgbClr val="F0EDE8"/>
                 </a:solidFill>
                 <a:latin typeface="Georgia" pitchFamily="34" charset="0"/>
                 <a:ea typeface="Georgia" pitchFamily="34" charset="-122"/>
@@ -7241,7 +7241,7 @@
             <a:r>
               <a:rPr lang="en-US" sz="3400" b="1" dirty="0">
                 <a:solidFill>
-                  <a:srgbClr val="FFFFFF"/>
+                  <a:srgbClr val="F0EDE8"/>
                 </a:solidFill>
                 <a:latin typeface="Georgia" pitchFamily="34" charset="0"/>
                 <a:ea typeface="Georgia" pitchFamily="34" charset="-122"/>
@@ -7268,11 +7268,11 @@
             <a:avLst/>
           </a:prstGeom>
           <a:solidFill>
-            <a:srgbClr val="0A2A28"/>
+            <a:srgbClr val="1A1E1C"/>
           </a:solidFill>
           <a:ln w="12700">
             <a:solidFill>
-              <a:srgbClr val="0B7A75"/>
+              <a:srgbClr val="0D8A82"/>
             </a:solidFill>
             <a:prstDash val="solid"/>
           </a:ln>
@@ -7305,7 +7305,7 @@
             <a:r>
               <a:rPr lang="en-US" sz="4000" b="1" dirty="0">
                 <a:solidFill>
-                  <a:srgbClr val="14B8A6"/>
+                  <a:srgbClr val="2DD4BF"/>
                 </a:solidFill>
                 <a:latin typeface="Georgia" pitchFamily="34" charset="0"/>
                 <a:ea typeface="Georgia" pitchFamily="34" charset="-122"/>
@@ -7347,7 +7347,7 @@
             <a:r>
               <a:rPr lang="en-US" sz="1200" dirty="0">
                 <a:solidFill>
-                  <a:srgbClr val="8CB3CC"/>
+                  <a:srgbClr val="A89F98"/>
                 </a:solidFill>
               </a:rPr>
               <a:t>Mercato delivery</a:t>
@@ -7364,7 +7364,7 @@
             <a:r>
               <a:rPr lang="en-US" sz="1200" dirty="0">
                 <a:solidFill>
-                  <a:srgbClr val="8CB3CC"/>
+                  <a:srgbClr val="A89F98"/>
                 </a:solidFill>
               </a:rPr>
               <a:t>locale Italia 2025</a:t>
@@ -7388,11 +7388,11 @@
             <a:avLst/>
           </a:prstGeom>
           <a:solidFill>
-            <a:srgbClr val="0B7A75"/>
+            <a:srgbClr val="0D8A82"/>
           </a:solidFill>
           <a:ln w="12700">
             <a:solidFill>
-              <a:srgbClr val="0B7A75"/>
+              <a:srgbClr val="0D8A82"/>
             </a:solidFill>
             <a:prstDash val="solid"/>
           </a:ln>
@@ -7425,7 +7425,7 @@
             <a:r>
               <a:rPr lang="en-US" sz="900" dirty="0">
                 <a:solidFill>
-                  <a:srgbClr val="14B8A6"/>
+                  <a:srgbClr val="2DD4BF"/>
                 </a:solidFill>
               </a:rPr>
               <a:t>SOM target: €12M/anno</a:t>
@@ -7449,11 +7449,11 @@
             <a:avLst/>
           </a:prstGeom>
           <a:solidFill>
-            <a:srgbClr val="0A2A28"/>
+            <a:srgbClr val="1A1E1C"/>
           </a:solidFill>
           <a:ln w="12700">
             <a:solidFill>
-              <a:srgbClr val="0B7A75"/>
+              <a:srgbClr val="0D8A82"/>
             </a:solidFill>
             <a:prstDash val="solid"/>
           </a:ln>
@@ -7486,7 +7486,7 @@
             <a:r>
               <a:rPr lang="en-US" sz="4000" b="1" dirty="0">
                 <a:solidFill>
-                  <a:srgbClr val="14B8A6"/>
+                  <a:srgbClr val="2DD4BF"/>
                 </a:solidFill>
                 <a:latin typeface="Georgia" pitchFamily="34" charset="0"/>
                 <a:ea typeface="Georgia" pitchFamily="34" charset="-122"/>
@@ -7528,7 +7528,7 @@
             <a:r>
               <a:rPr lang="en-US" sz="1200" dirty="0">
                 <a:solidFill>
-                  <a:srgbClr val="8CB3CC"/>
+                  <a:srgbClr val="A89F98"/>
                 </a:solidFill>
               </a:rPr>
               <a:t>Attività delivery</a:t>
@@ -7545,7 +7545,7 @@
             <a:r>
               <a:rPr lang="en-US" sz="1200" dirty="0">
                 <a:solidFill>
-                  <a:srgbClr val="8CB3CC"/>
+                  <a:srgbClr val="A89F98"/>
                 </a:solidFill>
               </a:rPr>
               <a:t>Napoli + Caserta</a:t>
@@ -7569,11 +7569,11 @@
             <a:avLst/>
           </a:prstGeom>
           <a:solidFill>
-            <a:srgbClr val="0B7A75"/>
+            <a:srgbClr val="0D8A82"/>
           </a:solidFill>
           <a:ln w="12700">
             <a:solidFill>
-              <a:srgbClr val="0B7A75"/>
+              <a:srgbClr val="0D8A82"/>
             </a:solidFill>
             <a:prstDash val="solid"/>
           </a:ln>
@@ -7606,7 +7606,7 @@
             <a:r>
               <a:rPr lang="en-US" sz="900" dirty="0">
                 <a:solidFill>
-                  <a:srgbClr val="14B8A6"/>
+                  <a:srgbClr val="2DD4BF"/>
                 </a:solidFill>
               </a:rPr>
               <a:t>Solo 3-5% usa software</a:t>
@@ -7630,11 +7630,11 @@
             <a:avLst/>
           </a:prstGeom>
           <a:solidFill>
-            <a:srgbClr val="0A2A28"/>
+            <a:srgbClr val="1A1E1C"/>
           </a:solidFill>
           <a:ln w="12700">
             <a:solidFill>
-              <a:srgbClr val="0B7A75"/>
+              <a:srgbClr val="0D8A82"/>
             </a:solidFill>
             <a:prstDash val="solid"/>
           </a:ln>
@@ -7667,7 +7667,7 @@
             <a:r>
               <a:rPr lang="en-US" sz="4000" b="1" dirty="0">
                 <a:solidFill>
-                  <a:srgbClr val="14B8A6"/>
+                  <a:srgbClr val="2DD4BF"/>
                 </a:solidFill>
                 <a:latin typeface="Georgia" pitchFamily="34" charset="0"/>
                 <a:ea typeface="Georgia" pitchFamily="34" charset="-122"/>
@@ -7709,7 +7709,7 @@
             <a:r>
               <a:rPr lang="en-US" sz="1200" dirty="0">
                 <a:solidFill>
-                  <a:srgbClr val="8CB3CC"/>
+                  <a:srgbClr val="A89F98"/>
                 </a:solidFill>
               </a:rPr>
               <a:t>Revenue media</a:t>
@@ -7726,7 +7726,7 @@
             <a:r>
               <a:rPr lang="en-US" sz="1200" dirty="0">
                 <a:solidFill>
-                  <a:srgbClr val="8CB3CC"/>
+                  <a:srgbClr val="A89F98"/>
                 </a:solidFill>
               </a:rPr>
               <a:t>per dealer/mese</a:t>
@@ -7750,11 +7750,11 @@
             <a:avLst/>
           </a:prstGeom>
           <a:solidFill>
-            <a:srgbClr val="0B7A75"/>
+            <a:srgbClr val="0D8A82"/>
           </a:solidFill>
           <a:ln w="12700">
             <a:solidFill>
-              <a:srgbClr val="0B7A75"/>
+              <a:srgbClr val="0D8A82"/>
             </a:solidFill>
             <a:prstDash val="solid"/>
           </a:ln>
@@ -7787,7 +7787,7 @@
             <a:r>
               <a:rPr lang="en-US" sz="900" dirty="0">
                 <a:solidFill>
-                  <a:srgbClr val="14B8A6"/>
+                  <a:srgbClr val="2DD4BF"/>
                 </a:solidFill>
               </a:rPr>
               <a:t>LTV: €7.440 (24 mesi)</a:t>
@@ -7811,11 +7811,11 @@
             <a:avLst/>
           </a:prstGeom>
           <a:solidFill>
-            <a:srgbClr val="0F2535"/>
+            <a:srgbClr val="201E1B"/>
           </a:solidFill>
           <a:ln w="12700">
             <a:solidFill>
-              <a:srgbClr val="1A3A50"/>
+              <a:srgbClr val="3A3530"/>
             </a:solidFill>
             <a:prstDash val="solid"/>
           </a:ln>
@@ -7848,7 +7848,7 @@
             <a:r>
               <a:rPr lang="en-US" sz="1200" b="1" dirty="0">
                 <a:solidFill>
-                  <a:srgbClr val="FFFFFF"/>
+                  <a:srgbClr val="F0EDE8"/>
                 </a:solidFill>
               </a:rPr>
               <a:t>🏆  Risparmio vs Alfonsino</a:t>
@@ -7887,7 +7887,7 @@
             <a:r>
               <a:rPr lang="en-US" sz="1000" dirty="0">
                 <a:solidFill>
-                  <a:srgbClr val="8CB3CC"/>
+                  <a:srgbClr val="A89F98"/>
                 </a:solidFill>
               </a:rPr>
               <a:t>Un dealer Dloop risparmia +€17.790/anno rispetto ad Alfonsino (marketplace 25-30%). Dloop è puro SaaS — zero commissioni sugli ordini.</a:t>
@@ -7911,11 +7911,11 @@
             <a:avLst/>
           </a:prstGeom>
           <a:solidFill>
-            <a:srgbClr val="0F2535"/>
+            <a:srgbClr val="201E1B"/>
           </a:solidFill>
           <a:ln w="12700">
             <a:solidFill>
-              <a:srgbClr val="1A3A50"/>
+              <a:srgbClr val="3A3530"/>
             </a:solidFill>
             <a:prstDash val="solid"/>
           </a:ln>
@@ -7948,7 +7948,7 @@
             <a:r>
               <a:rPr lang="en-US" sz="1200" b="1" dirty="0">
                 <a:solidFill>
-                  <a:srgbClr val="FFFFFF"/>
+                  <a:srgbClr val="F0EDE8"/>
                 </a:solidFill>
               </a:rPr>
               <a:t>🌍  Espansione geografica</a:t>
@@ -7987,7 +7987,7 @@
             <a:r>
               <a:rPr lang="en-US" sz="1000" dirty="0">
                 <a:solidFill>
-                  <a:srgbClr val="8CB3CC"/>
+                  <a:srgbClr val="A89F98"/>
                 </a:solidFill>
               </a:rPr>
               <a:t>Campania → Sud Italia M12 → Nazionale M18. Ogni provincia è un mercato autonomo replicabile.</a:t>
@@ -8023,7 +8023,7 @@
             <a:r>
               <a:rPr lang="en-US" sz="800" dirty="0">
                 <a:solidFill>
-                  <a:srgbClr val="334455"/>
+                  <a:srgbClr val="4A4540"/>
                 </a:solidFill>
               </a:rPr>
               <a:t>04 / 12</a:t>
@@ -8046,7 +8046,7 @@
     <p:bg>
       <p:bgPr>
         <a:solidFill>
-          <a:srgbClr val="0D1F35"/>
+          <a:srgbClr val="1C1C1E"/>
         </a:solidFill>
       </p:bgPr>
     </p:bg>
@@ -8091,7 +8091,7 @@
             <a:r>
               <a:rPr lang="en-US" sz="900" b="1" spc="300" kern="0" dirty="0">
                 <a:solidFill>
-                  <a:srgbClr val="14B8A6"/>
+                  <a:srgbClr val="2DD4BF"/>
                 </a:solidFill>
               </a:rPr>
               <a:t>ANALISI COMPETITIVA</a:t>
@@ -8130,7 +8130,7 @@
             <a:r>
               <a:rPr lang="en-US" sz="3400" b="1" dirty="0">
                 <a:solidFill>
-                  <a:srgbClr val="FFFFFF"/>
+                  <a:srgbClr val="F0EDE8"/>
                 </a:solidFill>
                 <a:latin typeface="Georgia" pitchFamily="34" charset="0"/>
                 <a:ea typeface="Georgia" pitchFamily="34" charset="-122"/>
@@ -8150,7 +8150,7 @@
             <a:r>
               <a:rPr lang="en-US" sz="3400" b="1" dirty="0">
                 <a:solidFill>
-                  <a:srgbClr val="FFFFFF"/>
+                  <a:srgbClr val="F0EDE8"/>
                 </a:solidFill>
                 <a:latin typeface="Georgia" pitchFamily="34" charset="0"/>
                 <a:ea typeface="Georgia" pitchFamily="34" charset="-122"/>
@@ -8177,11 +8177,11 @@
             <a:avLst/>
           </a:prstGeom>
           <a:solidFill>
-            <a:srgbClr val="0A2A4A"/>
+            <a:srgbClr val="1E1C18"/>
           </a:solidFill>
           <a:ln w="12700">
             <a:solidFill>
-              <a:srgbClr val="1A3A60"/>
+              <a:srgbClr val="3A3530"/>
             </a:solidFill>
             <a:prstDash val="solid"/>
           </a:ln>
@@ -8217,7 +8217,7 @@
             <a:r>
               <a:rPr lang="en-US" sz="900" b="1" dirty="0">
                 <a:solidFill>
-                  <a:srgbClr val="14B8A6"/>
+                  <a:srgbClr val="2DD4BF"/>
                 </a:solidFill>
               </a:rPr>
               <a:t>Player</a:t>
@@ -8241,11 +8241,11 @@
             <a:avLst/>
           </a:prstGeom>
           <a:solidFill>
-            <a:srgbClr val="0A2A4A"/>
+            <a:srgbClr val="1E1C18"/>
           </a:solidFill>
           <a:ln w="12700">
             <a:solidFill>
-              <a:srgbClr val="1A3A60"/>
+              <a:srgbClr val="3A3530"/>
             </a:solidFill>
             <a:prstDash val="solid"/>
           </a:ln>
@@ -8281,7 +8281,7 @@
             <a:r>
               <a:rPr lang="en-US" sz="900" b="1" dirty="0">
                 <a:solidFill>
-                  <a:srgbClr val="14B8A6"/>
+                  <a:srgbClr val="2DD4BF"/>
                 </a:solidFill>
               </a:rPr>
               <a:t>Pricing</a:t>
@@ -8305,11 +8305,11 @@
             <a:avLst/>
           </a:prstGeom>
           <a:solidFill>
-            <a:srgbClr val="0A2A4A"/>
+            <a:srgbClr val="1E1C18"/>
           </a:solidFill>
           <a:ln w="12700">
             <a:solidFill>
-              <a:srgbClr val="1A3A60"/>
+              <a:srgbClr val="3A3530"/>
             </a:solidFill>
             <a:prstDash val="solid"/>
           </a:ln>
@@ -8345,7 +8345,7 @@
             <a:r>
               <a:rPr lang="en-US" sz="900" b="1" dirty="0">
                 <a:solidFill>
-                  <a:srgbClr val="14B8A6"/>
+                  <a:srgbClr val="2DD4BF"/>
                 </a:solidFill>
               </a:rPr>
               <a:t>WhatsApp</a:t>
@@ -8362,7 +8362,7 @@
             <a:r>
               <a:rPr lang="en-US" sz="900" b="1" dirty="0">
                 <a:solidFill>
-                  <a:srgbClr val="14B8A6"/>
+                  <a:srgbClr val="2DD4BF"/>
                 </a:solidFill>
               </a:rPr>
               <a:t>nativo</a:t>
@@ -8386,11 +8386,11 @@
             <a:avLst/>
           </a:prstGeom>
           <a:solidFill>
-            <a:srgbClr val="0A2A4A"/>
+            <a:srgbClr val="1E1C18"/>
           </a:solidFill>
           <a:ln w="12700">
             <a:solidFill>
-              <a:srgbClr val="1A3A60"/>
+              <a:srgbClr val="3A3530"/>
             </a:solidFill>
             <a:prstDash val="solid"/>
           </a:ln>
@@ -8426,7 +8426,7 @@
             <a:r>
               <a:rPr lang="en-US" sz="900" b="1" dirty="0">
                 <a:solidFill>
-                  <a:srgbClr val="14B8A6"/>
+                  <a:srgbClr val="2DD4BF"/>
                 </a:solidFill>
               </a:rPr>
               <a:t>Modello</a:t>
@@ -8443,7 +8443,7 @@
             <a:r>
               <a:rPr lang="en-US" sz="900" b="1" dirty="0">
                 <a:solidFill>
-                  <a:srgbClr val="14B8A6"/>
+                  <a:srgbClr val="2DD4BF"/>
                 </a:solidFill>
               </a:rPr>
               <a:t>P.IVA IT</a:t>
@@ -8467,11 +8467,11 @@
             <a:avLst/>
           </a:prstGeom>
           <a:solidFill>
-            <a:srgbClr val="0A2A4A"/>
+            <a:srgbClr val="1E1C18"/>
           </a:solidFill>
           <a:ln w="12700">
             <a:solidFill>
-              <a:srgbClr val="1A3A60"/>
+              <a:srgbClr val="3A3530"/>
             </a:solidFill>
             <a:prstDash val="solid"/>
           </a:ln>
@@ -8507,7 +8507,7 @@
             <a:r>
               <a:rPr lang="en-US" sz="900" b="1" dirty="0">
                 <a:solidFill>
-                  <a:srgbClr val="14B8A6"/>
+                  <a:srgbClr val="2DD4BF"/>
                 </a:solidFill>
               </a:rPr>
               <a:t>In</a:t>
@@ -8524,7 +8524,7 @@
             <a:r>
               <a:rPr lang="en-US" sz="900" b="1" dirty="0">
                 <a:solidFill>
-                  <a:srgbClr val="14B8A6"/>
+                  <a:srgbClr val="2DD4BF"/>
                 </a:solidFill>
               </a:rPr>
               <a:t>Italiano</a:t>
@@ -8548,11 +8548,11 @@
             <a:avLst/>
           </a:prstGeom>
           <a:solidFill>
-            <a:srgbClr val="0A2A4A"/>
+            <a:srgbClr val="1E1C18"/>
           </a:solidFill>
           <a:ln w="12700">
             <a:solidFill>
-              <a:srgbClr val="1A3A60"/>
+              <a:srgbClr val="3A3530"/>
             </a:solidFill>
             <a:prstDash val="solid"/>
           </a:ln>
@@ -8588,7 +8588,7 @@
             <a:r>
               <a:rPr lang="en-US" sz="900" b="1" dirty="0">
                 <a:solidFill>
-                  <a:srgbClr val="14B8A6"/>
+                  <a:srgbClr val="2DD4BF"/>
                 </a:solidFill>
               </a:rPr>
               <a:t>PMI</a:t>
@@ -8605,7 +8605,7 @@
             <a:r>
               <a:rPr lang="en-US" sz="900" b="1" dirty="0">
                 <a:solidFill>
-                  <a:srgbClr val="14B8A6"/>
+                  <a:srgbClr val="2DD4BF"/>
                 </a:solidFill>
               </a:rPr>
               <a:t>ready</a:t>
@@ -8629,11 +8629,11 @@
             <a:avLst/>
           </a:prstGeom>
           <a:solidFill>
-            <a:srgbClr val="0A2A4A"/>
+            <a:srgbClr val="1E1C18"/>
           </a:solidFill>
           <a:ln w="12700">
             <a:solidFill>
-              <a:srgbClr val="1A3A60"/>
+              <a:srgbClr val="3A3530"/>
             </a:solidFill>
             <a:prstDash val="solid"/>
           </a:ln>
@@ -8669,7 +8669,7 @@
             <a:r>
               <a:rPr lang="en-US" sz="900" b="1" dirty="0">
                 <a:solidFill>
-                  <a:srgbClr val="14B8A6"/>
+                  <a:srgbClr val="2DD4BF"/>
                 </a:solidFill>
               </a:rPr>
               <a:t>SaaS</a:t>
@@ -8686,7 +8686,7 @@
             <a:r>
               <a:rPr lang="en-US" sz="900" b="1" dirty="0">
                 <a:solidFill>
-                  <a:srgbClr val="14B8A6"/>
+                  <a:srgbClr val="2DD4BF"/>
                 </a:solidFill>
               </a:rPr>
               <a:t>puro</a:t>
@@ -8703,8 +8703,8 @@
         </p:nvSpPr>
         <p:spPr>
           <a:xfrm>
-            <a:off x="457200" y="2240280"/>
-            <a:ext cx="2011680" cy="475488"/>
+            <a:off x="457200" y="2212848"/>
+            <a:ext cx="2011680" cy="402336"/>
           </a:xfrm>
           <a:prstGeom prst="rect">
             <a:avLst/>
@@ -8714,7 +8714,7 @@
           </a:solidFill>
           <a:ln w="12700">
             <a:solidFill>
-              <a:srgbClr val="0B7A75"/>
+              <a:srgbClr val="0D8A82"/>
             </a:solidFill>
             <a:prstDash val="solid"/>
           </a:ln>
@@ -8728,18 +8728,18 @@
         </p:nvSpPr>
         <p:spPr>
           <a:xfrm>
-            <a:off x="457200" y="2240280"/>
-            <a:ext cx="54864" cy="475488"/>
-          </a:xfrm>
-          <a:prstGeom prst="rect">
-            <a:avLst/>
-          </a:prstGeom>
-          <a:solidFill>
-            <a:srgbClr val="14B8A6"/>
+            <a:off x="457200" y="2212848"/>
+            <a:ext cx="54864" cy="402336"/>
+          </a:xfrm>
+          <a:prstGeom prst="rect">
+            <a:avLst/>
+          </a:prstGeom>
+          <a:solidFill>
+            <a:srgbClr val="2DD4BF"/>
           </a:solidFill>
           <a:ln w="12700">
             <a:solidFill>
-              <a:srgbClr val="14B8A6"/>
+              <a:srgbClr val="2DD4BF"/>
             </a:solidFill>
             <a:prstDash val="solid"/>
           </a:ln>
@@ -8753,8 +8753,8 @@
         </p:nvSpPr>
         <p:spPr>
           <a:xfrm>
-            <a:off x="457200" y="2240280"/>
-            <a:ext cx="2011680" cy="475488"/>
+            <a:off x="457200" y="2212848"/>
+            <a:ext cx="2011680" cy="402336"/>
           </a:xfrm>
           <a:prstGeom prst="rect">
             <a:avLst/>
@@ -8772,7 +8772,7 @@
             <a:r>
               <a:rPr lang="en-US" sz="1000" b="1" dirty="0">
                 <a:solidFill>
-                  <a:srgbClr val="FFFFFF"/>
+                  <a:srgbClr val="F0EDE8"/>
                 </a:solidFill>
               </a:rPr>
               <a:t>🟢 Dloop</a:t>
@@ -8789,8 +8789,8 @@
         </p:nvSpPr>
         <p:spPr>
           <a:xfrm>
-            <a:off x="2468880" y="2240280"/>
-            <a:ext cx="1554480" cy="475488"/>
+            <a:off x="2468880" y="2212848"/>
+            <a:ext cx="1554480" cy="402336"/>
           </a:xfrm>
           <a:prstGeom prst="rect">
             <a:avLst/>
@@ -8800,7 +8800,7 @@
           </a:solidFill>
           <a:ln w="12700">
             <a:solidFill>
-              <a:srgbClr val="0B7A75"/>
+              <a:srgbClr val="0D8A82"/>
             </a:solidFill>
             <a:prstDash val="solid"/>
           </a:ln>
@@ -8814,8 +8814,8 @@
         </p:nvSpPr>
         <p:spPr>
           <a:xfrm>
-            <a:off x="2468880" y="2240280"/>
-            <a:ext cx="1554480" cy="475488"/>
+            <a:off x="2468880" y="2212848"/>
+            <a:ext cx="1554480" cy="402336"/>
           </a:xfrm>
           <a:prstGeom prst="rect">
             <a:avLst/>
@@ -8833,7 +8833,7 @@
             <a:r>
               <a:rPr lang="en-US" sz="1200" dirty="0">
                 <a:solidFill>
-                  <a:srgbClr val="FFFFFF"/>
+                  <a:srgbClr val="F0EDE8"/>
                 </a:solidFill>
               </a:rPr>
               <a:t>€39–€499/mese</a:t>
@@ -8850,8 +8850,8 @@
         </p:nvSpPr>
         <p:spPr>
           <a:xfrm>
-            <a:off x="4023360" y="2240280"/>
-            <a:ext cx="1234440" cy="475488"/>
+            <a:off x="4023360" y="2212848"/>
+            <a:ext cx="1234440" cy="402336"/>
           </a:xfrm>
           <a:prstGeom prst="rect">
             <a:avLst/>
@@ -8861,7 +8861,7 @@
           </a:solidFill>
           <a:ln w="12700">
             <a:solidFill>
-              <a:srgbClr val="0B7A75"/>
+              <a:srgbClr val="0D8A82"/>
             </a:solidFill>
             <a:prstDash val="solid"/>
           </a:ln>
@@ -8875,8 +8875,8 @@
         </p:nvSpPr>
         <p:spPr>
           <a:xfrm>
-            <a:off x="4023360" y="2240280"/>
-            <a:ext cx="1234440" cy="475488"/>
+            <a:off x="4023360" y="2212848"/>
+            <a:ext cx="1234440" cy="402336"/>
           </a:xfrm>
           <a:prstGeom prst="rect">
             <a:avLst/>
@@ -8911,8 +8911,8 @@
         </p:nvSpPr>
         <p:spPr>
           <a:xfrm>
-            <a:off x="5257800" y="2240280"/>
-            <a:ext cx="1234440" cy="475488"/>
+            <a:off x="5257800" y="2212848"/>
+            <a:ext cx="1234440" cy="402336"/>
           </a:xfrm>
           <a:prstGeom prst="rect">
             <a:avLst/>
@@ -8922,7 +8922,7 @@
           </a:solidFill>
           <a:ln w="12700">
             <a:solidFill>
-              <a:srgbClr val="0B7A75"/>
+              <a:srgbClr val="0D8A82"/>
             </a:solidFill>
             <a:prstDash val="solid"/>
           </a:ln>
@@ -8936,8 +8936,8 @@
         </p:nvSpPr>
         <p:spPr>
           <a:xfrm>
-            <a:off x="5257800" y="2240280"/>
-            <a:ext cx="1234440" cy="475488"/>
+            <a:off x="5257800" y="2212848"/>
+            <a:ext cx="1234440" cy="402336"/>
           </a:xfrm>
           <a:prstGeom prst="rect">
             <a:avLst/>
@@ -8972,8 +8972,8 @@
         </p:nvSpPr>
         <p:spPr>
           <a:xfrm>
-            <a:off x="6492240" y="2240280"/>
-            <a:ext cx="1097280" cy="475488"/>
+            <a:off x="6492240" y="2212848"/>
+            <a:ext cx="1097280" cy="402336"/>
           </a:xfrm>
           <a:prstGeom prst="rect">
             <a:avLst/>
@@ -8983,7 +8983,7 @@
           </a:solidFill>
           <a:ln w="12700">
             <a:solidFill>
-              <a:srgbClr val="0B7A75"/>
+              <a:srgbClr val="0D8A82"/>
             </a:solidFill>
             <a:prstDash val="solid"/>
           </a:ln>
@@ -8997,8 +8997,8 @@
         </p:nvSpPr>
         <p:spPr>
           <a:xfrm>
-            <a:off x="6492240" y="2240280"/>
-            <a:ext cx="1097280" cy="475488"/>
+            <a:off x="6492240" y="2212848"/>
+            <a:ext cx="1097280" cy="402336"/>
           </a:xfrm>
           <a:prstGeom prst="rect">
             <a:avLst/>
@@ -9033,8 +9033,8 @@
         </p:nvSpPr>
         <p:spPr>
           <a:xfrm>
-            <a:off x="7589520" y="2240280"/>
-            <a:ext cx="1097280" cy="475488"/>
+            <a:off x="7589520" y="2212848"/>
+            <a:ext cx="1097280" cy="402336"/>
           </a:xfrm>
           <a:prstGeom prst="rect">
             <a:avLst/>
@@ -9044,7 +9044,7 @@
           </a:solidFill>
           <a:ln w="12700">
             <a:solidFill>
-              <a:srgbClr val="0B7A75"/>
+              <a:srgbClr val="0D8A82"/>
             </a:solidFill>
             <a:prstDash val="solid"/>
           </a:ln>
@@ -9058,8 +9058,8 @@
         </p:nvSpPr>
         <p:spPr>
           <a:xfrm>
-            <a:off x="7589520" y="2240280"/>
-            <a:ext cx="1097280" cy="475488"/>
+            <a:off x="7589520" y="2212848"/>
+            <a:ext cx="1097280" cy="402336"/>
           </a:xfrm>
           <a:prstGeom prst="rect">
             <a:avLst/>
@@ -9094,8 +9094,8 @@
         </p:nvSpPr>
         <p:spPr>
           <a:xfrm>
-            <a:off x="8686800" y="2240280"/>
-            <a:ext cx="1097280" cy="475488"/>
+            <a:off x="8686800" y="2212848"/>
+            <a:ext cx="1097280" cy="402336"/>
           </a:xfrm>
           <a:prstGeom prst="rect">
             <a:avLst/>
@@ -9105,7 +9105,7 @@
           </a:solidFill>
           <a:ln w="12700">
             <a:solidFill>
-              <a:srgbClr val="0B7A75"/>
+              <a:srgbClr val="0D8A82"/>
             </a:solidFill>
             <a:prstDash val="solid"/>
           </a:ln>
@@ -9119,8 +9119,8 @@
         </p:nvSpPr>
         <p:spPr>
           <a:xfrm>
-            <a:off x="8686800" y="2240280"/>
-            <a:ext cx="1097280" cy="475488"/>
+            <a:off x="8686800" y="2212848"/>
+            <a:ext cx="1097280" cy="402336"/>
           </a:xfrm>
           <a:prstGeom prst="rect">
             <a:avLst/>
@@ -9155,14 +9155,75 @@
         </p:nvSpPr>
         <p:spPr>
           <a:xfrm>
-            <a:off x="457200" y="2715768"/>
+            <a:off x="457200" y="2615184"/>
             <a:ext cx="11155680" cy="256032"/>
           </a:xfrm>
           <a:prstGeom prst="rect">
             <a:avLst/>
           </a:prstGeom>
           <a:solidFill>
-            <a:srgbClr val="0A1520"/>
+            <a:srgbClr val="141210"/>
+          </a:solidFill>
+          <a:ln w="12700">
+            <a:solidFill>
+              <a:srgbClr val="3A3530"/>
+            </a:solidFill>
+            <a:prstDash val="solid"/>
+          </a:ln>
+        </p:spPr>
+      </p:sp>
+      <p:sp>
+        <p:nvSpPr>
+          <p:cNvPr id="34" name="Text 32"/>
+          <p:cNvSpPr/>
+          <p:nvPr/>
+        </p:nvSpPr>
+        <p:spPr>
+          <a:xfrm>
+            <a:off x="548640" y="2615184"/>
+            <a:ext cx="10972800" cy="256032"/>
+          </a:xfrm>
+          <a:prstGeom prst="rect">
+            <a:avLst/>
+          </a:prstGeom>
+          <a:noFill/>
+          <a:ln/>
+        </p:spPr>
+        <p:txBody>
+          <a:bodyPr wrap="square" lIns="0" tIns="0" rIns="0" bIns="0" rtlCol="0" anchor="ctr"/>
+          <a:lstStyle/>
+          <a:p>
+            <a:pPr indent="0" marL="0">
+              <a:buNone/>
+            </a:pPr>
+            <a:r>
+              <a:rPr lang="en-US" sz="800" b="1" spc="200" kern="0" dirty="0">
+                <a:solidFill>
+                  <a:srgbClr val="4A8A9A"/>
+                </a:solidFill>
+              </a:rPr>
+              <a:t>— SaaS B2B —</a:t>
+            </a:r>
+            <a:endParaRPr lang="en-US" sz="800" dirty="0"/>
+          </a:p>
+        </p:txBody>
+      </p:sp>
+      <p:sp>
+        <p:nvSpPr>
+          <p:cNvPr id="35" name="Shape 33"/>
+          <p:cNvSpPr/>
+          <p:nvPr/>
+        </p:nvSpPr>
+        <p:spPr>
+          <a:xfrm>
+            <a:off x="457200" y="2871216"/>
+            <a:ext cx="2011680" cy="402336"/>
+          </a:xfrm>
+          <a:prstGeom prst="rect">
+            <a:avLst/>
+          </a:prstGeom>
+          <a:solidFill>
+            <a:srgbClr val="0F1E30"/>
           </a:solidFill>
           <a:ln w="12700">
             <a:solidFill>
@@ -9174,50 +9235,50 @@
       </p:sp>
       <p:sp>
         <p:nvSpPr>
-          <p:cNvPr id="34" name="Text 32"/>
-          <p:cNvSpPr/>
-          <p:nvPr/>
-        </p:nvSpPr>
-        <p:spPr>
-          <a:xfrm>
-            <a:off x="548640" y="2715768"/>
-            <a:ext cx="10972800" cy="256032"/>
-          </a:xfrm>
-          <a:prstGeom prst="rect">
-            <a:avLst/>
-          </a:prstGeom>
-          <a:noFill/>
-          <a:ln/>
-        </p:spPr>
-        <p:txBody>
-          <a:bodyPr wrap="square" lIns="0" tIns="0" rIns="0" bIns="0" rtlCol="0" anchor="ctr"/>
-          <a:lstStyle/>
-          <a:p>
-            <a:pPr indent="0" marL="0">
-              <a:buNone/>
-            </a:pPr>
-            <a:r>
-              <a:rPr lang="en-US" sz="800" b="1" spc="200" kern="0" dirty="0">
-                <a:solidFill>
-                  <a:srgbClr val="4A8A9A"/>
-                </a:solidFill>
-              </a:rPr>
-              <a:t>— SaaS B2B —</a:t>
-            </a:r>
-            <a:endParaRPr lang="en-US" sz="800" dirty="0"/>
-          </a:p>
-        </p:txBody>
-      </p:sp>
-      <p:sp>
-        <p:nvSpPr>
-          <p:cNvPr id="35" name="Shape 33"/>
-          <p:cNvSpPr/>
-          <p:nvPr/>
-        </p:nvSpPr>
-        <p:spPr>
-          <a:xfrm>
-            <a:off x="457200" y="2971800"/>
-            <a:ext cx="2011680" cy="475488"/>
+          <p:cNvPr id="36" name="Text 34"/>
+          <p:cNvSpPr/>
+          <p:nvPr/>
+        </p:nvSpPr>
+        <p:spPr>
+          <a:xfrm>
+            <a:off x="457200" y="2871216"/>
+            <a:ext cx="2011680" cy="402336"/>
+          </a:xfrm>
+          <a:prstGeom prst="rect">
+            <a:avLst/>
+          </a:prstGeom>
+          <a:noFill/>
+          <a:ln/>
+        </p:spPr>
+        <p:txBody>
+          <a:bodyPr wrap="square" lIns="0" tIns="0" rIns="0" bIns="0" rtlCol="0" anchor="ctr"/>
+          <a:lstStyle/>
+          <a:p>
+            <a:pPr algn="ctr" indent="0" marL="0">
+              <a:buNone/>
+            </a:pPr>
+            <a:r>
+              <a:rPr lang="en-US" sz="1000" dirty="0">
+                <a:solidFill>
+                  <a:srgbClr val="A89F98"/>
+                </a:solidFill>
+              </a:rPr>
+              <a:t>Onfleet</a:t>
+            </a:r>
+            <a:endParaRPr lang="en-US" sz="1000" dirty="0"/>
+          </a:p>
+        </p:txBody>
+      </p:sp>
+      <p:sp>
+        <p:nvSpPr>
+          <p:cNvPr id="37" name="Shape 35"/>
+          <p:cNvSpPr/>
+          <p:nvPr/>
+        </p:nvSpPr>
+        <p:spPr>
+          <a:xfrm>
+            <a:off x="2468880" y="2871216"/>
+            <a:ext cx="1554480" cy="402336"/>
           </a:xfrm>
           <a:prstGeom prst="rect">
             <a:avLst/>
@@ -9235,14 +9296,14 @@
       </p:sp>
       <p:sp>
         <p:nvSpPr>
-          <p:cNvPr id="36" name="Text 34"/>
-          <p:cNvSpPr/>
-          <p:nvPr/>
-        </p:nvSpPr>
-        <p:spPr>
-          <a:xfrm>
-            <a:off x="457200" y="2971800"/>
-            <a:ext cx="2011680" cy="475488"/>
+          <p:cNvPr id="38" name="Text 36"/>
+          <p:cNvSpPr/>
+          <p:nvPr/>
+        </p:nvSpPr>
+        <p:spPr>
+          <a:xfrm>
+            <a:off x="2468880" y="2871216"/>
+            <a:ext cx="1554480" cy="402336"/>
           </a:xfrm>
           <a:prstGeom prst="rect">
             <a:avLst/>
@@ -9258,27 +9319,27 @@
               <a:buNone/>
             </a:pPr>
             <a:r>
-              <a:rPr lang="en-US" sz="1000" dirty="0">
-                <a:solidFill>
-                  <a:srgbClr val="8CB3CC"/>
-                </a:solidFill>
-              </a:rPr>
-              <a:t>Onfleet</a:t>
-            </a:r>
-            <a:endParaRPr lang="en-US" sz="1000" dirty="0"/>
-          </a:p>
-        </p:txBody>
-      </p:sp>
-      <p:sp>
-        <p:nvSpPr>
-          <p:cNvPr id="37" name="Shape 35"/>
-          <p:cNvSpPr/>
-          <p:nvPr/>
-        </p:nvSpPr>
-        <p:spPr>
-          <a:xfrm>
-            <a:off x="2468880" y="2971800"/>
-            <a:ext cx="1554480" cy="475488"/>
+              <a:rPr lang="en-US" sz="1200" dirty="0">
+                <a:solidFill>
+                  <a:srgbClr val="A89F98"/>
+                </a:solidFill>
+              </a:rPr>
+              <a:t>$500+/mese</a:t>
+            </a:r>
+            <a:endParaRPr lang="en-US" sz="1200" dirty="0"/>
+          </a:p>
+        </p:txBody>
+      </p:sp>
+      <p:sp>
+        <p:nvSpPr>
+          <p:cNvPr id="39" name="Shape 37"/>
+          <p:cNvSpPr/>
+          <p:nvPr/>
+        </p:nvSpPr>
+        <p:spPr>
+          <a:xfrm>
+            <a:off x="4023360" y="2871216"/>
+            <a:ext cx="1234440" cy="402336"/>
           </a:xfrm>
           <a:prstGeom prst="rect">
             <a:avLst/>
@@ -9296,14 +9357,14 @@
       </p:sp>
       <p:sp>
         <p:nvSpPr>
-          <p:cNvPr id="38" name="Text 36"/>
-          <p:cNvSpPr/>
-          <p:nvPr/>
-        </p:nvSpPr>
-        <p:spPr>
-          <a:xfrm>
-            <a:off x="2468880" y="2971800"/>
-            <a:ext cx="1554480" cy="475488"/>
+          <p:cNvPr id="40" name="Text 38"/>
+          <p:cNvSpPr/>
+          <p:nvPr/>
+        </p:nvSpPr>
+        <p:spPr>
+          <a:xfrm>
+            <a:off x="4023360" y="2871216"/>
+            <a:ext cx="1234440" cy="402336"/>
           </a:xfrm>
           <a:prstGeom prst="rect">
             <a:avLst/>
@@ -9321,10 +9382,10 @@
             <a:r>
               <a:rPr lang="en-US" sz="1200" dirty="0">
                 <a:solidFill>
-                  <a:srgbClr val="8CB3CC"/>
-                </a:solidFill>
-              </a:rPr>
-              <a:t>$500+/mese</a:t>
+                  <a:srgbClr val="334455"/>
+                </a:solidFill>
+              </a:rPr>
+              <a:t>✗</a:t>
             </a:r>
             <a:endParaRPr lang="en-US" sz="1200" dirty="0"/>
           </a:p>
@@ -9332,14 +9393,14 @@
       </p:sp>
       <p:sp>
         <p:nvSpPr>
-          <p:cNvPr id="39" name="Shape 37"/>
-          <p:cNvSpPr/>
-          <p:nvPr/>
-        </p:nvSpPr>
-        <p:spPr>
-          <a:xfrm>
-            <a:off x="4023360" y="2971800"/>
-            <a:ext cx="1234440" cy="475488"/>
+          <p:cNvPr id="41" name="Shape 39"/>
+          <p:cNvSpPr/>
+          <p:nvPr/>
+        </p:nvSpPr>
+        <p:spPr>
+          <a:xfrm>
+            <a:off x="5257800" y="2871216"/>
+            <a:ext cx="1234440" cy="402336"/>
           </a:xfrm>
           <a:prstGeom prst="rect">
             <a:avLst/>
@@ -9357,14 +9418,14 @@
       </p:sp>
       <p:sp>
         <p:nvSpPr>
-          <p:cNvPr id="40" name="Text 38"/>
-          <p:cNvSpPr/>
-          <p:nvPr/>
-        </p:nvSpPr>
-        <p:spPr>
-          <a:xfrm>
-            <a:off x="4023360" y="2971800"/>
-            <a:ext cx="1234440" cy="475488"/>
+          <p:cNvPr id="42" name="Text 40"/>
+          <p:cNvSpPr/>
+          <p:nvPr/>
+        </p:nvSpPr>
+        <p:spPr>
+          <a:xfrm>
+            <a:off x="5257800" y="2871216"/>
+            <a:ext cx="1234440" cy="402336"/>
           </a:xfrm>
           <a:prstGeom prst="rect">
             <a:avLst/>
@@ -9393,14 +9454,14 @@
       </p:sp>
       <p:sp>
         <p:nvSpPr>
-          <p:cNvPr id="41" name="Shape 39"/>
-          <p:cNvSpPr/>
-          <p:nvPr/>
-        </p:nvSpPr>
-        <p:spPr>
-          <a:xfrm>
-            <a:off x="5257800" y="2971800"/>
-            <a:ext cx="1234440" cy="475488"/>
+          <p:cNvPr id="43" name="Shape 41"/>
+          <p:cNvSpPr/>
+          <p:nvPr/>
+        </p:nvSpPr>
+        <p:spPr>
+          <a:xfrm>
+            <a:off x="6492240" y="2871216"/>
+            <a:ext cx="1097280" cy="402336"/>
           </a:xfrm>
           <a:prstGeom prst="rect">
             <a:avLst/>
@@ -9418,14 +9479,14 @@
       </p:sp>
       <p:sp>
         <p:nvSpPr>
-          <p:cNvPr id="42" name="Text 40"/>
-          <p:cNvSpPr/>
-          <p:nvPr/>
-        </p:nvSpPr>
-        <p:spPr>
-          <a:xfrm>
-            <a:off x="5257800" y="2971800"/>
-            <a:ext cx="1234440" cy="475488"/>
+          <p:cNvPr id="44" name="Text 42"/>
+          <p:cNvSpPr/>
+          <p:nvPr/>
+        </p:nvSpPr>
+        <p:spPr>
+          <a:xfrm>
+            <a:off x="6492240" y="2871216"/>
+            <a:ext cx="1097280" cy="402336"/>
           </a:xfrm>
           <a:prstGeom prst="rect">
             <a:avLst/>
@@ -9454,14 +9515,14 @@
       </p:sp>
       <p:sp>
         <p:nvSpPr>
-          <p:cNvPr id="43" name="Shape 41"/>
-          <p:cNvSpPr/>
-          <p:nvPr/>
-        </p:nvSpPr>
-        <p:spPr>
-          <a:xfrm>
-            <a:off x="6492240" y="2971800"/>
-            <a:ext cx="1097280" cy="475488"/>
+          <p:cNvPr id="45" name="Shape 43"/>
+          <p:cNvSpPr/>
+          <p:nvPr/>
+        </p:nvSpPr>
+        <p:spPr>
+          <a:xfrm>
+            <a:off x="7589520" y="2871216"/>
+            <a:ext cx="1097280" cy="402336"/>
           </a:xfrm>
           <a:prstGeom prst="rect">
             <a:avLst/>
@@ -9479,14 +9540,14 @@
       </p:sp>
       <p:sp>
         <p:nvSpPr>
-          <p:cNvPr id="44" name="Text 42"/>
-          <p:cNvSpPr/>
-          <p:nvPr/>
-        </p:nvSpPr>
-        <p:spPr>
-          <a:xfrm>
-            <a:off x="6492240" y="2971800"/>
-            <a:ext cx="1097280" cy="475488"/>
+          <p:cNvPr id="46" name="Text 44"/>
+          <p:cNvSpPr/>
+          <p:nvPr/>
+        </p:nvSpPr>
+        <p:spPr>
+          <a:xfrm>
+            <a:off x="7589520" y="2871216"/>
+            <a:ext cx="1097280" cy="402336"/>
           </a:xfrm>
           <a:prstGeom prst="rect">
             <a:avLst/>
@@ -9515,14 +9576,14 @@
       </p:sp>
       <p:sp>
         <p:nvSpPr>
-          <p:cNvPr id="45" name="Shape 43"/>
-          <p:cNvSpPr/>
-          <p:nvPr/>
-        </p:nvSpPr>
-        <p:spPr>
-          <a:xfrm>
-            <a:off x="7589520" y="2971800"/>
-            <a:ext cx="1097280" cy="475488"/>
+          <p:cNvPr id="47" name="Shape 45"/>
+          <p:cNvSpPr/>
+          <p:nvPr/>
+        </p:nvSpPr>
+        <p:spPr>
+          <a:xfrm>
+            <a:off x="8686800" y="2871216"/>
+            <a:ext cx="1097280" cy="402336"/>
           </a:xfrm>
           <a:prstGeom prst="rect">
             <a:avLst/>
@@ -9540,14 +9601,14 @@
       </p:sp>
       <p:sp>
         <p:nvSpPr>
-          <p:cNvPr id="46" name="Text 44"/>
-          <p:cNvSpPr/>
-          <p:nvPr/>
-        </p:nvSpPr>
-        <p:spPr>
-          <a:xfrm>
-            <a:off x="7589520" y="2971800"/>
-            <a:ext cx="1097280" cy="475488"/>
+          <p:cNvPr id="48" name="Text 46"/>
+          <p:cNvSpPr/>
+          <p:nvPr/>
+        </p:nvSpPr>
+        <p:spPr>
+          <a:xfrm>
+            <a:off x="8686800" y="2871216"/>
+            <a:ext cx="1097280" cy="402336"/>
           </a:xfrm>
           <a:prstGeom prst="rect">
             <a:avLst/>
@@ -9563,12 +9624,12 @@
               <a:buNone/>
             </a:pPr>
             <a:r>
-              <a:rPr lang="en-US" sz="1200" dirty="0">
-                <a:solidFill>
-                  <a:srgbClr val="334455"/>
-                </a:solidFill>
-              </a:rPr>
-              <a:t>✗</a:t>
+              <a:rPr lang="en-US" sz="1200" b="1" dirty="0">
+                <a:solidFill>
+                  <a:srgbClr val="22C55E"/>
+                </a:solidFill>
+              </a:rPr>
+              <a:t>✓</a:t>
             </a:r>
             <a:endParaRPr lang="en-US" sz="1200" dirty="0"/>
           </a:p>
@@ -9576,20 +9637,20 @@
       </p:sp>
       <p:sp>
         <p:nvSpPr>
-          <p:cNvPr id="47" name="Shape 45"/>
-          <p:cNvSpPr/>
-          <p:nvPr/>
-        </p:nvSpPr>
-        <p:spPr>
-          <a:xfrm>
-            <a:off x="8686800" y="2971800"/>
-            <a:ext cx="1097280" cy="475488"/>
-          </a:xfrm>
-          <a:prstGeom prst="rect">
-            <a:avLst/>
-          </a:prstGeom>
-          <a:solidFill>
-            <a:srgbClr val="0F1E30"/>
+          <p:cNvPr id="49" name="Shape 47"/>
+          <p:cNvSpPr/>
+          <p:nvPr/>
+        </p:nvSpPr>
+        <p:spPr>
+          <a:xfrm>
+            <a:off x="457200" y="3273552"/>
+            <a:ext cx="2011680" cy="402336"/>
+          </a:xfrm>
+          <a:prstGeom prst="rect">
+            <a:avLst/>
+          </a:prstGeom>
+          <a:solidFill>
+            <a:srgbClr val="0A1929"/>
           </a:solidFill>
           <a:ln w="12700">
             <a:solidFill>
@@ -9601,14 +9662,14 @@
       </p:sp>
       <p:sp>
         <p:nvSpPr>
-          <p:cNvPr id="48" name="Text 46"/>
-          <p:cNvSpPr/>
-          <p:nvPr/>
-        </p:nvSpPr>
-        <p:spPr>
-          <a:xfrm>
-            <a:off x="8686800" y="2971800"/>
-            <a:ext cx="1097280" cy="475488"/>
+          <p:cNvPr id="50" name="Text 48"/>
+          <p:cNvSpPr/>
+          <p:nvPr/>
+        </p:nvSpPr>
+        <p:spPr>
+          <a:xfrm>
+            <a:off x="457200" y="3273552"/>
+            <a:ext cx="2011680" cy="402336"/>
           </a:xfrm>
           <a:prstGeom prst="rect">
             <a:avLst/>
@@ -9624,27 +9685,27 @@
               <a:buNone/>
             </a:pPr>
             <a:r>
-              <a:rPr lang="en-US" sz="1200" b="1" dirty="0">
-                <a:solidFill>
-                  <a:srgbClr val="22C55E"/>
-                </a:solidFill>
-              </a:rPr>
-              <a:t>✓</a:t>
-            </a:r>
-            <a:endParaRPr lang="en-US" sz="1200" dirty="0"/>
-          </a:p>
-        </p:txBody>
-      </p:sp>
-      <p:sp>
-        <p:nvSpPr>
-          <p:cNvPr id="49" name="Shape 47"/>
-          <p:cNvSpPr/>
-          <p:nvPr/>
-        </p:nvSpPr>
-        <p:spPr>
-          <a:xfrm>
-            <a:off x="457200" y="3447288"/>
-            <a:ext cx="2011680" cy="475488"/>
+              <a:rPr lang="en-US" sz="1000" dirty="0">
+                <a:solidFill>
+                  <a:srgbClr val="A89F98"/>
+                </a:solidFill>
+              </a:rPr>
+              <a:t>Tookan</a:t>
+            </a:r>
+            <a:endParaRPr lang="en-US" sz="1000" dirty="0"/>
+          </a:p>
+        </p:txBody>
+      </p:sp>
+      <p:sp>
+        <p:nvSpPr>
+          <p:cNvPr id="51" name="Shape 49"/>
+          <p:cNvSpPr/>
+          <p:nvPr/>
+        </p:nvSpPr>
+        <p:spPr>
+          <a:xfrm>
+            <a:off x="2468880" y="3273552"/>
+            <a:ext cx="1554480" cy="402336"/>
           </a:xfrm>
           <a:prstGeom prst="rect">
             <a:avLst/>
@@ -9662,14 +9723,14 @@
       </p:sp>
       <p:sp>
         <p:nvSpPr>
-          <p:cNvPr id="50" name="Text 48"/>
-          <p:cNvSpPr/>
-          <p:nvPr/>
-        </p:nvSpPr>
-        <p:spPr>
-          <a:xfrm>
-            <a:off x="457200" y="3447288"/>
-            <a:ext cx="2011680" cy="475488"/>
+          <p:cNvPr id="52" name="Text 50"/>
+          <p:cNvSpPr/>
+          <p:nvPr/>
+        </p:nvSpPr>
+        <p:spPr>
+          <a:xfrm>
+            <a:off x="2468880" y="3273552"/>
+            <a:ext cx="1554480" cy="402336"/>
           </a:xfrm>
           <a:prstGeom prst="rect">
             <a:avLst/>
@@ -9685,27 +9746,27 @@
               <a:buNone/>
             </a:pPr>
             <a:r>
-              <a:rPr lang="en-US" sz="1000" dirty="0">
-                <a:solidFill>
-                  <a:srgbClr val="8CB3CC"/>
-                </a:solidFill>
-              </a:rPr>
-              <a:t>Tookan</a:t>
-            </a:r>
-            <a:endParaRPr lang="en-US" sz="1000" dirty="0"/>
-          </a:p>
-        </p:txBody>
-      </p:sp>
-      <p:sp>
-        <p:nvSpPr>
-          <p:cNvPr id="51" name="Shape 49"/>
-          <p:cNvSpPr/>
-          <p:nvPr/>
-        </p:nvSpPr>
-        <p:spPr>
-          <a:xfrm>
-            <a:off x="2468880" y="3447288"/>
-            <a:ext cx="1554480" cy="475488"/>
+              <a:rPr lang="en-US" sz="1200" dirty="0">
+                <a:solidFill>
+                  <a:srgbClr val="A89F98"/>
+                </a:solidFill>
+              </a:rPr>
+              <a:t>$99–$299/mese</a:t>
+            </a:r>
+            <a:endParaRPr lang="en-US" sz="1200" dirty="0"/>
+          </a:p>
+        </p:txBody>
+      </p:sp>
+      <p:sp>
+        <p:nvSpPr>
+          <p:cNvPr id="53" name="Shape 51"/>
+          <p:cNvSpPr/>
+          <p:nvPr/>
+        </p:nvSpPr>
+        <p:spPr>
+          <a:xfrm>
+            <a:off x="4023360" y="3273552"/>
+            <a:ext cx="1234440" cy="402336"/>
           </a:xfrm>
           <a:prstGeom prst="rect">
             <a:avLst/>
@@ -9723,14 +9784,14 @@
       </p:sp>
       <p:sp>
         <p:nvSpPr>
-          <p:cNvPr id="52" name="Text 50"/>
-          <p:cNvSpPr/>
-          <p:nvPr/>
-        </p:nvSpPr>
-        <p:spPr>
-          <a:xfrm>
-            <a:off x="2468880" y="3447288"/>
-            <a:ext cx="1554480" cy="475488"/>
+          <p:cNvPr id="54" name="Text 52"/>
+          <p:cNvSpPr/>
+          <p:nvPr/>
+        </p:nvSpPr>
+        <p:spPr>
+          <a:xfrm>
+            <a:off x="4023360" y="3273552"/>
+            <a:ext cx="1234440" cy="402336"/>
           </a:xfrm>
           <a:prstGeom prst="rect">
             <a:avLst/>
@@ -9748,10 +9809,10 @@
             <a:r>
               <a:rPr lang="en-US" sz="1200" dirty="0">
                 <a:solidFill>
-                  <a:srgbClr val="8CB3CC"/>
-                </a:solidFill>
-              </a:rPr>
-              <a:t>$99–$299/mese</a:t>
+                  <a:srgbClr val="334455"/>
+                </a:solidFill>
+              </a:rPr>
+              <a:t>✗</a:t>
             </a:r>
             <a:endParaRPr lang="en-US" sz="1200" dirty="0"/>
           </a:p>
@@ -9759,14 +9820,14 @@
       </p:sp>
       <p:sp>
         <p:nvSpPr>
-          <p:cNvPr id="53" name="Shape 51"/>
-          <p:cNvSpPr/>
-          <p:nvPr/>
-        </p:nvSpPr>
-        <p:spPr>
-          <a:xfrm>
-            <a:off x="4023360" y="3447288"/>
-            <a:ext cx="1234440" cy="475488"/>
+          <p:cNvPr id="55" name="Shape 53"/>
+          <p:cNvSpPr/>
+          <p:nvPr/>
+        </p:nvSpPr>
+        <p:spPr>
+          <a:xfrm>
+            <a:off x="5257800" y="3273552"/>
+            <a:ext cx="1234440" cy="402336"/>
           </a:xfrm>
           <a:prstGeom prst="rect">
             <a:avLst/>
@@ -9784,14 +9845,14 @@
       </p:sp>
       <p:sp>
         <p:nvSpPr>
-          <p:cNvPr id="54" name="Text 52"/>
-          <p:cNvSpPr/>
-          <p:nvPr/>
-        </p:nvSpPr>
-        <p:spPr>
-          <a:xfrm>
-            <a:off x="4023360" y="3447288"/>
-            <a:ext cx="1234440" cy="475488"/>
+          <p:cNvPr id="56" name="Text 54"/>
+          <p:cNvSpPr/>
+          <p:nvPr/>
+        </p:nvSpPr>
+        <p:spPr>
+          <a:xfrm>
+            <a:off x="5257800" y="3273552"/>
+            <a:ext cx="1234440" cy="402336"/>
           </a:xfrm>
           <a:prstGeom prst="rect">
             <a:avLst/>
@@ -9820,14 +9881,14 @@
       </p:sp>
       <p:sp>
         <p:nvSpPr>
-          <p:cNvPr id="55" name="Shape 53"/>
-          <p:cNvSpPr/>
-          <p:nvPr/>
-        </p:nvSpPr>
-        <p:spPr>
-          <a:xfrm>
-            <a:off x="5257800" y="3447288"/>
-            <a:ext cx="1234440" cy="475488"/>
+          <p:cNvPr id="57" name="Shape 55"/>
+          <p:cNvSpPr/>
+          <p:nvPr/>
+        </p:nvSpPr>
+        <p:spPr>
+          <a:xfrm>
+            <a:off x="6492240" y="3273552"/>
+            <a:ext cx="1097280" cy="402336"/>
           </a:xfrm>
           <a:prstGeom prst="rect">
             <a:avLst/>
@@ -9845,14 +9906,14 @@
       </p:sp>
       <p:sp>
         <p:nvSpPr>
-          <p:cNvPr id="56" name="Text 54"/>
-          <p:cNvSpPr/>
-          <p:nvPr/>
-        </p:nvSpPr>
-        <p:spPr>
-          <a:xfrm>
-            <a:off x="5257800" y="3447288"/>
-            <a:ext cx="1234440" cy="475488"/>
+          <p:cNvPr id="58" name="Text 56"/>
+          <p:cNvSpPr/>
+          <p:nvPr/>
+        </p:nvSpPr>
+        <p:spPr>
+          <a:xfrm>
+            <a:off x="6492240" y="3273552"/>
+            <a:ext cx="1097280" cy="402336"/>
           </a:xfrm>
           <a:prstGeom prst="rect">
             <a:avLst/>
@@ -9881,14 +9942,14 @@
       </p:sp>
       <p:sp>
         <p:nvSpPr>
-          <p:cNvPr id="57" name="Shape 55"/>
-          <p:cNvSpPr/>
-          <p:nvPr/>
-        </p:nvSpPr>
-        <p:spPr>
-          <a:xfrm>
-            <a:off x="6492240" y="3447288"/>
-            <a:ext cx="1097280" cy="475488"/>
+          <p:cNvPr id="59" name="Shape 57"/>
+          <p:cNvSpPr/>
+          <p:nvPr/>
+        </p:nvSpPr>
+        <p:spPr>
+          <a:xfrm>
+            <a:off x="7589520" y="3273552"/>
+            <a:ext cx="1097280" cy="402336"/>
           </a:xfrm>
           <a:prstGeom prst="rect">
             <a:avLst/>
@@ -9906,14 +9967,14 @@
       </p:sp>
       <p:sp>
         <p:nvSpPr>
-          <p:cNvPr id="58" name="Text 56"/>
-          <p:cNvSpPr/>
-          <p:nvPr/>
-        </p:nvSpPr>
-        <p:spPr>
-          <a:xfrm>
-            <a:off x="6492240" y="3447288"/>
-            <a:ext cx="1097280" cy="475488"/>
+          <p:cNvPr id="60" name="Text 58"/>
+          <p:cNvSpPr/>
+          <p:nvPr/>
+        </p:nvSpPr>
+        <p:spPr>
+          <a:xfrm>
+            <a:off x="7589520" y="3273552"/>
+            <a:ext cx="1097280" cy="402336"/>
           </a:xfrm>
           <a:prstGeom prst="rect">
             <a:avLst/>
@@ -9931,10 +9992,10 @@
             <a:r>
               <a:rPr lang="en-US" sz="1200" dirty="0">
                 <a:solidFill>
-                  <a:srgbClr val="334455"/>
-                </a:solidFill>
-              </a:rPr>
-              <a:t>✗</a:t>
+                  <a:srgbClr val="F59E0B"/>
+                </a:solidFill>
+              </a:rPr>
+              <a:t>~</a:t>
             </a:r>
             <a:endParaRPr lang="en-US" sz="1200" dirty="0"/>
           </a:p>
@@ -9942,14 +10003,14 @@
       </p:sp>
       <p:sp>
         <p:nvSpPr>
-          <p:cNvPr id="59" name="Shape 57"/>
-          <p:cNvSpPr/>
-          <p:nvPr/>
-        </p:nvSpPr>
-        <p:spPr>
-          <a:xfrm>
-            <a:off x="7589520" y="3447288"/>
-            <a:ext cx="1097280" cy="475488"/>
+          <p:cNvPr id="61" name="Shape 59"/>
+          <p:cNvSpPr/>
+          <p:nvPr/>
+        </p:nvSpPr>
+        <p:spPr>
+          <a:xfrm>
+            <a:off x="8686800" y="3273552"/>
+            <a:ext cx="1097280" cy="402336"/>
           </a:xfrm>
           <a:prstGeom prst="rect">
             <a:avLst/>
@@ -9967,14 +10028,14 @@
       </p:sp>
       <p:sp>
         <p:nvSpPr>
-          <p:cNvPr id="60" name="Text 58"/>
-          <p:cNvSpPr/>
-          <p:nvPr/>
-        </p:nvSpPr>
-        <p:spPr>
-          <a:xfrm>
-            <a:off x="7589520" y="3447288"/>
-            <a:ext cx="1097280" cy="475488"/>
+          <p:cNvPr id="62" name="Text 60"/>
+          <p:cNvSpPr/>
+          <p:nvPr/>
+        </p:nvSpPr>
+        <p:spPr>
+          <a:xfrm>
+            <a:off x="8686800" y="3273552"/>
+            <a:ext cx="1097280" cy="402336"/>
           </a:xfrm>
           <a:prstGeom prst="rect">
             <a:avLst/>
@@ -9990,12 +10051,12 @@
               <a:buNone/>
             </a:pPr>
             <a:r>
-              <a:rPr lang="en-US" sz="1200" dirty="0">
-                <a:solidFill>
-                  <a:srgbClr val="F59E0B"/>
-                </a:solidFill>
-              </a:rPr>
-              <a:t>~</a:t>
+              <a:rPr lang="en-US" sz="1200" b="1" dirty="0">
+                <a:solidFill>
+                  <a:srgbClr val="22C55E"/>
+                </a:solidFill>
+              </a:rPr>
+              <a:t>✓</a:t>
             </a:r>
             <a:endParaRPr lang="en-US" sz="1200" dirty="0"/>
           </a:p>
@@ -10003,20 +10064,20 @@
       </p:sp>
       <p:sp>
         <p:nvSpPr>
-          <p:cNvPr id="61" name="Shape 59"/>
-          <p:cNvSpPr/>
-          <p:nvPr/>
-        </p:nvSpPr>
-        <p:spPr>
-          <a:xfrm>
-            <a:off x="8686800" y="3447288"/>
-            <a:ext cx="1097280" cy="475488"/>
-          </a:xfrm>
-          <a:prstGeom prst="rect">
-            <a:avLst/>
-          </a:prstGeom>
-          <a:solidFill>
-            <a:srgbClr val="0A1929"/>
+          <p:cNvPr id="63" name="Shape 61"/>
+          <p:cNvSpPr/>
+          <p:nvPr/>
+        </p:nvSpPr>
+        <p:spPr>
+          <a:xfrm>
+            <a:off x="457200" y="3675888"/>
+            <a:ext cx="2011680" cy="402336"/>
+          </a:xfrm>
+          <a:prstGeom prst="rect">
+            <a:avLst/>
+          </a:prstGeom>
+          <a:solidFill>
+            <a:srgbClr val="0F1E30"/>
           </a:solidFill>
           <a:ln w="12700">
             <a:solidFill>
@@ -10028,14 +10089,14 @@
       </p:sp>
       <p:sp>
         <p:nvSpPr>
-          <p:cNvPr id="62" name="Text 60"/>
-          <p:cNvSpPr/>
-          <p:nvPr/>
-        </p:nvSpPr>
-        <p:spPr>
-          <a:xfrm>
-            <a:off x="8686800" y="3447288"/>
-            <a:ext cx="1097280" cy="475488"/>
+          <p:cNvPr id="64" name="Text 62"/>
+          <p:cNvSpPr/>
+          <p:nvPr/>
+        </p:nvSpPr>
+        <p:spPr>
+          <a:xfrm>
+            <a:off x="457200" y="3675888"/>
+            <a:ext cx="2011680" cy="402336"/>
           </a:xfrm>
           <a:prstGeom prst="rect">
             <a:avLst/>
@@ -10051,27 +10112,27 @@
               <a:buNone/>
             </a:pPr>
             <a:r>
-              <a:rPr lang="en-US" sz="1200" b="1" dirty="0">
-                <a:solidFill>
-                  <a:srgbClr val="22C55E"/>
-                </a:solidFill>
-              </a:rPr>
-              <a:t>✓</a:t>
-            </a:r>
-            <a:endParaRPr lang="en-US" sz="1200" dirty="0"/>
-          </a:p>
-        </p:txBody>
-      </p:sp>
-      <p:sp>
-        <p:nvSpPr>
-          <p:cNvPr id="63" name="Shape 61"/>
-          <p:cNvSpPr/>
-          <p:nvPr/>
-        </p:nvSpPr>
-        <p:spPr>
-          <a:xfrm>
-            <a:off x="457200" y="3922776"/>
-            <a:ext cx="2011680" cy="475488"/>
+              <a:rPr lang="en-US" sz="1000" dirty="0">
+                <a:solidFill>
+                  <a:srgbClr val="A89F98"/>
+                </a:solidFill>
+              </a:rPr>
+              <a:t>LogiNext</a:t>
+            </a:r>
+            <a:endParaRPr lang="en-US" sz="1000" dirty="0"/>
+          </a:p>
+        </p:txBody>
+      </p:sp>
+      <p:sp>
+        <p:nvSpPr>
+          <p:cNvPr id="65" name="Shape 63"/>
+          <p:cNvSpPr/>
+          <p:nvPr/>
+        </p:nvSpPr>
+        <p:spPr>
+          <a:xfrm>
+            <a:off x="2468880" y="3675888"/>
+            <a:ext cx="1554480" cy="402336"/>
           </a:xfrm>
           <a:prstGeom prst="rect">
             <a:avLst/>
@@ -10089,14 +10150,14 @@
       </p:sp>
       <p:sp>
         <p:nvSpPr>
-          <p:cNvPr id="64" name="Text 62"/>
-          <p:cNvSpPr/>
-          <p:nvPr/>
-        </p:nvSpPr>
-        <p:spPr>
-          <a:xfrm>
-            <a:off x="457200" y="3922776"/>
-            <a:ext cx="2011680" cy="475488"/>
+          <p:cNvPr id="66" name="Text 64"/>
+          <p:cNvSpPr/>
+          <p:nvPr/>
+        </p:nvSpPr>
+        <p:spPr>
+          <a:xfrm>
+            <a:off x="2468880" y="3675888"/>
+            <a:ext cx="1554480" cy="402336"/>
           </a:xfrm>
           <a:prstGeom prst="rect">
             <a:avLst/>
@@ -10112,27 +10173,27 @@
               <a:buNone/>
             </a:pPr>
             <a:r>
-              <a:rPr lang="en-US" sz="1000" dirty="0">
-                <a:solidFill>
-                  <a:srgbClr val="8CB3CC"/>
-                </a:solidFill>
-              </a:rPr>
-              <a:t>LogiNext</a:t>
-            </a:r>
-            <a:endParaRPr lang="en-US" sz="1000" dirty="0"/>
-          </a:p>
-        </p:txBody>
-      </p:sp>
-      <p:sp>
-        <p:nvSpPr>
-          <p:cNvPr id="65" name="Shape 63"/>
-          <p:cNvSpPr/>
-          <p:nvPr/>
-        </p:nvSpPr>
-        <p:spPr>
-          <a:xfrm>
-            <a:off x="2468880" y="3922776"/>
-            <a:ext cx="1554480" cy="475488"/>
+              <a:rPr lang="en-US" sz="1200" dirty="0">
+                <a:solidFill>
+                  <a:srgbClr val="A89F98"/>
+                </a:solidFill>
+              </a:rPr>
+              <a:t>Enterprise</a:t>
+            </a:r>
+            <a:endParaRPr lang="en-US" sz="1200" dirty="0"/>
+          </a:p>
+        </p:txBody>
+      </p:sp>
+      <p:sp>
+        <p:nvSpPr>
+          <p:cNvPr id="67" name="Shape 65"/>
+          <p:cNvSpPr/>
+          <p:nvPr/>
+        </p:nvSpPr>
+        <p:spPr>
+          <a:xfrm>
+            <a:off x="4023360" y="3675888"/>
+            <a:ext cx="1234440" cy="402336"/>
           </a:xfrm>
           <a:prstGeom prst="rect">
             <a:avLst/>
@@ -10150,14 +10211,14 @@
       </p:sp>
       <p:sp>
         <p:nvSpPr>
-          <p:cNvPr id="66" name="Text 64"/>
-          <p:cNvSpPr/>
-          <p:nvPr/>
-        </p:nvSpPr>
-        <p:spPr>
-          <a:xfrm>
-            <a:off x="2468880" y="3922776"/>
-            <a:ext cx="1554480" cy="475488"/>
+          <p:cNvPr id="68" name="Text 66"/>
+          <p:cNvSpPr/>
+          <p:nvPr/>
+        </p:nvSpPr>
+        <p:spPr>
+          <a:xfrm>
+            <a:off x="4023360" y="3675888"/>
+            <a:ext cx="1234440" cy="402336"/>
           </a:xfrm>
           <a:prstGeom prst="rect">
             <a:avLst/>
@@ -10175,10 +10236,10 @@
             <a:r>
               <a:rPr lang="en-US" sz="1200" dirty="0">
                 <a:solidFill>
-                  <a:srgbClr val="8CB3CC"/>
-                </a:solidFill>
-              </a:rPr>
-              <a:t>Enterprise</a:t>
+                  <a:srgbClr val="334455"/>
+                </a:solidFill>
+              </a:rPr>
+              <a:t>✗</a:t>
             </a:r>
             <a:endParaRPr lang="en-US" sz="1200" dirty="0"/>
           </a:p>
@@ -10186,14 +10247,14 @@
       </p:sp>
       <p:sp>
         <p:nvSpPr>
-          <p:cNvPr id="67" name="Shape 65"/>
-          <p:cNvSpPr/>
-          <p:nvPr/>
-        </p:nvSpPr>
-        <p:spPr>
-          <a:xfrm>
-            <a:off x="4023360" y="3922776"/>
-            <a:ext cx="1234440" cy="475488"/>
+          <p:cNvPr id="69" name="Shape 67"/>
+          <p:cNvSpPr/>
+          <p:nvPr/>
+        </p:nvSpPr>
+        <p:spPr>
+          <a:xfrm>
+            <a:off x="5257800" y="3675888"/>
+            <a:ext cx="1234440" cy="402336"/>
           </a:xfrm>
           <a:prstGeom prst="rect">
             <a:avLst/>
@@ -10211,14 +10272,14 @@
       </p:sp>
       <p:sp>
         <p:nvSpPr>
-          <p:cNvPr id="68" name="Text 66"/>
-          <p:cNvSpPr/>
-          <p:nvPr/>
-        </p:nvSpPr>
-        <p:spPr>
-          <a:xfrm>
-            <a:off x="4023360" y="3922776"/>
-            <a:ext cx="1234440" cy="475488"/>
+          <p:cNvPr id="70" name="Text 68"/>
+          <p:cNvSpPr/>
+          <p:nvPr/>
+        </p:nvSpPr>
+        <p:spPr>
+          <a:xfrm>
+            <a:off x="5257800" y="3675888"/>
+            <a:ext cx="1234440" cy="402336"/>
           </a:xfrm>
           <a:prstGeom prst="rect">
             <a:avLst/>
@@ -10247,14 +10308,14 @@
       </p:sp>
       <p:sp>
         <p:nvSpPr>
-          <p:cNvPr id="69" name="Shape 67"/>
-          <p:cNvSpPr/>
-          <p:nvPr/>
-        </p:nvSpPr>
-        <p:spPr>
-          <a:xfrm>
-            <a:off x="5257800" y="3922776"/>
-            <a:ext cx="1234440" cy="475488"/>
+          <p:cNvPr id="71" name="Shape 69"/>
+          <p:cNvSpPr/>
+          <p:nvPr/>
+        </p:nvSpPr>
+        <p:spPr>
+          <a:xfrm>
+            <a:off x="6492240" y="3675888"/>
+            <a:ext cx="1097280" cy="402336"/>
           </a:xfrm>
           <a:prstGeom prst="rect">
             <a:avLst/>
@@ -10272,14 +10333,14 @@
       </p:sp>
       <p:sp>
         <p:nvSpPr>
-          <p:cNvPr id="70" name="Text 68"/>
-          <p:cNvSpPr/>
-          <p:nvPr/>
-        </p:nvSpPr>
-        <p:spPr>
-          <a:xfrm>
-            <a:off x="5257800" y="3922776"/>
-            <a:ext cx="1234440" cy="475488"/>
+          <p:cNvPr id="72" name="Text 70"/>
+          <p:cNvSpPr/>
+          <p:nvPr/>
+        </p:nvSpPr>
+        <p:spPr>
+          <a:xfrm>
+            <a:off x="6492240" y="3675888"/>
+            <a:ext cx="1097280" cy="402336"/>
           </a:xfrm>
           <a:prstGeom prst="rect">
             <a:avLst/>
@@ -10308,14 +10369,14 @@
       </p:sp>
       <p:sp>
         <p:nvSpPr>
-          <p:cNvPr id="71" name="Shape 69"/>
-          <p:cNvSpPr/>
-          <p:nvPr/>
-        </p:nvSpPr>
-        <p:spPr>
-          <a:xfrm>
-            <a:off x="6492240" y="3922776"/>
-            <a:ext cx="1097280" cy="475488"/>
+          <p:cNvPr id="73" name="Shape 71"/>
+          <p:cNvSpPr/>
+          <p:nvPr/>
+        </p:nvSpPr>
+        <p:spPr>
+          <a:xfrm>
+            <a:off x="7589520" y="3675888"/>
+            <a:ext cx="1097280" cy="402336"/>
           </a:xfrm>
           <a:prstGeom prst="rect">
             <a:avLst/>
@@ -10333,14 +10394,14 @@
       </p:sp>
       <p:sp>
         <p:nvSpPr>
-          <p:cNvPr id="72" name="Text 70"/>
-          <p:cNvSpPr/>
-          <p:nvPr/>
-        </p:nvSpPr>
-        <p:spPr>
-          <a:xfrm>
-            <a:off x="6492240" y="3922776"/>
-            <a:ext cx="1097280" cy="475488"/>
+          <p:cNvPr id="74" name="Text 72"/>
+          <p:cNvSpPr/>
+          <p:nvPr/>
+        </p:nvSpPr>
+        <p:spPr>
+          <a:xfrm>
+            <a:off x="7589520" y="3675888"/>
+            <a:ext cx="1097280" cy="402336"/>
           </a:xfrm>
           <a:prstGeom prst="rect">
             <a:avLst/>
@@ -10369,14 +10430,14 @@
       </p:sp>
       <p:sp>
         <p:nvSpPr>
-          <p:cNvPr id="73" name="Shape 71"/>
-          <p:cNvSpPr/>
-          <p:nvPr/>
-        </p:nvSpPr>
-        <p:spPr>
-          <a:xfrm>
-            <a:off x="7589520" y="3922776"/>
-            <a:ext cx="1097280" cy="475488"/>
+          <p:cNvPr id="75" name="Shape 73"/>
+          <p:cNvSpPr/>
+          <p:nvPr/>
+        </p:nvSpPr>
+        <p:spPr>
+          <a:xfrm>
+            <a:off x="8686800" y="3675888"/>
+            <a:ext cx="1097280" cy="402336"/>
           </a:xfrm>
           <a:prstGeom prst="rect">
             <a:avLst/>
@@ -10394,14 +10455,14 @@
       </p:sp>
       <p:sp>
         <p:nvSpPr>
-          <p:cNvPr id="74" name="Text 72"/>
-          <p:cNvSpPr/>
-          <p:nvPr/>
-        </p:nvSpPr>
-        <p:spPr>
-          <a:xfrm>
-            <a:off x="7589520" y="3922776"/>
-            <a:ext cx="1097280" cy="475488"/>
+          <p:cNvPr id="76" name="Text 74"/>
+          <p:cNvSpPr/>
+          <p:nvPr/>
+        </p:nvSpPr>
+        <p:spPr>
+          <a:xfrm>
+            <a:off x="8686800" y="3675888"/>
+            <a:ext cx="1097280" cy="402336"/>
           </a:xfrm>
           <a:prstGeom prst="rect">
             <a:avLst/>
@@ -10417,12 +10478,12 @@
               <a:buNone/>
             </a:pPr>
             <a:r>
-              <a:rPr lang="en-US" sz="1200" dirty="0">
-                <a:solidFill>
-                  <a:srgbClr val="334455"/>
-                </a:solidFill>
-              </a:rPr>
-              <a:t>✗</a:t>
+              <a:rPr lang="en-US" sz="1200" b="1" dirty="0">
+                <a:solidFill>
+                  <a:srgbClr val="22C55E"/>
+                </a:solidFill>
+              </a:rPr>
+              <a:t>✓</a:t>
             </a:r>
             <a:endParaRPr lang="en-US" sz="1200" dirty="0"/>
           </a:p>
@@ -10430,14 +10491,75 @@
       </p:sp>
       <p:sp>
         <p:nvSpPr>
-          <p:cNvPr id="75" name="Shape 73"/>
-          <p:cNvSpPr/>
-          <p:nvPr/>
-        </p:nvSpPr>
-        <p:spPr>
-          <a:xfrm>
-            <a:off x="8686800" y="3922776"/>
-            <a:ext cx="1097280" cy="475488"/>
+          <p:cNvPr id="77" name="Shape 75"/>
+          <p:cNvSpPr/>
+          <p:nvPr/>
+        </p:nvSpPr>
+        <p:spPr>
+          <a:xfrm>
+            <a:off x="457200" y="4078224"/>
+            <a:ext cx="11155680" cy="256032"/>
+          </a:xfrm>
+          <a:prstGeom prst="rect">
+            <a:avLst/>
+          </a:prstGeom>
+          <a:solidFill>
+            <a:srgbClr val="141210"/>
+          </a:solidFill>
+          <a:ln w="12700">
+            <a:solidFill>
+              <a:srgbClr val="3A3530"/>
+            </a:solidFill>
+            <a:prstDash val="solid"/>
+          </a:ln>
+        </p:spPr>
+      </p:sp>
+      <p:sp>
+        <p:nvSpPr>
+          <p:cNvPr id="78" name="Text 76"/>
+          <p:cNvSpPr/>
+          <p:nvPr/>
+        </p:nvSpPr>
+        <p:spPr>
+          <a:xfrm>
+            <a:off x="548640" y="4078224"/>
+            <a:ext cx="10972800" cy="256032"/>
+          </a:xfrm>
+          <a:prstGeom prst="rect">
+            <a:avLst/>
+          </a:prstGeom>
+          <a:noFill/>
+          <a:ln/>
+        </p:spPr>
+        <p:txBody>
+          <a:bodyPr wrap="square" lIns="0" tIns="0" rIns="0" bIns="0" rtlCol="0" anchor="ctr"/>
+          <a:lstStyle/>
+          <a:p>
+            <a:pPr indent="0" marL="0">
+              <a:buNone/>
+            </a:pPr>
+            <a:r>
+              <a:rPr lang="en-US" sz="800" b="1" spc="200" kern="0" dirty="0">
+                <a:solidFill>
+                  <a:srgbClr val="4A8A9A"/>
+                </a:solidFill>
+              </a:rPr>
+              <a:t>— Marketplace —</a:t>
+            </a:r>
+            <a:endParaRPr lang="en-US" sz="800" dirty="0"/>
+          </a:p>
+        </p:txBody>
+      </p:sp>
+      <p:sp>
+        <p:nvSpPr>
+          <p:cNvPr id="79" name="Shape 77"/>
+          <p:cNvSpPr/>
+          <p:nvPr/>
+        </p:nvSpPr>
+        <p:spPr>
+          <a:xfrm>
+            <a:off x="457200" y="4334256"/>
+            <a:ext cx="2011680" cy="402336"/>
           </a:xfrm>
           <a:prstGeom prst="rect">
             <a:avLst/>
@@ -10455,14 +10577,14 @@
       </p:sp>
       <p:sp>
         <p:nvSpPr>
-          <p:cNvPr id="76" name="Text 74"/>
-          <p:cNvSpPr/>
-          <p:nvPr/>
-        </p:nvSpPr>
-        <p:spPr>
-          <a:xfrm>
-            <a:off x="8686800" y="3922776"/>
-            <a:ext cx="1097280" cy="475488"/>
+          <p:cNvPr id="80" name="Text 78"/>
+          <p:cNvSpPr/>
+          <p:nvPr/>
+        </p:nvSpPr>
+        <p:spPr>
+          <a:xfrm>
+            <a:off x="457200" y="4334256"/>
+            <a:ext cx="2011680" cy="402336"/>
           </a:xfrm>
           <a:prstGeom prst="rect">
             <a:avLst/>
@@ -10478,33 +10600,33 @@
               <a:buNone/>
             </a:pPr>
             <a:r>
-              <a:rPr lang="en-US" sz="1200" b="1" dirty="0">
-                <a:solidFill>
-                  <a:srgbClr val="22C55E"/>
-                </a:solidFill>
-              </a:rPr>
-              <a:t>✓</a:t>
-            </a:r>
-            <a:endParaRPr lang="en-US" sz="1200" dirty="0"/>
-          </a:p>
-        </p:txBody>
-      </p:sp>
-      <p:sp>
-        <p:nvSpPr>
-          <p:cNvPr id="77" name="Shape 75"/>
-          <p:cNvSpPr/>
-          <p:nvPr/>
-        </p:nvSpPr>
-        <p:spPr>
-          <a:xfrm>
-            <a:off x="457200" y="4398264"/>
-            <a:ext cx="11155680" cy="256032"/>
-          </a:xfrm>
-          <a:prstGeom prst="rect">
-            <a:avLst/>
-          </a:prstGeom>
-          <a:solidFill>
-            <a:srgbClr val="0A1520"/>
+              <a:rPr lang="en-US" sz="1000" dirty="0">
+                <a:solidFill>
+                  <a:srgbClr val="A89F98"/>
+                </a:solidFill>
+              </a:rPr>
+              <a:t>Glovo</a:t>
+            </a:r>
+            <a:endParaRPr lang="en-US" sz="1000" dirty="0"/>
+          </a:p>
+        </p:txBody>
+      </p:sp>
+      <p:sp>
+        <p:nvSpPr>
+          <p:cNvPr id="81" name="Shape 79"/>
+          <p:cNvSpPr/>
+          <p:nvPr/>
+        </p:nvSpPr>
+        <p:spPr>
+          <a:xfrm>
+            <a:off x="2468880" y="4334256"/>
+            <a:ext cx="1554480" cy="402336"/>
+          </a:xfrm>
+          <a:prstGeom prst="rect">
+            <a:avLst/>
+          </a:prstGeom>
+          <a:solidFill>
+            <a:srgbClr val="0F1E30"/>
           </a:solidFill>
           <a:ln w="12700">
             <a:solidFill>
@@ -10516,50 +10638,50 @@
       </p:sp>
       <p:sp>
         <p:nvSpPr>
-          <p:cNvPr id="78" name="Text 76"/>
-          <p:cNvSpPr/>
-          <p:nvPr/>
-        </p:nvSpPr>
-        <p:spPr>
-          <a:xfrm>
-            <a:off x="548640" y="4398264"/>
-            <a:ext cx="10972800" cy="256032"/>
-          </a:xfrm>
-          <a:prstGeom prst="rect">
-            <a:avLst/>
-          </a:prstGeom>
-          <a:noFill/>
-          <a:ln/>
-        </p:spPr>
-        <p:txBody>
-          <a:bodyPr wrap="square" lIns="0" tIns="0" rIns="0" bIns="0" rtlCol="0" anchor="ctr"/>
-          <a:lstStyle/>
-          <a:p>
-            <a:pPr indent="0" marL="0">
-              <a:buNone/>
-            </a:pPr>
-            <a:r>
-              <a:rPr lang="en-US" sz="800" b="1" spc="200" kern="0" dirty="0">
-                <a:solidFill>
-                  <a:srgbClr val="4A8A9A"/>
-                </a:solidFill>
-              </a:rPr>
-              <a:t>— Marketplace —</a:t>
-            </a:r>
-            <a:endParaRPr lang="en-US" sz="800" dirty="0"/>
-          </a:p>
-        </p:txBody>
-      </p:sp>
-      <p:sp>
-        <p:nvSpPr>
-          <p:cNvPr id="79" name="Shape 77"/>
-          <p:cNvSpPr/>
-          <p:nvPr/>
-        </p:nvSpPr>
-        <p:spPr>
-          <a:xfrm>
-            <a:off x="457200" y="4654296"/>
-            <a:ext cx="2011680" cy="475488"/>
+          <p:cNvPr id="82" name="Text 80"/>
+          <p:cNvSpPr/>
+          <p:nvPr/>
+        </p:nvSpPr>
+        <p:spPr>
+          <a:xfrm>
+            <a:off x="2468880" y="4334256"/>
+            <a:ext cx="1554480" cy="402336"/>
+          </a:xfrm>
+          <a:prstGeom prst="rect">
+            <a:avLst/>
+          </a:prstGeom>
+          <a:noFill/>
+          <a:ln/>
+        </p:spPr>
+        <p:txBody>
+          <a:bodyPr wrap="square" lIns="0" tIns="0" rIns="0" bIns="0" rtlCol="0" anchor="ctr"/>
+          <a:lstStyle/>
+          <a:p>
+            <a:pPr algn="ctr" indent="0" marL="0">
+              <a:buNone/>
+            </a:pPr>
+            <a:r>
+              <a:rPr lang="en-US" sz="1200" dirty="0">
+                <a:solidFill>
+                  <a:srgbClr val="A89F98"/>
+                </a:solidFill>
+              </a:rPr>
+              <a:t>25-30% comm.</a:t>
+            </a:r>
+            <a:endParaRPr lang="en-US" sz="1200" dirty="0"/>
+          </a:p>
+        </p:txBody>
+      </p:sp>
+      <p:sp>
+        <p:nvSpPr>
+          <p:cNvPr id="83" name="Shape 81"/>
+          <p:cNvSpPr/>
+          <p:nvPr/>
+        </p:nvSpPr>
+        <p:spPr>
+          <a:xfrm>
+            <a:off x="4023360" y="4334256"/>
+            <a:ext cx="1234440" cy="402336"/>
           </a:xfrm>
           <a:prstGeom prst="rect">
             <a:avLst/>
@@ -10577,14 +10699,14 @@
       </p:sp>
       <p:sp>
         <p:nvSpPr>
-          <p:cNvPr id="80" name="Text 78"/>
-          <p:cNvSpPr/>
-          <p:nvPr/>
-        </p:nvSpPr>
-        <p:spPr>
-          <a:xfrm>
-            <a:off x="457200" y="4654296"/>
-            <a:ext cx="2011680" cy="475488"/>
+          <p:cNvPr id="84" name="Text 82"/>
+          <p:cNvSpPr/>
+          <p:nvPr/>
+        </p:nvSpPr>
+        <p:spPr>
+          <a:xfrm>
+            <a:off x="4023360" y="4334256"/>
+            <a:ext cx="1234440" cy="402336"/>
           </a:xfrm>
           <a:prstGeom prst="rect">
             <a:avLst/>
@@ -10600,27 +10722,27 @@
               <a:buNone/>
             </a:pPr>
             <a:r>
-              <a:rPr lang="en-US" sz="1000" dirty="0">
-                <a:solidFill>
-                  <a:srgbClr val="8CB3CC"/>
-                </a:solidFill>
-              </a:rPr>
-              <a:t>Glovo</a:t>
-            </a:r>
-            <a:endParaRPr lang="en-US" sz="1000" dirty="0"/>
-          </a:p>
-        </p:txBody>
-      </p:sp>
-      <p:sp>
-        <p:nvSpPr>
-          <p:cNvPr id="81" name="Shape 79"/>
-          <p:cNvSpPr/>
-          <p:nvPr/>
-        </p:nvSpPr>
-        <p:spPr>
-          <a:xfrm>
-            <a:off x="2468880" y="4654296"/>
-            <a:ext cx="1554480" cy="475488"/>
+              <a:rPr lang="en-US" sz="1200" dirty="0">
+                <a:solidFill>
+                  <a:srgbClr val="F59E0B"/>
+                </a:solidFill>
+              </a:rPr>
+              <a:t>~</a:t>
+            </a:r>
+            <a:endParaRPr lang="en-US" sz="1200" dirty="0"/>
+          </a:p>
+        </p:txBody>
+      </p:sp>
+      <p:sp>
+        <p:nvSpPr>
+          <p:cNvPr id="85" name="Shape 83"/>
+          <p:cNvSpPr/>
+          <p:nvPr/>
+        </p:nvSpPr>
+        <p:spPr>
+          <a:xfrm>
+            <a:off x="5257800" y="4334256"/>
+            <a:ext cx="1234440" cy="402336"/>
           </a:xfrm>
           <a:prstGeom prst="rect">
             <a:avLst/>
@@ -10638,14 +10760,14 @@
       </p:sp>
       <p:sp>
         <p:nvSpPr>
-          <p:cNvPr id="82" name="Text 80"/>
-          <p:cNvSpPr/>
-          <p:nvPr/>
-        </p:nvSpPr>
-        <p:spPr>
-          <a:xfrm>
-            <a:off x="2468880" y="4654296"/>
-            <a:ext cx="1554480" cy="475488"/>
+          <p:cNvPr id="86" name="Text 84"/>
+          <p:cNvSpPr/>
+          <p:nvPr/>
+        </p:nvSpPr>
+        <p:spPr>
+          <a:xfrm>
+            <a:off x="5257800" y="4334256"/>
+            <a:ext cx="1234440" cy="402336"/>
           </a:xfrm>
           <a:prstGeom prst="rect">
             <a:avLst/>
@@ -10663,10 +10785,10 @@
             <a:r>
               <a:rPr lang="en-US" sz="1200" dirty="0">
                 <a:solidFill>
-                  <a:srgbClr val="8CB3CC"/>
-                </a:solidFill>
-              </a:rPr>
-              <a:t>25-30% comm.</a:t>
+                  <a:srgbClr val="334455"/>
+                </a:solidFill>
+              </a:rPr>
+              <a:t>✗</a:t>
             </a:r>
             <a:endParaRPr lang="en-US" sz="1200" dirty="0"/>
           </a:p>
@@ -10674,14 +10796,14 @@
       </p:sp>
       <p:sp>
         <p:nvSpPr>
-          <p:cNvPr id="83" name="Shape 81"/>
-          <p:cNvSpPr/>
-          <p:nvPr/>
-        </p:nvSpPr>
-        <p:spPr>
-          <a:xfrm>
-            <a:off x="4023360" y="4654296"/>
-            <a:ext cx="1234440" cy="475488"/>
+          <p:cNvPr id="87" name="Shape 85"/>
+          <p:cNvSpPr/>
+          <p:nvPr/>
+        </p:nvSpPr>
+        <p:spPr>
+          <a:xfrm>
+            <a:off x="6492240" y="4334256"/>
+            <a:ext cx="1097280" cy="402336"/>
           </a:xfrm>
           <a:prstGeom prst="rect">
             <a:avLst/>
@@ -10699,14 +10821,14 @@
       </p:sp>
       <p:sp>
         <p:nvSpPr>
-          <p:cNvPr id="84" name="Text 82"/>
-          <p:cNvSpPr/>
-          <p:nvPr/>
-        </p:nvSpPr>
-        <p:spPr>
-          <a:xfrm>
-            <a:off x="4023360" y="4654296"/>
-            <a:ext cx="1234440" cy="475488"/>
+          <p:cNvPr id="88" name="Text 86"/>
+          <p:cNvSpPr/>
+          <p:nvPr/>
+        </p:nvSpPr>
+        <p:spPr>
+          <a:xfrm>
+            <a:off x="6492240" y="4334256"/>
+            <a:ext cx="1097280" cy="402336"/>
           </a:xfrm>
           <a:prstGeom prst="rect">
             <a:avLst/>
@@ -10722,12 +10844,12 @@
               <a:buNone/>
             </a:pPr>
             <a:r>
-              <a:rPr lang="en-US" sz="1200" dirty="0">
-                <a:solidFill>
-                  <a:srgbClr val="F59E0B"/>
-                </a:solidFill>
-              </a:rPr>
-              <a:t>~</a:t>
+              <a:rPr lang="en-US" sz="1200" b="1" dirty="0">
+                <a:solidFill>
+                  <a:srgbClr val="22C55E"/>
+                </a:solidFill>
+              </a:rPr>
+              <a:t>✓</a:t>
             </a:r>
             <a:endParaRPr lang="en-US" sz="1200" dirty="0"/>
           </a:p>
@@ -10735,14 +10857,14 @@
       </p:sp>
       <p:sp>
         <p:nvSpPr>
-          <p:cNvPr id="85" name="Shape 83"/>
-          <p:cNvSpPr/>
-          <p:nvPr/>
-        </p:nvSpPr>
-        <p:spPr>
-          <a:xfrm>
-            <a:off x="5257800" y="4654296"/>
-            <a:ext cx="1234440" cy="475488"/>
+          <p:cNvPr id="89" name="Shape 87"/>
+          <p:cNvSpPr/>
+          <p:nvPr/>
+        </p:nvSpPr>
+        <p:spPr>
+          <a:xfrm>
+            <a:off x="7589520" y="4334256"/>
+            <a:ext cx="1097280" cy="402336"/>
           </a:xfrm>
           <a:prstGeom prst="rect">
             <a:avLst/>
@@ -10760,14 +10882,14 @@
       </p:sp>
       <p:sp>
         <p:nvSpPr>
-          <p:cNvPr id="86" name="Text 84"/>
-          <p:cNvSpPr/>
-          <p:nvPr/>
-        </p:nvSpPr>
-        <p:spPr>
-          <a:xfrm>
-            <a:off x="5257800" y="4654296"/>
-            <a:ext cx="1234440" cy="475488"/>
+          <p:cNvPr id="90" name="Text 88"/>
+          <p:cNvSpPr/>
+          <p:nvPr/>
+        </p:nvSpPr>
+        <p:spPr>
+          <a:xfrm>
+            <a:off x="7589520" y="4334256"/>
+            <a:ext cx="1097280" cy="402336"/>
           </a:xfrm>
           <a:prstGeom prst="rect">
             <a:avLst/>
@@ -10785,10 +10907,10 @@
             <a:r>
               <a:rPr lang="en-US" sz="1200" dirty="0">
                 <a:solidFill>
-                  <a:srgbClr val="334455"/>
-                </a:solidFill>
-              </a:rPr>
-              <a:t>✗</a:t>
+                  <a:srgbClr val="F59E0B"/>
+                </a:solidFill>
+              </a:rPr>
+              <a:t>~</a:t>
             </a:r>
             <a:endParaRPr lang="en-US" sz="1200" dirty="0"/>
           </a:p>
@@ -10796,14 +10918,14 @@
       </p:sp>
       <p:sp>
         <p:nvSpPr>
-          <p:cNvPr id="87" name="Shape 85"/>
-          <p:cNvSpPr/>
-          <p:nvPr/>
-        </p:nvSpPr>
-        <p:spPr>
-          <a:xfrm>
-            <a:off x="6492240" y="4654296"/>
-            <a:ext cx="1097280" cy="475488"/>
+          <p:cNvPr id="91" name="Shape 89"/>
+          <p:cNvSpPr/>
+          <p:nvPr/>
+        </p:nvSpPr>
+        <p:spPr>
+          <a:xfrm>
+            <a:off x="8686800" y="4334256"/>
+            <a:ext cx="1097280" cy="402336"/>
           </a:xfrm>
           <a:prstGeom prst="rect">
             <a:avLst/>
@@ -10821,14 +10943,14 @@
       </p:sp>
       <p:sp>
         <p:nvSpPr>
-          <p:cNvPr id="88" name="Text 86"/>
-          <p:cNvSpPr/>
-          <p:nvPr/>
-        </p:nvSpPr>
-        <p:spPr>
-          <a:xfrm>
-            <a:off x="6492240" y="4654296"/>
-            <a:ext cx="1097280" cy="475488"/>
+          <p:cNvPr id="92" name="Text 90"/>
+          <p:cNvSpPr/>
+          <p:nvPr/>
+        </p:nvSpPr>
+        <p:spPr>
+          <a:xfrm>
+            <a:off x="8686800" y="4334256"/>
+            <a:ext cx="1097280" cy="402336"/>
           </a:xfrm>
           <a:prstGeom prst="rect">
             <a:avLst/>
@@ -10844,12 +10966,12 @@
               <a:buNone/>
             </a:pPr>
             <a:r>
-              <a:rPr lang="en-US" sz="1200" b="1" dirty="0">
-                <a:solidFill>
-                  <a:srgbClr val="22C55E"/>
-                </a:solidFill>
-              </a:rPr>
-              <a:t>✓</a:t>
+              <a:rPr lang="en-US" sz="1200" dirty="0">
+                <a:solidFill>
+                  <a:srgbClr val="334455"/>
+                </a:solidFill>
+              </a:rPr>
+              <a:t>✗</a:t>
             </a:r>
             <a:endParaRPr lang="en-US" sz="1200" dirty="0"/>
           </a:p>
@@ -10857,20 +10979,20 @@
       </p:sp>
       <p:sp>
         <p:nvSpPr>
-          <p:cNvPr id="89" name="Shape 87"/>
-          <p:cNvSpPr/>
-          <p:nvPr/>
-        </p:nvSpPr>
-        <p:spPr>
-          <a:xfrm>
-            <a:off x="7589520" y="4654296"/>
-            <a:ext cx="1097280" cy="475488"/>
-          </a:xfrm>
-          <a:prstGeom prst="rect">
-            <a:avLst/>
-          </a:prstGeom>
-          <a:solidFill>
-            <a:srgbClr val="0F1E30"/>
+          <p:cNvPr id="93" name="Shape 91"/>
+          <p:cNvSpPr/>
+          <p:nvPr/>
+        </p:nvSpPr>
+        <p:spPr>
+          <a:xfrm>
+            <a:off x="457200" y="4736592"/>
+            <a:ext cx="2011680" cy="402336"/>
+          </a:xfrm>
+          <a:prstGeom prst="rect">
+            <a:avLst/>
+          </a:prstGeom>
+          <a:solidFill>
+            <a:srgbClr val="0A1929"/>
           </a:solidFill>
           <a:ln w="12700">
             <a:solidFill>
@@ -10882,14 +11004,14 @@
       </p:sp>
       <p:sp>
         <p:nvSpPr>
-          <p:cNvPr id="90" name="Text 88"/>
-          <p:cNvSpPr/>
-          <p:nvPr/>
-        </p:nvSpPr>
-        <p:spPr>
-          <a:xfrm>
-            <a:off x="7589520" y="4654296"/>
-            <a:ext cx="1097280" cy="475488"/>
+          <p:cNvPr id="94" name="Text 92"/>
+          <p:cNvSpPr/>
+          <p:nvPr/>
+        </p:nvSpPr>
+        <p:spPr>
+          <a:xfrm>
+            <a:off x="457200" y="4736592"/>
+            <a:ext cx="2011680" cy="402336"/>
           </a:xfrm>
           <a:prstGeom prst="rect">
             <a:avLst/>
@@ -10905,33 +11027,33 @@
               <a:buNone/>
             </a:pPr>
             <a:r>
-              <a:rPr lang="en-US" sz="1200" dirty="0">
-                <a:solidFill>
-                  <a:srgbClr val="F59E0B"/>
-                </a:solidFill>
-              </a:rPr>
-              <a:t>~</a:t>
-            </a:r>
-            <a:endParaRPr lang="en-US" sz="1200" dirty="0"/>
-          </a:p>
-        </p:txBody>
-      </p:sp>
-      <p:sp>
-        <p:nvSpPr>
-          <p:cNvPr id="91" name="Shape 89"/>
-          <p:cNvSpPr/>
-          <p:nvPr/>
-        </p:nvSpPr>
-        <p:spPr>
-          <a:xfrm>
-            <a:off x="8686800" y="4654296"/>
-            <a:ext cx="1097280" cy="475488"/>
-          </a:xfrm>
-          <a:prstGeom prst="rect">
-            <a:avLst/>
-          </a:prstGeom>
-          <a:solidFill>
-            <a:srgbClr val="0F1E30"/>
+              <a:rPr lang="en-US" sz="1000" dirty="0">
+                <a:solidFill>
+                  <a:srgbClr val="A89F98"/>
+                </a:solidFill>
+              </a:rPr>
+              <a:t>Deliveroo / Just Eat</a:t>
+            </a:r>
+            <a:endParaRPr lang="en-US" sz="1000" dirty="0"/>
+          </a:p>
+        </p:txBody>
+      </p:sp>
+      <p:sp>
+        <p:nvSpPr>
+          <p:cNvPr id="95" name="Shape 93"/>
+          <p:cNvSpPr/>
+          <p:nvPr/>
+        </p:nvSpPr>
+        <p:spPr>
+          <a:xfrm>
+            <a:off x="2468880" y="4736592"/>
+            <a:ext cx="1554480" cy="402336"/>
+          </a:xfrm>
+          <a:prstGeom prst="rect">
+            <a:avLst/>
+          </a:prstGeom>
+          <a:solidFill>
+            <a:srgbClr val="0A1929"/>
           </a:solidFill>
           <a:ln w="12700">
             <a:solidFill>
@@ -10943,14 +11065,14 @@
       </p:sp>
       <p:sp>
         <p:nvSpPr>
-          <p:cNvPr id="92" name="Text 90"/>
-          <p:cNvSpPr/>
-          <p:nvPr/>
-        </p:nvSpPr>
-        <p:spPr>
-          <a:xfrm>
-            <a:off x="8686800" y="4654296"/>
-            <a:ext cx="1097280" cy="475488"/>
+          <p:cNvPr id="96" name="Text 94"/>
+          <p:cNvSpPr/>
+          <p:nvPr/>
+        </p:nvSpPr>
+        <p:spPr>
+          <a:xfrm>
+            <a:off x="2468880" y="4736592"/>
+            <a:ext cx="1554480" cy="402336"/>
           </a:xfrm>
           <a:prstGeom prst="rect">
             <a:avLst/>
@@ -10968,10 +11090,10 @@
             <a:r>
               <a:rPr lang="en-US" sz="1200" dirty="0">
                 <a:solidFill>
-                  <a:srgbClr val="334455"/>
-                </a:solidFill>
-              </a:rPr>
-              <a:t>✗</a:t>
+                  <a:srgbClr val="A89F98"/>
+                </a:solidFill>
+              </a:rPr>
+              <a:t>25-30% comm.</a:t>
             </a:r>
             <a:endParaRPr lang="en-US" sz="1200" dirty="0"/>
           </a:p>
@@ -10979,14 +11101,14 @@
       </p:sp>
       <p:sp>
         <p:nvSpPr>
-          <p:cNvPr id="93" name="Shape 91"/>
-          <p:cNvSpPr/>
-          <p:nvPr/>
-        </p:nvSpPr>
-        <p:spPr>
-          <a:xfrm>
-            <a:off x="457200" y="5129784"/>
-            <a:ext cx="2011680" cy="475488"/>
+          <p:cNvPr id="97" name="Shape 95"/>
+          <p:cNvSpPr/>
+          <p:nvPr/>
+        </p:nvSpPr>
+        <p:spPr>
+          <a:xfrm>
+            <a:off x="4023360" y="4736592"/>
+            <a:ext cx="1234440" cy="402336"/>
           </a:xfrm>
           <a:prstGeom prst="rect">
             <a:avLst/>
@@ -11004,14 +11126,14 @@
       </p:sp>
       <p:sp>
         <p:nvSpPr>
-          <p:cNvPr id="94" name="Text 92"/>
-          <p:cNvSpPr/>
-          <p:nvPr/>
-        </p:nvSpPr>
-        <p:spPr>
-          <a:xfrm>
-            <a:off x="457200" y="5129784"/>
-            <a:ext cx="2011680" cy="475488"/>
+          <p:cNvPr id="98" name="Text 96"/>
+          <p:cNvSpPr/>
+          <p:nvPr/>
+        </p:nvSpPr>
+        <p:spPr>
+          <a:xfrm>
+            <a:off x="4023360" y="4736592"/>
+            <a:ext cx="1234440" cy="402336"/>
           </a:xfrm>
           <a:prstGeom prst="rect">
             <a:avLst/>
@@ -11027,27 +11149,27 @@
               <a:buNone/>
             </a:pPr>
             <a:r>
-              <a:rPr lang="en-US" sz="1000" dirty="0">
-                <a:solidFill>
-                  <a:srgbClr val="8CB3CC"/>
-                </a:solidFill>
-              </a:rPr>
-              <a:t>Deliveroo / Just Eat</a:t>
-            </a:r>
-            <a:endParaRPr lang="en-US" sz="1000" dirty="0"/>
-          </a:p>
-        </p:txBody>
-      </p:sp>
-      <p:sp>
-        <p:nvSpPr>
-          <p:cNvPr id="95" name="Shape 93"/>
-          <p:cNvSpPr/>
-          <p:nvPr/>
-        </p:nvSpPr>
-        <p:spPr>
-          <a:xfrm>
-            <a:off x="2468880" y="5129784"/>
-            <a:ext cx="1554480" cy="475488"/>
+              <a:rPr lang="en-US" sz="1200" dirty="0">
+                <a:solidFill>
+                  <a:srgbClr val="334455"/>
+                </a:solidFill>
+              </a:rPr>
+              <a:t>✗</a:t>
+            </a:r>
+            <a:endParaRPr lang="en-US" sz="1200" dirty="0"/>
+          </a:p>
+        </p:txBody>
+      </p:sp>
+      <p:sp>
+        <p:nvSpPr>
+          <p:cNvPr id="99" name="Shape 97"/>
+          <p:cNvSpPr/>
+          <p:nvPr/>
+        </p:nvSpPr>
+        <p:spPr>
+          <a:xfrm>
+            <a:off x="5257800" y="4736592"/>
+            <a:ext cx="1234440" cy="402336"/>
           </a:xfrm>
           <a:prstGeom prst="rect">
             <a:avLst/>
@@ -11065,14 +11187,14 @@
       </p:sp>
       <p:sp>
         <p:nvSpPr>
-          <p:cNvPr id="96" name="Text 94"/>
-          <p:cNvSpPr/>
-          <p:nvPr/>
-        </p:nvSpPr>
-        <p:spPr>
-          <a:xfrm>
-            <a:off x="2468880" y="5129784"/>
-            <a:ext cx="1554480" cy="475488"/>
+          <p:cNvPr id="100" name="Text 98"/>
+          <p:cNvSpPr/>
+          <p:nvPr/>
+        </p:nvSpPr>
+        <p:spPr>
+          <a:xfrm>
+            <a:off x="5257800" y="4736592"/>
+            <a:ext cx="1234440" cy="402336"/>
           </a:xfrm>
           <a:prstGeom prst="rect">
             <a:avLst/>
@@ -11090,10 +11212,10 @@
             <a:r>
               <a:rPr lang="en-US" sz="1200" dirty="0">
                 <a:solidFill>
-                  <a:srgbClr val="8CB3CC"/>
-                </a:solidFill>
-              </a:rPr>
-              <a:t>25-30% comm.</a:t>
+                  <a:srgbClr val="334455"/>
+                </a:solidFill>
+              </a:rPr>
+              <a:t>✗</a:t>
             </a:r>
             <a:endParaRPr lang="en-US" sz="1200" dirty="0"/>
           </a:p>
@@ -11101,14 +11223,14 @@
       </p:sp>
       <p:sp>
         <p:nvSpPr>
-          <p:cNvPr id="97" name="Shape 95"/>
-          <p:cNvSpPr/>
-          <p:nvPr/>
-        </p:nvSpPr>
-        <p:spPr>
-          <a:xfrm>
-            <a:off x="4023360" y="5129784"/>
-            <a:ext cx="1234440" cy="475488"/>
+          <p:cNvPr id="101" name="Shape 99"/>
+          <p:cNvSpPr/>
+          <p:nvPr/>
+        </p:nvSpPr>
+        <p:spPr>
+          <a:xfrm>
+            <a:off x="6492240" y="4736592"/>
+            <a:ext cx="1097280" cy="402336"/>
           </a:xfrm>
           <a:prstGeom prst="rect">
             <a:avLst/>
@@ -11126,14 +11248,14 @@
       </p:sp>
       <p:sp>
         <p:nvSpPr>
-          <p:cNvPr id="98" name="Text 96"/>
-          <p:cNvSpPr/>
-          <p:nvPr/>
-        </p:nvSpPr>
-        <p:spPr>
-          <a:xfrm>
-            <a:off x="4023360" y="5129784"/>
-            <a:ext cx="1234440" cy="475488"/>
+          <p:cNvPr id="102" name="Text 100"/>
+          <p:cNvSpPr/>
+          <p:nvPr/>
+        </p:nvSpPr>
+        <p:spPr>
+          <a:xfrm>
+            <a:off x="6492240" y="4736592"/>
+            <a:ext cx="1097280" cy="402336"/>
           </a:xfrm>
           <a:prstGeom prst="rect">
             <a:avLst/>
@@ -11149,12 +11271,12 @@
               <a:buNone/>
             </a:pPr>
             <a:r>
-              <a:rPr lang="en-US" sz="1200" dirty="0">
-                <a:solidFill>
-                  <a:srgbClr val="334455"/>
-                </a:solidFill>
-              </a:rPr>
-              <a:t>✗</a:t>
+              <a:rPr lang="en-US" sz="1200" b="1" dirty="0">
+                <a:solidFill>
+                  <a:srgbClr val="22C55E"/>
+                </a:solidFill>
+              </a:rPr>
+              <a:t>✓</a:t>
             </a:r>
             <a:endParaRPr lang="en-US" sz="1200" dirty="0"/>
           </a:p>
@@ -11162,14 +11284,14 @@
       </p:sp>
       <p:sp>
         <p:nvSpPr>
-          <p:cNvPr id="99" name="Shape 97"/>
-          <p:cNvSpPr/>
-          <p:nvPr/>
-        </p:nvSpPr>
-        <p:spPr>
-          <a:xfrm>
-            <a:off x="5257800" y="5129784"/>
-            <a:ext cx="1234440" cy="475488"/>
+          <p:cNvPr id="103" name="Shape 101"/>
+          <p:cNvSpPr/>
+          <p:nvPr/>
+        </p:nvSpPr>
+        <p:spPr>
+          <a:xfrm>
+            <a:off x="7589520" y="4736592"/>
+            <a:ext cx="1097280" cy="402336"/>
           </a:xfrm>
           <a:prstGeom prst="rect">
             <a:avLst/>
@@ -11187,14 +11309,14 @@
       </p:sp>
       <p:sp>
         <p:nvSpPr>
-          <p:cNvPr id="100" name="Text 98"/>
-          <p:cNvSpPr/>
-          <p:nvPr/>
-        </p:nvSpPr>
-        <p:spPr>
-          <a:xfrm>
-            <a:off x="5257800" y="5129784"/>
-            <a:ext cx="1234440" cy="475488"/>
+          <p:cNvPr id="104" name="Text 102"/>
+          <p:cNvSpPr/>
+          <p:nvPr/>
+        </p:nvSpPr>
+        <p:spPr>
+          <a:xfrm>
+            <a:off x="7589520" y="4736592"/>
+            <a:ext cx="1097280" cy="402336"/>
           </a:xfrm>
           <a:prstGeom prst="rect">
             <a:avLst/>
@@ -11212,10 +11334,10 @@
             <a:r>
               <a:rPr lang="en-US" sz="1200" dirty="0">
                 <a:solidFill>
-                  <a:srgbClr val="334455"/>
-                </a:solidFill>
-              </a:rPr>
-              <a:t>✗</a:t>
+                  <a:srgbClr val="F59E0B"/>
+                </a:solidFill>
+              </a:rPr>
+              <a:t>~</a:t>
             </a:r>
             <a:endParaRPr lang="en-US" sz="1200" dirty="0"/>
           </a:p>
@@ -11223,14 +11345,14 @@
       </p:sp>
       <p:sp>
         <p:nvSpPr>
-          <p:cNvPr id="101" name="Shape 99"/>
-          <p:cNvSpPr/>
-          <p:nvPr/>
-        </p:nvSpPr>
-        <p:spPr>
-          <a:xfrm>
-            <a:off x="6492240" y="5129784"/>
-            <a:ext cx="1097280" cy="475488"/>
+          <p:cNvPr id="105" name="Shape 103"/>
+          <p:cNvSpPr/>
+          <p:nvPr/>
+        </p:nvSpPr>
+        <p:spPr>
+          <a:xfrm>
+            <a:off x="8686800" y="4736592"/>
+            <a:ext cx="1097280" cy="402336"/>
           </a:xfrm>
           <a:prstGeom prst="rect">
             <a:avLst/>
@@ -11248,14 +11370,14 @@
       </p:sp>
       <p:sp>
         <p:nvSpPr>
-          <p:cNvPr id="102" name="Text 100"/>
-          <p:cNvSpPr/>
-          <p:nvPr/>
-        </p:nvSpPr>
-        <p:spPr>
-          <a:xfrm>
-            <a:off x="6492240" y="5129784"/>
-            <a:ext cx="1097280" cy="475488"/>
+          <p:cNvPr id="106" name="Text 104"/>
+          <p:cNvSpPr/>
+          <p:nvPr/>
+        </p:nvSpPr>
+        <p:spPr>
+          <a:xfrm>
+            <a:off x="8686800" y="4736592"/>
+            <a:ext cx="1097280" cy="402336"/>
           </a:xfrm>
           <a:prstGeom prst="rect">
             <a:avLst/>
@@ -11271,12 +11393,12 @@
               <a:buNone/>
             </a:pPr>
             <a:r>
-              <a:rPr lang="en-US" sz="1200" b="1" dirty="0">
-                <a:solidFill>
-                  <a:srgbClr val="22C55E"/>
-                </a:solidFill>
-              </a:rPr>
-              <a:t>✓</a:t>
+              <a:rPr lang="en-US" sz="1200" dirty="0">
+                <a:solidFill>
+                  <a:srgbClr val="334455"/>
+                </a:solidFill>
+              </a:rPr>
+              <a:t>✗</a:t>
             </a:r>
             <a:endParaRPr lang="en-US" sz="1200" dirty="0"/>
           </a:p>
@@ -11284,20 +11406,20 @@
       </p:sp>
       <p:sp>
         <p:nvSpPr>
-          <p:cNvPr id="103" name="Shape 101"/>
-          <p:cNvSpPr/>
-          <p:nvPr/>
-        </p:nvSpPr>
-        <p:spPr>
-          <a:xfrm>
-            <a:off x="7589520" y="5129784"/>
-            <a:ext cx="1097280" cy="475488"/>
-          </a:xfrm>
-          <a:prstGeom prst="rect">
-            <a:avLst/>
-          </a:prstGeom>
-          <a:solidFill>
-            <a:srgbClr val="0A1929"/>
+          <p:cNvPr id="107" name="Shape 105"/>
+          <p:cNvSpPr/>
+          <p:nvPr/>
+        </p:nvSpPr>
+        <p:spPr>
+          <a:xfrm>
+            <a:off x="457200" y="5138928"/>
+            <a:ext cx="2011680" cy="402336"/>
+          </a:xfrm>
+          <a:prstGeom prst="rect">
+            <a:avLst/>
+          </a:prstGeom>
+          <a:solidFill>
+            <a:srgbClr val="0F1E30"/>
           </a:solidFill>
           <a:ln w="12700">
             <a:solidFill>
@@ -11309,14 +11431,14 @@
       </p:sp>
       <p:sp>
         <p:nvSpPr>
-          <p:cNvPr id="104" name="Text 102"/>
-          <p:cNvSpPr/>
-          <p:nvPr/>
-        </p:nvSpPr>
-        <p:spPr>
-          <a:xfrm>
-            <a:off x="7589520" y="5129784"/>
-            <a:ext cx="1097280" cy="475488"/>
+          <p:cNvPr id="108" name="Text 106"/>
+          <p:cNvSpPr/>
+          <p:nvPr/>
+        </p:nvSpPr>
+        <p:spPr>
+          <a:xfrm>
+            <a:off x="457200" y="5138928"/>
+            <a:ext cx="2011680" cy="402336"/>
           </a:xfrm>
           <a:prstGeom prst="rect">
             <a:avLst/>
@@ -11332,33 +11454,33 @@
               <a:buNone/>
             </a:pPr>
             <a:r>
-              <a:rPr lang="en-US" sz="1200" dirty="0">
-                <a:solidFill>
-                  <a:srgbClr val="F59E0B"/>
-                </a:solidFill>
-              </a:rPr>
-              <a:t>~</a:t>
-            </a:r>
-            <a:endParaRPr lang="en-US" sz="1200" dirty="0"/>
-          </a:p>
-        </p:txBody>
-      </p:sp>
-      <p:sp>
-        <p:nvSpPr>
-          <p:cNvPr id="105" name="Shape 103"/>
-          <p:cNvSpPr/>
-          <p:nvPr/>
-        </p:nvSpPr>
-        <p:spPr>
-          <a:xfrm>
-            <a:off x="8686800" y="5129784"/>
-            <a:ext cx="1097280" cy="475488"/>
-          </a:xfrm>
-          <a:prstGeom prst="rect">
-            <a:avLst/>
-          </a:prstGeom>
-          <a:solidFill>
-            <a:srgbClr val="0A1929"/>
+              <a:rPr lang="en-US" sz="1000" dirty="0">
+                <a:solidFill>
+                  <a:srgbClr val="A89F98"/>
+                </a:solidFill>
+              </a:rPr>
+              <a:t>Alfonsino</a:t>
+            </a:r>
+            <a:endParaRPr lang="en-US" sz="1000" dirty="0"/>
+          </a:p>
+        </p:txBody>
+      </p:sp>
+      <p:sp>
+        <p:nvSpPr>
+          <p:cNvPr id="109" name="Shape 107"/>
+          <p:cNvSpPr/>
+          <p:nvPr/>
+        </p:nvSpPr>
+        <p:spPr>
+          <a:xfrm>
+            <a:off x="2468880" y="5138928"/>
+            <a:ext cx="1554480" cy="402336"/>
+          </a:xfrm>
+          <a:prstGeom prst="rect">
+            <a:avLst/>
+          </a:prstGeom>
+          <a:solidFill>
+            <a:srgbClr val="0F1E30"/>
           </a:solidFill>
           <a:ln w="12700">
             <a:solidFill>
@@ -11370,14 +11492,14 @@
       </p:sp>
       <p:sp>
         <p:nvSpPr>
-          <p:cNvPr id="106" name="Text 104"/>
-          <p:cNvSpPr/>
-          <p:nvPr/>
-        </p:nvSpPr>
-        <p:spPr>
-          <a:xfrm>
-            <a:off x="8686800" y="5129784"/>
-            <a:ext cx="1097280" cy="475488"/>
+          <p:cNvPr id="110" name="Text 108"/>
+          <p:cNvSpPr/>
+          <p:nvPr/>
+        </p:nvSpPr>
+        <p:spPr>
+          <a:xfrm>
+            <a:off x="2468880" y="5138928"/>
+            <a:ext cx="1554480" cy="402336"/>
           </a:xfrm>
           <a:prstGeom prst="rect">
             <a:avLst/>
@@ -11395,10 +11517,10 @@
             <a:r>
               <a:rPr lang="en-US" sz="1200" dirty="0">
                 <a:solidFill>
-                  <a:srgbClr val="334455"/>
-                </a:solidFill>
-              </a:rPr>
-              <a:t>✗</a:t>
+                  <a:srgbClr val="A89F98"/>
+                </a:solidFill>
+              </a:rPr>
+              <a:t>25-30% comm.</a:t>
             </a:r>
             <a:endParaRPr lang="en-US" sz="1200" dirty="0"/>
           </a:p>
@@ -11406,14 +11528,14 @@
       </p:sp>
       <p:sp>
         <p:nvSpPr>
-          <p:cNvPr id="107" name="Shape 105"/>
-          <p:cNvSpPr/>
-          <p:nvPr/>
-        </p:nvSpPr>
-        <p:spPr>
-          <a:xfrm>
-            <a:off x="457200" y="5605272"/>
-            <a:ext cx="2011680" cy="475488"/>
+          <p:cNvPr id="111" name="Shape 109"/>
+          <p:cNvSpPr/>
+          <p:nvPr/>
+        </p:nvSpPr>
+        <p:spPr>
+          <a:xfrm>
+            <a:off x="4023360" y="5138928"/>
+            <a:ext cx="1234440" cy="402336"/>
           </a:xfrm>
           <a:prstGeom prst="rect">
             <a:avLst/>
@@ -11431,14 +11553,14 @@
       </p:sp>
       <p:sp>
         <p:nvSpPr>
-          <p:cNvPr id="108" name="Text 106"/>
-          <p:cNvSpPr/>
-          <p:nvPr/>
-        </p:nvSpPr>
-        <p:spPr>
-          <a:xfrm>
-            <a:off x="457200" y="5605272"/>
-            <a:ext cx="2011680" cy="475488"/>
+          <p:cNvPr id="112" name="Text 110"/>
+          <p:cNvSpPr/>
+          <p:nvPr/>
+        </p:nvSpPr>
+        <p:spPr>
+          <a:xfrm>
+            <a:off x="4023360" y="5138928"/>
+            <a:ext cx="1234440" cy="402336"/>
           </a:xfrm>
           <a:prstGeom prst="rect">
             <a:avLst/>
@@ -11454,27 +11576,27 @@
               <a:buNone/>
             </a:pPr>
             <a:r>
-              <a:rPr lang="en-US" sz="1000" dirty="0">
-                <a:solidFill>
-                  <a:srgbClr val="8CB3CC"/>
-                </a:solidFill>
-              </a:rPr>
-              <a:t>Alfonsino</a:t>
-            </a:r>
-            <a:endParaRPr lang="en-US" sz="1000" dirty="0"/>
-          </a:p>
-        </p:txBody>
-      </p:sp>
-      <p:sp>
-        <p:nvSpPr>
-          <p:cNvPr id="109" name="Shape 107"/>
-          <p:cNvSpPr/>
-          <p:nvPr/>
-        </p:nvSpPr>
-        <p:spPr>
-          <a:xfrm>
-            <a:off x="2468880" y="5605272"/>
-            <a:ext cx="1554480" cy="475488"/>
+              <a:rPr lang="en-US" sz="1200" dirty="0">
+                <a:solidFill>
+                  <a:srgbClr val="F59E0B"/>
+                </a:solidFill>
+              </a:rPr>
+              <a:t>~</a:t>
+            </a:r>
+            <a:endParaRPr lang="en-US" sz="1200" dirty="0"/>
+          </a:p>
+        </p:txBody>
+      </p:sp>
+      <p:sp>
+        <p:nvSpPr>
+          <p:cNvPr id="113" name="Shape 111"/>
+          <p:cNvSpPr/>
+          <p:nvPr/>
+        </p:nvSpPr>
+        <p:spPr>
+          <a:xfrm>
+            <a:off x="5257800" y="5138928"/>
+            <a:ext cx="1234440" cy="402336"/>
           </a:xfrm>
           <a:prstGeom prst="rect">
             <a:avLst/>
@@ -11492,14 +11614,14 @@
       </p:sp>
       <p:sp>
         <p:nvSpPr>
-          <p:cNvPr id="110" name="Text 108"/>
-          <p:cNvSpPr/>
-          <p:nvPr/>
-        </p:nvSpPr>
-        <p:spPr>
-          <a:xfrm>
-            <a:off x="2468880" y="5605272"/>
-            <a:ext cx="1554480" cy="475488"/>
+          <p:cNvPr id="114" name="Text 112"/>
+          <p:cNvSpPr/>
+          <p:nvPr/>
+        </p:nvSpPr>
+        <p:spPr>
+          <a:xfrm>
+            <a:off x="5257800" y="5138928"/>
+            <a:ext cx="1234440" cy="402336"/>
           </a:xfrm>
           <a:prstGeom prst="rect">
             <a:avLst/>
@@ -11517,10 +11639,10 @@
             <a:r>
               <a:rPr lang="en-US" sz="1200" dirty="0">
                 <a:solidFill>
-                  <a:srgbClr val="8CB3CC"/>
-                </a:solidFill>
-              </a:rPr>
-              <a:t>25-30% comm.</a:t>
+                  <a:srgbClr val="334455"/>
+                </a:solidFill>
+              </a:rPr>
+              <a:t>✗</a:t>
             </a:r>
             <a:endParaRPr lang="en-US" sz="1200" dirty="0"/>
           </a:p>
@@ -11528,14 +11650,14 @@
       </p:sp>
       <p:sp>
         <p:nvSpPr>
-          <p:cNvPr id="111" name="Shape 109"/>
-          <p:cNvSpPr/>
-          <p:nvPr/>
-        </p:nvSpPr>
-        <p:spPr>
-          <a:xfrm>
-            <a:off x="4023360" y="5605272"/>
-            <a:ext cx="1234440" cy="475488"/>
+          <p:cNvPr id="115" name="Shape 113"/>
+          <p:cNvSpPr/>
+          <p:nvPr/>
+        </p:nvSpPr>
+        <p:spPr>
+          <a:xfrm>
+            <a:off x="6492240" y="5138928"/>
+            <a:ext cx="1097280" cy="402336"/>
           </a:xfrm>
           <a:prstGeom prst="rect">
             <a:avLst/>
@@ -11553,14 +11675,14 @@
       </p:sp>
       <p:sp>
         <p:nvSpPr>
-          <p:cNvPr id="112" name="Text 110"/>
-          <p:cNvSpPr/>
-          <p:nvPr/>
-        </p:nvSpPr>
-        <p:spPr>
-          <a:xfrm>
-            <a:off x="4023360" y="5605272"/>
-            <a:ext cx="1234440" cy="475488"/>
+          <p:cNvPr id="116" name="Text 114"/>
+          <p:cNvSpPr/>
+          <p:nvPr/>
+        </p:nvSpPr>
+        <p:spPr>
+          <a:xfrm>
+            <a:off x="6492240" y="5138928"/>
+            <a:ext cx="1097280" cy="402336"/>
           </a:xfrm>
           <a:prstGeom prst="rect">
             <a:avLst/>
@@ -11576,12 +11698,12 @@
               <a:buNone/>
             </a:pPr>
             <a:r>
-              <a:rPr lang="en-US" sz="1200" dirty="0">
-                <a:solidFill>
-                  <a:srgbClr val="F59E0B"/>
-                </a:solidFill>
-              </a:rPr>
-              <a:t>~</a:t>
+              <a:rPr lang="en-US" sz="1200" b="1" dirty="0">
+                <a:solidFill>
+                  <a:srgbClr val="22C55E"/>
+                </a:solidFill>
+              </a:rPr>
+              <a:t>✓</a:t>
             </a:r>
             <a:endParaRPr lang="en-US" sz="1200" dirty="0"/>
           </a:p>
@@ -11589,14 +11711,14 @@
       </p:sp>
       <p:sp>
         <p:nvSpPr>
-          <p:cNvPr id="113" name="Shape 111"/>
-          <p:cNvSpPr/>
-          <p:nvPr/>
-        </p:nvSpPr>
-        <p:spPr>
-          <a:xfrm>
-            <a:off x="5257800" y="5605272"/>
-            <a:ext cx="1234440" cy="475488"/>
+          <p:cNvPr id="117" name="Shape 115"/>
+          <p:cNvSpPr/>
+          <p:nvPr/>
+        </p:nvSpPr>
+        <p:spPr>
+          <a:xfrm>
+            <a:off x="7589520" y="5138928"/>
+            <a:ext cx="1097280" cy="402336"/>
           </a:xfrm>
           <a:prstGeom prst="rect">
             <a:avLst/>
@@ -11614,14 +11736,14 @@
       </p:sp>
       <p:sp>
         <p:nvSpPr>
-          <p:cNvPr id="114" name="Text 112"/>
-          <p:cNvSpPr/>
-          <p:nvPr/>
-        </p:nvSpPr>
-        <p:spPr>
-          <a:xfrm>
-            <a:off x="5257800" y="5605272"/>
-            <a:ext cx="1234440" cy="475488"/>
+          <p:cNvPr id="118" name="Text 116"/>
+          <p:cNvSpPr/>
+          <p:nvPr/>
+        </p:nvSpPr>
+        <p:spPr>
+          <a:xfrm>
+            <a:off x="7589520" y="5138928"/>
+            <a:ext cx="1097280" cy="402336"/>
           </a:xfrm>
           <a:prstGeom prst="rect">
             <a:avLst/>
@@ -11639,10 +11761,10 @@
             <a:r>
               <a:rPr lang="en-US" sz="1200" dirty="0">
                 <a:solidFill>
-                  <a:srgbClr val="334455"/>
-                </a:solidFill>
-              </a:rPr>
-              <a:t>✗</a:t>
+                  <a:srgbClr val="F59E0B"/>
+                </a:solidFill>
+              </a:rPr>
+              <a:t>~</a:t>
             </a:r>
             <a:endParaRPr lang="en-US" sz="1200" dirty="0"/>
           </a:p>
@@ -11650,14 +11772,14 @@
       </p:sp>
       <p:sp>
         <p:nvSpPr>
-          <p:cNvPr id="115" name="Shape 113"/>
-          <p:cNvSpPr/>
-          <p:nvPr/>
-        </p:nvSpPr>
-        <p:spPr>
-          <a:xfrm>
-            <a:off x="6492240" y="5605272"/>
-            <a:ext cx="1097280" cy="475488"/>
+          <p:cNvPr id="119" name="Shape 117"/>
+          <p:cNvSpPr/>
+          <p:nvPr/>
+        </p:nvSpPr>
+        <p:spPr>
+          <a:xfrm>
+            <a:off x="8686800" y="5138928"/>
+            <a:ext cx="1097280" cy="402336"/>
           </a:xfrm>
           <a:prstGeom prst="rect">
             <a:avLst/>
@@ -11675,14 +11797,14 @@
       </p:sp>
       <p:sp>
         <p:nvSpPr>
-          <p:cNvPr id="116" name="Text 114"/>
-          <p:cNvSpPr/>
-          <p:nvPr/>
-        </p:nvSpPr>
-        <p:spPr>
-          <a:xfrm>
-            <a:off x="6492240" y="5605272"/>
-            <a:ext cx="1097280" cy="475488"/>
+          <p:cNvPr id="120" name="Text 118"/>
+          <p:cNvSpPr/>
+          <p:nvPr/>
+        </p:nvSpPr>
+        <p:spPr>
+          <a:xfrm>
+            <a:off x="8686800" y="5138928"/>
+            <a:ext cx="1097280" cy="402336"/>
           </a:xfrm>
           <a:prstGeom prst="rect">
             <a:avLst/>
@@ -11698,12 +11820,12 @@
               <a:buNone/>
             </a:pPr>
             <a:r>
-              <a:rPr lang="en-US" sz="1200" b="1" dirty="0">
-                <a:solidFill>
-                  <a:srgbClr val="22C55E"/>
-                </a:solidFill>
-              </a:rPr>
-              <a:t>✓</a:t>
+              <a:rPr lang="en-US" sz="1200" dirty="0">
+                <a:solidFill>
+                  <a:srgbClr val="334455"/>
+                </a:solidFill>
+              </a:rPr>
+              <a:t>✗</a:t>
             </a:r>
             <a:endParaRPr lang="en-US" sz="1200" dirty="0"/>
           </a:p>
@@ -11711,20 +11833,20 @@
       </p:sp>
       <p:sp>
         <p:nvSpPr>
-          <p:cNvPr id="117" name="Shape 115"/>
-          <p:cNvSpPr/>
-          <p:nvPr/>
-        </p:nvSpPr>
-        <p:spPr>
-          <a:xfrm>
-            <a:off x="7589520" y="5605272"/>
-            <a:ext cx="1097280" cy="475488"/>
-          </a:xfrm>
-          <a:prstGeom prst="rect">
-            <a:avLst/>
-          </a:prstGeom>
-          <a:solidFill>
-            <a:srgbClr val="0F1E30"/>
+          <p:cNvPr id="121" name="Shape 119"/>
+          <p:cNvSpPr/>
+          <p:nvPr/>
+        </p:nvSpPr>
+        <p:spPr>
+          <a:xfrm>
+            <a:off x="457200" y="5541264"/>
+            <a:ext cx="2011680" cy="402336"/>
+          </a:xfrm>
+          <a:prstGeom prst="rect">
+            <a:avLst/>
+          </a:prstGeom>
+          <a:solidFill>
+            <a:srgbClr val="0A1929"/>
           </a:solidFill>
           <a:ln w="12700">
             <a:solidFill>
@@ -11736,14 +11858,14 @@
       </p:sp>
       <p:sp>
         <p:nvSpPr>
-          <p:cNvPr id="118" name="Text 116"/>
-          <p:cNvSpPr/>
-          <p:nvPr/>
-        </p:nvSpPr>
-        <p:spPr>
-          <a:xfrm>
-            <a:off x="7589520" y="5605272"/>
-            <a:ext cx="1097280" cy="475488"/>
+          <p:cNvPr id="122" name="Text 120"/>
+          <p:cNvSpPr/>
+          <p:nvPr/>
+        </p:nvSpPr>
+        <p:spPr>
+          <a:xfrm>
+            <a:off x="457200" y="5541264"/>
+            <a:ext cx="2011680" cy="402336"/>
           </a:xfrm>
           <a:prstGeom prst="rect">
             <a:avLst/>
@@ -11759,33 +11881,33 @@
               <a:buNone/>
             </a:pPr>
             <a:r>
-              <a:rPr lang="en-US" sz="1200" dirty="0">
-                <a:solidFill>
-                  <a:srgbClr val="F59E0B"/>
-                </a:solidFill>
-              </a:rPr>
-              <a:t>~</a:t>
-            </a:r>
-            <a:endParaRPr lang="en-US" sz="1200" dirty="0"/>
-          </a:p>
-        </p:txBody>
-      </p:sp>
-      <p:sp>
-        <p:nvSpPr>
-          <p:cNvPr id="119" name="Shape 117"/>
-          <p:cNvSpPr/>
-          <p:nvPr/>
-        </p:nvSpPr>
-        <p:spPr>
-          <a:xfrm>
-            <a:off x="8686800" y="5605272"/>
-            <a:ext cx="1097280" cy="475488"/>
-          </a:xfrm>
-          <a:prstGeom prst="rect">
-            <a:avLst/>
-          </a:prstGeom>
-          <a:solidFill>
-            <a:srgbClr val="0F1E30"/>
+              <a:rPr lang="en-US" sz="1000" dirty="0">
+                <a:solidFill>
+                  <a:srgbClr val="A89F98"/>
+                </a:solidFill>
+              </a:rPr>
+              <a:t>Uber Eats</a:t>
+            </a:r>
+            <a:endParaRPr lang="en-US" sz="1000" dirty="0"/>
+          </a:p>
+        </p:txBody>
+      </p:sp>
+      <p:sp>
+        <p:nvSpPr>
+          <p:cNvPr id="123" name="Shape 121"/>
+          <p:cNvSpPr/>
+          <p:nvPr/>
+        </p:nvSpPr>
+        <p:spPr>
+          <a:xfrm>
+            <a:off x="2468880" y="5541264"/>
+            <a:ext cx="1554480" cy="402336"/>
+          </a:xfrm>
+          <a:prstGeom prst="rect">
+            <a:avLst/>
+          </a:prstGeom>
+          <a:solidFill>
+            <a:srgbClr val="0A1929"/>
           </a:solidFill>
           <a:ln w="12700">
             <a:solidFill>
@@ -11797,14 +11919,14 @@
       </p:sp>
       <p:sp>
         <p:nvSpPr>
-          <p:cNvPr id="120" name="Text 118"/>
-          <p:cNvSpPr/>
-          <p:nvPr/>
-        </p:nvSpPr>
-        <p:spPr>
-          <a:xfrm>
-            <a:off x="8686800" y="5605272"/>
-            <a:ext cx="1097280" cy="475488"/>
+          <p:cNvPr id="124" name="Text 122"/>
+          <p:cNvSpPr/>
+          <p:nvPr/>
+        </p:nvSpPr>
+        <p:spPr>
+          <a:xfrm>
+            <a:off x="2468880" y="5541264"/>
+            <a:ext cx="1554480" cy="402336"/>
           </a:xfrm>
           <a:prstGeom prst="rect">
             <a:avLst/>
@@ -11822,10 +11944,10 @@
             <a:r>
               <a:rPr lang="en-US" sz="1200" dirty="0">
                 <a:solidFill>
-                  <a:srgbClr val="334455"/>
-                </a:solidFill>
-              </a:rPr>
-              <a:t>✗</a:t>
+                  <a:srgbClr val="A89F98"/>
+                </a:solidFill>
+              </a:rPr>
+              <a:t>25-30% comm.</a:t>
             </a:r>
             <a:endParaRPr lang="en-US" sz="1200" dirty="0"/>
           </a:p>
@@ -11833,14 +11955,14 @@
       </p:sp>
       <p:sp>
         <p:nvSpPr>
-          <p:cNvPr id="121" name="Shape 119"/>
-          <p:cNvSpPr/>
-          <p:nvPr/>
-        </p:nvSpPr>
-        <p:spPr>
-          <a:xfrm>
-            <a:off x="457200" y="6080760"/>
-            <a:ext cx="2011680" cy="475488"/>
+          <p:cNvPr id="125" name="Shape 123"/>
+          <p:cNvSpPr/>
+          <p:nvPr/>
+        </p:nvSpPr>
+        <p:spPr>
+          <a:xfrm>
+            <a:off x="4023360" y="5541264"/>
+            <a:ext cx="1234440" cy="402336"/>
           </a:xfrm>
           <a:prstGeom prst="rect">
             <a:avLst/>
@@ -11858,14 +11980,14 @@
       </p:sp>
       <p:sp>
         <p:nvSpPr>
-          <p:cNvPr id="122" name="Text 120"/>
-          <p:cNvSpPr/>
-          <p:nvPr/>
-        </p:nvSpPr>
-        <p:spPr>
-          <a:xfrm>
-            <a:off x="457200" y="6080760"/>
-            <a:ext cx="2011680" cy="475488"/>
+          <p:cNvPr id="126" name="Text 124"/>
+          <p:cNvSpPr/>
+          <p:nvPr/>
+        </p:nvSpPr>
+        <p:spPr>
+          <a:xfrm>
+            <a:off x="4023360" y="5541264"/>
+            <a:ext cx="1234440" cy="402336"/>
           </a:xfrm>
           <a:prstGeom prst="rect">
             <a:avLst/>
@@ -11881,27 +12003,27 @@
               <a:buNone/>
             </a:pPr>
             <a:r>
-              <a:rPr lang="en-US" sz="1000" dirty="0">
-                <a:solidFill>
-                  <a:srgbClr val="8CB3CC"/>
-                </a:solidFill>
-              </a:rPr>
-              <a:t>Uber Eats</a:t>
-            </a:r>
-            <a:endParaRPr lang="en-US" sz="1000" dirty="0"/>
-          </a:p>
-        </p:txBody>
-      </p:sp>
-      <p:sp>
-        <p:nvSpPr>
-          <p:cNvPr id="123" name="Shape 121"/>
-          <p:cNvSpPr/>
-          <p:nvPr/>
-        </p:nvSpPr>
-        <p:spPr>
-          <a:xfrm>
-            <a:off x="2468880" y="6080760"/>
-            <a:ext cx="1554480" cy="475488"/>
+              <a:rPr lang="en-US" sz="1200" dirty="0">
+                <a:solidFill>
+                  <a:srgbClr val="334455"/>
+                </a:solidFill>
+              </a:rPr>
+              <a:t>✗</a:t>
+            </a:r>
+            <a:endParaRPr lang="en-US" sz="1200" dirty="0"/>
+          </a:p>
+        </p:txBody>
+      </p:sp>
+      <p:sp>
+        <p:nvSpPr>
+          <p:cNvPr id="127" name="Shape 125"/>
+          <p:cNvSpPr/>
+          <p:nvPr/>
+        </p:nvSpPr>
+        <p:spPr>
+          <a:xfrm>
+            <a:off x="5257800" y="5541264"/>
+            <a:ext cx="1234440" cy="402336"/>
           </a:xfrm>
           <a:prstGeom prst="rect">
             <a:avLst/>
@@ -11919,14 +12041,14 @@
       </p:sp>
       <p:sp>
         <p:nvSpPr>
-          <p:cNvPr id="124" name="Text 122"/>
-          <p:cNvSpPr/>
-          <p:nvPr/>
-        </p:nvSpPr>
-        <p:spPr>
-          <a:xfrm>
-            <a:off x="2468880" y="6080760"/>
-            <a:ext cx="1554480" cy="475488"/>
+          <p:cNvPr id="128" name="Text 126"/>
+          <p:cNvSpPr/>
+          <p:nvPr/>
+        </p:nvSpPr>
+        <p:spPr>
+          <a:xfrm>
+            <a:off x="5257800" y="5541264"/>
+            <a:ext cx="1234440" cy="402336"/>
           </a:xfrm>
           <a:prstGeom prst="rect">
             <a:avLst/>
@@ -11944,10 +12066,10 @@
             <a:r>
               <a:rPr lang="en-US" sz="1200" dirty="0">
                 <a:solidFill>
-                  <a:srgbClr val="8CB3CC"/>
-                </a:solidFill>
-              </a:rPr>
-              <a:t>25-30% comm.</a:t>
+                  <a:srgbClr val="334455"/>
+                </a:solidFill>
+              </a:rPr>
+              <a:t>✗</a:t>
             </a:r>
             <a:endParaRPr lang="en-US" sz="1200" dirty="0"/>
           </a:p>
@@ -11955,14 +12077,14 @@
       </p:sp>
       <p:sp>
         <p:nvSpPr>
-          <p:cNvPr id="125" name="Shape 123"/>
-          <p:cNvSpPr/>
-          <p:nvPr/>
-        </p:nvSpPr>
-        <p:spPr>
-          <a:xfrm>
-            <a:off x="4023360" y="6080760"/>
-            <a:ext cx="1234440" cy="475488"/>
+          <p:cNvPr id="129" name="Shape 127"/>
+          <p:cNvSpPr/>
+          <p:nvPr/>
+        </p:nvSpPr>
+        <p:spPr>
+          <a:xfrm>
+            <a:off x="6492240" y="5541264"/>
+            <a:ext cx="1097280" cy="402336"/>
           </a:xfrm>
           <a:prstGeom prst="rect">
             <a:avLst/>
@@ -11980,14 +12102,14 @@
       </p:sp>
       <p:sp>
         <p:nvSpPr>
-          <p:cNvPr id="126" name="Text 124"/>
-          <p:cNvSpPr/>
-          <p:nvPr/>
-        </p:nvSpPr>
-        <p:spPr>
-          <a:xfrm>
-            <a:off x="4023360" y="6080760"/>
-            <a:ext cx="1234440" cy="475488"/>
+          <p:cNvPr id="130" name="Text 128"/>
+          <p:cNvSpPr/>
+          <p:nvPr/>
+        </p:nvSpPr>
+        <p:spPr>
+          <a:xfrm>
+            <a:off x="6492240" y="5541264"/>
+            <a:ext cx="1097280" cy="402336"/>
           </a:xfrm>
           <a:prstGeom prst="rect">
             <a:avLst/>
@@ -12003,12 +12125,12 @@
               <a:buNone/>
             </a:pPr>
             <a:r>
-              <a:rPr lang="en-US" sz="1200" dirty="0">
-                <a:solidFill>
-                  <a:srgbClr val="334455"/>
-                </a:solidFill>
-              </a:rPr>
-              <a:t>✗</a:t>
+              <a:rPr lang="en-US" sz="1200" b="1" dirty="0">
+                <a:solidFill>
+                  <a:srgbClr val="22C55E"/>
+                </a:solidFill>
+              </a:rPr>
+              <a:t>✓</a:t>
             </a:r>
             <a:endParaRPr lang="en-US" sz="1200" dirty="0"/>
           </a:p>
@@ -12016,14 +12138,14 @@
       </p:sp>
       <p:sp>
         <p:nvSpPr>
-          <p:cNvPr id="127" name="Shape 125"/>
-          <p:cNvSpPr/>
-          <p:nvPr/>
-        </p:nvSpPr>
-        <p:spPr>
-          <a:xfrm>
-            <a:off x="5257800" y="6080760"/>
-            <a:ext cx="1234440" cy="475488"/>
+          <p:cNvPr id="131" name="Shape 129"/>
+          <p:cNvSpPr/>
+          <p:nvPr/>
+        </p:nvSpPr>
+        <p:spPr>
+          <a:xfrm>
+            <a:off x="7589520" y="5541264"/>
+            <a:ext cx="1097280" cy="402336"/>
           </a:xfrm>
           <a:prstGeom prst="rect">
             <a:avLst/>
@@ -12041,14 +12163,14 @@
       </p:sp>
       <p:sp>
         <p:nvSpPr>
-          <p:cNvPr id="128" name="Text 126"/>
-          <p:cNvSpPr/>
-          <p:nvPr/>
-        </p:nvSpPr>
-        <p:spPr>
-          <a:xfrm>
-            <a:off x="5257800" y="6080760"/>
-            <a:ext cx="1234440" cy="475488"/>
+          <p:cNvPr id="132" name="Text 130"/>
+          <p:cNvSpPr/>
+          <p:nvPr/>
+        </p:nvSpPr>
+        <p:spPr>
+          <a:xfrm>
+            <a:off x="7589520" y="5541264"/>
+            <a:ext cx="1097280" cy="402336"/>
           </a:xfrm>
           <a:prstGeom prst="rect">
             <a:avLst/>
@@ -12077,14 +12199,14 @@
       </p:sp>
       <p:sp>
         <p:nvSpPr>
-          <p:cNvPr id="129" name="Shape 127"/>
-          <p:cNvSpPr/>
-          <p:nvPr/>
-        </p:nvSpPr>
-        <p:spPr>
-          <a:xfrm>
-            <a:off x="6492240" y="6080760"/>
-            <a:ext cx="1097280" cy="475488"/>
+          <p:cNvPr id="133" name="Shape 131"/>
+          <p:cNvSpPr/>
+          <p:nvPr/>
+        </p:nvSpPr>
+        <p:spPr>
+          <a:xfrm>
+            <a:off x="8686800" y="5541264"/>
+            <a:ext cx="1097280" cy="402336"/>
           </a:xfrm>
           <a:prstGeom prst="rect">
             <a:avLst/>
@@ -12102,136 +12224,14 @@
       </p:sp>
       <p:sp>
         <p:nvSpPr>
-          <p:cNvPr id="130" name="Text 128"/>
-          <p:cNvSpPr/>
-          <p:nvPr/>
-        </p:nvSpPr>
-        <p:spPr>
-          <a:xfrm>
-            <a:off x="6492240" y="6080760"/>
-            <a:ext cx="1097280" cy="475488"/>
-          </a:xfrm>
-          <a:prstGeom prst="rect">
-            <a:avLst/>
-          </a:prstGeom>
-          <a:noFill/>
-          <a:ln/>
-        </p:spPr>
-        <p:txBody>
-          <a:bodyPr wrap="square" lIns="0" tIns="0" rIns="0" bIns="0" rtlCol="0" anchor="ctr"/>
-          <a:lstStyle/>
-          <a:p>
-            <a:pPr algn="ctr" indent="0" marL="0">
-              <a:buNone/>
-            </a:pPr>
-            <a:r>
-              <a:rPr lang="en-US" sz="1200" b="1" dirty="0">
-                <a:solidFill>
-                  <a:srgbClr val="22C55E"/>
-                </a:solidFill>
-              </a:rPr>
-              <a:t>✓</a:t>
-            </a:r>
-            <a:endParaRPr lang="en-US" sz="1200" dirty="0"/>
-          </a:p>
-        </p:txBody>
-      </p:sp>
-      <p:sp>
-        <p:nvSpPr>
-          <p:cNvPr id="131" name="Shape 129"/>
-          <p:cNvSpPr/>
-          <p:nvPr/>
-        </p:nvSpPr>
-        <p:spPr>
-          <a:xfrm>
-            <a:off x="7589520" y="6080760"/>
-            <a:ext cx="1097280" cy="475488"/>
-          </a:xfrm>
-          <a:prstGeom prst="rect">
-            <a:avLst/>
-          </a:prstGeom>
-          <a:solidFill>
-            <a:srgbClr val="0A1929"/>
-          </a:solidFill>
-          <a:ln w="12700">
-            <a:solidFill>
-              <a:srgbClr val="1A3A50"/>
-            </a:solidFill>
-            <a:prstDash val="solid"/>
-          </a:ln>
-        </p:spPr>
-      </p:sp>
-      <p:sp>
-        <p:nvSpPr>
-          <p:cNvPr id="132" name="Text 130"/>
-          <p:cNvSpPr/>
-          <p:nvPr/>
-        </p:nvSpPr>
-        <p:spPr>
-          <a:xfrm>
-            <a:off x="7589520" y="6080760"/>
-            <a:ext cx="1097280" cy="475488"/>
-          </a:xfrm>
-          <a:prstGeom prst="rect">
-            <a:avLst/>
-          </a:prstGeom>
-          <a:noFill/>
-          <a:ln/>
-        </p:spPr>
-        <p:txBody>
-          <a:bodyPr wrap="square" lIns="0" tIns="0" rIns="0" bIns="0" rtlCol="0" anchor="ctr"/>
-          <a:lstStyle/>
-          <a:p>
-            <a:pPr algn="ctr" indent="0" marL="0">
-              <a:buNone/>
-            </a:pPr>
-            <a:r>
-              <a:rPr lang="en-US" sz="1200" dirty="0">
-                <a:solidFill>
-                  <a:srgbClr val="334455"/>
-                </a:solidFill>
-              </a:rPr>
-              <a:t>✗</a:t>
-            </a:r>
-            <a:endParaRPr lang="en-US" sz="1200" dirty="0"/>
-          </a:p>
-        </p:txBody>
-      </p:sp>
-      <p:sp>
-        <p:nvSpPr>
-          <p:cNvPr id="133" name="Shape 131"/>
-          <p:cNvSpPr/>
-          <p:nvPr/>
-        </p:nvSpPr>
-        <p:spPr>
-          <a:xfrm>
-            <a:off x="8686800" y="6080760"/>
-            <a:ext cx="1097280" cy="475488"/>
-          </a:xfrm>
-          <a:prstGeom prst="rect">
-            <a:avLst/>
-          </a:prstGeom>
-          <a:solidFill>
-            <a:srgbClr val="0A1929"/>
-          </a:solidFill>
-          <a:ln w="12700">
-            <a:solidFill>
-              <a:srgbClr val="1A3A50"/>
-            </a:solidFill>
-            <a:prstDash val="solid"/>
-          </a:ln>
-        </p:spPr>
-      </p:sp>
-      <p:sp>
-        <p:nvSpPr>
           <p:cNvPr id="134" name="Text 132"/>
           <p:cNvSpPr/>
           <p:nvPr/>
         </p:nvSpPr>
         <p:spPr>
           <a:xfrm>
-            <a:off x="8686800" y="6080760"/>
-            <a:ext cx="1097280" cy="475488"/>
+            <a:off x="8686800" y="5541264"/>
+            <a:ext cx="1097280" cy="402336"/>
           </a:xfrm>
           <a:prstGeom prst="rect">
             <a:avLst/>
@@ -12285,7 +12285,7 @@
             <a:r>
               <a:rPr lang="en-US" sz="800" dirty="0">
                 <a:solidFill>
-                  <a:srgbClr val="334455"/>
+                  <a:srgbClr val="4A4540"/>
                 </a:solidFill>
               </a:rPr>
               <a:t>✓ = sì  |  ✗ = no  |  ~ = parziale</a:t>
@@ -12321,7 +12321,7 @@
             <a:r>
               <a:rPr lang="en-US" sz="800" dirty="0">
                 <a:solidFill>
-                  <a:srgbClr val="334455"/>
+                  <a:srgbClr val="4A4540"/>
                 </a:solidFill>
               </a:rPr>
               <a:t>05 / 12</a:t>
@@ -12344,7 +12344,7 @@
     <p:bg>
       <p:bgPr>
         <a:solidFill>
-          <a:srgbClr val="0A1929"/>
+          <a:srgbClr val="141412"/>
         </a:solidFill>
       </p:bgPr>
     </p:bg>
@@ -12389,7 +12389,7 @@
             <a:r>
               <a:rPr lang="en-US" sz="900" b="1" spc="300" kern="0" dirty="0">
                 <a:solidFill>
-                  <a:srgbClr val="14B8A6"/>
+                  <a:srgbClr val="2DD4BF"/>
                 </a:solidFill>
               </a:rPr>
               <a:t>POSIZIONAMENTO</a:t>
@@ -12425,7 +12425,7 @@
             <a:r>
               <a:rPr lang="en-US" sz="2200" b="1" dirty="0">
                 <a:solidFill>
-                  <a:srgbClr val="FFFFFF"/>
+                  <a:srgbClr val="F0EDE8"/>
                 </a:solidFill>
                 <a:latin typeface="Georgia" pitchFamily="34" charset="0"/>
                 <a:ea typeface="Georgia" pitchFamily="34" charset="-122"/>
@@ -12452,11 +12452,11 @@
             <a:avLst/>
           </a:prstGeom>
           <a:solidFill>
-            <a:srgbClr val="0F2535"/>
+            <a:srgbClr val="201E1B"/>
           </a:solidFill>
           <a:ln w="12700">
             <a:solidFill>
-              <a:srgbClr val="1A3A50"/>
+              <a:srgbClr val="3A3530"/>
             </a:solidFill>
             <a:prstDash val="solid"/>
           </a:ln>
@@ -12477,11 +12477,11 @@
             <a:avLst/>
           </a:prstGeom>
           <a:solidFill>
-            <a:srgbClr val="0A2A28"/>
+            <a:srgbClr val="1A1E1C"/>
           </a:solidFill>
           <a:ln w="12700">
             <a:solidFill>
-              <a:srgbClr val="0B7A75"/>
+              <a:srgbClr val="0D8A82"/>
             </a:solidFill>
             <a:prstDash val="solid"/>
           </a:ln>
@@ -12502,11 +12502,11 @@
             <a:avLst/>
           </a:prstGeom>
           <a:solidFill>
-            <a:srgbClr val="0A1520"/>
+            <a:srgbClr val="141210"/>
           </a:solidFill>
           <a:ln w="12700">
             <a:solidFill>
-              <a:srgbClr val="1A3A50"/>
+              <a:srgbClr val="3A3530"/>
             </a:solidFill>
             <a:prstDash val="solid"/>
           </a:ln>
@@ -12527,11 +12527,11 @@
             <a:avLst/>
           </a:prstGeom>
           <a:solidFill>
-            <a:srgbClr val="0A1929"/>
+            <a:srgbClr val="181614"/>
           </a:solidFill>
           <a:ln w="12700">
             <a:solidFill>
-              <a:srgbClr val="1A3A50"/>
+              <a:srgbClr val="3A3530"/>
             </a:solidFill>
             <a:prstDash val="solid"/>
           </a:ln>
@@ -12564,7 +12564,7 @@
             <a:r>
               <a:rPr lang="en-US" sz="800" b="1" spc="100" kern="0" dirty="0">
                 <a:solidFill>
-                  <a:srgbClr val="334455"/>
+                  <a:srgbClr val="4A4540"/>
                 </a:solidFill>
               </a:rPr>
               <a:t>MARKETPLACE LOCALE</a:t>
@@ -12600,7 +12600,7 @@
             <a:r>
               <a:rPr lang="en-US" sz="800" b="1" spc="100" kern="0" dirty="0">
                 <a:solidFill>
-                  <a:srgbClr val="0B7A75"/>
+                  <a:srgbClr val="0D8A82"/>
                 </a:solidFill>
               </a:rPr>
               <a:t>SaaS LOCALE  ★</a:t>
@@ -12636,7 +12636,7 @@
             <a:r>
               <a:rPr lang="en-US" sz="800" b="1" spc="100" kern="0" dirty="0">
                 <a:solidFill>
-                  <a:srgbClr val="334455"/>
+                  <a:srgbClr val="4A4540"/>
                 </a:solidFill>
               </a:rPr>
               <a:t>MARKETPLACE GLOBALE</a:t>
@@ -12672,7 +12672,7 @@
             <a:r>
               <a:rPr lang="en-US" sz="800" b="1" spc="100" kern="0" dirty="0">
                 <a:solidFill>
-                  <a:srgbClr val="334455"/>
+                  <a:srgbClr val="4A4540"/>
                 </a:solidFill>
               </a:rPr>
               <a:t>SAAS GLOBALE</a:t>
@@ -12698,7 +12698,7 @@
           <a:noFill/>
           <a:ln w="12700">
             <a:solidFill>
-              <a:srgbClr val="2A4A5A"/>
+              <a:srgbClr val="4A4540"/>
             </a:solidFill>
             <a:prstDash val="solid"/>
           </a:ln>
@@ -12721,7 +12721,7 @@
           <a:noFill/>
           <a:ln w="12700">
             <a:solidFill>
-              <a:srgbClr val="2A4A5A"/>
+              <a:srgbClr val="4A4540"/>
             </a:solidFill>
             <a:prstDash val="solid"/>
           </a:ln>
@@ -12754,7 +12754,7 @@
             <a:r>
               <a:rPr lang="en-US" sz="800" spc="100" kern="0" dirty="0">
                 <a:solidFill>
-                  <a:srgbClr val="4A6A7A"/>
+                  <a:srgbClr val="6A6560"/>
                 </a:solidFill>
               </a:rPr>
               <a:t>← MARKETPLACE          MODELLO          SAAS PURO →</a:t>
@@ -12790,7 +12790,7 @@
             <a:r>
               <a:rPr lang="en-US" sz="800" dirty="0">
                 <a:solidFill>
-                  <a:srgbClr val="4A6A7A"/>
+                  <a:srgbClr val="6A6560"/>
                 </a:solidFill>
               </a:rPr>
               <a:t>↑ LOCALE / PMI</a:t>
@@ -12826,7 +12826,7 @@
             <a:r>
               <a:rPr lang="en-US" sz="800" dirty="0">
                 <a:solidFill>
-                  <a:srgbClr val="4A6A7A"/>
+                  <a:srgbClr val="6A6560"/>
                 </a:solidFill>
               </a:rPr>
               <a:t>↓ GLOBALE / ENTERPRISE</a:t>
@@ -12850,11 +12850,11 @@
             <a:avLst/>
           </a:prstGeom>
           <a:solidFill>
-            <a:srgbClr val="14B8A6"/>
+            <a:srgbClr val="2DD4BF"/>
           </a:solidFill>
           <a:ln w="12700">
             <a:solidFill>
-              <a:srgbClr val="14B8A6"/>
+              <a:srgbClr val="2DD4BF"/>
             </a:solidFill>
             <a:prstDash val="solid"/>
           </a:ln>
@@ -12887,7 +12887,7 @@
             <a:r>
               <a:rPr lang="en-US" sz="1400" b="1" dirty="0">
                 <a:solidFill>
-                  <a:srgbClr val="14B8A6"/>
+                  <a:srgbClr val="2DD4BF"/>
                 </a:solidFill>
               </a:rPr>
               <a:t>🟢 DLOOP</a:t>
@@ -12911,11 +12911,11 @@
             <a:avLst/>
           </a:prstGeom>
           <a:solidFill>
-            <a:srgbClr val="8CB3CC"/>
+            <a:srgbClr val="A89F98"/>
           </a:solidFill>
           <a:ln w="12700">
             <a:solidFill>
-              <a:srgbClr val="8CB3CC"/>
+              <a:srgbClr val="A89F98"/>
             </a:solidFill>
             <a:prstDash val="solid"/>
           </a:ln>
@@ -12948,7 +12948,7 @@
             <a:r>
               <a:rPr lang="en-US" sz="1000" dirty="0">
                 <a:solidFill>
-                  <a:srgbClr val="8CB3CC"/>
+                  <a:srgbClr val="A89F98"/>
                 </a:solidFill>
               </a:rPr>
               <a:t>Onfleet</a:t>
@@ -12972,11 +12972,11 @@
             <a:avLst/>
           </a:prstGeom>
           <a:solidFill>
-            <a:srgbClr val="8CB3CC"/>
+            <a:srgbClr val="A89F98"/>
           </a:solidFill>
           <a:ln w="12700">
             <a:solidFill>
-              <a:srgbClr val="8CB3CC"/>
+              <a:srgbClr val="A89F98"/>
             </a:solidFill>
             <a:prstDash val="solid"/>
           </a:ln>
@@ -13009,7 +13009,7 @@
             <a:r>
               <a:rPr lang="en-US" sz="1000" dirty="0">
                 <a:solidFill>
-                  <a:srgbClr val="8CB3CC"/>
+                  <a:srgbClr val="A89F98"/>
                 </a:solidFill>
               </a:rPr>
               <a:t>Tookan</a:t>
@@ -13033,11 +13033,11 @@
             <a:avLst/>
           </a:prstGeom>
           <a:solidFill>
-            <a:srgbClr val="8CB3CC"/>
+            <a:srgbClr val="A89F98"/>
           </a:solidFill>
           <a:ln w="12700">
             <a:solidFill>
-              <a:srgbClr val="8CB3CC"/>
+              <a:srgbClr val="A89F98"/>
             </a:solidFill>
             <a:prstDash val="solid"/>
           </a:ln>
@@ -13070,7 +13070,7 @@
             <a:r>
               <a:rPr lang="en-US" sz="1000" dirty="0">
                 <a:solidFill>
-                  <a:srgbClr val="8CB3CC"/>
+                  <a:srgbClr val="A89F98"/>
                 </a:solidFill>
               </a:rPr>
               <a:t>LogiNext</a:t>
@@ -13399,11 +13399,11 @@
             <a:avLst/>
           </a:prstGeom>
           <a:solidFill>
-            <a:srgbClr val="8CB3CC"/>
+            <a:srgbClr val="A89F98"/>
           </a:solidFill>
           <a:ln w="12700">
             <a:solidFill>
-              <a:srgbClr val="8CB3CC"/>
+              <a:srgbClr val="A89F98"/>
             </a:solidFill>
             <a:prstDash val="solid"/>
           </a:ln>
@@ -13436,7 +13436,7 @@
             <a:r>
               <a:rPr lang="en-US" sz="1000" dirty="0">
                 <a:solidFill>
-                  <a:srgbClr val="8CB3CC"/>
+                  <a:srgbClr val="A89F98"/>
                 </a:solidFill>
               </a:rPr>
               <a:t>Bringg</a:t>
@@ -13460,11 +13460,11 @@
             <a:avLst/>
           </a:prstGeom>
           <a:solidFill>
-            <a:srgbClr val="0A1929"/>
+            <a:srgbClr val="181614"/>
           </a:solidFill>
           <a:ln w="12700">
             <a:solidFill>
-              <a:srgbClr val="1A3A50"/>
+              <a:srgbClr val="3A3530"/>
             </a:solidFill>
             <a:prstDash val="solid"/>
           </a:ln>
@@ -13485,11 +13485,11 @@
             <a:avLst/>
           </a:prstGeom>
           <a:solidFill>
-            <a:srgbClr val="14B8A6"/>
+            <a:srgbClr val="2DD4BF"/>
           </a:solidFill>
           <a:ln w="12700">
             <a:solidFill>
-              <a:srgbClr val="14B8A6"/>
+              <a:srgbClr val="2DD4BF"/>
             </a:solidFill>
             <a:prstDash val="solid"/>
           </a:ln>
@@ -13522,7 +13522,7 @@
             <a:r>
               <a:rPr lang="en-US" sz="800" dirty="0">
                 <a:solidFill>
-                  <a:srgbClr val="14B8A6"/>
+                  <a:srgbClr val="2DD4BF"/>
                 </a:solidFill>
               </a:rPr>
               <a:t>Dloop — SaaS locale PMI (posizione unica)</a:t>
@@ -13546,11 +13546,11 @@
             <a:avLst/>
           </a:prstGeom>
           <a:solidFill>
-            <a:srgbClr val="8CB3CC"/>
+            <a:srgbClr val="A89F98"/>
           </a:solidFill>
           <a:ln w="12700">
             <a:solidFill>
-              <a:srgbClr val="8CB3CC"/>
+              <a:srgbClr val="A89F98"/>
             </a:solidFill>
             <a:prstDash val="solid"/>
           </a:ln>
@@ -13583,7 +13583,7 @@
             <a:r>
               <a:rPr lang="en-US" sz="800" dirty="0">
                 <a:solidFill>
-                  <a:srgbClr val="8CB3CC"/>
+                  <a:srgbClr val="A89F98"/>
                 </a:solidFill>
               </a:rPr>
               <a:t>SaaS B2B delivery (Onfleet, Tookan, LogiNext, Bringg)</a:t>
@@ -13741,7 +13741,7 @@
             <a:r>
               <a:rPr lang="en-US" sz="800" dirty="0">
                 <a:solidFill>
-                  <a:srgbClr val="334455"/>
+                  <a:srgbClr val="4A4540"/>
                 </a:solidFill>
               </a:rPr>
               <a:t>06 / 12</a:t>
@@ -13764,7 +13764,7 @@
     <p:bg>
       <p:bgPr>
         <a:solidFill>
-          <a:srgbClr val="0A2A28"/>
+          <a:srgbClr val="141E1C"/>
         </a:solidFill>
       </p:bgPr>
     </p:bg>
@@ -13809,7 +13809,7 @@
             <a:r>
               <a:rPr lang="en-US" sz="900" b="1" spc="300" kern="0" dirty="0">
                 <a:solidFill>
-                  <a:srgbClr val="14B8A6"/>
+                  <a:srgbClr val="2DD4BF"/>
                 </a:solidFill>
               </a:rPr>
               <a:t>BUSINESS MODEL</a:t>
@@ -13848,7 +13848,7 @@
             <a:r>
               <a:rPr lang="en-US" sz="3400" b="1" dirty="0">
                 <a:solidFill>
-                  <a:srgbClr val="FFFFFF"/>
+                  <a:srgbClr val="F0EDE8"/>
                 </a:solidFill>
                 <a:latin typeface="Georgia" pitchFamily="34" charset="0"/>
                 <a:ea typeface="Georgia" pitchFamily="34" charset="-122"/>
@@ -13868,7 +13868,7 @@
             <a:r>
               <a:rPr lang="en-US" sz="3400" b="1" dirty="0">
                 <a:solidFill>
-                  <a:srgbClr val="FFFFFF"/>
+                  <a:srgbClr val="F0EDE8"/>
                 </a:solidFill>
                 <a:latin typeface="Georgia" pitchFamily="34" charset="0"/>
                 <a:ea typeface="Georgia" pitchFamily="34" charset="-122"/>
@@ -13907,7 +13907,7 @@
             <a:r>
               <a:rPr lang="en-US" sz="1000" b="1" spc="200" kern="0" dirty="0">
                 <a:solidFill>
-                  <a:srgbClr val="14B8A6"/>
+                  <a:srgbClr val="2DD4BF"/>
                 </a:solidFill>
               </a:rPr>
               <a:t>SMB — Merchant singoli</a:t>
@@ -13968,7 +13968,7 @@
             <a:r>
               <a:rPr lang="en-US" sz="1100" b="1" dirty="0">
                 <a:solidFill>
-                  <a:srgbClr val="FFFFFF"/>
+                  <a:srgbClr val="F0EDE8"/>
                 </a:solidFill>
               </a:rPr>
               <a:t>Starter</a:t>
@@ -14004,7 +14004,7 @@
             <a:r>
               <a:rPr lang="en-US" sz="900" dirty="0">
                 <a:solidFill>
-                  <a:srgbClr val="8CB3CC"/>
+                  <a:srgbClr val="A89F98"/>
                 </a:solidFill>
               </a:rPr>
               <a:t>50 ord. inclusi · €0,80/extra</a:t>
@@ -14040,7 +14040,7 @@
             <a:r>
               <a:rPr lang="en-US" sz="1200" b="1" dirty="0">
                 <a:solidFill>
-                  <a:srgbClr val="14B8A6"/>
+                  <a:srgbClr val="2DD4BF"/>
                 </a:solidFill>
                 <a:latin typeface="Calibri" pitchFamily="34" charset="0"/>
                 <a:ea typeface="Calibri" pitchFamily="34" charset="-122"/>
@@ -14071,7 +14071,7 @@
           </a:solidFill>
           <a:ln w="12700">
             <a:solidFill>
-              <a:srgbClr val="0B7A75"/>
+              <a:srgbClr val="0D8A82"/>
             </a:solidFill>
             <a:prstDash val="solid"/>
           </a:ln>
@@ -14104,7 +14104,7 @@
             <a:r>
               <a:rPr lang="en-US" sz="1100" b="1" dirty="0">
                 <a:solidFill>
-                  <a:srgbClr val="FFFFFF"/>
+                  <a:srgbClr val="F0EDE8"/>
                 </a:solidFill>
               </a:rPr>
               <a:t>Pro  ★ Più popolare</a:t>
@@ -14140,7 +14140,7 @@
             <a:r>
               <a:rPr lang="en-US" sz="900" dirty="0">
                 <a:solidFill>
-                  <a:srgbClr val="8CB3CC"/>
+                  <a:srgbClr val="A89F98"/>
                 </a:solidFill>
               </a:rPr>
               <a:t>100 ord. inclusi · €0,80/extra</a:t>
@@ -14176,7 +14176,7 @@
             <a:r>
               <a:rPr lang="en-US" sz="1200" b="1" dirty="0">
                 <a:solidFill>
-                  <a:srgbClr val="14B8A6"/>
+                  <a:srgbClr val="2DD4BF"/>
                 </a:solidFill>
                 <a:latin typeface="Calibri" pitchFamily="34" charset="0"/>
                 <a:ea typeface="Calibri" pitchFamily="34" charset="-122"/>
@@ -14240,7 +14240,7 @@
             <a:r>
               <a:rPr lang="en-US" sz="1100" b="1" dirty="0">
                 <a:solidFill>
-                  <a:srgbClr val="FFFFFF"/>
+                  <a:srgbClr val="F0EDE8"/>
                 </a:solidFill>
               </a:rPr>
               <a:t>Enterprise</a:t>
@@ -14276,7 +14276,7 @@
             <a:r>
               <a:rPr lang="en-US" sz="900" dirty="0">
                 <a:solidFill>
-                  <a:srgbClr val="8CB3CC"/>
+                  <a:srgbClr val="A89F98"/>
                 </a:solidFill>
               </a:rPr>
               <a:t>250 ord. inclusi · €0,50/extra</a:t>
@@ -14312,7 +14312,7 @@
             <a:r>
               <a:rPr lang="en-US" sz="1200" b="1" dirty="0">
                 <a:solidFill>
-                  <a:srgbClr val="14B8A6"/>
+                  <a:srgbClr val="2DD4BF"/>
                 </a:solidFill>
                 <a:latin typeface="Calibri" pitchFamily="34" charset="0"/>
                 <a:ea typeface="Calibri" pitchFamily="34" charset="-122"/>
@@ -14351,7 +14351,7 @@
             <a:r>
               <a:rPr lang="en-US" sz="1000" b="1" spc="200" kern="0" dirty="0">
                 <a:solidFill>
-                  <a:srgbClr val="14B8A6"/>
+                  <a:srgbClr val="2DD4BF"/>
                 </a:solidFill>
               </a:rPr>
               <a:t>B2B Operator — Flotte delivery</a:t>
@@ -14412,7 +14412,7 @@
             <a:r>
               <a:rPr lang="en-US" sz="1000" b="1" dirty="0">
                 <a:solidFill>
-                  <a:srgbClr val="FFFFFF"/>
+                  <a:srgbClr val="F0EDE8"/>
                 </a:solidFill>
               </a:rPr>
               <a:t>Starter</a:t>
@@ -14448,7 +14448,7 @@
             <a:r>
               <a:rPr lang="en-US" sz="800" dirty="0">
                 <a:solidFill>
-                  <a:srgbClr val="8CB3CC"/>
+                  <a:srgbClr val="A89F98"/>
                 </a:solidFill>
               </a:rPr>
               <a:t>500 ord. inclusi · €0,90/extra</a:t>
@@ -14484,7 +14484,7 @@
             <a:r>
               <a:rPr lang="en-US" sz="1100" b="1" dirty="0">
                 <a:solidFill>
-                  <a:srgbClr val="14B8A6"/>
+                  <a:srgbClr val="2DD4BF"/>
                 </a:solidFill>
               </a:rPr>
               <a:t>€99/mese</a:t>
@@ -14512,7 +14512,7 @@
           </a:solidFill>
           <a:ln w="12700">
             <a:solidFill>
-              <a:srgbClr val="0B7A75"/>
+              <a:srgbClr val="0D8A82"/>
             </a:solidFill>
             <a:prstDash val="solid"/>
           </a:ln>
@@ -14545,7 +14545,7 @@
             <a:r>
               <a:rPr lang="en-US" sz="1000" b="1" dirty="0">
                 <a:solidFill>
-                  <a:srgbClr val="FFFFFF"/>
+                  <a:srgbClr val="F0EDE8"/>
                 </a:solidFill>
               </a:rPr>
               <a:t>Business ★ Target ADV</a:t>
@@ -14581,7 +14581,7 @@
             <a:r>
               <a:rPr lang="en-US" sz="800" dirty="0">
                 <a:solidFill>
-                  <a:srgbClr val="8CB3CC"/>
+                  <a:srgbClr val="A89F98"/>
                 </a:solidFill>
               </a:rPr>
               <a:t>1.500 ord. inclusi · €0,60/extra</a:t>
@@ -14617,7 +14617,7 @@
             <a:r>
               <a:rPr lang="en-US" sz="1100" b="1" dirty="0">
                 <a:solidFill>
-                  <a:srgbClr val="14B8A6"/>
+                  <a:srgbClr val="2DD4BF"/>
                 </a:solidFill>
               </a:rPr>
               <a:t>€199/mese</a:t>
@@ -14714,7 +14714,7 @@
             <a:r>
               <a:rPr lang="en-US" sz="800" dirty="0">
                 <a:solidFill>
-                  <a:srgbClr val="8CB3CC"/>
+                  <a:srgbClr val="A89F98"/>
                 </a:solidFill>
               </a:rPr>
               <a:t>3.000 ord. inclusi · €0,45/extra</a:t>
@@ -14811,7 +14811,7 @@
             <a:r>
               <a:rPr lang="en-US" sz="1000" b="1" dirty="0">
                 <a:solidFill>
-                  <a:srgbClr val="FFFFFF"/>
+                  <a:srgbClr val="F0EDE8"/>
                 </a:solidFill>
               </a:rPr>
               <a:t>Enterprise</a:t>
@@ -14847,7 +14847,7 @@
             <a:r>
               <a:rPr lang="en-US" sz="800" dirty="0">
                 <a:solidFill>
-                  <a:srgbClr val="8CB3CC"/>
+                  <a:srgbClr val="A89F98"/>
                 </a:solidFill>
               </a:rPr>
               <a:t>5.000 ord. inclusi · €0,30/extra</a:t>
@@ -14883,7 +14883,7 @@
             <a:r>
               <a:rPr lang="en-US" sz="1100" b="1" dirty="0">
                 <a:solidFill>
-                  <a:srgbClr val="14B8A6"/>
+                  <a:srgbClr val="2DD4BF"/>
                 </a:solidFill>
               </a:rPr>
               <a:t>€499/mese</a:t>
@@ -14907,11 +14907,11 @@
             <a:avLst/>
           </a:prstGeom>
           <a:solidFill>
-            <a:srgbClr val="0A1929"/>
+            <a:srgbClr val="181614"/>
           </a:solidFill>
           <a:ln w="12700">
             <a:solidFill>
-              <a:srgbClr val="1A3A50"/>
+              <a:srgbClr val="3A3530"/>
             </a:solidFill>
             <a:prstDash val="solid"/>
           </a:ln>
@@ -14951,7 +14951,7 @@
             <a:r>
               <a:rPr lang="en-US" sz="900" b="1" spc="200" kern="0" dirty="0">
                 <a:solidFill>
-                  <a:srgbClr val="14B8A6"/>
+                  <a:srgbClr val="2DD4BF"/>
                 </a:solidFill>
               </a:rPr>
               <a:t>UNIT ECONOMICS PER ORDINE</a:t>
@@ -14987,7 +14987,7 @@
             <a:r>
               <a:rPr lang="en-US" sz="1100" dirty="0">
                 <a:solidFill>
-                  <a:srgbClr val="8CB3CC"/>
+                  <a:srgbClr val="A89F98"/>
                 </a:solidFill>
               </a:rPr>
               <a:t>Revenue blended/ordine</a:t>
@@ -15023,7 +15023,7 @@
             <a:r>
               <a:rPr lang="en-US" sz="1200" dirty="0">
                 <a:solidFill>
-                  <a:srgbClr val="14B8A6"/>
+                  <a:srgbClr val="2DD4BF"/>
                 </a:solidFill>
                 <a:latin typeface="Calibri" pitchFamily="34" charset="0"/>
                 <a:ea typeface="Calibri" pitchFamily="34" charset="-122"/>
@@ -15062,7 +15062,7 @@
             <a:r>
               <a:rPr lang="en-US" sz="1100" dirty="0">
                 <a:solidFill>
-                  <a:srgbClr val="8CB3CC"/>
+                  <a:srgbClr val="A89F98"/>
                 </a:solidFill>
               </a:rPr>
               <a:t>Costo variabile/ordine</a:t>
@@ -15137,7 +15137,7 @@
             <a:r>
               <a:rPr lang="en-US" sz="1100" dirty="0">
                 <a:solidFill>
-                  <a:srgbClr val="8CB3CC"/>
+                  <a:srgbClr val="A89F98"/>
                 </a:solidFill>
               </a:rPr>
               <a:t>Margine/ordine</a:t>
@@ -15173,7 +15173,7 @@
             <a:r>
               <a:rPr lang="en-US" sz="1200" b="1" dirty="0">
                 <a:solidFill>
-                  <a:srgbClr val="10B981"/>
+                  <a:srgbClr val="34D399"/>
                 </a:solidFill>
                 <a:latin typeface="Calibri" pitchFamily="34" charset="0"/>
                 <a:ea typeface="Calibri" pitchFamily="34" charset="-122"/>
@@ -15202,7 +15202,7 @@
           <a:noFill/>
           <a:ln w="12700">
             <a:solidFill>
-              <a:srgbClr val="0B7A75"/>
+              <a:srgbClr val="0D8A82"/>
             </a:solidFill>
             <a:prstDash val="dash"/>
           </a:ln>
@@ -15235,7 +15235,7 @@
             <a:r>
               <a:rPr lang="en-US" sz="1100" dirty="0">
                 <a:solidFill>
-                  <a:srgbClr val="8CB3CC"/>
+                  <a:srgbClr val="A89F98"/>
                 </a:solidFill>
               </a:rPr>
               <a:t>Gross Margin</a:t>
@@ -15271,7 +15271,7 @@
             <a:r>
               <a:rPr lang="en-US" sz="1200" b="1" dirty="0">
                 <a:solidFill>
-                  <a:srgbClr val="10B981"/>
+                  <a:srgbClr val="34D399"/>
                 </a:solidFill>
                 <a:latin typeface="Calibri" pitchFamily="34" charset="0"/>
                 <a:ea typeface="Calibri" pitchFamily="34" charset="-122"/>
@@ -15310,7 +15310,7 @@
             <a:r>
               <a:rPr lang="en-US" sz="1100" dirty="0">
                 <a:solidFill>
-                  <a:srgbClr val="8CB3CC"/>
+                  <a:srgbClr val="A89F98"/>
                 </a:solidFill>
               </a:rPr>
               <a:t>Revenue media/dealer</a:t>
@@ -15346,7 +15346,7 @@
             <a:r>
               <a:rPr lang="en-US" sz="1200" dirty="0">
                 <a:solidFill>
-                  <a:srgbClr val="FFFFFF"/>
+                  <a:srgbClr val="F0EDE8"/>
                 </a:solidFill>
                 <a:latin typeface="Calibri" pitchFamily="34" charset="0"/>
                 <a:ea typeface="Calibri" pitchFamily="34" charset="-122"/>
@@ -15385,7 +15385,7 @@
             <a:r>
               <a:rPr lang="en-US" sz="1100" dirty="0">
                 <a:solidFill>
-                  <a:srgbClr val="8CB3CC"/>
+                  <a:srgbClr val="A89F98"/>
                 </a:solidFill>
               </a:rPr>
               <a:t>Break-even</a:t>
@@ -15448,11 +15448,11 @@
             <a:avLst/>
           </a:prstGeom>
           <a:solidFill>
-            <a:srgbClr val="0A2A28"/>
+            <a:srgbClr val="1A1E1C"/>
           </a:solidFill>
           <a:ln w="12700">
             <a:solidFill>
-              <a:srgbClr val="0B7A75"/>
+              <a:srgbClr val="0D8A82"/>
             </a:solidFill>
             <a:prstDash val="solid"/>
           </a:ln>
@@ -15541,7 +15541,7 @@
             <a:r>
               <a:rPr lang="en-US" sz="800" dirty="0">
                 <a:solidFill>
-                  <a:srgbClr val="334455"/>
+                  <a:srgbClr val="4A4540"/>
                 </a:solidFill>
               </a:rPr>
               <a:t>07 / 12</a:t>
@@ -15564,7 +15564,7 @@
     <p:bg>
       <p:bgPr>
         <a:solidFill>
-          <a:srgbClr val="0A1929"/>
+          <a:srgbClr val="141412"/>
         </a:solidFill>
       </p:bgPr>
     </p:bg>
@@ -15609,7 +15609,7 @@
             <a:r>
               <a:rPr lang="en-US" sz="900" b="1" spc="300" kern="0" dirty="0">
                 <a:solidFill>
-                  <a:srgbClr val="14B8A6"/>
+                  <a:srgbClr val="2DD4BF"/>
                 </a:solidFill>
               </a:rPr>
               <a:t>PROIEZIONI FINANZIARIE</a:t>
@@ -15648,7 +15648,7 @@
             <a:r>
               <a:rPr lang="en-US" sz="3400" b="1" dirty="0">
                 <a:solidFill>
-                  <a:srgbClr val="FFFFFF"/>
+                  <a:srgbClr val="F0EDE8"/>
                 </a:solidFill>
                 <a:latin typeface="Georgia" pitchFamily="34" charset="0"/>
                 <a:ea typeface="Georgia" pitchFamily="34" charset="-122"/>
@@ -15668,7 +15668,7 @@
             <a:r>
               <a:rPr lang="en-US" sz="3400" b="1" dirty="0">
                 <a:solidFill>
-                  <a:srgbClr val="FFFFFF"/>
+                  <a:srgbClr val="F0EDE8"/>
                 </a:solidFill>
                 <a:latin typeface="Georgia" pitchFamily="34" charset="0"/>
                 <a:ea typeface="Georgia" pitchFamily="34" charset="-122"/>
@@ -15690,6 +15690,586 @@
           <a:xfrm>
             <a:off x="457200" y="1828800"/>
             <a:ext cx="2697480" cy="1737360"/>
+          </a:xfrm>
+          <a:prstGeom prst="rect">
+            <a:avLst/>
+          </a:prstGeom>
+          <a:solidFill>
+            <a:srgbClr val="201E1B"/>
+          </a:solidFill>
+          <a:ln w="12700">
+            <a:solidFill>
+              <a:srgbClr val="3A3530"/>
+            </a:solidFill>
+            <a:prstDash val="solid"/>
+          </a:ln>
+        </p:spPr>
+      </p:sp>
+      <p:sp>
+        <p:nvSpPr>
+          <p:cNvPr id="5" name="Text 3"/>
+          <p:cNvSpPr/>
+          <p:nvPr/>
+        </p:nvSpPr>
+        <p:spPr>
+          <a:xfrm>
+            <a:off x="457200" y="1920240"/>
+            <a:ext cx="2697480" cy="731520"/>
+          </a:xfrm>
+          <a:prstGeom prst="rect">
+            <a:avLst/>
+          </a:prstGeom>
+          <a:noFill/>
+          <a:ln/>
+        </p:spPr>
+        <p:txBody>
+          <a:bodyPr wrap="square" lIns="0" tIns="0" rIns="0" bIns="0" rtlCol="0" anchor="ctr"/>
+          <a:lstStyle/>
+          <a:p>
+            <a:pPr algn="ctr" indent="0" marL="0">
+              <a:buNone/>
+            </a:pPr>
+            <a:r>
+              <a:rPr lang="en-US" sz="3200" b="1" dirty="0">
+                <a:solidFill>
+                  <a:srgbClr val="2DD4BF"/>
+                </a:solidFill>
+                <a:latin typeface="Georgia" pitchFamily="34" charset="0"/>
+                <a:ea typeface="Georgia" pitchFamily="34" charset="-122"/>
+                <a:cs typeface="Georgia" pitchFamily="34" charset="-120"/>
+              </a:rPr>
+              <a:t>M11</a:t>
+            </a:r>
+            <a:endParaRPr lang="en-US" sz="3200" dirty="0"/>
+          </a:p>
+        </p:txBody>
+      </p:sp>
+      <p:sp>
+        <p:nvSpPr>
+          <p:cNvPr id="6" name="Text 4"/>
+          <p:cNvSpPr/>
+          <p:nvPr/>
+        </p:nvSpPr>
+        <p:spPr>
+          <a:xfrm>
+            <a:off x="457200" y="2651760"/>
+            <a:ext cx="2697480" cy="274320"/>
+          </a:xfrm>
+          <a:prstGeom prst="rect">
+            <a:avLst/>
+          </a:prstGeom>
+          <a:noFill/>
+          <a:ln/>
+        </p:spPr>
+        <p:txBody>
+          <a:bodyPr wrap="square" lIns="0" tIns="0" rIns="0" bIns="0" rtlCol="0" anchor="ctr"/>
+          <a:lstStyle/>
+          <a:p>
+            <a:pPr algn="ctr" indent="0" marL="0">
+              <a:buNone/>
+            </a:pPr>
+            <a:r>
+              <a:rPr lang="en-US" sz="1000" b="1" dirty="0">
+                <a:solidFill>
+                  <a:srgbClr val="F0EDE8"/>
+                </a:solidFill>
+              </a:rPr>
+              <a:t>Break-even operativo</a:t>
+            </a:r>
+            <a:endParaRPr lang="en-US" sz="1000" dirty="0"/>
+          </a:p>
+        </p:txBody>
+      </p:sp>
+      <p:sp>
+        <p:nvSpPr>
+          <p:cNvPr id="7" name="Text 5"/>
+          <p:cNvSpPr/>
+          <p:nvPr/>
+        </p:nvSpPr>
+        <p:spPr>
+          <a:xfrm>
+            <a:off x="457200" y="2944368"/>
+            <a:ext cx="2697480" cy="228600"/>
+          </a:xfrm>
+          <a:prstGeom prst="rect">
+            <a:avLst/>
+          </a:prstGeom>
+          <a:noFill/>
+          <a:ln/>
+        </p:spPr>
+        <p:txBody>
+          <a:bodyPr wrap="square" lIns="0" tIns="0" rIns="0" bIns="0" rtlCol="0" anchor="ctr"/>
+          <a:lstStyle/>
+          <a:p>
+            <a:pPr algn="ctr" indent="0" marL="0">
+              <a:buNone/>
+            </a:pPr>
+            <a:r>
+              <a:rPr lang="en-US" sz="800" dirty="0">
+                <a:solidFill>
+                  <a:srgbClr val="A89F98"/>
+                </a:solidFill>
+              </a:rPr>
+              <a:t>@ 61 dealer attivi</a:t>
+            </a:r>
+            <a:endParaRPr lang="en-US" sz="800" dirty="0"/>
+          </a:p>
+        </p:txBody>
+      </p:sp>
+      <p:sp>
+        <p:nvSpPr>
+          <p:cNvPr id="8" name="Shape 6"/>
+          <p:cNvSpPr/>
+          <p:nvPr/>
+        </p:nvSpPr>
+        <p:spPr>
+          <a:xfrm>
+            <a:off x="3383280" y="1828800"/>
+            <a:ext cx="2697480" cy="1737360"/>
+          </a:xfrm>
+          <a:prstGeom prst="rect">
+            <a:avLst/>
+          </a:prstGeom>
+          <a:solidFill>
+            <a:srgbClr val="201E1B"/>
+          </a:solidFill>
+          <a:ln w="12700">
+            <a:solidFill>
+              <a:srgbClr val="3A3530"/>
+            </a:solidFill>
+            <a:prstDash val="solid"/>
+          </a:ln>
+        </p:spPr>
+      </p:sp>
+      <p:sp>
+        <p:nvSpPr>
+          <p:cNvPr id="9" name="Text 7"/>
+          <p:cNvSpPr/>
+          <p:nvPr/>
+        </p:nvSpPr>
+        <p:spPr>
+          <a:xfrm>
+            <a:off x="3383280" y="1920240"/>
+            <a:ext cx="2697480" cy="731520"/>
+          </a:xfrm>
+          <a:prstGeom prst="rect">
+            <a:avLst/>
+          </a:prstGeom>
+          <a:noFill/>
+          <a:ln/>
+        </p:spPr>
+        <p:txBody>
+          <a:bodyPr wrap="square" lIns="0" tIns="0" rIns="0" bIns="0" rtlCol="0" anchor="ctr"/>
+          <a:lstStyle/>
+          <a:p>
+            <a:pPr algn="ctr" indent="0" marL="0">
+              <a:buNone/>
+            </a:pPr>
+            <a:r>
+              <a:rPr lang="en-US" sz="3200" b="1" dirty="0">
+                <a:solidFill>
+                  <a:srgbClr val="34D399"/>
+                </a:solidFill>
+                <a:latin typeface="Georgia" pitchFamily="34" charset="0"/>
+                <a:ea typeface="Georgia" pitchFamily="34" charset="-122"/>
+                <a:cs typeface="Georgia" pitchFamily="34" charset="-120"/>
+              </a:rPr>
+              <a:t>73%</a:t>
+            </a:r>
+            <a:endParaRPr lang="en-US" sz="3200" dirty="0"/>
+          </a:p>
+        </p:txBody>
+      </p:sp>
+      <p:sp>
+        <p:nvSpPr>
+          <p:cNvPr id="10" name="Text 8"/>
+          <p:cNvSpPr/>
+          <p:nvPr/>
+        </p:nvSpPr>
+        <p:spPr>
+          <a:xfrm>
+            <a:off x="3383280" y="2651760"/>
+            <a:ext cx="2697480" cy="274320"/>
+          </a:xfrm>
+          <a:prstGeom prst="rect">
+            <a:avLst/>
+          </a:prstGeom>
+          <a:noFill/>
+          <a:ln/>
+        </p:spPr>
+        <p:txBody>
+          <a:bodyPr wrap="square" lIns="0" tIns="0" rIns="0" bIns="0" rtlCol="0" anchor="ctr"/>
+          <a:lstStyle/>
+          <a:p>
+            <a:pPr algn="ctr" indent="0" marL="0">
+              <a:buNone/>
+            </a:pPr>
+            <a:r>
+              <a:rPr lang="en-US" sz="1000" b="1" dirty="0">
+                <a:solidFill>
+                  <a:srgbClr val="F0EDE8"/>
+                </a:solidFill>
+              </a:rPr>
+              <a:t>Gross Margin</a:t>
+            </a:r>
+            <a:endParaRPr lang="en-US" sz="1000" dirty="0"/>
+          </a:p>
+        </p:txBody>
+      </p:sp>
+      <p:sp>
+        <p:nvSpPr>
+          <p:cNvPr id="11" name="Text 9"/>
+          <p:cNvSpPr/>
+          <p:nvPr/>
+        </p:nvSpPr>
+        <p:spPr>
+          <a:xfrm>
+            <a:off x="3383280" y="2944368"/>
+            <a:ext cx="2697480" cy="228600"/>
+          </a:xfrm>
+          <a:prstGeom prst="rect">
+            <a:avLst/>
+          </a:prstGeom>
+          <a:noFill/>
+          <a:ln/>
+        </p:spPr>
+        <p:txBody>
+          <a:bodyPr wrap="square" lIns="0" tIns="0" rIns="0" bIns="0" rtlCol="0" anchor="ctr"/>
+          <a:lstStyle/>
+          <a:p>
+            <a:pPr algn="ctr" indent="0" marL="0">
+              <a:buNone/>
+            </a:pPr>
+            <a:r>
+              <a:rPr lang="en-US" sz="800" dirty="0">
+                <a:solidFill>
+                  <a:srgbClr val="A89F98"/>
+                </a:solidFill>
+              </a:rPr>
+              <a:t>Benchmark SaaS: &gt;70%</a:t>
+            </a:r>
+            <a:endParaRPr lang="en-US" sz="800" dirty="0"/>
+          </a:p>
+        </p:txBody>
+      </p:sp>
+      <p:sp>
+        <p:nvSpPr>
+          <p:cNvPr id="12" name="Shape 10"/>
+          <p:cNvSpPr/>
+          <p:nvPr/>
+        </p:nvSpPr>
+        <p:spPr>
+          <a:xfrm>
+            <a:off x="6309360" y="1828800"/>
+            <a:ext cx="2697480" cy="1737360"/>
+          </a:xfrm>
+          <a:prstGeom prst="rect">
+            <a:avLst/>
+          </a:prstGeom>
+          <a:solidFill>
+            <a:srgbClr val="201E1B"/>
+          </a:solidFill>
+          <a:ln w="12700">
+            <a:solidFill>
+              <a:srgbClr val="3A3530"/>
+            </a:solidFill>
+            <a:prstDash val="solid"/>
+          </a:ln>
+        </p:spPr>
+      </p:sp>
+      <p:sp>
+        <p:nvSpPr>
+          <p:cNvPr id="13" name="Text 11"/>
+          <p:cNvSpPr/>
+          <p:nvPr/>
+        </p:nvSpPr>
+        <p:spPr>
+          <a:xfrm>
+            <a:off x="6309360" y="1920240"/>
+            <a:ext cx="2697480" cy="731520"/>
+          </a:xfrm>
+          <a:prstGeom prst="rect">
+            <a:avLst/>
+          </a:prstGeom>
+          <a:noFill/>
+          <a:ln/>
+        </p:spPr>
+        <p:txBody>
+          <a:bodyPr wrap="square" lIns="0" tIns="0" rIns="0" bIns="0" rtlCol="0" anchor="ctr"/>
+          <a:lstStyle/>
+          <a:p>
+            <a:pPr algn="ctr" indent="0" marL="0">
+              <a:buNone/>
+            </a:pPr>
+            <a:r>
+              <a:rPr lang="en-US" sz="3200" b="1" dirty="0">
+                <a:solidFill>
+                  <a:srgbClr val="F59E0B"/>
+                </a:solidFill>
+                <a:latin typeface="Georgia" pitchFamily="34" charset="0"/>
+                <a:ea typeface="Georgia" pitchFamily="34" charset="-122"/>
+                <a:cs typeface="Georgia" pitchFamily="34" charset="-120"/>
+              </a:rPr>
+              <a:t>16-18x</a:t>
+            </a:r>
+            <a:endParaRPr lang="en-US" sz="3200" dirty="0"/>
+          </a:p>
+        </p:txBody>
+      </p:sp>
+      <p:sp>
+        <p:nvSpPr>
+          <p:cNvPr id="14" name="Text 12"/>
+          <p:cNvSpPr/>
+          <p:nvPr/>
+        </p:nvSpPr>
+        <p:spPr>
+          <a:xfrm>
+            <a:off x="6309360" y="2651760"/>
+            <a:ext cx="2697480" cy="274320"/>
+          </a:xfrm>
+          <a:prstGeom prst="rect">
+            <a:avLst/>
+          </a:prstGeom>
+          <a:noFill/>
+          <a:ln/>
+        </p:spPr>
+        <p:txBody>
+          <a:bodyPr wrap="square" lIns="0" tIns="0" rIns="0" bIns="0" rtlCol="0" anchor="ctr"/>
+          <a:lstStyle/>
+          <a:p>
+            <a:pPr algn="ctr" indent="0" marL="0">
+              <a:buNone/>
+            </a:pPr>
+            <a:r>
+              <a:rPr lang="en-US" sz="1000" b="1" dirty="0">
+                <a:solidFill>
+                  <a:srgbClr val="F0EDE8"/>
+                </a:solidFill>
+              </a:rPr>
+              <a:t>LTV:CAC Ratio</a:t>
+            </a:r>
+            <a:endParaRPr lang="en-US" sz="1000" dirty="0"/>
+          </a:p>
+        </p:txBody>
+      </p:sp>
+      <p:sp>
+        <p:nvSpPr>
+          <p:cNvPr id="15" name="Text 13"/>
+          <p:cNvSpPr/>
+          <p:nvPr/>
+        </p:nvSpPr>
+        <p:spPr>
+          <a:xfrm>
+            <a:off x="6309360" y="2944368"/>
+            <a:ext cx="2697480" cy="228600"/>
+          </a:xfrm>
+          <a:prstGeom prst="rect">
+            <a:avLst/>
+          </a:prstGeom>
+          <a:noFill/>
+          <a:ln/>
+        </p:spPr>
+        <p:txBody>
+          <a:bodyPr wrap="square" lIns="0" tIns="0" rIns="0" bIns="0" rtlCol="0" anchor="ctr"/>
+          <a:lstStyle/>
+          <a:p>
+            <a:pPr algn="ctr" indent="0" marL="0">
+              <a:buNone/>
+            </a:pPr>
+            <a:r>
+              <a:rPr lang="en-US" sz="800" dirty="0">
+                <a:solidFill>
+                  <a:srgbClr val="A89F98"/>
+                </a:solidFill>
+              </a:rPr>
+              <a:t>Benchmark VC: &gt;3x ✓</a:t>
+            </a:r>
+            <a:endParaRPr lang="en-US" sz="800" dirty="0"/>
+          </a:p>
+        </p:txBody>
+      </p:sp>
+      <p:sp>
+        <p:nvSpPr>
+          <p:cNvPr id="16" name="Shape 14"/>
+          <p:cNvSpPr/>
+          <p:nvPr/>
+        </p:nvSpPr>
+        <p:spPr>
+          <a:xfrm>
+            <a:off x="9235440" y="1828800"/>
+            <a:ext cx="2697480" cy="1737360"/>
+          </a:xfrm>
+          <a:prstGeom prst="rect">
+            <a:avLst/>
+          </a:prstGeom>
+          <a:solidFill>
+            <a:srgbClr val="201E1B"/>
+          </a:solidFill>
+          <a:ln w="12700">
+            <a:solidFill>
+              <a:srgbClr val="3A3530"/>
+            </a:solidFill>
+            <a:prstDash val="solid"/>
+          </a:ln>
+        </p:spPr>
+      </p:sp>
+      <p:sp>
+        <p:nvSpPr>
+          <p:cNvPr id="17" name="Text 15"/>
+          <p:cNvSpPr/>
+          <p:nvPr/>
+        </p:nvSpPr>
+        <p:spPr>
+          <a:xfrm>
+            <a:off x="9235440" y="1920240"/>
+            <a:ext cx="2697480" cy="731520"/>
+          </a:xfrm>
+          <a:prstGeom prst="rect">
+            <a:avLst/>
+          </a:prstGeom>
+          <a:noFill/>
+          <a:ln/>
+        </p:spPr>
+        <p:txBody>
+          <a:bodyPr wrap="square" lIns="0" tIns="0" rIns="0" bIns="0" rtlCol="0" anchor="ctr"/>
+          <a:lstStyle/>
+          <a:p>
+            <a:pPr algn="ctr" indent="0" marL="0">
+              <a:buNone/>
+            </a:pPr>
+            <a:r>
+              <a:rPr lang="en-US" sz="3200" b="1" dirty="0">
+                <a:solidFill>
+                  <a:srgbClr val="2DD4BF"/>
+                </a:solidFill>
+                <a:latin typeface="Georgia" pitchFamily="34" charset="0"/>
+                <a:ea typeface="Georgia" pitchFamily="34" charset="-122"/>
+                <a:cs typeface="Georgia" pitchFamily="34" charset="-120"/>
+              </a:rPr>
+              <a:t>4 mesi</a:t>
+            </a:r>
+            <a:endParaRPr lang="en-US" sz="3200" dirty="0"/>
+          </a:p>
+        </p:txBody>
+      </p:sp>
+      <p:sp>
+        <p:nvSpPr>
+          <p:cNvPr id="18" name="Text 16"/>
+          <p:cNvSpPr/>
+          <p:nvPr/>
+        </p:nvSpPr>
+        <p:spPr>
+          <a:xfrm>
+            <a:off x="9235440" y="2651760"/>
+            <a:ext cx="2697480" cy="274320"/>
+          </a:xfrm>
+          <a:prstGeom prst="rect">
+            <a:avLst/>
+          </a:prstGeom>
+          <a:noFill/>
+          <a:ln/>
+        </p:spPr>
+        <p:txBody>
+          <a:bodyPr wrap="square" lIns="0" tIns="0" rIns="0" bIns="0" rtlCol="0" anchor="ctr"/>
+          <a:lstStyle/>
+          <a:p>
+            <a:pPr algn="ctr" indent="0" marL="0">
+              <a:buNone/>
+            </a:pPr>
+            <a:r>
+              <a:rPr lang="en-US" sz="1000" b="1" dirty="0">
+                <a:solidFill>
+                  <a:srgbClr val="F0EDE8"/>
+                </a:solidFill>
+              </a:rPr>
+              <a:t>CAC Payback</a:t>
+            </a:r>
+            <a:endParaRPr lang="en-US" sz="1000" dirty="0"/>
+          </a:p>
+        </p:txBody>
+      </p:sp>
+      <p:sp>
+        <p:nvSpPr>
+          <p:cNvPr id="19" name="Text 17"/>
+          <p:cNvSpPr/>
+          <p:nvPr/>
+        </p:nvSpPr>
+        <p:spPr>
+          <a:xfrm>
+            <a:off x="9235440" y="2944368"/>
+            <a:ext cx="2697480" cy="228600"/>
+          </a:xfrm>
+          <a:prstGeom prst="rect">
+            <a:avLst/>
+          </a:prstGeom>
+          <a:noFill/>
+          <a:ln/>
+        </p:spPr>
+        <p:txBody>
+          <a:bodyPr wrap="square" lIns="0" tIns="0" rIns="0" bIns="0" rtlCol="0" anchor="ctr"/>
+          <a:lstStyle/>
+          <a:p>
+            <a:pPr algn="ctr" indent="0" marL="0">
+              <a:buNone/>
+            </a:pPr>
+            <a:r>
+              <a:rPr lang="en-US" sz="800" dirty="0">
+                <a:solidFill>
+                  <a:srgbClr val="A89F98"/>
+                </a:solidFill>
+              </a:rPr>
+              <a:t>Benchmark: &lt;18 mesi</a:t>
+            </a:r>
+            <a:endParaRPr lang="en-US" sz="800" dirty="0"/>
+          </a:p>
+        </p:txBody>
+      </p:sp>
+      <p:sp>
+        <p:nvSpPr>
+          <p:cNvPr id="20" name="Text 18"/>
+          <p:cNvSpPr/>
+          <p:nvPr/>
+        </p:nvSpPr>
+        <p:spPr>
+          <a:xfrm>
+            <a:off x="457200" y="3794760"/>
+            <a:ext cx="5486400" cy="256032"/>
+          </a:xfrm>
+          <a:prstGeom prst="rect">
+            <a:avLst/>
+          </a:prstGeom>
+          <a:noFill/>
+          <a:ln/>
+        </p:spPr>
+        <p:txBody>
+          <a:bodyPr wrap="square" lIns="0" tIns="0" rIns="0" bIns="0" rtlCol="0" anchor="ctr"/>
+          <a:lstStyle/>
+          <a:p>
+            <a:pPr indent="0" marL="0">
+              <a:buNone/>
+            </a:pPr>
+            <a:r>
+              <a:rPr lang="en-US" sz="1000" b="1" spc="100" kern="0" dirty="0">
+                <a:solidFill>
+                  <a:srgbClr val="2DD4BF"/>
+                </a:solidFill>
+              </a:rPr>
+              <a:t>Crescita MRR — Scenario Guerriglia</a:t>
+            </a:r>
+            <a:endParaRPr lang="en-US" sz="1000" dirty="0"/>
+          </a:p>
+        </p:txBody>
+      </p:sp>
+      <p:sp>
+        <p:nvSpPr>
+          <p:cNvPr id="21" name="Shape 19"/>
+          <p:cNvSpPr/>
+          <p:nvPr/>
+        </p:nvSpPr>
+        <p:spPr>
+          <a:xfrm>
+            <a:off x="457200" y="4114800"/>
+            <a:ext cx="2468880" cy="777240"/>
           </a:xfrm>
           <a:prstGeom prst="rect">
             <a:avLst/>
@@ -15707,14 +16287,89 @@
       </p:sp>
       <p:sp>
         <p:nvSpPr>
-          <p:cNvPr id="5" name="Text 3"/>
-          <p:cNvSpPr/>
-          <p:nvPr/>
-        </p:nvSpPr>
-        <p:spPr>
-          <a:xfrm>
-            <a:off x="457200" y="1920240"/>
-            <a:ext cx="2697480" cy="731520"/>
+          <p:cNvPr id="22" name="Text 20"/>
+          <p:cNvSpPr/>
+          <p:nvPr/>
+        </p:nvSpPr>
+        <p:spPr>
+          <a:xfrm>
+            <a:off x="457200" y="4160520"/>
+            <a:ext cx="914400" cy="320040"/>
+          </a:xfrm>
+          <a:prstGeom prst="rect">
+            <a:avLst/>
+          </a:prstGeom>
+          <a:noFill/>
+          <a:ln/>
+        </p:spPr>
+        <p:txBody>
+          <a:bodyPr wrap="square" lIns="0" tIns="0" rIns="0" bIns="0" rtlCol="0" anchor="ctr"/>
+          <a:lstStyle/>
+          <a:p>
+            <a:pPr indent="0" marL="0">
+              <a:buNone/>
+            </a:pPr>
+            <a:r>
+              <a:rPr lang="en-US" sz="1000" b="1" dirty="0">
+                <a:solidFill>
+                  <a:srgbClr val="A89F98"/>
+                </a:solidFill>
+              </a:rPr>
+              <a:t>M3</a:t>
+            </a:r>
+            <a:endParaRPr lang="en-US" sz="1000" dirty="0"/>
+          </a:p>
+        </p:txBody>
+      </p:sp>
+      <p:sp>
+        <p:nvSpPr>
+          <p:cNvPr id="23" name="Text 21"/>
+          <p:cNvSpPr/>
+          <p:nvPr/>
+        </p:nvSpPr>
+        <p:spPr>
+          <a:xfrm>
+            <a:off x="1280160" y="4160520"/>
+            <a:ext cx="1554480" cy="320040"/>
+          </a:xfrm>
+          <a:prstGeom prst="rect">
+            <a:avLst/>
+          </a:prstGeom>
+          <a:noFill/>
+          <a:ln/>
+        </p:spPr>
+        <p:txBody>
+          <a:bodyPr wrap="square" lIns="0" tIns="0" rIns="0" bIns="0" rtlCol="0" anchor="ctr"/>
+          <a:lstStyle/>
+          <a:p>
+            <a:pPr algn="r" indent="0" marL="0">
+              <a:buNone/>
+            </a:pPr>
+            <a:r>
+              <a:rPr lang="en-US" sz="1200" b="1" dirty="0">
+                <a:solidFill>
+                  <a:srgbClr val="A89F98"/>
+                </a:solidFill>
+                <a:latin typeface="Calibri" pitchFamily="34" charset="0"/>
+                <a:ea typeface="Calibri" pitchFamily="34" charset="-122"/>
+                <a:cs typeface="Calibri" pitchFamily="34" charset="-120"/>
+              </a:rPr>
+              <a:t>€ 744</a:t>
+            </a:r>
+            <a:endParaRPr lang="en-US" sz="1200" dirty="0"/>
+          </a:p>
+        </p:txBody>
+      </p:sp>
+      <p:sp>
+        <p:nvSpPr>
+          <p:cNvPr id="24" name="Text 22"/>
+          <p:cNvSpPr/>
+          <p:nvPr/>
+        </p:nvSpPr>
+        <p:spPr>
+          <a:xfrm>
+            <a:off x="457200" y="4480560"/>
+            <a:ext cx="2468880" cy="228600"/>
           </a:xfrm>
           <a:prstGeom prst="rect">
             <a:avLst/>
@@ -15730,87 +16385,12 @@
               <a:buNone/>
             </a:pPr>
             <a:r>
-              <a:rPr lang="en-US" sz="3200" b="1" dirty="0">
-                <a:solidFill>
-                  <a:srgbClr val="14B8A6"/>
-                </a:solidFill>
-                <a:latin typeface="Georgia" pitchFamily="34" charset="0"/>
-                <a:ea typeface="Georgia" pitchFamily="34" charset="-122"/>
-                <a:cs typeface="Georgia" pitchFamily="34" charset="-120"/>
-              </a:rPr>
-              <a:t>M11</a:t>
-            </a:r>
-            <a:endParaRPr lang="en-US" sz="3200" dirty="0"/>
-          </a:p>
-        </p:txBody>
-      </p:sp>
-      <p:sp>
-        <p:nvSpPr>
-          <p:cNvPr id="6" name="Text 4"/>
-          <p:cNvSpPr/>
-          <p:nvPr/>
-        </p:nvSpPr>
-        <p:spPr>
-          <a:xfrm>
-            <a:off x="457200" y="2651760"/>
-            <a:ext cx="2697480" cy="274320"/>
-          </a:xfrm>
-          <a:prstGeom prst="rect">
-            <a:avLst/>
-          </a:prstGeom>
-          <a:noFill/>
-          <a:ln/>
-        </p:spPr>
-        <p:txBody>
-          <a:bodyPr wrap="square" lIns="0" tIns="0" rIns="0" bIns="0" rtlCol="0" anchor="ctr"/>
-          <a:lstStyle/>
-          <a:p>
-            <a:pPr algn="ctr" indent="0" marL="0">
-              <a:buNone/>
-            </a:pPr>
-            <a:r>
-              <a:rPr lang="en-US" sz="1000" b="1" dirty="0">
-                <a:solidFill>
-                  <a:srgbClr val="FFFFFF"/>
-                </a:solidFill>
-              </a:rPr>
-              <a:t>Break-even operativo</a:t>
-            </a:r>
-            <a:endParaRPr lang="en-US" sz="1000" dirty="0"/>
-          </a:p>
-        </p:txBody>
-      </p:sp>
-      <p:sp>
-        <p:nvSpPr>
-          <p:cNvPr id="7" name="Text 5"/>
-          <p:cNvSpPr/>
-          <p:nvPr/>
-        </p:nvSpPr>
-        <p:spPr>
-          <a:xfrm>
-            <a:off x="457200" y="2944368"/>
-            <a:ext cx="2697480" cy="228600"/>
-          </a:xfrm>
-          <a:prstGeom prst="rect">
-            <a:avLst/>
-          </a:prstGeom>
-          <a:noFill/>
-          <a:ln/>
-        </p:spPr>
-        <p:txBody>
-          <a:bodyPr wrap="square" lIns="0" tIns="0" rIns="0" bIns="0" rtlCol="0" anchor="ctr"/>
-          <a:lstStyle/>
-          <a:p>
-            <a:pPr algn="ctr" indent="0" marL="0">
-              <a:buNone/>
-            </a:pPr>
-            <a:r>
               <a:rPr lang="en-US" sz="800" dirty="0">
                 <a:solidFill>
-                  <a:srgbClr val="8CB3CC"/>
-                </a:solidFill>
-              </a:rPr>
-              <a:t>@ 61 dealer attivi</a:t>
+                  <a:srgbClr val="7A7570"/>
+                </a:solidFill>
+              </a:rPr>
+              <a:t>seed ricevuto</a:t>
             </a:r>
             <a:endParaRPr lang="en-US" sz="800" dirty="0"/>
           </a:p>
@@ -15818,14 +16398,14 @@
       </p:sp>
       <p:sp>
         <p:nvSpPr>
-          <p:cNvPr id="8" name="Shape 6"/>
-          <p:cNvSpPr/>
-          <p:nvPr/>
-        </p:nvSpPr>
-        <p:spPr>
-          <a:xfrm>
-            <a:off x="3383280" y="1828800"/>
-            <a:ext cx="2697480" cy="1737360"/>
+          <p:cNvPr id="25" name="Shape 23"/>
+          <p:cNvSpPr/>
+          <p:nvPr/>
+        </p:nvSpPr>
+        <p:spPr>
+          <a:xfrm>
+            <a:off x="3200400" y="4114800"/>
+            <a:ext cx="2468880" cy="777240"/>
           </a:xfrm>
           <a:prstGeom prst="rect">
             <a:avLst/>
@@ -15843,14 +16423,89 @@
       </p:sp>
       <p:sp>
         <p:nvSpPr>
-          <p:cNvPr id="9" name="Text 7"/>
-          <p:cNvSpPr/>
-          <p:nvPr/>
-        </p:nvSpPr>
-        <p:spPr>
-          <a:xfrm>
-            <a:off x="3383280" y="1920240"/>
-            <a:ext cx="2697480" cy="731520"/>
+          <p:cNvPr id="26" name="Text 24"/>
+          <p:cNvSpPr/>
+          <p:nvPr/>
+        </p:nvSpPr>
+        <p:spPr>
+          <a:xfrm>
+            <a:off x="3200400" y="4160520"/>
+            <a:ext cx="914400" cy="320040"/>
+          </a:xfrm>
+          <a:prstGeom prst="rect">
+            <a:avLst/>
+          </a:prstGeom>
+          <a:noFill/>
+          <a:ln/>
+        </p:spPr>
+        <p:txBody>
+          <a:bodyPr wrap="square" lIns="0" tIns="0" rIns="0" bIns="0" rtlCol="0" anchor="ctr"/>
+          <a:lstStyle/>
+          <a:p>
+            <a:pPr indent="0" marL="0">
+              <a:buNone/>
+            </a:pPr>
+            <a:r>
+              <a:rPr lang="en-US" sz="1000" b="1" dirty="0">
+                <a:solidFill>
+                  <a:srgbClr val="A89F98"/>
+                </a:solidFill>
+              </a:rPr>
+              <a:t>M6</a:t>
+            </a:r>
+            <a:endParaRPr lang="en-US" sz="1000" dirty="0"/>
+          </a:p>
+        </p:txBody>
+      </p:sp>
+      <p:sp>
+        <p:nvSpPr>
+          <p:cNvPr id="27" name="Text 25"/>
+          <p:cNvSpPr/>
+          <p:nvPr/>
+        </p:nvSpPr>
+        <p:spPr>
+          <a:xfrm>
+            <a:off x="4023360" y="4160520"/>
+            <a:ext cx="1554480" cy="320040"/>
+          </a:xfrm>
+          <a:prstGeom prst="rect">
+            <a:avLst/>
+          </a:prstGeom>
+          <a:noFill/>
+          <a:ln/>
+        </p:spPr>
+        <p:txBody>
+          <a:bodyPr wrap="square" lIns="0" tIns="0" rIns="0" bIns="0" rtlCol="0" anchor="ctr"/>
+          <a:lstStyle/>
+          <a:p>
+            <a:pPr algn="r" indent="0" marL="0">
+              <a:buNone/>
+            </a:pPr>
+            <a:r>
+              <a:rPr lang="en-US" sz="1200" b="1" dirty="0">
+                <a:solidFill>
+                  <a:srgbClr val="A89F98"/>
+                </a:solidFill>
+                <a:latin typeface="Calibri" pitchFamily="34" charset="0"/>
+                <a:ea typeface="Calibri" pitchFamily="34" charset="-122"/>
+                <a:cs typeface="Calibri" pitchFamily="34" charset="-120"/>
+              </a:rPr>
+              <a:t>€ 3.021</a:t>
+            </a:r>
+            <a:endParaRPr lang="en-US" sz="1200" dirty="0"/>
+          </a:p>
+        </p:txBody>
+      </p:sp>
+      <p:sp>
+        <p:nvSpPr>
+          <p:cNvPr id="28" name="Text 26"/>
+          <p:cNvSpPr/>
+          <p:nvPr/>
+        </p:nvSpPr>
+        <p:spPr>
+          <a:xfrm>
+            <a:off x="3200400" y="4480560"/>
+            <a:ext cx="2468880" cy="228600"/>
           </a:xfrm>
           <a:prstGeom prst="rect">
             <a:avLst/>
@@ -15866,30 +16521,127 @@
               <a:buNone/>
             </a:pPr>
             <a:r>
-              <a:rPr lang="en-US" sz="3200" b="1" dirty="0">
-                <a:solidFill>
-                  <a:srgbClr val="10B981"/>
-                </a:solidFill>
-                <a:latin typeface="Georgia" pitchFamily="34" charset="0"/>
-                <a:ea typeface="Georgia" pitchFamily="34" charset="-122"/>
-                <a:cs typeface="Georgia" pitchFamily="34" charset="-120"/>
-              </a:rPr>
-              <a:t>73%</a:t>
-            </a:r>
-            <a:endParaRPr lang="en-US" sz="3200" dirty="0"/>
-          </a:p>
-        </p:txBody>
-      </p:sp>
-      <p:sp>
-        <p:nvSpPr>
-          <p:cNvPr id="10" name="Text 8"/>
-          <p:cNvSpPr/>
-          <p:nvPr/>
-        </p:nvSpPr>
-        <p:spPr>
-          <a:xfrm>
-            <a:off x="3383280" y="2651760"/>
-            <a:ext cx="2697480" cy="274320"/>
+              <a:rPr lang="en-US" sz="800" dirty="0">
+                <a:solidFill>
+                  <a:srgbClr val="7A7570"/>
+                </a:solidFill>
+              </a:rPr>
+              <a:t>scala outreach</a:t>
+            </a:r>
+            <a:endParaRPr lang="en-US" sz="800" dirty="0"/>
+          </a:p>
+        </p:txBody>
+      </p:sp>
+      <p:sp>
+        <p:nvSpPr>
+          <p:cNvPr id="29" name="Shape 27"/>
+          <p:cNvSpPr/>
+          <p:nvPr/>
+        </p:nvSpPr>
+        <p:spPr>
+          <a:xfrm>
+            <a:off x="5943600" y="4114800"/>
+            <a:ext cx="2468880" cy="777240"/>
+          </a:xfrm>
+          <a:prstGeom prst="rect">
+            <a:avLst/>
+          </a:prstGeom>
+          <a:solidFill>
+            <a:srgbClr val="0A2A20"/>
+          </a:solidFill>
+          <a:ln w="12700">
+            <a:solidFill>
+              <a:srgbClr val="34D399"/>
+            </a:solidFill>
+            <a:prstDash val="solid"/>
+          </a:ln>
+        </p:spPr>
+      </p:sp>
+      <p:sp>
+        <p:nvSpPr>
+          <p:cNvPr id="30" name="Text 28"/>
+          <p:cNvSpPr/>
+          <p:nvPr/>
+        </p:nvSpPr>
+        <p:spPr>
+          <a:xfrm>
+            <a:off x="5943600" y="4160520"/>
+            <a:ext cx="914400" cy="320040"/>
+          </a:xfrm>
+          <a:prstGeom prst="rect">
+            <a:avLst/>
+          </a:prstGeom>
+          <a:noFill/>
+          <a:ln/>
+        </p:spPr>
+        <p:txBody>
+          <a:bodyPr wrap="square" lIns="0" tIns="0" rIns="0" bIns="0" rtlCol="0" anchor="ctr"/>
+          <a:lstStyle/>
+          <a:p>
+            <a:pPr indent="0" marL="0">
+              <a:buNone/>
+            </a:pPr>
+            <a:r>
+              <a:rPr lang="en-US" sz="1000" b="1" dirty="0">
+                <a:solidFill>
+                  <a:srgbClr val="A89F98"/>
+                </a:solidFill>
+              </a:rPr>
+              <a:t>M11</a:t>
+            </a:r>
+            <a:endParaRPr lang="en-US" sz="1000" dirty="0"/>
+          </a:p>
+        </p:txBody>
+      </p:sp>
+      <p:sp>
+        <p:nvSpPr>
+          <p:cNvPr id="31" name="Text 29"/>
+          <p:cNvSpPr/>
+          <p:nvPr/>
+        </p:nvSpPr>
+        <p:spPr>
+          <a:xfrm>
+            <a:off x="6766560" y="4160520"/>
+            <a:ext cx="1554480" cy="320040"/>
+          </a:xfrm>
+          <a:prstGeom prst="rect">
+            <a:avLst/>
+          </a:prstGeom>
+          <a:noFill/>
+          <a:ln/>
+        </p:spPr>
+        <p:txBody>
+          <a:bodyPr wrap="square" lIns="0" tIns="0" rIns="0" bIns="0" rtlCol="0" anchor="ctr"/>
+          <a:lstStyle/>
+          <a:p>
+            <a:pPr algn="r" indent="0" marL="0">
+              <a:buNone/>
+            </a:pPr>
+            <a:r>
+              <a:rPr lang="en-US" sz="1200" b="1" dirty="0">
+                <a:solidFill>
+                  <a:srgbClr val="34D399"/>
+                </a:solidFill>
+                <a:latin typeface="Calibri" pitchFamily="34" charset="0"/>
+                <a:ea typeface="Calibri" pitchFamily="34" charset="-122"/>
+                <a:cs typeface="Calibri" pitchFamily="34" charset="-120"/>
+              </a:rPr>
+              <a:t>€ 13.000</a:t>
+            </a:r>
+            <a:endParaRPr lang="en-US" sz="1200" dirty="0"/>
+          </a:p>
+        </p:txBody>
+      </p:sp>
+      <p:sp>
+        <p:nvSpPr>
+          <p:cNvPr id="32" name="Text 30"/>
+          <p:cNvSpPr/>
+          <p:nvPr/>
+        </p:nvSpPr>
+        <p:spPr>
+          <a:xfrm>
+            <a:off x="5943600" y="4480560"/>
+            <a:ext cx="2468880" cy="228600"/>
           </a:xfrm>
           <a:prstGeom prst="rect">
             <a:avLst/>
@@ -15905,48 +16657,12 @@
               <a:buNone/>
             </a:pPr>
             <a:r>
-              <a:rPr lang="en-US" sz="1000" b="1" dirty="0">
-                <a:solidFill>
-                  <a:srgbClr val="FFFFFF"/>
-                </a:solidFill>
-              </a:rPr>
-              <a:t>Gross Margin</a:t>
-            </a:r>
-            <a:endParaRPr lang="en-US" sz="1000" dirty="0"/>
-          </a:p>
-        </p:txBody>
-      </p:sp>
-      <p:sp>
-        <p:nvSpPr>
-          <p:cNvPr id="11" name="Text 9"/>
-          <p:cNvSpPr/>
-          <p:nvPr/>
-        </p:nvSpPr>
-        <p:spPr>
-          <a:xfrm>
-            <a:off x="3383280" y="2944368"/>
-            <a:ext cx="2697480" cy="228600"/>
-          </a:xfrm>
-          <a:prstGeom prst="rect">
-            <a:avLst/>
-          </a:prstGeom>
-          <a:noFill/>
-          <a:ln/>
-        </p:spPr>
-        <p:txBody>
-          <a:bodyPr wrap="square" lIns="0" tIns="0" rIns="0" bIns="0" rtlCol="0" anchor="ctr"/>
-          <a:lstStyle/>
-          <a:p>
-            <a:pPr algn="ctr" indent="0" marL="0">
-              <a:buNone/>
-            </a:pPr>
-            <a:r>
               <a:rPr lang="en-US" sz="800" dirty="0">
                 <a:solidFill>
-                  <a:srgbClr val="8CB3CC"/>
-                </a:solidFill>
-              </a:rPr>
-              <a:t>Benchmark SaaS: &gt;70%</a:t>
+                  <a:srgbClr val="7A7570"/>
+                </a:solidFill>
+              </a:rPr>
+              <a:t>break-even ✓</a:t>
             </a:r>
             <a:endParaRPr lang="en-US" sz="800" dirty="0"/>
           </a:p>
@@ -15954,14 +16670,14 @@
       </p:sp>
       <p:sp>
         <p:nvSpPr>
-          <p:cNvPr id="12" name="Shape 10"/>
-          <p:cNvSpPr/>
-          <p:nvPr/>
-        </p:nvSpPr>
-        <p:spPr>
-          <a:xfrm>
-            <a:off x="6309360" y="1828800"/>
-            <a:ext cx="2697480" cy="1737360"/>
+          <p:cNvPr id="33" name="Shape 31"/>
+          <p:cNvSpPr/>
+          <p:nvPr/>
+        </p:nvSpPr>
+        <p:spPr>
+          <a:xfrm>
+            <a:off x="8686800" y="4114800"/>
+            <a:ext cx="2468880" cy="777240"/>
           </a:xfrm>
           <a:prstGeom prst="rect">
             <a:avLst/>
@@ -15979,14 +16695,89 @@
       </p:sp>
       <p:sp>
         <p:nvSpPr>
-          <p:cNvPr id="13" name="Text 11"/>
-          <p:cNvSpPr/>
-          <p:nvPr/>
-        </p:nvSpPr>
-        <p:spPr>
-          <a:xfrm>
-            <a:off x="6309360" y="1920240"/>
-            <a:ext cx="2697480" cy="731520"/>
+          <p:cNvPr id="34" name="Text 32"/>
+          <p:cNvSpPr/>
+          <p:nvPr/>
+        </p:nvSpPr>
+        <p:spPr>
+          <a:xfrm>
+            <a:off x="8686800" y="4160520"/>
+            <a:ext cx="914400" cy="320040"/>
+          </a:xfrm>
+          <a:prstGeom prst="rect">
+            <a:avLst/>
+          </a:prstGeom>
+          <a:noFill/>
+          <a:ln/>
+        </p:spPr>
+        <p:txBody>
+          <a:bodyPr wrap="square" lIns="0" tIns="0" rIns="0" bIns="0" rtlCol="0" anchor="ctr"/>
+          <a:lstStyle/>
+          <a:p>
+            <a:pPr indent="0" marL="0">
+              <a:buNone/>
+            </a:pPr>
+            <a:r>
+              <a:rPr lang="en-US" sz="1000" b="1" dirty="0">
+                <a:solidFill>
+                  <a:srgbClr val="A89F98"/>
+                </a:solidFill>
+              </a:rPr>
+              <a:t>M18</a:t>
+            </a:r>
+            <a:endParaRPr lang="en-US" sz="1000" dirty="0"/>
+          </a:p>
+        </p:txBody>
+      </p:sp>
+      <p:sp>
+        <p:nvSpPr>
+          <p:cNvPr id="35" name="Text 33"/>
+          <p:cNvSpPr/>
+          <p:nvPr/>
+        </p:nvSpPr>
+        <p:spPr>
+          <a:xfrm>
+            <a:off x="9509760" y="4160520"/>
+            <a:ext cx="1554480" cy="320040"/>
+          </a:xfrm>
+          <a:prstGeom prst="rect">
+            <a:avLst/>
+          </a:prstGeom>
+          <a:noFill/>
+          <a:ln/>
+        </p:spPr>
+        <p:txBody>
+          <a:bodyPr wrap="square" lIns="0" tIns="0" rIns="0" bIns="0" rtlCol="0" anchor="ctr"/>
+          <a:lstStyle/>
+          <a:p>
+            <a:pPr algn="r" indent="0" marL="0">
+              <a:buNone/>
+            </a:pPr>
+            <a:r>
+              <a:rPr lang="en-US" sz="1200" b="1" dirty="0">
+                <a:solidFill>
+                  <a:srgbClr val="2DD4BF"/>
+                </a:solidFill>
+                <a:latin typeface="Calibri" pitchFamily="34" charset="0"/>
+                <a:ea typeface="Calibri" pitchFamily="34" charset="-122"/>
+                <a:cs typeface="Calibri" pitchFamily="34" charset="-120"/>
+              </a:rPr>
+              <a:t>€ 25.000+</a:t>
+            </a:r>
+            <a:endParaRPr lang="en-US" sz="1200" dirty="0"/>
+          </a:p>
+        </p:txBody>
+      </p:sp>
+      <p:sp>
+        <p:nvSpPr>
+          <p:cNvPr id="36" name="Text 34"/>
+          <p:cNvSpPr/>
+          <p:nvPr/>
+        </p:nvSpPr>
+        <p:spPr>
+          <a:xfrm>
+            <a:off x="8686800" y="4480560"/>
+            <a:ext cx="2468880" cy="228600"/>
           </a:xfrm>
           <a:prstGeom prst="rect">
             <a:avLst/>
@@ -16002,51 +16793,48 @@
               <a:buNone/>
             </a:pPr>
             <a:r>
-              <a:rPr lang="en-US" sz="3200" b="1" dirty="0">
-                <a:solidFill>
-                  <a:srgbClr val="F59E0B"/>
-                </a:solidFill>
-                <a:latin typeface="Georgia" pitchFamily="34" charset="0"/>
-                <a:ea typeface="Georgia" pitchFamily="34" charset="-122"/>
-                <a:cs typeface="Georgia" pitchFamily="34" charset="-120"/>
-              </a:rPr>
-              <a:t>16-18x</a:t>
-            </a:r>
-            <a:endParaRPr lang="en-US" sz="3200" dirty="0"/>
-          </a:p>
-        </p:txBody>
-      </p:sp>
-      <p:sp>
-        <p:nvSpPr>
-          <p:cNvPr id="14" name="Text 12"/>
-          <p:cNvSpPr/>
-          <p:nvPr/>
-        </p:nvSpPr>
-        <p:spPr>
-          <a:xfrm>
-            <a:off x="6309360" y="2651760"/>
-            <a:ext cx="2697480" cy="274320"/>
-          </a:xfrm>
-          <a:prstGeom prst="rect">
-            <a:avLst/>
-          </a:prstGeom>
-          <a:noFill/>
-          <a:ln/>
-        </p:spPr>
-        <p:txBody>
-          <a:bodyPr wrap="square" lIns="0" tIns="0" rIns="0" bIns="0" rtlCol="0" anchor="ctr"/>
-          <a:lstStyle/>
-          <a:p>
-            <a:pPr algn="ctr" indent="0" marL="0">
-              <a:buNone/>
-            </a:pPr>
-            <a:r>
-              <a:rPr lang="en-US" sz="1000" b="1" dirty="0">
-                <a:solidFill>
-                  <a:srgbClr val="FFFFFF"/>
-                </a:solidFill>
-              </a:rPr>
-              <a:t>LTV:CAC Ratio</a:t>
+              <a:rPr lang="en-US" sz="800" dirty="0">
+                <a:solidFill>
+                  <a:srgbClr val="7A7570"/>
+                </a:solidFill>
+              </a:rPr>
+              <a:t>regime</a:t>
+            </a:r>
+            <a:endParaRPr lang="en-US" sz="800" dirty="0"/>
+          </a:p>
+        </p:txBody>
+      </p:sp>
+      <p:sp>
+        <p:nvSpPr>
+          <p:cNvPr id="37" name="Text 35"/>
+          <p:cNvSpPr/>
+          <p:nvPr/>
+        </p:nvSpPr>
+        <p:spPr>
+          <a:xfrm>
+            <a:off x="6217920" y="3794760"/>
+            <a:ext cx="5303520" cy="256032"/>
+          </a:xfrm>
+          <a:prstGeom prst="rect">
+            <a:avLst/>
+          </a:prstGeom>
+          <a:noFill/>
+          <a:ln/>
+        </p:spPr>
+        <p:txBody>
+          <a:bodyPr wrap="square" lIns="0" tIns="0" rIns="0" bIns="0" rtlCol="0" anchor="ctr"/>
+          <a:lstStyle/>
+          <a:p>
+            <a:pPr indent="0" marL="0">
+              <a:buNone/>
+            </a:pPr>
+            <a:r>
+              <a:rPr lang="en-US" sz="1000" b="1" spc="100" kern="0" dirty="0">
+                <a:solidFill>
+                  <a:srgbClr val="2DD4BF"/>
+                </a:solidFill>
+              </a:rPr>
+              <a:t>P&amp;L Anno 1 — Guerriglia</a:t>
             </a:r>
             <a:endParaRPr lang="en-US" sz="1000" dirty="0"/>
           </a:p>
@@ -16054,50 +16842,14 @@
       </p:sp>
       <p:sp>
         <p:nvSpPr>
-          <p:cNvPr id="15" name="Text 13"/>
-          <p:cNvSpPr/>
-          <p:nvPr/>
-        </p:nvSpPr>
-        <p:spPr>
-          <a:xfrm>
-            <a:off x="6309360" y="2944368"/>
-            <a:ext cx="2697480" cy="228600"/>
-          </a:xfrm>
-          <a:prstGeom prst="rect">
-            <a:avLst/>
-          </a:prstGeom>
-          <a:noFill/>
-          <a:ln/>
-        </p:spPr>
-        <p:txBody>
-          <a:bodyPr wrap="square" lIns="0" tIns="0" rIns="0" bIns="0" rtlCol="0" anchor="ctr"/>
-          <a:lstStyle/>
-          <a:p>
-            <a:pPr algn="ctr" indent="0" marL="0">
-              <a:buNone/>
-            </a:pPr>
-            <a:r>
-              <a:rPr lang="en-US" sz="800" dirty="0">
-                <a:solidFill>
-                  <a:srgbClr val="8CB3CC"/>
-                </a:solidFill>
-              </a:rPr>
-              <a:t>Benchmark VC: &gt;3x ✓</a:t>
-            </a:r>
-            <a:endParaRPr lang="en-US" sz="800" dirty="0"/>
-          </a:p>
-        </p:txBody>
-      </p:sp>
-      <p:sp>
-        <p:nvSpPr>
-          <p:cNvPr id="16" name="Shape 14"/>
-          <p:cNvSpPr/>
-          <p:nvPr/>
-        </p:nvSpPr>
-        <p:spPr>
-          <a:xfrm>
-            <a:off x="9235440" y="1828800"/>
-            <a:ext cx="2697480" cy="1737360"/>
+          <p:cNvPr id="38" name="Shape 36"/>
+          <p:cNvSpPr/>
+          <p:nvPr/>
+        </p:nvSpPr>
+        <p:spPr>
+          <a:xfrm>
+            <a:off x="6217920" y="4114800"/>
+            <a:ext cx="5394960" cy="438912"/>
           </a:xfrm>
           <a:prstGeom prst="rect">
             <a:avLst/>
@@ -16107,7 +16859,7 @@
           </a:solidFill>
           <a:ln w="12700">
             <a:solidFill>
-              <a:srgbClr val="1A3A50"/>
+              <a:srgbClr val="3A3530"/>
             </a:solidFill>
             <a:prstDash val="solid"/>
           </a:ln>
@@ -16115,74 +16867,74 @@
       </p:sp>
       <p:sp>
         <p:nvSpPr>
-          <p:cNvPr id="17" name="Text 15"/>
-          <p:cNvSpPr/>
-          <p:nvPr/>
-        </p:nvSpPr>
-        <p:spPr>
-          <a:xfrm>
-            <a:off x="9235440" y="1920240"/>
-            <a:ext cx="2697480" cy="731520"/>
-          </a:xfrm>
-          <a:prstGeom prst="rect">
-            <a:avLst/>
-          </a:prstGeom>
-          <a:noFill/>
-          <a:ln/>
-        </p:spPr>
-        <p:txBody>
-          <a:bodyPr wrap="square" lIns="0" tIns="0" rIns="0" bIns="0" rtlCol="0" anchor="ctr"/>
-          <a:lstStyle/>
-          <a:p>
-            <a:pPr algn="ctr" indent="0" marL="0">
-              <a:buNone/>
-            </a:pPr>
-            <a:r>
-              <a:rPr lang="en-US" sz="3200" b="1" dirty="0">
-                <a:solidFill>
-                  <a:srgbClr val="14B8A6"/>
-                </a:solidFill>
-                <a:latin typeface="Georgia" pitchFamily="34" charset="0"/>
-                <a:ea typeface="Georgia" pitchFamily="34" charset="-122"/>
-                <a:cs typeface="Georgia" pitchFamily="34" charset="-120"/>
-              </a:rPr>
-              <a:t>4 mesi</a:t>
-            </a:r>
-            <a:endParaRPr lang="en-US" sz="3200" dirty="0"/>
-          </a:p>
-        </p:txBody>
-      </p:sp>
-      <p:sp>
-        <p:nvSpPr>
-          <p:cNvPr id="18" name="Text 16"/>
-          <p:cNvSpPr/>
-          <p:nvPr/>
-        </p:nvSpPr>
-        <p:spPr>
-          <a:xfrm>
-            <a:off x="9235440" y="2651760"/>
-            <a:ext cx="2697480" cy="274320"/>
-          </a:xfrm>
-          <a:prstGeom prst="rect">
-            <a:avLst/>
-          </a:prstGeom>
-          <a:noFill/>
-          <a:ln/>
-        </p:spPr>
-        <p:txBody>
-          <a:bodyPr wrap="square" lIns="0" tIns="0" rIns="0" bIns="0" rtlCol="0" anchor="ctr"/>
-          <a:lstStyle/>
-          <a:p>
-            <a:pPr algn="ctr" indent="0" marL="0">
+          <p:cNvPr id="39" name="Text 37"/>
+          <p:cNvSpPr/>
+          <p:nvPr/>
+        </p:nvSpPr>
+        <p:spPr>
+          <a:xfrm>
+            <a:off x="6400800" y="4160520"/>
+            <a:ext cx="3200400" cy="320040"/>
+          </a:xfrm>
+          <a:prstGeom prst="rect">
+            <a:avLst/>
+          </a:prstGeom>
+          <a:noFill/>
+          <a:ln/>
+        </p:spPr>
+        <p:txBody>
+          <a:bodyPr wrap="square" lIns="0" tIns="0" rIns="0" bIns="0" rtlCol="0" anchor="ctr"/>
+          <a:lstStyle/>
+          <a:p>
+            <a:pPr indent="0" marL="0">
+              <a:buNone/>
+            </a:pPr>
+            <a:r>
+              <a:rPr lang="en-US" sz="1000" dirty="0">
+                <a:solidFill>
+                  <a:srgbClr val="A89F98"/>
+                </a:solidFill>
+              </a:rPr>
+              <a:t>Burn totale Anno 1</a:t>
+            </a:r>
+            <a:endParaRPr lang="en-US" sz="1000" dirty="0"/>
+          </a:p>
+        </p:txBody>
+      </p:sp>
+      <p:sp>
+        <p:nvSpPr>
+          <p:cNvPr id="40" name="Text 38"/>
+          <p:cNvSpPr/>
+          <p:nvPr/>
+        </p:nvSpPr>
+        <p:spPr>
+          <a:xfrm>
+            <a:off x="9326880" y="4160520"/>
+            <a:ext cx="2103120" cy="320040"/>
+          </a:xfrm>
+          <a:prstGeom prst="rect">
+            <a:avLst/>
+          </a:prstGeom>
+          <a:noFill/>
+          <a:ln/>
+        </p:spPr>
+        <p:txBody>
+          <a:bodyPr wrap="square" lIns="0" tIns="0" rIns="0" bIns="0" rtlCol="0" anchor="ctr"/>
+          <a:lstStyle/>
+          <a:p>
+            <a:pPr algn="r" indent="0" marL="0">
               <a:buNone/>
             </a:pPr>
             <a:r>
               <a:rPr lang="en-US" sz="1000" b="1" dirty="0">
                 <a:solidFill>
-                  <a:srgbClr val="FFFFFF"/>
-                </a:solidFill>
-              </a:rPr>
-              <a:t>CAC Payback</a:t>
+                  <a:srgbClr val="EF4444"/>
+                </a:solidFill>
+                <a:latin typeface="Calibri" pitchFamily="34" charset="0"/>
+                <a:ea typeface="Calibri" pitchFamily="34" charset="-122"/>
+                <a:cs typeface="Calibri" pitchFamily="34" charset="-120"/>
+              </a:rPr>
+              <a:t>€ 74.694</a:t>
             </a:r>
             <a:endParaRPr lang="en-US" sz="1000" dirty="0"/>
           </a:p>
@@ -16190,86 +16942,14 @@
       </p:sp>
       <p:sp>
         <p:nvSpPr>
-          <p:cNvPr id="19" name="Text 17"/>
-          <p:cNvSpPr/>
-          <p:nvPr/>
-        </p:nvSpPr>
-        <p:spPr>
-          <a:xfrm>
-            <a:off x="9235440" y="2944368"/>
-            <a:ext cx="2697480" cy="228600"/>
-          </a:xfrm>
-          <a:prstGeom prst="rect">
-            <a:avLst/>
-          </a:prstGeom>
-          <a:noFill/>
-          <a:ln/>
-        </p:spPr>
-        <p:txBody>
-          <a:bodyPr wrap="square" lIns="0" tIns="0" rIns="0" bIns="0" rtlCol="0" anchor="ctr"/>
-          <a:lstStyle/>
-          <a:p>
-            <a:pPr algn="ctr" indent="0" marL="0">
-              <a:buNone/>
-            </a:pPr>
-            <a:r>
-              <a:rPr lang="en-US" sz="800" dirty="0">
-                <a:solidFill>
-                  <a:srgbClr val="8CB3CC"/>
-                </a:solidFill>
-              </a:rPr>
-              <a:t>Benchmark: &lt;18 mesi</a:t>
-            </a:r>
-            <a:endParaRPr lang="en-US" sz="800" dirty="0"/>
-          </a:p>
-        </p:txBody>
-      </p:sp>
-      <p:sp>
-        <p:nvSpPr>
-          <p:cNvPr id="20" name="Text 18"/>
-          <p:cNvSpPr/>
-          <p:nvPr/>
-        </p:nvSpPr>
-        <p:spPr>
-          <a:xfrm>
-            <a:off x="457200" y="3794760"/>
-            <a:ext cx="5486400" cy="256032"/>
-          </a:xfrm>
-          <a:prstGeom prst="rect">
-            <a:avLst/>
-          </a:prstGeom>
-          <a:noFill/>
-          <a:ln/>
-        </p:spPr>
-        <p:txBody>
-          <a:bodyPr wrap="square" lIns="0" tIns="0" rIns="0" bIns="0" rtlCol="0" anchor="ctr"/>
-          <a:lstStyle/>
-          <a:p>
-            <a:pPr indent="0" marL="0">
-              <a:buNone/>
-            </a:pPr>
-            <a:r>
-              <a:rPr lang="en-US" sz="1000" b="1" spc="100" kern="0" dirty="0">
-                <a:solidFill>
-                  <a:srgbClr val="14B8A6"/>
-                </a:solidFill>
-              </a:rPr>
-              <a:t>Crescita MRR — Scenario Guerriglia</a:t>
-            </a:r>
-            <a:endParaRPr lang="en-US" sz="1000" dirty="0"/>
-          </a:p>
-        </p:txBody>
-      </p:sp>
-      <p:sp>
-        <p:nvSpPr>
-          <p:cNvPr id="21" name="Shape 19"/>
-          <p:cNvSpPr/>
-          <p:nvPr/>
-        </p:nvSpPr>
-        <p:spPr>
-          <a:xfrm>
-            <a:off x="457200" y="4114800"/>
-            <a:ext cx="2468880" cy="777240"/>
+          <p:cNvPr id="41" name="Shape 39"/>
+          <p:cNvSpPr/>
+          <p:nvPr/>
+        </p:nvSpPr>
+        <p:spPr>
+          <a:xfrm>
+            <a:off x="6217920" y="4617720"/>
+            <a:ext cx="5394960" cy="438912"/>
           </a:xfrm>
           <a:prstGeom prst="rect">
             <a:avLst/>
@@ -16279,7 +16959,7 @@
           </a:solidFill>
           <a:ln w="12700">
             <a:solidFill>
-              <a:srgbClr val="1A3A50"/>
+              <a:srgbClr val="3A3530"/>
             </a:solidFill>
             <a:prstDash val="solid"/>
           </a:ln>
@@ -16287,125 +16967,89 @@
       </p:sp>
       <p:sp>
         <p:nvSpPr>
-          <p:cNvPr id="22" name="Text 20"/>
-          <p:cNvSpPr/>
-          <p:nvPr/>
-        </p:nvSpPr>
-        <p:spPr>
-          <a:xfrm>
-            <a:off x="457200" y="4160520"/>
-            <a:ext cx="914400" cy="320040"/>
-          </a:xfrm>
-          <a:prstGeom prst="rect">
-            <a:avLst/>
-          </a:prstGeom>
-          <a:noFill/>
-          <a:ln/>
-        </p:spPr>
-        <p:txBody>
-          <a:bodyPr wrap="square" lIns="0" tIns="0" rIns="0" bIns="0" rtlCol="0" anchor="ctr"/>
-          <a:lstStyle/>
-          <a:p>
-            <a:pPr indent="0" marL="0">
+          <p:cNvPr id="42" name="Text 40"/>
+          <p:cNvSpPr/>
+          <p:nvPr/>
+        </p:nvSpPr>
+        <p:spPr>
+          <a:xfrm>
+            <a:off x="6400800" y="4663440"/>
+            <a:ext cx="3200400" cy="320040"/>
+          </a:xfrm>
+          <a:prstGeom prst="rect">
+            <a:avLst/>
+          </a:prstGeom>
+          <a:noFill/>
+          <a:ln/>
+        </p:spPr>
+        <p:txBody>
+          <a:bodyPr wrap="square" lIns="0" tIns="0" rIns="0" bIns="0" rtlCol="0" anchor="ctr"/>
+          <a:lstStyle/>
+          <a:p>
+            <a:pPr indent="0" marL="0">
+              <a:buNone/>
+            </a:pPr>
+            <a:r>
+              <a:rPr lang="en-US" sz="1000" dirty="0">
+                <a:solidFill>
+                  <a:srgbClr val="A89F98"/>
+                </a:solidFill>
+              </a:rPr>
+              <a:t>OpEx mensile (3 FTE)</a:t>
+            </a:r>
+            <a:endParaRPr lang="en-US" sz="1000" dirty="0"/>
+          </a:p>
+        </p:txBody>
+      </p:sp>
+      <p:sp>
+        <p:nvSpPr>
+          <p:cNvPr id="43" name="Text 41"/>
+          <p:cNvSpPr/>
+          <p:nvPr/>
+        </p:nvSpPr>
+        <p:spPr>
+          <a:xfrm>
+            <a:off x="9326880" y="4663440"/>
+            <a:ext cx="2103120" cy="320040"/>
+          </a:xfrm>
+          <a:prstGeom prst="rect">
+            <a:avLst/>
+          </a:prstGeom>
+          <a:noFill/>
+          <a:ln/>
+        </p:spPr>
+        <p:txBody>
+          <a:bodyPr wrap="square" lIns="0" tIns="0" rIns="0" bIns="0" rtlCol="0" anchor="ctr"/>
+          <a:lstStyle/>
+          <a:p>
+            <a:pPr algn="r" indent="0" marL="0">
               <a:buNone/>
             </a:pPr>
             <a:r>
               <a:rPr lang="en-US" sz="1000" b="1" dirty="0">
                 <a:solidFill>
-                  <a:srgbClr val="8CB3CC"/>
-                </a:solidFill>
-              </a:rPr>
-              <a:t>M3</a:t>
-            </a:r>
-            <a:endParaRPr lang="en-US" sz="1000" dirty="0"/>
-          </a:p>
-        </p:txBody>
-      </p:sp>
-      <p:sp>
-        <p:nvSpPr>
-          <p:cNvPr id="23" name="Text 21"/>
-          <p:cNvSpPr/>
-          <p:nvPr/>
-        </p:nvSpPr>
-        <p:spPr>
-          <a:xfrm>
-            <a:off x="1280160" y="4160520"/>
-            <a:ext cx="1554480" cy="320040"/>
-          </a:xfrm>
-          <a:prstGeom prst="rect">
-            <a:avLst/>
-          </a:prstGeom>
-          <a:noFill/>
-          <a:ln/>
-        </p:spPr>
-        <p:txBody>
-          <a:bodyPr wrap="square" lIns="0" tIns="0" rIns="0" bIns="0" rtlCol="0" anchor="ctr"/>
-          <a:lstStyle/>
-          <a:p>
-            <a:pPr algn="r" indent="0" marL="0">
-              <a:buNone/>
-            </a:pPr>
-            <a:r>
-              <a:rPr lang="en-US" sz="1200" b="1" dirty="0">
-                <a:solidFill>
-                  <a:srgbClr val="8CB3CC"/>
+                  <a:srgbClr val="A89F98"/>
                 </a:solidFill>
                 <a:latin typeface="Calibri" pitchFamily="34" charset="0"/>
                 <a:ea typeface="Calibri" pitchFamily="34" charset="-122"/>
                 <a:cs typeface="Calibri" pitchFamily="34" charset="-120"/>
               </a:rPr>
-              <a:t>€ 744</a:t>
-            </a:r>
-            <a:endParaRPr lang="en-US" sz="1200" dirty="0"/>
-          </a:p>
-        </p:txBody>
-      </p:sp>
-      <p:sp>
-        <p:nvSpPr>
-          <p:cNvPr id="24" name="Text 22"/>
-          <p:cNvSpPr/>
-          <p:nvPr/>
-        </p:nvSpPr>
-        <p:spPr>
-          <a:xfrm>
-            <a:off x="457200" y="4480560"/>
-            <a:ext cx="2468880" cy="228600"/>
-          </a:xfrm>
-          <a:prstGeom prst="rect">
-            <a:avLst/>
-          </a:prstGeom>
-          <a:noFill/>
-          <a:ln/>
-        </p:spPr>
-        <p:txBody>
-          <a:bodyPr wrap="square" lIns="0" tIns="0" rIns="0" bIns="0" rtlCol="0" anchor="ctr"/>
-          <a:lstStyle/>
-          <a:p>
-            <a:pPr algn="ctr" indent="0" marL="0">
-              <a:buNone/>
-            </a:pPr>
-            <a:r>
-              <a:rPr lang="en-US" sz="800" dirty="0">
-                <a:solidFill>
-                  <a:srgbClr val="5A8A9A"/>
-                </a:solidFill>
-              </a:rPr>
-              <a:t>seed ricevuto</a:t>
-            </a:r>
-            <a:endParaRPr lang="en-US" sz="800" dirty="0"/>
-          </a:p>
-        </p:txBody>
-      </p:sp>
-      <p:sp>
-        <p:nvSpPr>
-          <p:cNvPr id="25" name="Shape 23"/>
-          <p:cNvSpPr/>
-          <p:nvPr/>
-        </p:nvSpPr>
-        <p:spPr>
-          <a:xfrm>
-            <a:off x="3200400" y="4114800"/>
-            <a:ext cx="2468880" cy="777240"/>
+              <a:t>€9.400–€13.800</a:t>
+            </a:r>
+            <a:endParaRPr lang="en-US" sz="1000" dirty="0"/>
+          </a:p>
+        </p:txBody>
+      </p:sp>
+      <p:sp>
+        <p:nvSpPr>
+          <p:cNvPr id="44" name="Shape 42"/>
+          <p:cNvSpPr/>
+          <p:nvPr/>
+        </p:nvSpPr>
+        <p:spPr>
+          <a:xfrm>
+            <a:off x="6217920" y="5120640"/>
+            <a:ext cx="5394960" cy="438912"/>
           </a:xfrm>
           <a:prstGeom prst="rect">
             <a:avLst/>
@@ -16415,7 +17059,7 @@
           </a:solidFill>
           <a:ln w="12700">
             <a:solidFill>
-              <a:srgbClr val="1A3A50"/>
+              <a:srgbClr val="3A3530"/>
             </a:solidFill>
             <a:prstDash val="solid"/>
           </a:ln>
@@ -16423,125 +17067,89 @@
       </p:sp>
       <p:sp>
         <p:nvSpPr>
-          <p:cNvPr id="26" name="Text 24"/>
-          <p:cNvSpPr/>
-          <p:nvPr/>
-        </p:nvSpPr>
-        <p:spPr>
-          <a:xfrm>
-            <a:off x="3200400" y="4160520"/>
-            <a:ext cx="914400" cy="320040"/>
-          </a:xfrm>
-          <a:prstGeom prst="rect">
-            <a:avLst/>
-          </a:prstGeom>
-          <a:noFill/>
-          <a:ln/>
-        </p:spPr>
-        <p:txBody>
-          <a:bodyPr wrap="square" lIns="0" tIns="0" rIns="0" bIns="0" rtlCol="0" anchor="ctr"/>
-          <a:lstStyle/>
-          <a:p>
-            <a:pPr indent="0" marL="0">
+          <p:cNvPr id="45" name="Text 43"/>
+          <p:cNvSpPr/>
+          <p:nvPr/>
+        </p:nvSpPr>
+        <p:spPr>
+          <a:xfrm>
+            <a:off x="6400800" y="5166360"/>
+            <a:ext cx="3200400" cy="320040"/>
+          </a:xfrm>
+          <a:prstGeom prst="rect">
+            <a:avLst/>
+          </a:prstGeom>
+          <a:noFill/>
+          <a:ln/>
+        </p:spPr>
+        <p:txBody>
+          <a:bodyPr wrap="square" lIns="0" tIns="0" rIns="0" bIns="0" rtlCol="0" anchor="ctr"/>
+          <a:lstStyle/>
+          <a:p>
+            <a:pPr indent="0" marL="0">
+              <a:buNone/>
+            </a:pPr>
+            <a:r>
+              <a:rPr lang="en-US" sz="1000" dirty="0">
+                <a:solidFill>
+                  <a:srgbClr val="A89F98"/>
+                </a:solidFill>
+              </a:rPr>
+              <a:t>CAC Guerriglia M1-M4</a:t>
+            </a:r>
+            <a:endParaRPr lang="en-US" sz="1000" dirty="0"/>
+          </a:p>
+        </p:txBody>
+      </p:sp>
+      <p:sp>
+        <p:nvSpPr>
+          <p:cNvPr id="46" name="Text 44"/>
+          <p:cNvSpPr/>
+          <p:nvPr/>
+        </p:nvSpPr>
+        <p:spPr>
+          <a:xfrm>
+            <a:off x="9326880" y="5166360"/>
+            <a:ext cx="2103120" cy="320040"/>
+          </a:xfrm>
+          <a:prstGeom prst="rect">
+            <a:avLst/>
+          </a:prstGeom>
+          <a:noFill/>
+          <a:ln/>
+        </p:spPr>
+        <p:txBody>
+          <a:bodyPr wrap="square" lIns="0" tIns="0" rIns="0" bIns="0" rtlCol="0" anchor="ctr"/>
+          <a:lstStyle/>
+          <a:p>
+            <a:pPr algn="r" indent="0" marL="0">
               <a:buNone/>
             </a:pPr>
             <a:r>
               <a:rPr lang="en-US" sz="1000" b="1" dirty="0">
                 <a:solidFill>
-                  <a:srgbClr val="8CB3CC"/>
-                </a:solidFill>
-              </a:rPr>
-              <a:t>M6</a:t>
-            </a:r>
-            <a:endParaRPr lang="en-US" sz="1000" dirty="0"/>
-          </a:p>
-        </p:txBody>
-      </p:sp>
-      <p:sp>
-        <p:nvSpPr>
-          <p:cNvPr id="27" name="Text 25"/>
-          <p:cNvSpPr/>
-          <p:nvPr/>
-        </p:nvSpPr>
-        <p:spPr>
-          <a:xfrm>
-            <a:off x="4023360" y="4160520"/>
-            <a:ext cx="1554480" cy="320040"/>
-          </a:xfrm>
-          <a:prstGeom prst="rect">
-            <a:avLst/>
-          </a:prstGeom>
-          <a:noFill/>
-          <a:ln/>
-        </p:spPr>
-        <p:txBody>
-          <a:bodyPr wrap="square" lIns="0" tIns="0" rIns="0" bIns="0" rtlCol="0" anchor="ctr"/>
-          <a:lstStyle/>
-          <a:p>
-            <a:pPr algn="r" indent="0" marL="0">
-              <a:buNone/>
-            </a:pPr>
-            <a:r>
-              <a:rPr lang="en-US" sz="1200" b="1" dirty="0">
-                <a:solidFill>
-                  <a:srgbClr val="8CB3CC"/>
+                  <a:srgbClr val="2DD4BF"/>
                 </a:solidFill>
                 <a:latin typeface="Calibri" pitchFamily="34" charset="0"/>
                 <a:ea typeface="Calibri" pitchFamily="34" charset="-122"/>
                 <a:cs typeface="Calibri" pitchFamily="34" charset="-120"/>
               </a:rPr>
-              <a:t>€ 3.021</a:t>
-            </a:r>
-            <a:endParaRPr lang="en-US" sz="1200" dirty="0"/>
-          </a:p>
-        </p:txBody>
-      </p:sp>
-      <p:sp>
-        <p:nvSpPr>
-          <p:cNvPr id="28" name="Text 26"/>
-          <p:cNvSpPr/>
-          <p:nvPr/>
-        </p:nvSpPr>
-        <p:spPr>
-          <a:xfrm>
-            <a:off x="3200400" y="4480560"/>
-            <a:ext cx="2468880" cy="228600"/>
-          </a:xfrm>
-          <a:prstGeom prst="rect">
-            <a:avLst/>
-          </a:prstGeom>
-          <a:noFill/>
-          <a:ln/>
-        </p:spPr>
-        <p:txBody>
-          <a:bodyPr wrap="square" lIns="0" tIns="0" rIns="0" bIns="0" rtlCol="0" anchor="ctr"/>
-          <a:lstStyle/>
-          <a:p>
-            <a:pPr algn="ctr" indent="0" marL="0">
-              <a:buNone/>
-            </a:pPr>
-            <a:r>
-              <a:rPr lang="en-US" sz="800" dirty="0">
-                <a:solidFill>
-                  <a:srgbClr val="5A8A9A"/>
-                </a:solidFill>
-              </a:rPr>
-              <a:t>scala outreach</a:t>
-            </a:r>
-            <a:endParaRPr lang="en-US" sz="800" dirty="0"/>
-          </a:p>
-        </p:txBody>
-      </p:sp>
-      <p:sp>
-        <p:nvSpPr>
-          <p:cNvPr id="29" name="Shape 27"/>
-          <p:cNvSpPr/>
-          <p:nvPr/>
-        </p:nvSpPr>
-        <p:spPr>
-          <a:xfrm>
-            <a:off x="5943600" y="4114800"/>
-            <a:ext cx="2468880" cy="777240"/>
+              <a:t>€ 42/dealer</a:t>
+            </a:r>
+            <a:endParaRPr lang="en-US" sz="1000" dirty="0"/>
+          </a:p>
+        </p:txBody>
+      </p:sp>
+      <p:sp>
+        <p:nvSpPr>
+          <p:cNvPr id="47" name="Shape 45"/>
+          <p:cNvSpPr/>
+          <p:nvPr/>
+        </p:nvSpPr>
+        <p:spPr>
+          <a:xfrm>
+            <a:off x="6217920" y="5623560"/>
+            <a:ext cx="5394960" cy="438912"/>
           </a:xfrm>
           <a:prstGeom prst="rect">
             <a:avLst/>
@@ -16551,7 +17159,7 @@
           </a:solidFill>
           <a:ln w="12700">
             <a:solidFill>
-              <a:srgbClr val="10B981"/>
+              <a:srgbClr val="3A3530"/>
             </a:solidFill>
             <a:prstDash val="solid"/>
           </a:ln>
@@ -16559,681 +17167,73 @@
       </p:sp>
       <p:sp>
         <p:nvSpPr>
-          <p:cNvPr id="30" name="Text 28"/>
-          <p:cNvSpPr/>
-          <p:nvPr/>
-        </p:nvSpPr>
-        <p:spPr>
-          <a:xfrm>
-            <a:off x="5943600" y="4160520"/>
-            <a:ext cx="914400" cy="320040"/>
-          </a:xfrm>
-          <a:prstGeom prst="rect">
-            <a:avLst/>
-          </a:prstGeom>
-          <a:noFill/>
-          <a:ln/>
-        </p:spPr>
-        <p:txBody>
-          <a:bodyPr wrap="square" lIns="0" tIns="0" rIns="0" bIns="0" rtlCol="0" anchor="ctr"/>
-          <a:lstStyle/>
-          <a:p>
-            <a:pPr indent="0" marL="0">
+          <p:cNvPr id="48" name="Text 46"/>
+          <p:cNvSpPr/>
+          <p:nvPr/>
+        </p:nvSpPr>
+        <p:spPr>
+          <a:xfrm>
+            <a:off x="6400800" y="5669280"/>
+            <a:ext cx="3200400" cy="320040"/>
+          </a:xfrm>
+          <a:prstGeom prst="rect">
+            <a:avLst/>
+          </a:prstGeom>
+          <a:noFill/>
+          <a:ln/>
+        </p:spPr>
+        <p:txBody>
+          <a:bodyPr wrap="square" lIns="0" tIns="0" rIns="0" bIns="0" rtlCol="0" anchor="ctr"/>
+          <a:lstStyle/>
+          <a:p>
+            <a:pPr indent="0" marL="0">
+              <a:buNone/>
+            </a:pPr>
+            <a:r>
+              <a:rPr lang="en-US" sz="1000" dirty="0">
+                <a:solidFill>
+                  <a:srgbClr val="A89F98"/>
+                </a:solidFill>
+              </a:rPr>
+              <a:t>Saving vs Alfonsino</a:t>
+            </a:r>
+            <a:endParaRPr lang="en-US" sz="1000" dirty="0"/>
+          </a:p>
+        </p:txBody>
+      </p:sp>
+      <p:sp>
+        <p:nvSpPr>
+          <p:cNvPr id="49" name="Text 47"/>
+          <p:cNvSpPr/>
+          <p:nvPr/>
+        </p:nvSpPr>
+        <p:spPr>
+          <a:xfrm>
+            <a:off x="9326880" y="5669280"/>
+            <a:ext cx="2103120" cy="320040"/>
+          </a:xfrm>
+          <a:prstGeom prst="rect">
+            <a:avLst/>
+          </a:prstGeom>
+          <a:noFill/>
+          <a:ln/>
+        </p:spPr>
+        <p:txBody>
+          <a:bodyPr wrap="square" lIns="0" tIns="0" rIns="0" bIns="0" rtlCol="0" anchor="ctr"/>
+          <a:lstStyle/>
+          <a:p>
+            <a:pPr algn="r" indent="0" marL="0">
               <a:buNone/>
             </a:pPr>
             <a:r>
               <a:rPr lang="en-US" sz="1000" b="1" dirty="0">
                 <a:solidFill>
-                  <a:srgbClr val="8CB3CC"/>
-                </a:solidFill>
-              </a:rPr>
-              <a:t>M11</a:t>
-            </a:r>
-            <a:endParaRPr lang="en-US" sz="1000" dirty="0"/>
-          </a:p>
-        </p:txBody>
-      </p:sp>
-      <p:sp>
-        <p:nvSpPr>
-          <p:cNvPr id="31" name="Text 29"/>
-          <p:cNvSpPr/>
-          <p:nvPr/>
-        </p:nvSpPr>
-        <p:spPr>
-          <a:xfrm>
-            <a:off x="6766560" y="4160520"/>
-            <a:ext cx="1554480" cy="320040"/>
-          </a:xfrm>
-          <a:prstGeom prst="rect">
-            <a:avLst/>
-          </a:prstGeom>
-          <a:noFill/>
-          <a:ln/>
-        </p:spPr>
-        <p:txBody>
-          <a:bodyPr wrap="square" lIns="0" tIns="0" rIns="0" bIns="0" rtlCol="0" anchor="ctr"/>
-          <a:lstStyle/>
-          <a:p>
-            <a:pPr algn="r" indent="0" marL="0">
-              <a:buNone/>
-            </a:pPr>
-            <a:r>
-              <a:rPr lang="en-US" sz="1200" b="1" dirty="0">
-                <a:solidFill>
-                  <a:srgbClr val="10B981"/>
+                  <a:srgbClr val="34D399"/>
                 </a:solidFill>
                 <a:latin typeface="Calibri" pitchFamily="34" charset="0"/>
                 <a:ea typeface="Calibri" pitchFamily="34" charset="-122"/>
                 <a:cs typeface="Calibri" pitchFamily="34" charset="-120"/>
               </a:rPr>
-              <a:t>€ 13.000</a:t>
-            </a:r>
-            <a:endParaRPr lang="en-US" sz="1200" dirty="0"/>
-          </a:p>
-        </p:txBody>
-      </p:sp>
-      <p:sp>
-        <p:nvSpPr>
-          <p:cNvPr id="32" name="Text 30"/>
-          <p:cNvSpPr/>
-          <p:nvPr/>
-        </p:nvSpPr>
-        <p:spPr>
-          <a:xfrm>
-            <a:off x="5943600" y="4480560"/>
-            <a:ext cx="2468880" cy="228600"/>
-          </a:xfrm>
-          <a:prstGeom prst="rect">
-            <a:avLst/>
-          </a:prstGeom>
-          <a:noFill/>
-          <a:ln/>
-        </p:spPr>
-        <p:txBody>
-          <a:bodyPr wrap="square" lIns="0" tIns="0" rIns="0" bIns="0" rtlCol="0" anchor="ctr"/>
-          <a:lstStyle/>
-          <a:p>
-            <a:pPr algn="ctr" indent="0" marL="0">
-              <a:buNone/>
-            </a:pPr>
-            <a:r>
-              <a:rPr lang="en-US" sz="800" dirty="0">
-                <a:solidFill>
-                  <a:srgbClr val="5A8A9A"/>
-                </a:solidFill>
-              </a:rPr>
-              <a:t>break-even ✓</a:t>
-            </a:r>
-            <a:endParaRPr lang="en-US" sz="800" dirty="0"/>
-          </a:p>
-        </p:txBody>
-      </p:sp>
-      <p:sp>
-        <p:nvSpPr>
-          <p:cNvPr id="33" name="Shape 31"/>
-          <p:cNvSpPr/>
-          <p:nvPr/>
-        </p:nvSpPr>
-        <p:spPr>
-          <a:xfrm>
-            <a:off x="8686800" y="4114800"/>
-            <a:ext cx="2468880" cy="777240"/>
-          </a:xfrm>
-          <a:prstGeom prst="rect">
-            <a:avLst/>
-          </a:prstGeom>
-          <a:solidFill>
-            <a:srgbClr val="0F2535"/>
-          </a:solidFill>
-          <a:ln w="12700">
-            <a:solidFill>
-              <a:srgbClr val="1A3A50"/>
-            </a:solidFill>
-            <a:prstDash val="solid"/>
-          </a:ln>
-        </p:spPr>
-      </p:sp>
-      <p:sp>
-        <p:nvSpPr>
-          <p:cNvPr id="34" name="Text 32"/>
-          <p:cNvSpPr/>
-          <p:nvPr/>
-        </p:nvSpPr>
-        <p:spPr>
-          <a:xfrm>
-            <a:off x="8686800" y="4160520"/>
-            <a:ext cx="914400" cy="320040"/>
-          </a:xfrm>
-          <a:prstGeom prst="rect">
-            <a:avLst/>
-          </a:prstGeom>
-          <a:noFill/>
-          <a:ln/>
-        </p:spPr>
-        <p:txBody>
-          <a:bodyPr wrap="square" lIns="0" tIns="0" rIns="0" bIns="0" rtlCol="0" anchor="ctr"/>
-          <a:lstStyle/>
-          <a:p>
-            <a:pPr indent="0" marL="0">
-              <a:buNone/>
-            </a:pPr>
-            <a:r>
-              <a:rPr lang="en-US" sz="1000" b="1" dirty="0">
-                <a:solidFill>
-                  <a:srgbClr val="8CB3CC"/>
-                </a:solidFill>
-              </a:rPr>
-              <a:t>M18</a:t>
-            </a:r>
-            <a:endParaRPr lang="en-US" sz="1000" dirty="0"/>
-          </a:p>
-        </p:txBody>
-      </p:sp>
-      <p:sp>
-        <p:nvSpPr>
-          <p:cNvPr id="35" name="Text 33"/>
-          <p:cNvSpPr/>
-          <p:nvPr/>
-        </p:nvSpPr>
-        <p:spPr>
-          <a:xfrm>
-            <a:off x="9509760" y="4160520"/>
-            <a:ext cx="1554480" cy="320040"/>
-          </a:xfrm>
-          <a:prstGeom prst="rect">
-            <a:avLst/>
-          </a:prstGeom>
-          <a:noFill/>
-          <a:ln/>
-        </p:spPr>
-        <p:txBody>
-          <a:bodyPr wrap="square" lIns="0" tIns="0" rIns="0" bIns="0" rtlCol="0" anchor="ctr"/>
-          <a:lstStyle/>
-          <a:p>
-            <a:pPr algn="r" indent="0" marL="0">
-              <a:buNone/>
-            </a:pPr>
-            <a:r>
-              <a:rPr lang="en-US" sz="1200" b="1" dirty="0">
-                <a:solidFill>
-                  <a:srgbClr val="14B8A6"/>
-                </a:solidFill>
-                <a:latin typeface="Calibri" pitchFamily="34" charset="0"/>
-                <a:ea typeface="Calibri" pitchFamily="34" charset="-122"/>
-                <a:cs typeface="Calibri" pitchFamily="34" charset="-120"/>
-              </a:rPr>
-              <a:t>€ 25.000+</a:t>
-            </a:r>
-            <a:endParaRPr lang="en-US" sz="1200" dirty="0"/>
-          </a:p>
-        </p:txBody>
-      </p:sp>
-      <p:sp>
-        <p:nvSpPr>
-          <p:cNvPr id="36" name="Text 34"/>
-          <p:cNvSpPr/>
-          <p:nvPr/>
-        </p:nvSpPr>
-        <p:spPr>
-          <a:xfrm>
-            <a:off x="8686800" y="4480560"/>
-            <a:ext cx="2468880" cy="228600"/>
-          </a:xfrm>
-          <a:prstGeom prst="rect">
-            <a:avLst/>
-          </a:prstGeom>
-          <a:noFill/>
-          <a:ln/>
-        </p:spPr>
-        <p:txBody>
-          <a:bodyPr wrap="square" lIns="0" tIns="0" rIns="0" bIns="0" rtlCol="0" anchor="ctr"/>
-          <a:lstStyle/>
-          <a:p>
-            <a:pPr algn="ctr" indent="0" marL="0">
-              <a:buNone/>
-            </a:pPr>
-            <a:r>
-              <a:rPr lang="en-US" sz="800" dirty="0">
-                <a:solidFill>
-                  <a:srgbClr val="5A8A9A"/>
-                </a:solidFill>
-              </a:rPr>
-              <a:t>regime</a:t>
-            </a:r>
-            <a:endParaRPr lang="en-US" sz="800" dirty="0"/>
-          </a:p>
-        </p:txBody>
-      </p:sp>
-      <p:sp>
-        <p:nvSpPr>
-          <p:cNvPr id="37" name="Text 35"/>
-          <p:cNvSpPr/>
-          <p:nvPr/>
-        </p:nvSpPr>
-        <p:spPr>
-          <a:xfrm>
-            <a:off x="6217920" y="3794760"/>
-            <a:ext cx="5303520" cy="256032"/>
-          </a:xfrm>
-          <a:prstGeom prst="rect">
-            <a:avLst/>
-          </a:prstGeom>
-          <a:noFill/>
-          <a:ln/>
-        </p:spPr>
-        <p:txBody>
-          <a:bodyPr wrap="square" lIns="0" tIns="0" rIns="0" bIns="0" rtlCol="0" anchor="ctr"/>
-          <a:lstStyle/>
-          <a:p>
-            <a:pPr indent="0" marL="0">
-              <a:buNone/>
-            </a:pPr>
-            <a:r>
-              <a:rPr lang="en-US" sz="1000" b="1" spc="100" kern="0" dirty="0">
-                <a:solidFill>
-                  <a:srgbClr val="14B8A6"/>
-                </a:solidFill>
-              </a:rPr>
-              <a:t>P&amp;L Anno 1 — Guerriglia</a:t>
-            </a:r>
-            <a:endParaRPr lang="en-US" sz="1000" dirty="0"/>
-          </a:p>
-        </p:txBody>
-      </p:sp>
-      <p:sp>
-        <p:nvSpPr>
-          <p:cNvPr id="38" name="Shape 36"/>
-          <p:cNvSpPr/>
-          <p:nvPr/>
-        </p:nvSpPr>
-        <p:spPr>
-          <a:xfrm>
-            <a:off x="6217920" y="4114800"/>
-            <a:ext cx="5394960" cy="438912"/>
-          </a:xfrm>
-          <a:prstGeom prst="rect">
-            <a:avLst/>
-          </a:prstGeom>
-          <a:solidFill>
-            <a:srgbClr val="0F2535"/>
-          </a:solidFill>
-          <a:ln w="12700">
-            <a:solidFill>
-              <a:srgbClr val="1A3A50"/>
-            </a:solidFill>
-            <a:prstDash val="solid"/>
-          </a:ln>
-        </p:spPr>
-      </p:sp>
-      <p:sp>
-        <p:nvSpPr>
-          <p:cNvPr id="39" name="Text 37"/>
-          <p:cNvSpPr/>
-          <p:nvPr/>
-        </p:nvSpPr>
-        <p:spPr>
-          <a:xfrm>
-            <a:off x="6400800" y="4160520"/>
-            <a:ext cx="3200400" cy="320040"/>
-          </a:xfrm>
-          <a:prstGeom prst="rect">
-            <a:avLst/>
-          </a:prstGeom>
-          <a:noFill/>
-          <a:ln/>
-        </p:spPr>
-        <p:txBody>
-          <a:bodyPr wrap="square" lIns="0" tIns="0" rIns="0" bIns="0" rtlCol="0" anchor="ctr"/>
-          <a:lstStyle/>
-          <a:p>
-            <a:pPr indent="0" marL="0">
-              <a:buNone/>
-            </a:pPr>
-            <a:r>
-              <a:rPr lang="en-US" sz="1000" dirty="0">
-                <a:solidFill>
-                  <a:srgbClr val="8CB3CC"/>
-                </a:solidFill>
-              </a:rPr>
-              <a:t>Burn totale Anno 1</a:t>
-            </a:r>
-            <a:endParaRPr lang="en-US" sz="1000" dirty="0"/>
-          </a:p>
-        </p:txBody>
-      </p:sp>
-      <p:sp>
-        <p:nvSpPr>
-          <p:cNvPr id="40" name="Text 38"/>
-          <p:cNvSpPr/>
-          <p:nvPr/>
-        </p:nvSpPr>
-        <p:spPr>
-          <a:xfrm>
-            <a:off x="9326880" y="4160520"/>
-            <a:ext cx="2103120" cy="320040"/>
-          </a:xfrm>
-          <a:prstGeom prst="rect">
-            <a:avLst/>
-          </a:prstGeom>
-          <a:noFill/>
-          <a:ln/>
-        </p:spPr>
-        <p:txBody>
-          <a:bodyPr wrap="square" lIns="0" tIns="0" rIns="0" bIns="0" rtlCol="0" anchor="ctr"/>
-          <a:lstStyle/>
-          <a:p>
-            <a:pPr algn="r" indent="0" marL="0">
-              <a:buNone/>
-            </a:pPr>
-            <a:r>
-              <a:rPr lang="en-US" sz="1000" b="1" dirty="0">
-                <a:solidFill>
-                  <a:srgbClr val="EF4444"/>
-                </a:solidFill>
-                <a:latin typeface="Calibri" pitchFamily="34" charset="0"/>
-                <a:ea typeface="Calibri" pitchFamily="34" charset="-122"/>
-                <a:cs typeface="Calibri" pitchFamily="34" charset="-120"/>
-              </a:rPr>
-              <a:t>€ 74.694</a:t>
-            </a:r>
-            <a:endParaRPr lang="en-US" sz="1000" dirty="0"/>
-          </a:p>
-        </p:txBody>
-      </p:sp>
-      <p:sp>
-        <p:nvSpPr>
-          <p:cNvPr id="41" name="Shape 39"/>
-          <p:cNvSpPr/>
-          <p:nvPr/>
-        </p:nvSpPr>
-        <p:spPr>
-          <a:xfrm>
-            <a:off x="6217920" y="4617720"/>
-            <a:ext cx="5394960" cy="438912"/>
-          </a:xfrm>
-          <a:prstGeom prst="rect">
-            <a:avLst/>
-          </a:prstGeom>
-          <a:solidFill>
-            <a:srgbClr val="0F2535"/>
-          </a:solidFill>
-          <a:ln w="12700">
-            <a:solidFill>
-              <a:srgbClr val="1A3A50"/>
-            </a:solidFill>
-            <a:prstDash val="solid"/>
-          </a:ln>
-        </p:spPr>
-      </p:sp>
-      <p:sp>
-        <p:nvSpPr>
-          <p:cNvPr id="42" name="Text 40"/>
-          <p:cNvSpPr/>
-          <p:nvPr/>
-        </p:nvSpPr>
-        <p:spPr>
-          <a:xfrm>
-            <a:off x="6400800" y="4663440"/>
-            <a:ext cx="3200400" cy="320040"/>
-          </a:xfrm>
-          <a:prstGeom prst="rect">
-            <a:avLst/>
-          </a:prstGeom>
-          <a:noFill/>
-          <a:ln/>
-        </p:spPr>
-        <p:txBody>
-          <a:bodyPr wrap="square" lIns="0" tIns="0" rIns="0" bIns="0" rtlCol="0" anchor="ctr"/>
-          <a:lstStyle/>
-          <a:p>
-            <a:pPr indent="0" marL="0">
-              <a:buNone/>
-            </a:pPr>
-            <a:r>
-              <a:rPr lang="en-US" sz="1000" dirty="0">
-                <a:solidFill>
-                  <a:srgbClr val="8CB3CC"/>
-                </a:solidFill>
-              </a:rPr>
-              <a:t>OpEx mensile (3 FTE)</a:t>
-            </a:r>
-            <a:endParaRPr lang="en-US" sz="1000" dirty="0"/>
-          </a:p>
-        </p:txBody>
-      </p:sp>
-      <p:sp>
-        <p:nvSpPr>
-          <p:cNvPr id="43" name="Text 41"/>
-          <p:cNvSpPr/>
-          <p:nvPr/>
-        </p:nvSpPr>
-        <p:spPr>
-          <a:xfrm>
-            <a:off x="9326880" y="4663440"/>
-            <a:ext cx="2103120" cy="320040"/>
-          </a:xfrm>
-          <a:prstGeom prst="rect">
-            <a:avLst/>
-          </a:prstGeom>
-          <a:noFill/>
-          <a:ln/>
-        </p:spPr>
-        <p:txBody>
-          <a:bodyPr wrap="square" lIns="0" tIns="0" rIns="0" bIns="0" rtlCol="0" anchor="ctr"/>
-          <a:lstStyle/>
-          <a:p>
-            <a:pPr algn="r" indent="0" marL="0">
-              <a:buNone/>
-            </a:pPr>
-            <a:r>
-              <a:rPr lang="en-US" sz="1000" b="1" dirty="0">
-                <a:solidFill>
-                  <a:srgbClr val="8CB3CC"/>
-                </a:solidFill>
-                <a:latin typeface="Calibri" pitchFamily="34" charset="0"/>
-                <a:ea typeface="Calibri" pitchFamily="34" charset="-122"/>
-                <a:cs typeface="Calibri" pitchFamily="34" charset="-120"/>
-              </a:rPr>
-              <a:t>€9.400–€13.800</a:t>
-            </a:r>
-            <a:endParaRPr lang="en-US" sz="1000" dirty="0"/>
-          </a:p>
-        </p:txBody>
-      </p:sp>
-      <p:sp>
-        <p:nvSpPr>
-          <p:cNvPr id="44" name="Shape 42"/>
-          <p:cNvSpPr/>
-          <p:nvPr/>
-        </p:nvSpPr>
-        <p:spPr>
-          <a:xfrm>
-            <a:off x="6217920" y="5120640"/>
-            <a:ext cx="5394960" cy="438912"/>
-          </a:xfrm>
-          <a:prstGeom prst="rect">
-            <a:avLst/>
-          </a:prstGeom>
-          <a:solidFill>
-            <a:srgbClr val="0F2535"/>
-          </a:solidFill>
-          <a:ln w="12700">
-            <a:solidFill>
-              <a:srgbClr val="1A3A50"/>
-            </a:solidFill>
-            <a:prstDash val="solid"/>
-          </a:ln>
-        </p:spPr>
-      </p:sp>
-      <p:sp>
-        <p:nvSpPr>
-          <p:cNvPr id="45" name="Text 43"/>
-          <p:cNvSpPr/>
-          <p:nvPr/>
-        </p:nvSpPr>
-        <p:spPr>
-          <a:xfrm>
-            <a:off x="6400800" y="5166360"/>
-            <a:ext cx="3200400" cy="320040"/>
-          </a:xfrm>
-          <a:prstGeom prst="rect">
-            <a:avLst/>
-          </a:prstGeom>
-          <a:noFill/>
-          <a:ln/>
-        </p:spPr>
-        <p:txBody>
-          <a:bodyPr wrap="square" lIns="0" tIns="0" rIns="0" bIns="0" rtlCol="0" anchor="ctr"/>
-          <a:lstStyle/>
-          <a:p>
-            <a:pPr indent="0" marL="0">
-              <a:buNone/>
-            </a:pPr>
-            <a:r>
-              <a:rPr lang="en-US" sz="1000" dirty="0">
-                <a:solidFill>
-                  <a:srgbClr val="8CB3CC"/>
-                </a:solidFill>
-              </a:rPr>
-              <a:t>CAC Guerriglia M1-M4</a:t>
-            </a:r>
-            <a:endParaRPr lang="en-US" sz="1000" dirty="0"/>
-          </a:p>
-        </p:txBody>
-      </p:sp>
-      <p:sp>
-        <p:nvSpPr>
-          <p:cNvPr id="46" name="Text 44"/>
-          <p:cNvSpPr/>
-          <p:nvPr/>
-        </p:nvSpPr>
-        <p:spPr>
-          <a:xfrm>
-            <a:off x="9326880" y="5166360"/>
-            <a:ext cx="2103120" cy="320040"/>
-          </a:xfrm>
-          <a:prstGeom prst="rect">
-            <a:avLst/>
-          </a:prstGeom>
-          <a:noFill/>
-          <a:ln/>
-        </p:spPr>
-        <p:txBody>
-          <a:bodyPr wrap="square" lIns="0" tIns="0" rIns="0" bIns="0" rtlCol="0" anchor="ctr"/>
-          <a:lstStyle/>
-          <a:p>
-            <a:pPr algn="r" indent="0" marL="0">
-              <a:buNone/>
-            </a:pPr>
-            <a:r>
-              <a:rPr lang="en-US" sz="1000" b="1" dirty="0">
-                <a:solidFill>
-                  <a:srgbClr val="14B8A6"/>
-                </a:solidFill>
-                <a:latin typeface="Calibri" pitchFamily="34" charset="0"/>
-                <a:ea typeface="Calibri" pitchFamily="34" charset="-122"/>
-                <a:cs typeface="Calibri" pitchFamily="34" charset="-120"/>
-              </a:rPr>
-              <a:t>€ 42/dealer</a:t>
-            </a:r>
-            <a:endParaRPr lang="en-US" sz="1000" dirty="0"/>
-          </a:p>
-        </p:txBody>
-      </p:sp>
-      <p:sp>
-        <p:nvSpPr>
-          <p:cNvPr id="47" name="Shape 45"/>
-          <p:cNvSpPr/>
-          <p:nvPr/>
-        </p:nvSpPr>
-        <p:spPr>
-          <a:xfrm>
-            <a:off x="6217920" y="5623560"/>
-            <a:ext cx="5394960" cy="438912"/>
-          </a:xfrm>
-          <a:prstGeom prst="rect">
-            <a:avLst/>
-          </a:prstGeom>
-          <a:solidFill>
-            <a:srgbClr val="0A2A20"/>
-          </a:solidFill>
-          <a:ln w="12700">
-            <a:solidFill>
-              <a:srgbClr val="1A3A50"/>
-            </a:solidFill>
-            <a:prstDash val="solid"/>
-          </a:ln>
-        </p:spPr>
-      </p:sp>
-      <p:sp>
-        <p:nvSpPr>
-          <p:cNvPr id="48" name="Text 46"/>
-          <p:cNvSpPr/>
-          <p:nvPr/>
-        </p:nvSpPr>
-        <p:spPr>
-          <a:xfrm>
-            <a:off x="6400800" y="5669280"/>
-            <a:ext cx="3200400" cy="320040"/>
-          </a:xfrm>
-          <a:prstGeom prst="rect">
-            <a:avLst/>
-          </a:prstGeom>
-          <a:noFill/>
-          <a:ln/>
-        </p:spPr>
-        <p:txBody>
-          <a:bodyPr wrap="square" lIns="0" tIns="0" rIns="0" bIns="0" rtlCol="0" anchor="ctr"/>
-          <a:lstStyle/>
-          <a:p>
-            <a:pPr indent="0" marL="0">
-              <a:buNone/>
-            </a:pPr>
-            <a:r>
-              <a:rPr lang="en-US" sz="1000" dirty="0">
-                <a:solidFill>
-                  <a:srgbClr val="8CB3CC"/>
-                </a:solidFill>
-              </a:rPr>
-              <a:t>Saving vs Alfonsino</a:t>
-            </a:r>
-            <a:endParaRPr lang="en-US" sz="1000" dirty="0"/>
-          </a:p>
-        </p:txBody>
-      </p:sp>
-      <p:sp>
-        <p:nvSpPr>
-          <p:cNvPr id="49" name="Text 47"/>
-          <p:cNvSpPr/>
-          <p:nvPr/>
-        </p:nvSpPr>
-        <p:spPr>
-          <a:xfrm>
-            <a:off x="9326880" y="5669280"/>
-            <a:ext cx="2103120" cy="320040"/>
-          </a:xfrm>
-          <a:prstGeom prst="rect">
-            <a:avLst/>
-          </a:prstGeom>
-          <a:noFill/>
-          <a:ln/>
-        </p:spPr>
-        <p:txBody>
-          <a:bodyPr wrap="square" lIns="0" tIns="0" rIns="0" bIns="0" rtlCol="0" anchor="ctr"/>
-          <a:lstStyle/>
-          <a:p>
-            <a:pPr algn="r" indent="0" marL="0">
-              <a:buNone/>
-            </a:pPr>
-            <a:r>
-              <a:rPr lang="en-US" sz="1000" b="1" dirty="0">
-                <a:solidFill>
-                  <a:srgbClr val="10B981"/>
-                </a:solidFill>
-                <a:latin typeface="Calibri" pitchFamily="34" charset="0"/>
-                <a:ea typeface="Calibri" pitchFamily="34" charset="-122"/>
-                <a:cs typeface="Calibri" pitchFamily="34" charset="-120"/>
-              </a:rPr>
               <a:t>+€17.790/anno</a:t>
             </a:r>
             <a:endParaRPr lang="en-US" sz="1000" dirty="0"/>
@@ -17267,7 +17267,7 @@
             <a:r>
               <a:rPr lang="en-US" sz="800" dirty="0">
                 <a:solidFill>
-                  <a:srgbClr val="334455"/>
+                  <a:srgbClr val="4A4540"/>
                 </a:solidFill>
               </a:rPr>
               <a:t>08 / 12</a:t>
@@ -17290,7 +17290,7 @@
     <p:bg>
       <p:bgPr>
         <a:solidFill>
-          <a:srgbClr val="0D1F35"/>
+          <a:srgbClr val="1C1C1E"/>
         </a:solidFill>
       </p:bgPr>
     </p:bg>
@@ -17335,7 +17335,7 @@
             <a:r>
               <a:rPr lang="en-US" sz="900" b="1" spc="300" kern="0" dirty="0">
                 <a:solidFill>
-                  <a:srgbClr val="14B8A6"/>
+                  <a:srgbClr val="2DD4BF"/>
                 </a:solidFill>
               </a:rPr>
               <a:t>TRAZIONE E VALIDAZIONE</a:t>
@@ -17374,7 +17374,7 @@
             <a:r>
               <a:rPr lang="en-US" sz="3400" b="1" dirty="0">
                 <a:solidFill>
-                  <a:srgbClr val="FFFFFF"/>
+                  <a:srgbClr val="F0EDE8"/>
                 </a:solidFill>
                 <a:latin typeface="Georgia" pitchFamily="34" charset="0"/>
                 <a:ea typeface="Georgia" pitchFamily="34" charset="-122"/>
@@ -17394,7 +17394,7 @@
             <a:r>
               <a:rPr lang="en-US" sz="3400" b="1" dirty="0">
                 <a:solidFill>
-                  <a:srgbClr val="FFFFFF"/>
+                  <a:srgbClr val="F0EDE8"/>
                 </a:solidFill>
                 <a:latin typeface="Georgia" pitchFamily="34" charset="0"/>
                 <a:ea typeface="Georgia" pitchFamily="34" charset="-122"/>
@@ -17421,11 +17421,11 @@
             <a:avLst/>
           </a:prstGeom>
           <a:solidFill>
-            <a:srgbClr val="0F2535"/>
+            <a:srgbClr val="201E1B"/>
           </a:solidFill>
           <a:ln w="12700">
             <a:solidFill>
-              <a:srgbClr val="1A3A50"/>
+              <a:srgbClr val="3A3530"/>
             </a:solidFill>
             <a:prstDash val="solid"/>
           </a:ln>
@@ -17446,11 +17446,11 @@
             <a:avLst/>
           </a:prstGeom>
           <a:solidFill>
-            <a:srgbClr val="0B7A75"/>
+            <a:srgbClr val="0D8A82"/>
           </a:solidFill>
           <a:ln w="12700">
             <a:solidFill>
-              <a:srgbClr val="0B7A75"/>
+              <a:srgbClr val="0D8A82"/>
             </a:solidFill>
             <a:prstDash val="solid"/>
           </a:ln>
@@ -17483,7 +17483,7 @@
             <a:r>
               <a:rPr lang="en-US" sz="1000" b="1" dirty="0">
                 <a:solidFill>
-                  <a:srgbClr val="FFFFFF"/>
+                  <a:srgbClr val="F0EDE8"/>
                 </a:solidFill>
               </a:rPr>
               <a:t>App Rider Flutter — prototipo funzionante</a:t>
@@ -17522,7 +17522,7 @@
             <a:r>
               <a:rPr lang="en-US" sz="900" dirty="0">
                 <a:solidFill>
-                  <a:srgbClr val="8CB3CC"/>
+                  <a:srgbClr val="A89F98"/>
                 </a:solidFill>
               </a:rPr>
               <a:t>Sviluppato da Saba (CTO, P.IVA). Ordini, navigazione, prova di consegna. Pronto deploy iOS/Android.</a:t>
@@ -17546,11 +17546,11 @@
             <a:avLst/>
           </a:prstGeom>
           <a:solidFill>
-            <a:srgbClr val="0F2535"/>
+            <a:srgbClr val="201E1B"/>
           </a:solidFill>
           <a:ln w="12700">
             <a:solidFill>
-              <a:srgbClr val="1A3A50"/>
+              <a:srgbClr val="3A3530"/>
             </a:solidFill>
             <a:prstDash val="solid"/>
           </a:ln>
@@ -17571,11 +17571,11 @@
             <a:avLst/>
           </a:prstGeom>
           <a:solidFill>
-            <a:srgbClr val="0B7A75"/>
+            <a:srgbClr val="0D8A82"/>
           </a:solidFill>
           <a:ln w="12700">
             <a:solidFill>
-              <a:srgbClr val="0B7A75"/>
+              <a:srgbClr val="0D8A82"/>
             </a:solidFill>
             <a:prstDash val="solid"/>
           </a:ln>
@@ -17608,7 +17608,7 @@
             <a:r>
               <a:rPr lang="en-US" sz="1000" b="1" dirty="0">
                 <a:solidFill>
-                  <a:srgbClr val="FFFFFF"/>
+                  <a:srgbClr val="F0EDE8"/>
                 </a:solidFill>
               </a:rPr>
               <a:t>WhatsApp Bot dual-AI (Operai + Haiku)</a:t>
@@ -17647,7 +17647,7 @@
             <a:r>
               <a:rPr lang="en-US" sz="900" dirty="0">
                 <a:solidFill>
-                  <a:srgbClr val="8CB3CC"/>
+                  <a:srgbClr val="A89F98"/>
                 </a:solidFill>
               </a:rPr>
               <a:t>Strategia parallela con fallback integrato. Costo ~€78/anno, 95% accuratezza. File deployment pronti.</a:t>
@@ -17671,11 +17671,11 @@
             <a:avLst/>
           </a:prstGeom>
           <a:solidFill>
-            <a:srgbClr val="0F2535"/>
+            <a:srgbClr val="201E1B"/>
           </a:solidFill>
           <a:ln w="12700">
             <a:solidFill>
-              <a:srgbClr val="1A3A50"/>
+              <a:srgbClr val="3A3530"/>
             </a:solidFill>
             <a:prstDash val="solid"/>
           </a:ln>
@@ -17696,11 +17696,11 @@
             <a:avLst/>
           </a:prstGeom>
           <a:solidFill>
-            <a:srgbClr val="0B7A75"/>
+            <a:srgbClr val="0D8A82"/>
           </a:solidFill>
           <a:ln w="12700">
             <a:solidFill>
-              <a:srgbClr val="0B7A75"/>
+              <a:srgbClr val="0D8A82"/>
             </a:solidFill>
             <a:prstDash val="solid"/>
           </a:ln>
@@ -17733,7 +17733,7 @@
             <a:r>
               <a:rPr lang="en-US" sz="1000" b="1" dirty="0">
                 <a:solidFill>
-                  <a:srgbClr val="FFFFFF"/>
+                  <a:srgbClr val="F0EDE8"/>
                 </a:solidFill>
               </a:rPr>
               <a:t>Pipeline warm: 6+ merchant certi a M1</a:t>
@@ -17772,7 +17772,7 @@
             <a:r>
               <a:rPr lang="en-US" sz="900" dirty="0">
                 <a:solidFill>
-                  <a:srgbClr val="8CB3CC"/>
+                  <a:srgbClr val="A89F98"/>
                 </a:solidFill>
               </a:rPr>
               <a:t>Mario Cucciolito (Pet Shop) · Gruppo Amodio (Supermercati Pam) · Farmacia Tanzillo · NaturaSì Vomero. Rete personale Pomigliano/Napoli. Zero paid ads M1-M4.</a:t>
@@ -17796,11 +17796,11 @@
             <a:avLst/>
           </a:prstGeom>
           <a:solidFill>
-            <a:srgbClr val="0F2535"/>
+            <a:srgbClr val="201E1B"/>
           </a:solidFill>
           <a:ln w="12700">
             <a:solidFill>
-              <a:srgbClr val="1A3A50"/>
+              <a:srgbClr val="3A3530"/>
             </a:solidFill>
             <a:prstDash val="solid"/>
           </a:ln>
@@ -17821,11 +17821,11 @@
             <a:avLst/>
           </a:prstGeom>
           <a:solidFill>
-            <a:srgbClr val="0B7A75"/>
+            <a:srgbClr val="0D8A82"/>
           </a:solidFill>
           <a:ln w="12700">
             <a:solidFill>
-              <a:srgbClr val="0B7A75"/>
+              <a:srgbClr val="0D8A82"/>
             </a:solidFill>
             <a:prstDash val="solid"/>
           </a:ln>
@@ -17858,7 +17858,7 @@
             <a:r>
               <a:rPr lang="en-US" sz="1000" b="1" dirty="0">
                 <a:solidFill>
-                  <a:srgbClr val="FFFFFF"/>
+                  <a:srgbClr val="F0EDE8"/>
                 </a:solidFill>
               </a:rPr>
               <a:t>ADV Advertising Company — target B2B</a:t>
@@ -17897,7 +17897,7 @@
             <a:r>
               <a:rPr lang="en-US" sz="900" dirty="0">
                 <a:solidFill>
-                  <a:srgbClr val="8CB3CC"/>
+                  <a:srgbClr val="A89F98"/>
                 </a:solidFill>
               </a:rPr>
               <a:t>Operatore logistico Napoli identificato come primo cliente Business tier (500-1.000 ordini/mese).</a:t>
@@ -17921,11 +17921,11 @@
             <a:avLst/>
           </a:prstGeom>
           <a:solidFill>
-            <a:srgbClr val="0F2535"/>
+            <a:srgbClr val="201E1B"/>
           </a:solidFill>
           <a:ln w="12700">
             <a:solidFill>
-              <a:srgbClr val="1A3A50"/>
+              <a:srgbClr val="3A3530"/>
             </a:solidFill>
             <a:prstDash val="solid"/>
           </a:ln>
@@ -17946,11 +17946,11 @@
             <a:avLst/>
           </a:prstGeom>
           <a:solidFill>
-            <a:srgbClr val="0B7A75"/>
+            <a:srgbClr val="0D8A82"/>
           </a:solidFill>
           <a:ln w="12700">
             <a:solidFill>
-              <a:srgbClr val="0B7A75"/>
+              <a:srgbClr val="0D8A82"/>
             </a:solidFill>
             <a:prstDash val="solid"/>
           </a:ln>
@@ -17983,7 +17983,7 @@
             <a:r>
               <a:rPr lang="en-US" sz="1000" b="1" dirty="0">
                 <a:solidFill>
-                  <a:srgbClr val="FFFFFF"/>
+                  <a:srgbClr val="F0EDE8"/>
                 </a:solidFill>
               </a:rPr>
               <a:t>Stack tecnico production-ready</a:t>
@@ -18022,7 +18022,7 @@
             <a:r>
               <a:rPr lang="en-US" sz="900" dirty="0">
                 <a:solidFill>
-                  <a:srgbClr val="8CB3CC"/>
+                  <a:srgbClr val="A89F98"/>
                 </a:solidFill>
               </a:rPr>
               <a:t>Flutter + Supabase/PostGIS + Firebase + Twilio WhatsApp Business. Architettura verificata e deployable.</a:t>
@@ -18046,11 +18046,11 @@
             <a:avLst/>
           </a:prstGeom>
           <a:solidFill>
-            <a:srgbClr val="0F2535"/>
+            <a:srgbClr val="201E1B"/>
           </a:solidFill>
           <a:ln w="12700">
             <a:solidFill>
-              <a:srgbClr val="1A3A50"/>
+              <a:srgbClr val="3A3530"/>
             </a:solidFill>
             <a:prstDash val="solid"/>
           </a:ln>
@@ -18071,11 +18071,11 @@
             <a:avLst/>
           </a:prstGeom>
           <a:solidFill>
-            <a:srgbClr val="0B7A75"/>
+            <a:srgbClr val="0D8A82"/>
           </a:solidFill>
           <a:ln w="12700">
             <a:solidFill>
-              <a:srgbClr val="0B7A75"/>
+              <a:srgbClr val="0D8A82"/>
             </a:solidFill>
             <a:prstDash val="solid"/>
           </a:ln>
@@ -18108,7 +18108,7 @@
             <a:r>
               <a:rPr lang="en-US" sz="1000" b="1" dirty="0">
                 <a:solidFill>
-                  <a:srgbClr val="FFFFFF"/>
+                  <a:srgbClr val="F0EDE8"/>
                 </a:solidFill>
               </a:rPr>
               <a:t>Struttura legale verificata</a:t>
@@ -18147,7 +18147,7 @@
             <a:r>
               <a:rPr lang="en-US" sz="900" dirty="0">
                 <a:solidFill>
-                  <a:srgbClr val="8CB3CC"/>
+                  <a:srgbClr val="A89F98"/>
                 </a:solidFill>
               </a:rPr>
               <a:t>CAV S.R.L. startup innovativa D.L. 3/2015. P.IVA 09532291219. Modello BlaBlaCar-style validato.</a:t>
@@ -18171,11 +18171,11 @@
             <a:avLst/>
           </a:prstGeom>
           <a:solidFill>
-            <a:srgbClr val="0F2535"/>
+            <a:srgbClr val="201E1B"/>
           </a:solidFill>
           <a:ln w="12700">
             <a:solidFill>
-              <a:srgbClr val="1A3A50"/>
+              <a:srgbClr val="3A3530"/>
             </a:solidFill>
             <a:prstDash val="solid"/>
           </a:ln>
@@ -18233,7 +18233,7 @@
             <a:r>
               <a:rPr lang="en-US" sz="1000" b="1" dirty="0">
                 <a:solidFill>
-                  <a:srgbClr val="FFFFFF"/>
+                  <a:srgbClr val="F0EDE8"/>
                 </a:solidFill>
               </a:rPr>
               <a:t>Verifica Twilio in corso (Case #1380112390587406)</a:t>
@@ -18272,7 +18272,7 @@
             <a:r>
               <a:rPr lang="en-US" sz="900" dirty="0">
                 <a:solidFill>
-                  <a:srgbClr val="8CB3CC"/>
+                  <a:srgbClr val="A89F98"/>
                 </a:solidFill>
               </a:rPr>
               <a:t>Documentazione inviata. Fallback alternativo pronto. WhatsApp Business API operativa entro 15gg.</a:t>
@@ -18296,11 +18296,11 @@
             <a:avLst/>
           </a:prstGeom>
           <a:solidFill>
-            <a:srgbClr val="0F2535"/>
+            <a:srgbClr val="201E1B"/>
           </a:solidFill>
           <a:ln w="12700">
             <a:solidFill>
-              <a:srgbClr val="1A3A50"/>
+              <a:srgbClr val="3A3530"/>
             </a:solidFill>
             <a:prstDash val="solid"/>
           </a:ln>
@@ -18321,11 +18321,11 @@
             <a:avLst/>
           </a:prstGeom>
           <a:solidFill>
-            <a:srgbClr val="0B7A75"/>
+            <a:srgbClr val="0D8A82"/>
           </a:solidFill>
           <a:ln w="12700">
             <a:solidFill>
-              <a:srgbClr val="0B7A75"/>
+              <a:srgbClr val="0D8A82"/>
             </a:solidFill>
             <a:prstDash val="solid"/>
           </a:ln>
@@ -18358,7 +18358,7 @@
             <a:r>
               <a:rPr lang="en-US" sz="1000" b="1" dirty="0">
                 <a:solidFill>
-                  <a:srgbClr val="FFFFFF"/>
+                  <a:srgbClr val="F0EDE8"/>
                 </a:solidFill>
               </a:rPr>
               <a:t>GitHub pubblico con pitch deck live</a:t>
@@ -18397,7 +18397,7 @@
             <a:r>
               <a:rPr lang="en-US" sz="900" dirty="0">
                 <a:solidFill>
-                  <a:srgbClr val="8CB3CC"/>
+                  <a:srgbClr val="A89F98"/>
                 </a:solidFill>
               </a:rPr>
               <a:t>github.com/creamoj-ai/dloop-pitch-deck — due diligence tecnica aperta. GitHub Pages attivo.</a:t>
@@ -18433,7 +18433,7 @@
             <a:r>
               <a:rPr lang="en-US" sz="800" dirty="0">
                 <a:solidFill>
-                  <a:srgbClr val="334455"/>
+                  <a:srgbClr val="4A4540"/>
                 </a:solidFill>
               </a:rPr>
               <a:t>09 / 12</a:t>

--- a/02-INVESTOR-PRESENTATIONS/DLOOP_Pitch_Deck_2026.pptx
+++ b/02-INVESTOR-PRESENTATIONS/DLOOP_Pitch_Deck_2026.pptx
@@ -7407,7 +7407,7 @@
         <p:spPr>
           <a:xfrm>
             <a:off x="457200" y="3520440"/>
-            <a:ext cx="3520440" cy="274320"/>
+            <a:ext cx="3520440" cy="228600"/>
           </a:xfrm>
           <a:prstGeom prst="rect">
             <a:avLst/>
@@ -7436,7 +7436,43 @@
       </p:sp>
       <p:sp>
         <p:nvSpPr>
-          <p:cNvPr id="9" name="Shape 7"/>
+          <p:cNvPr id="9" name="Text 7"/>
+          <p:cNvSpPr/>
+          <p:nvPr/>
+        </p:nvSpPr>
+        <p:spPr>
+          <a:xfrm>
+            <a:off x="548640" y="3822192"/>
+            <a:ext cx="3337560" cy="182880"/>
+          </a:xfrm>
+          <a:prstGeom prst="rect">
+            <a:avLst/>
+          </a:prstGeom>
+          <a:noFill/>
+          <a:ln/>
+        </p:spPr>
+        <p:txBody>
+          <a:bodyPr wrap="square" lIns="0" tIns="0" rIns="0" bIns="0" rtlCol="0" anchor="ctr"/>
+          <a:lstStyle/>
+          <a:p>
+            <a:pPr algn="ctr" indent="0" marL="0">
+              <a:buNone/>
+            </a:pPr>
+            <a:r>
+              <a:rPr lang="en-US" sz="750" dirty="0">
+                <a:solidFill>
+                  <a:srgbClr val="4A7A8A"/>
+                </a:solidFill>
+              </a:rPr>
+              <a:t>Fonte: Statista / Casaleggio Assoc. 2025</a:t>
+            </a:r>
+            <a:endParaRPr lang="en-US" sz="750" dirty="0"/>
+          </a:p>
+        </p:txBody>
+      </p:sp>
+      <p:sp>
+        <p:nvSpPr>
+          <p:cNvPr id="10" name="Shape 8"/>
           <p:cNvSpPr/>
           <p:nvPr/>
         </p:nvSpPr>
@@ -7461,7 +7497,7 @@
       </p:sp>
       <p:sp>
         <p:nvSpPr>
-          <p:cNvPr id="10" name="Text 8"/>
+          <p:cNvPr id="11" name="Text 9"/>
           <p:cNvSpPr/>
           <p:nvPr/>
         </p:nvSpPr>
@@ -7500,7 +7536,7 @@
       </p:sp>
       <p:sp>
         <p:nvSpPr>
-          <p:cNvPr id="11" name="Text 9"/>
+          <p:cNvPr id="12" name="Text 10"/>
           <p:cNvSpPr/>
           <p:nvPr/>
         </p:nvSpPr>
@@ -7556,7 +7592,7 @@
       </p:sp>
       <p:sp>
         <p:nvSpPr>
-          <p:cNvPr id="12" name="Shape 10"/>
+          <p:cNvPr id="13" name="Shape 11"/>
           <p:cNvSpPr/>
           <p:nvPr/>
         </p:nvSpPr>
@@ -7581,14 +7617,14 @@
       </p:sp>
       <p:sp>
         <p:nvSpPr>
-          <p:cNvPr id="13" name="Text 11"/>
+          <p:cNvPr id="14" name="Text 12"/>
           <p:cNvSpPr/>
           <p:nvPr/>
         </p:nvSpPr>
         <p:spPr>
           <a:xfrm>
             <a:off x="4297680" y="3520440"/>
-            <a:ext cx="3520440" cy="274320"/>
+            <a:ext cx="3520440" cy="228600"/>
           </a:xfrm>
           <a:prstGeom prst="rect">
             <a:avLst/>
@@ -7617,7 +7653,43 @@
       </p:sp>
       <p:sp>
         <p:nvSpPr>
-          <p:cNvPr id="14" name="Shape 12"/>
+          <p:cNvPr id="15" name="Text 13"/>
+          <p:cNvSpPr/>
+          <p:nvPr/>
+        </p:nvSpPr>
+        <p:spPr>
+          <a:xfrm>
+            <a:off x="4389120" y="3822192"/>
+            <a:ext cx="3337560" cy="182880"/>
+          </a:xfrm>
+          <a:prstGeom prst="rect">
+            <a:avLst/>
+          </a:prstGeom>
+          <a:noFill/>
+          <a:ln/>
+        </p:spPr>
+        <p:txBody>
+          <a:bodyPr wrap="square" lIns="0" tIns="0" rIns="0" bIns="0" rtlCol="0" anchor="ctr"/>
+          <a:lstStyle/>
+          <a:p>
+            <a:pPr algn="ctr" indent="0" marL="0">
+              <a:buNone/>
+            </a:pPr>
+            <a:r>
+              <a:rPr lang="en-US" sz="750" dirty="0">
+                <a:solidFill>
+                  <a:srgbClr val="4A7A8A"/>
+                </a:solidFill>
+              </a:rPr>
+              <a:t>Fonte: ISTAT / CCIAA Napoli 2025</a:t>
+            </a:r>
+            <a:endParaRPr lang="en-US" sz="750" dirty="0"/>
+          </a:p>
+        </p:txBody>
+      </p:sp>
+      <p:sp>
+        <p:nvSpPr>
+          <p:cNvPr id="16" name="Shape 14"/>
           <p:cNvSpPr/>
           <p:nvPr/>
         </p:nvSpPr>
@@ -7642,7 +7714,7 @@
       </p:sp>
       <p:sp>
         <p:nvSpPr>
-          <p:cNvPr id="15" name="Text 13"/>
+          <p:cNvPr id="17" name="Text 15"/>
           <p:cNvSpPr/>
           <p:nvPr/>
         </p:nvSpPr>
@@ -7681,7 +7753,7 @@
       </p:sp>
       <p:sp>
         <p:nvSpPr>
-          <p:cNvPr id="16" name="Text 14"/>
+          <p:cNvPr id="18" name="Text 16"/>
           <p:cNvSpPr/>
           <p:nvPr/>
         </p:nvSpPr>
@@ -7737,7 +7809,7 @@
       </p:sp>
       <p:sp>
         <p:nvSpPr>
-          <p:cNvPr id="17" name="Shape 15"/>
+          <p:cNvPr id="19" name="Shape 17"/>
           <p:cNvSpPr/>
           <p:nvPr/>
         </p:nvSpPr>
@@ -7762,14 +7834,14 @@
       </p:sp>
       <p:sp>
         <p:nvSpPr>
-          <p:cNvPr id="18" name="Text 16"/>
+          <p:cNvPr id="20" name="Text 18"/>
           <p:cNvSpPr/>
           <p:nvPr/>
         </p:nvSpPr>
         <p:spPr>
           <a:xfrm>
             <a:off x="8138160" y="3520440"/>
-            <a:ext cx="3520440" cy="274320"/>
+            <a:ext cx="3520440" cy="228600"/>
           </a:xfrm>
           <a:prstGeom prst="rect">
             <a:avLst/>
@@ -7798,14 +7870,50 @@
       </p:sp>
       <p:sp>
         <p:nvSpPr>
-          <p:cNvPr id="19" name="Shape 17"/>
-          <p:cNvSpPr/>
-          <p:nvPr/>
-        </p:nvSpPr>
-        <p:spPr>
-          <a:xfrm>
-            <a:off x="457200" y="4572000"/>
-            <a:ext cx="5577840" cy="1234440"/>
+          <p:cNvPr id="21" name="Text 19"/>
+          <p:cNvSpPr/>
+          <p:nvPr/>
+        </p:nvSpPr>
+        <p:spPr>
+          <a:xfrm>
+            <a:off x="8229600" y="3822192"/>
+            <a:ext cx="3337560" cy="182880"/>
+          </a:xfrm>
+          <a:prstGeom prst="rect">
+            <a:avLst/>
+          </a:prstGeom>
+          <a:noFill/>
+          <a:ln/>
+        </p:spPr>
+        <p:txBody>
+          <a:bodyPr wrap="square" lIns="0" tIns="0" rIns="0" bIns="0" rtlCol="0" anchor="ctr"/>
+          <a:lstStyle/>
+          <a:p>
+            <a:pPr algn="ctr" indent="0" marL="0">
+              <a:buNone/>
+            </a:pPr>
+            <a:r>
+              <a:rPr lang="en-US" sz="750" dirty="0">
+                <a:solidFill>
+                  <a:srgbClr val="4A7A8A"/>
+                </a:solidFill>
+              </a:rPr>
+              <a:t>Fonte: stima interna Dloop su dati CCIAA</a:t>
+            </a:r>
+            <a:endParaRPr lang="en-US" sz="750" dirty="0"/>
+          </a:p>
+        </p:txBody>
+      </p:sp>
+      <p:sp>
+        <p:nvSpPr>
+          <p:cNvPr id="22" name="Shape 20"/>
+          <p:cNvSpPr/>
+          <p:nvPr/>
+        </p:nvSpPr>
+        <p:spPr>
+          <a:xfrm>
+            <a:off x="457200" y="4434840"/>
+            <a:ext cx="5577840" cy="868680"/>
           </a:xfrm>
           <a:prstGeom prst="rect">
             <a:avLst/>
@@ -7823,14 +7931,14 @@
       </p:sp>
       <p:sp>
         <p:nvSpPr>
-          <p:cNvPr id="20" name="Text 18"/>
-          <p:cNvSpPr/>
-          <p:nvPr/>
-        </p:nvSpPr>
-        <p:spPr>
-          <a:xfrm>
-            <a:off x="640080" y="4663440"/>
-            <a:ext cx="5212080" cy="256032"/>
+          <p:cNvPr id="23" name="Text 21"/>
+          <p:cNvSpPr/>
+          <p:nvPr/>
+        </p:nvSpPr>
+        <p:spPr>
+          <a:xfrm>
+            <a:off x="640080" y="4480560"/>
+            <a:ext cx="5212080" cy="237744"/>
           </a:xfrm>
           <a:prstGeom prst="rect">
             <a:avLst/>
@@ -7859,7 +7967,7 @@
       </p:sp>
       <p:sp>
         <p:nvSpPr>
-          <p:cNvPr id="21" name="Text 19"/>
+          <p:cNvPr id="24" name="Text 22"/>
           <p:cNvSpPr/>
           <p:nvPr/>
         </p:nvSpPr>
@@ -7898,14 +8006,14 @@
       </p:sp>
       <p:sp>
         <p:nvSpPr>
-          <p:cNvPr id="22" name="Shape 20"/>
-          <p:cNvSpPr/>
-          <p:nvPr/>
-        </p:nvSpPr>
-        <p:spPr>
-          <a:xfrm>
-            <a:off x="6309360" y="4572000"/>
-            <a:ext cx="5349240" cy="1234440"/>
+          <p:cNvPr id="25" name="Shape 23"/>
+          <p:cNvSpPr/>
+          <p:nvPr/>
+        </p:nvSpPr>
+        <p:spPr>
+          <a:xfrm>
+            <a:off x="6309360" y="4434840"/>
+            <a:ext cx="5349240" cy="868680"/>
           </a:xfrm>
           <a:prstGeom prst="rect">
             <a:avLst/>
@@ -7923,14 +8031,14 @@
       </p:sp>
       <p:sp>
         <p:nvSpPr>
-          <p:cNvPr id="23" name="Text 21"/>
-          <p:cNvSpPr/>
-          <p:nvPr/>
-        </p:nvSpPr>
-        <p:spPr>
-          <a:xfrm>
-            <a:off x="6492240" y="4663440"/>
-            <a:ext cx="4937760" cy="256032"/>
+          <p:cNvPr id="26" name="Text 24"/>
+          <p:cNvSpPr/>
+          <p:nvPr/>
+        </p:nvSpPr>
+        <p:spPr>
+          <a:xfrm>
+            <a:off x="6492240" y="4480560"/>
+            <a:ext cx="4937760" cy="237744"/>
           </a:xfrm>
           <a:prstGeom prst="rect">
             <a:avLst/>
@@ -7959,14 +8067,14 @@
       </p:sp>
       <p:sp>
         <p:nvSpPr>
-          <p:cNvPr id="24" name="Text 22"/>
-          <p:cNvSpPr/>
-          <p:nvPr/>
-        </p:nvSpPr>
-        <p:spPr>
-          <a:xfrm>
-            <a:off x="6492240" y="4956048"/>
-            <a:ext cx="4937760" cy="731520"/>
+          <p:cNvPr id="27" name="Text 25"/>
+          <p:cNvSpPr/>
+          <p:nvPr/>
+        </p:nvSpPr>
+        <p:spPr>
+          <a:xfrm>
+            <a:off x="6492240" y="4754880"/>
+            <a:ext cx="4937760" cy="502920"/>
           </a:xfrm>
           <a:prstGeom prst="rect">
             <a:avLst/>
@@ -7980,7 +8088,7 @@
           <a:p>
             <a:pPr indent="0" marL="0">
               <a:lnSpc>
-                <a:spcPct val="140000"/>
+                <a:spcPct val="130000"/>
               </a:lnSpc>
               <a:buNone/>
             </a:pPr>
@@ -7998,7 +8106,7 @@
       </p:sp>
       <p:sp>
         <p:nvSpPr>
-          <p:cNvPr id="25" name="Text 23"/>
+          <p:cNvPr id="28" name="Text 26"/>
           <p:cNvSpPr/>
           <p:nvPr/>
         </p:nvSpPr>
@@ -8108,8 +8216,8 @@
         </p:nvSpPr>
         <p:spPr>
           <a:xfrm>
-            <a:off x="457200" y="640080"/>
-            <a:ext cx="8229600" cy="1005840"/>
+            <a:off x="457200" y="621792"/>
+            <a:ext cx="9144000" cy="594360"/>
           </a:xfrm>
           <a:prstGeom prst="rect">
             <a:avLst/>
@@ -8122,13 +8230,10 @@
           <a:lstStyle/>
           <a:p>
             <a:pPr indent="0" marL="0">
-              <a:lnSpc>
-                <a:spcPct val="110000"/>
-              </a:lnSpc>
-              <a:buNone/>
-            </a:pPr>
-            <a:r>
-              <a:rPr lang="en-US" sz="3400" b="1" dirty="0">
+              <a:buNone/>
+            </a:pPr>
+            <a:r>
+              <a:rPr lang="en-US" sz="3000" b="1" dirty="0">
                 <a:solidFill>
                   <a:srgbClr val="FFFFFF"/>
                 </a:solidFill>
@@ -8136,35 +8241,51 @@
                 <a:ea typeface="Georgia" pitchFamily="34" charset="-122"/>
                 <a:cs typeface="Georgia" pitchFamily="34" charset="-120"/>
               </a:rPr>
-              <a:t>Nessun competitor ha</a:t>
-            </a:r>
-            <a:endParaRPr lang="en-US" sz="3400" dirty="0"/>
-          </a:p>
+              <a:t>Nessun competitor ha il posizionamento di Dloop</a:t>
+            </a:r>
+            <a:endParaRPr lang="en-US" sz="3000" dirty="0"/>
+          </a:p>
+        </p:txBody>
+      </p:sp>
+      <p:sp>
+        <p:nvSpPr>
+          <p:cNvPr id="4" name="Text 2"/>
+          <p:cNvSpPr/>
+          <p:nvPr/>
+        </p:nvSpPr>
+        <p:spPr>
+          <a:xfrm>
+            <a:off x="457200" y="1261872"/>
+            <a:ext cx="11247120" cy="228600"/>
+          </a:xfrm>
+          <a:prstGeom prst="rect">
+            <a:avLst/>
+          </a:prstGeom>
+          <a:noFill/>
+          <a:ln/>
+        </p:spPr>
+        <p:txBody>
+          <a:bodyPr wrap="square" lIns="0" tIns="0" rIns="0" bIns="0" rtlCol="0" anchor="ctr"/>
+          <a:lstStyle/>
           <a:p>
             <a:pPr indent="0" marL="0">
-              <a:lnSpc>
-                <a:spcPct val="110000"/>
-              </a:lnSpc>
-              <a:buNone/>
-            </a:pPr>
-            <a:r>
-              <a:rPr lang="en-US" sz="3400" b="1" dirty="0">
-                <a:solidFill>
-                  <a:srgbClr val="FFFFFF"/>
-                </a:solidFill>
-                <a:latin typeface="Georgia" pitchFamily="34" charset="0"/>
-                <a:ea typeface="Georgia" pitchFamily="34" charset="-122"/>
-                <a:cs typeface="Georgia" pitchFamily="34" charset="-120"/>
-              </a:rPr>
-              <a:t>il posizionamento di Dloop</a:t>
-            </a:r>
-            <a:endParaRPr lang="en-US" sz="3400" dirty="0"/>
-          </a:p>
-        </p:txBody>
-      </p:sp>
-      <p:sp>
-        <p:nvSpPr>
-          <p:cNvPr id="4" name="Shape 2"/>
+              <a:buNone/>
+            </a:pPr>
+            <a:r>
+              <a:rPr lang="en-US" sz="800" dirty="0">
+                <a:solidFill>
+                  <a:srgbClr val="4A7A8A"/>
+                </a:solidFill>
+              </a:rPr>
+              <a:t>Fonti: Capterra IT 2025  ·  G2.com  ·  siti ufficiali Onfleet / Tookan / LogiNext  ·  pricing pubblico Glovo / Deliveroo / Alfonsino / Uber Eats</a:t>
+            </a:r>
+            <a:endParaRPr lang="en-US" sz="800" dirty="0"/>
+          </a:p>
+        </p:txBody>
+      </p:sp>
+      <p:sp>
+        <p:nvSpPr>
+          <p:cNvPr id="5" name="Shape 3"/>
           <p:cNvSpPr/>
           <p:nvPr/>
         </p:nvSpPr>
@@ -8189,7 +8310,7 @@
       </p:sp>
       <p:sp>
         <p:nvSpPr>
-          <p:cNvPr id="5" name="Text 3"/>
+          <p:cNvPr id="6" name="Text 4"/>
           <p:cNvSpPr/>
           <p:nvPr/>
         </p:nvSpPr>
@@ -8228,7 +8349,7 @@
       </p:sp>
       <p:sp>
         <p:nvSpPr>
-          <p:cNvPr id="6" name="Shape 4"/>
+          <p:cNvPr id="7" name="Shape 5"/>
           <p:cNvSpPr/>
           <p:nvPr/>
         </p:nvSpPr>
@@ -8253,7 +8374,7 @@
       </p:sp>
       <p:sp>
         <p:nvSpPr>
-          <p:cNvPr id="7" name="Text 5"/>
+          <p:cNvPr id="8" name="Text 6"/>
           <p:cNvSpPr/>
           <p:nvPr/>
         </p:nvSpPr>
@@ -8292,7 +8413,7 @@
       </p:sp>
       <p:sp>
         <p:nvSpPr>
-          <p:cNvPr id="8" name="Shape 6"/>
+          <p:cNvPr id="9" name="Shape 7"/>
           <p:cNvSpPr/>
           <p:nvPr/>
         </p:nvSpPr>
@@ -8317,7 +8438,7 @@
       </p:sp>
       <p:sp>
         <p:nvSpPr>
-          <p:cNvPr id="9" name="Text 7"/>
+          <p:cNvPr id="10" name="Text 8"/>
           <p:cNvSpPr/>
           <p:nvPr/>
         </p:nvSpPr>
@@ -8373,7 +8494,7 @@
       </p:sp>
       <p:sp>
         <p:nvSpPr>
-          <p:cNvPr id="10" name="Shape 8"/>
+          <p:cNvPr id="11" name="Shape 9"/>
           <p:cNvSpPr/>
           <p:nvPr/>
         </p:nvSpPr>
@@ -8398,7 +8519,7 @@
       </p:sp>
       <p:sp>
         <p:nvSpPr>
-          <p:cNvPr id="11" name="Text 9"/>
+          <p:cNvPr id="12" name="Text 10"/>
           <p:cNvSpPr/>
           <p:nvPr/>
         </p:nvSpPr>
@@ -8454,7 +8575,7 @@
       </p:sp>
       <p:sp>
         <p:nvSpPr>
-          <p:cNvPr id="12" name="Shape 10"/>
+          <p:cNvPr id="13" name="Shape 11"/>
           <p:cNvSpPr/>
           <p:nvPr/>
         </p:nvSpPr>
@@ -8479,7 +8600,7 @@
       </p:sp>
       <p:sp>
         <p:nvSpPr>
-          <p:cNvPr id="13" name="Text 11"/>
+          <p:cNvPr id="14" name="Text 12"/>
           <p:cNvSpPr/>
           <p:nvPr/>
         </p:nvSpPr>
@@ -8535,7 +8656,7 @@
       </p:sp>
       <p:sp>
         <p:nvSpPr>
-          <p:cNvPr id="14" name="Shape 12"/>
+          <p:cNvPr id="15" name="Shape 13"/>
           <p:cNvSpPr/>
           <p:nvPr/>
         </p:nvSpPr>
@@ -8560,7 +8681,7 @@
       </p:sp>
       <p:sp>
         <p:nvSpPr>
-          <p:cNvPr id="15" name="Text 13"/>
+          <p:cNvPr id="16" name="Text 14"/>
           <p:cNvSpPr/>
           <p:nvPr/>
         </p:nvSpPr>
@@ -8616,7 +8737,7 @@
       </p:sp>
       <p:sp>
         <p:nvSpPr>
-          <p:cNvPr id="16" name="Shape 14"/>
+          <p:cNvPr id="17" name="Shape 15"/>
           <p:cNvSpPr/>
           <p:nvPr/>
         </p:nvSpPr>
@@ -8641,7 +8762,7 @@
       </p:sp>
       <p:sp>
         <p:nvSpPr>
-          <p:cNvPr id="17" name="Text 15"/>
+          <p:cNvPr id="18" name="Text 16"/>
           <p:cNvSpPr/>
           <p:nvPr/>
         </p:nvSpPr>
@@ -8697,7 +8818,7 @@
       </p:sp>
       <p:sp>
         <p:nvSpPr>
-          <p:cNvPr id="18" name="Shape 16"/>
+          <p:cNvPr id="19" name="Shape 17"/>
           <p:cNvSpPr/>
           <p:nvPr/>
         </p:nvSpPr>
@@ -8722,7 +8843,7 @@
       </p:sp>
       <p:sp>
         <p:nvSpPr>
-          <p:cNvPr id="19" name="Shape 17"/>
+          <p:cNvPr id="20" name="Shape 18"/>
           <p:cNvSpPr/>
           <p:nvPr/>
         </p:nvSpPr>
@@ -8747,7 +8868,7 @@
       </p:sp>
       <p:sp>
         <p:nvSpPr>
-          <p:cNvPr id="20" name="Text 18"/>
+          <p:cNvPr id="21" name="Text 19"/>
           <p:cNvSpPr/>
           <p:nvPr/>
         </p:nvSpPr>
@@ -8783,7 +8904,7 @@
       </p:sp>
       <p:sp>
         <p:nvSpPr>
-          <p:cNvPr id="21" name="Shape 19"/>
+          <p:cNvPr id="22" name="Shape 20"/>
           <p:cNvSpPr/>
           <p:nvPr/>
         </p:nvSpPr>
@@ -8808,7 +8929,7 @@
       </p:sp>
       <p:sp>
         <p:nvSpPr>
-          <p:cNvPr id="22" name="Text 20"/>
+          <p:cNvPr id="23" name="Text 21"/>
           <p:cNvSpPr/>
           <p:nvPr/>
         </p:nvSpPr>
@@ -8844,7 +8965,7 @@
       </p:sp>
       <p:sp>
         <p:nvSpPr>
-          <p:cNvPr id="23" name="Shape 21"/>
+          <p:cNvPr id="24" name="Shape 22"/>
           <p:cNvSpPr/>
           <p:nvPr/>
         </p:nvSpPr>
@@ -8869,7 +8990,7 @@
       </p:sp>
       <p:sp>
         <p:nvSpPr>
-          <p:cNvPr id="24" name="Text 22"/>
+          <p:cNvPr id="25" name="Text 23"/>
           <p:cNvSpPr/>
           <p:nvPr/>
         </p:nvSpPr>
@@ -8905,7 +9026,7 @@
       </p:sp>
       <p:sp>
         <p:nvSpPr>
-          <p:cNvPr id="25" name="Shape 23"/>
+          <p:cNvPr id="26" name="Shape 24"/>
           <p:cNvSpPr/>
           <p:nvPr/>
         </p:nvSpPr>
@@ -8930,7 +9051,7 @@
       </p:sp>
       <p:sp>
         <p:nvSpPr>
-          <p:cNvPr id="26" name="Text 24"/>
+          <p:cNvPr id="27" name="Text 25"/>
           <p:cNvSpPr/>
           <p:nvPr/>
         </p:nvSpPr>
@@ -8966,7 +9087,7 @@
       </p:sp>
       <p:sp>
         <p:nvSpPr>
-          <p:cNvPr id="27" name="Shape 25"/>
+          <p:cNvPr id="28" name="Shape 26"/>
           <p:cNvSpPr/>
           <p:nvPr/>
         </p:nvSpPr>
@@ -8991,7 +9112,7 @@
       </p:sp>
       <p:sp>
         <p:nvSpPr>
-          <p:cNvPr id="28" name="Text 26"/>
+          <p:cNvPr id="29" name="Text 27"/>
           <p:cNvSpPr/>
           <p:nvPr/>
         </p:nvSpPr>
@@ -9027,7 +9148,7 @@
       </p:sp>
       <p:sp>
         <p:nvSpPr>
-          <p:cNvPr id="29" name="Shape 27"/>
+          <p:cNvPr id="30" name="Shape 28"/>
           <p:cNvSpPr/>
           <p:nvPr/>
         </p:nvSpPr>
@@ -9052,7 +9173,7 @@
       </p:sp>
       <p:sp>
         <p:nvSpPr>
-          <p:cNvPr id="30" name="Text 28"/>
+          <p:cNvPr id="31" name="Text 29"/>
           <p:cNvSpPr/>
           <p:nvPr/>
         </p:nvSpPr>
@@ -9088,7 +9209,7 @@
       </p:sp>
       <p:sp>
         <p:nvSpPr>
-          <p:cNvPr id="31" name="Shape 29"/>
+          <p:cNvPr id="32" name="Shape 30"/>
           <p:cNvSpPr/>
           <p:nvPr/>
         </p:nvSpPr>
@@ -9113,7 +9234,7 @@
       </p:sp>
       <p:sp>
         <p:nvSpPr>
-          <p:cNvPr id="32" name="Text 30"/>
+          <p:cNvPr id="33" name="Text 31"/>
           <p:cNvSpPr/>
           <p:nvPr/>
         </p:nvSpPr>
@@ -9149,7 +9270,7 @@
       </p:sp>
       <p:sp>
         <p:nvSpPr>
-          <p:cNvPr id="33" name="Shape 31"/>
+          <p:cNvPr id="34" name="Shape 32"/>
           <p:cNvSpPr/>
           <p:nvPr/>
         </p:nvSpPr>
@@ -9174,7 +9295,7 @@
       </p:sp>
       <p:sp>
         <p:nvSpPr>
-          <p:cNvPr id="34" name="Text 32"/>
+          <p:cNvPr id="35" name="Text 33"/>
           <p:cNvSpPr/>
           <p:nvPr/>
         </p:nvSpPr>
@@ -9210,7 +9331,7 @@
       </p:sp>
       <p:sp>
         <p:nvSpPr>
-          <p:cNvPr id="35" name="Shape 33"/>
+          <p:cNvPr id="36" name="Shape 34"/>
           <p:cNvSpPr/>
           <p:nvPr/>
         </p:nvSpPr>
@@ -9235,7 +9356,7 @@
       </p:sp>
       <p:sp>
         <p:nvSpPr>
-          <p:cNvPr id="36" name="Text 34"/>
+          <p:cNvPr id="37" name="Text 35"/>
           <p:cNvSpPr/>
           <p:nvPr/>
         </p:nvSpPr>
@@ -9271,7 +9392,7 @@
       </p:sp>
       <p:sp>
         <p:nvSpPr>
-          <p:cNvPr id="37" name="Shape 35"/>
+          <p:cNvPr id="38" name="Shape 36"/>
           <p:cNvSpPr/>
           <p:nvPr/>
         </p:nvSpPr>
@@ -9296,7 +9417,7 @@
       </p:sp>
       <p:sp>
         <p:nvSpPr>
-          <p:cNvPr id="38" name="Text 36"/>
+          <p:cNvPr id="39" name="Text 37"/>
           <p:cNvSpPr/>
           <p:nvPr/>
         </p:nvSpPr>
@@ -9332,7 +9453,7 @@
       </p:sp>
       <p:sp>
         <p:nvSpPr>
-          <p:cNvPr id="39" name="Shape 37"/>
+          <p:cNvPr id="40" name="Shape 38"/>
           <p:cNvSpPr/>
           <p:nvPr/>
         </p:nvSpPr>
@@ -9357,7 +9478,7 @@
       </p:sp>
       <p:sp>
         <p:nvSpPr>
-          <p:cNvPr id="40" name="Text 38"/>
+          <p:cNvPr id="41" name="Text 39"/>
           <p:cNvSpPr/>
           <p:nvPr/>
         </p:nvSpPr>
@@ -9393,7 +9514,7 @@
       </p:sp>
       <p:sp>
         <p:nvSpPr>
-          <p:cNvPr id="41" name="Shape 39"/>
+          <p:cNvPr id="42" name="Shape 40"/>
           <p:cNvSpPr/>
           <p:nvPr/>
         </p:nvSpPr>
@@ -9418,7 +9539,7 @@
       </p:sp>
       <p:sp>
         <p:nvSpPr>
-          <p:cNvPr id="42" name="Text 40"/>
+          <p:cNvPr id="43" name="Text 41"/>
           <p:cNvSpPr/>
           <p:nvPr/>
         </p:nvSpPr>
@@ -9454,7 +9575,7 @@
       </p:sp>
       <p:sp>
         <p:nvSpPr>
-          <p:cNvPr id="43" name="Shape 41"/>
+          <p:cNvPr id="44" name="Shape 42"/>
           <p:cNvSpPr/>
           <p:nvPr/>
         </p:nvSpPr>
@@ -9479,7 +9600,7 @@
       </p:sp>
       <p:sp>
         <p:nvSpPr>
-          <p:cNvPr id="44" name="Text 42"/>
+          <p:cNvPr id="45" name="Text 43"/>
           <p:cNvSpPr/>
           <p:nvPr/>
         </p:nvSpPr>
@@ -9515,7 +9636,7 @@
       </p:sp>
       <p:sp>
         <p:nvSpPr>
-          <p:cNvPr id="45" name="Shape 43"/>
+          <p:cNvPr id="46" name="Shape 44"/>
           <p:cNvSpPr/>
           <p:nvPr/>
         </p:nvSpPr>
@@ -9540,7 +9661,7 @@
       </p:sp>
       <p:sp>
         <p:nvSpPr>
-          <p:cNvPr id="46" name="Text 44"/>
+          <p:cNvPr id="47" name="Text 45"/>
           <p:cNvSpPr/>
           <p:nvPr/>
         </p:nvSpPr>
@@ -9576,7 +9697,7 @@
       </p:sp>
       <p:sp>
         <p:nvSpPr>
-          <p:cNvPr id="47" name="Shape 45"/>
+          <p:cNvPr id="48" name="Shape 46"/>
           <p:cNvSpPr/>
           <p:nvPr/>
         </p:nvSpPr>
@@ -9601,7 +9722,7 @@
       </p:sp>
       <p:sp>
         <p:nvSpPr>
-          <p:cNvPr id="48" name="Text 46"/>
+          <p:cNvPr id="49" name="Text 47"/>
           <p:cNvSpPr/>
           <p:nvPr/>
         </p:nvSpPr>
@@ -9637,7 +9758,7 @@
       </p:sp>
       <p:sp>
         <p:nvSpPr>
-          <p:cNvPr id="49" name="Shape 47"/>
+          <p:cNvPr id="50" name="Shape 48"/>
           <p:cNvSpPr/>
           <p:nvPr/>
         </p:nvSpPr>
@@ -9662,7 +9783,7 @@
       </p:sp>
       <p:sp>
         <p:nvSpPr>
-          <p:cNvPr id="50" name="Text 48"/>
+          <p:cNvPr id="51" name="Text 49"/>
           <p:cNvSpPr/>
           <p:nvPr/>
         </p:nvSpPr>
@@ -9698,7 +9819,7 @@
       </p:sp>
       <p:sp>
         <p:nvSpPr>
-          <p:cNvPr id="51" name="Shape 49"/>
+          <p:cNvPr id="52" name="Shape 50"/>
           <p:cNvSpPr/>
           <p:nvPr/>
         </p:nvSpPr>
@@ -9723,7 +9844,7 @@
       </p:sp>
       <p:sp>
         <p:nvSpPr>
-          <p:cNvPr id="52" name="Text 50"/>
+          <p:cNvPr id="53" name="Text 51"/>
           <p:cNvSpPr/>
           <p:nvPr/>
         </p:nvSpPr>
@@ -9759,7 +9880,7 @@
       </p:sp>
       <p:sp>
         <p:nvSpPr>
-          <p:cNvPr id="53" name="Shape 51"/>
+          <p:cNvPr id="54" name="Shape 52"/>
           <p:cNvSpPr/>
           <p:nvPr/>
         </p:nvSpPr>
@@ -9784,7 +9905,7 @@
       </p:sp>
       <p:sp>
         <p:nvSpPr>
-          <p:cNvPr id="54" name="Text 52"/>
+          <p:cNvPr id="55" name="Text 53"/>
           <p:cNvSpPr/>
           <p:nvPr/>
         </p:nvSpPr>
@@ -9820,7 +9941,7 @@
       </p:sp>
       <p:sp>
         <p:nvSpPr>
-          <p:cNvPr id="55" name="Shape 53"/>
+          <p:cNvPr id="56" name="Shape 54"/>
           <p:cNvSpPr/>
           <p:nvPr/>
         </p:nvSpPr>
@@ -9845,7 +9966,7 @@
       </p:sp>
       <p:sp>
         <p:nvSpPr>
-          <p:cNvPr id="56" name="Text 54"/>
+          <p:cNvPr id="57" name="Text 55"/>
           <p:cNvSpPr/>
           <p:nvPr/>
         </p:nvSpPr>
@@ -9881,7 +10002,7 @@
       </p:sp>
       <p:sp>
         <p:nvSpPr>
-          <p:cNvPr id="57" name="Shape 55"/>
+          <p:cNvPr id="58" name="Shape 56"/>
           <p:cNvSpPr/>
           <p:nvPr/>
         </p:nvSpPr>
@@ -9906,7 +10027,7 @@
       </p:sp>
       <p:sp>
         <p:nvSpPr>
-          <p:cNvPr id="58" name="Text 56"/>
+          <p:cNvPr id="59" name="Text 57"/>
           <p:cNvSpPr/>
           <p:nvPr/>
         </p:nvSpPr>
@@ -9942,7 +10063,7 @@
       </p:sp>
       <p:sp>
         <p:nvSpPr>
-          <p:cNvPr id="59" name="Shape 57"/>
+          <p:cNvPr id="60" name="Shape 58"/>
           <p:cNvSpPr/>
           <p:nvPr/>
         </p:nvSpPr>
@@ -9967,7 +10088,7 @@
       </p:sp>
       <p:sp>
         <p:nvSpPr>
-          <p:cNvPr id="60" name="Text 58"/>
+          <p:cNvPr id="61" name="Text 59"/>
           <p:cNvSpPr/>
           <p:nvPr/>
         </p:nvSpPr>
@@ -10003,7 +10124,7 @@
       </p:sp>
       <p:sp>
         <p:nvSpPr>
-          <p:cNvPr id="61" name="Shape 59"/>
+          <p:cNvPr id="62" name="Shape 60"/>
           <p:cNvSpPr/>
           <p:nvPr/>
         </p:nvSpPr>
@@ -10028,7 +10149,7 @@
       </p:sp>
       <p:sp>
         <p:nvSpPr>
-          <p:cNvPr id="62" name="Text 60"/>
+          <p:cNvPr id="63" name="Text 61"/>
           <p:cNvSpPr/>
           <p:nvPr/>
         </p:nvSpPr>
@@ -10064,7 +10185,7 @@
       </p:sp>
       <p:sp>
         <p:nvSpPr>
-          <p:cNvPr id="63" name="Shape 61"/>
+          <p:cNvPr id="64" name="Shape 62"/>
           <p:cNvSpPr/>
           <p:nvPr/>
         </p:nvSpPr>
@@ -10089,7 +10210,7 @@
       </p:sp>
       <p:sp>
         <p:nvSpPr>
-          <p:cNvPr id="64" name="Text 62"/>
+          <p:cNvPr id="65" name="Text 63"/>
           <p:cNvSpPr/>
           <p:nvPr/>
         </p:nvSpPr>
@@ -10125,7 +10246,7 @@
       </p:sp>
       <p:sp>
         <p:nvSpPr>
-          <p:cNvPr id="65" name="Shape 63"/>
+          <p:cNvPr id="66" name="Shape 64"/>
           <p:cNvSpPr/>
           <p:nvPr/>
         </p:nvSpPr>
@@ -10150,7 +10271,7 @@
       </p:sp>
       <p:sp>
         <p:nvSpPr>
-          <p:cNvPr id="66" name="Text 64"/>
+          <p:cNvPr id="67" name="Text 65"/>
           <p:cNvSpPr/>
           <p:nvPr/>
         </p:nvSpPr>
@@ -10186,7 +10307,7 @@
       </p:sp>
       <p:sp>
         <p:nvSpPr>
-          <p:cNvPr id="67" name="Shape 65"/>
+          <p:cNvPr id="68" name="Shape 66"/>
           <p:cNvSpPr/>
           <p:nvPr/>
         </p:nvSpPr>
@@ -10211,7 +10332,7 @@
       </p:sp>
       <p:sp>
         <p:nvSpPr>
-          <p:cNvPr id="68" name="Text 66"/>
+          <p:cNvPr id="69" name="Text 67"/>
           <p:cNvSpPr/>
           <p:nvPr/>
         </p:nvSpPr>
@@ -10247,7 +10368,7 @@
       </p:sp>
       <p:sp>
         <p:nvSpPr>
-          <p:cNvPr id="69" name="Shape 67"/>
+          <p:cNvPr id="70" name="Shape 68"/>
           <p:cNvSpPr/>
           <p:nvPr/>
         </p:nvSpPr>
@@ -10272,7 +10393,7 @@
       </p:sp>
       <p:sp>
         <p:nvSpPr>
-          <p:cNvPr id="70" name="Text 68"/>
+          <p:cNvPr id="71" name="Text 69"/>
           <p:cNvSpPr/>
           <p:nvPr/>
         </p:nvSpPr>
@@ -10308,7 +10429,7 @@
       </p:sp>
       <p:sp>
         <p:nvSpPr>
-          <p:cNvPr id="71" name="Shape 69"/>
+          <p:cNvPr id="72" name="Shape 70"/>
           <p:cNvSpPr/>
           <p:nvPr/>
         </p:nvSpPr>
@@ -10333,7 +10454,7 @@
       </p:sp>
       <p:sp>
         <p:nvSpPr>
-          <p:cNvPr id="72" name="Text 70"/>
+          <p:cNvPr id="73" name="Text 71"/>
           <p:cNvSpPr/>
           <p:nvPr/>
         </p:nvSpPr>
@@ -10369,7 +10490,7 @@
       </p:sp>
       <p:sp>
         <p:nvSpPr>
-          <p:cNvPr id="73" name="Shape 71"/>
+          <p:cNvPr id="74" name="Shape 72"/>
           <p:cNvSpPr/>
           <p:nvPr/>
         </p:nvSpPr>
@@ -10394,7 +10515,7 @@
       </p:sp>
       <p:sp>
         <p:nvSpPr>
-          <p:cNvPr id="74" name="Text 72"/>
+          <p:cNvPr id="75" name="Text 73"/>
           <p:cNvSpPr/>
           <p:nvPr/>
         </p:nvSpPr>
@@ -10430,7 +10551,7 @@
       </p:sp>
       <p:sp>
         <p:nvSpPr>
-          <p:cNvPr id="75" name="Shape 73"/>
+          <p:cNvPr id="76" name="Shape 74"/>
           <p:cNvSpPr/>
           <p:nvPr/>
         </p:nvSpPr>
@@ -10455,7 +10576,7 @@
       </p:sp>
       <p:sp>
         <p:nvSpPr>
-          <p:cNvPr id="76" name="Text 74"/>
+          <p:cNvPr id="77" name="Text 75"/>
           <p:cNvSpPr/>
           <p:nvPr/>
         </p:nvSpPr>
@@ -10491,7 +10612,7 @@
       </p:sp>
       <p:sp>
         <p:nvSpPr>
-          <p:cNvPr id="77" name="Shape 75"/>
+          <p:cNvPr id="78" name="Shape 76"/>
           <p:cNvSpPr/>
           <p:nvPr/>
         </p:nvSpPr>
@@ -10516,7 +10637,7 @@
       </p:sp>
       <p:sp>
         <p:nvSpPr>
-          <p:cNvPr id="78" name="Text 76"/>
+          <p:cNvPr id="79" name="Text 77"/>
           <p:cNvSpPr/>
           <p:nvPr/>
         </p:nvSpPr>
@@ -10552,7 +10673,7 @@
       </p:sp>
       <p:sp>
         <p:nvSpPr>
-          <p:cNvPr id="79" name="Shape 77"/>
+          <p:cNvPr id="80" name="Shape 78"/>
           <p:cNvSpPr/>
           <p:nvPr/>
         </p:nvSpPr>
@@ -10577,7 +10698,7 @@
       </p:sp>
       <p:sp>
         <p:nvSpPr>
-          <p:cNvPr id="80" name="Text 78"/>
+          <p:cNvPr id="81" name="Text 79"/>
           <p:cNvSpPr/>
           <p:nvPr/>
         </p:nvSpPr>
@@ -10613,7 +10734,7 @@
       </p:sp>
       <p:sp>
         <p:nvSpPr>
-          <p:cNvPr id="81" name="Shape 79"/>
+          <p:cNvPr id="82" name="Shape 80"/>
           <p:cNvSpPr/>
           <p:nvPr/>
         </p:nvSpPr>
@@ -10638,7 +10759,7 @@
       </p:sp>
       <p:sp>
         <p:nvSpPr>
-          <p:cNvPr id="82" name="Text 80"/>
+          <p:cNvPr id="83" name="Text 81"/>
           <p:cNvSpPr/>
           <p:nvPr/>
         </p:nvSpPr>
@@ -10674,7 +10795,7 @@
       </p:sp>
       <p:sp>
         <p:nvSpPr>
-          <p:cNvPr id="83" name="Shape 81"/>
+          <p:cNvPr id="84" name="Shape 82"/>
           <p:cNvSpPr/>
           <p:nvPr/>
         </p:nvSpPr>
@@ -10699,7 +10820,7 @@
       </p:sp>
       <p:sp>
         <p:nvSpPr>
-          <p:cNvPr id="84" name="Text 82"/>
+          <p:cNvPr id="85" name="Text 83"/>
           <p:cNvSpPr/>
           <p:nvPr/>
         </p:nvSpPr>
@@ -10735,7 +10856,7 @@
       </p:sp>
       <p:sp>
         <p:nvSpPr>
-          <p:cNvPr id="85" name="Shape 83"/>
+          <p:cNvPr id="86" name="Shape 84"/>
           <p:cNvSpPr/>
           <p:nvPr/>
         </p:nvSpPr>
@@ -10760,7 +10881,7 @@
       </p:sp>
       <p:sp>
         <p:nvSpPr>
-          <p:cNvPr id="86" name="Text 84"/>
+          <p:cNvPr id="87" name="Text 85"/>
           <p:cNvSpPr/>
           <p:nvPr/>
         </p:nvSpPr>
@@ -10796,7 +10917,7 @@
       </p:sp>
       <p:sp>
         <p:nvSpPr>
-          <p:cNvPr id="87" name="Shape 85"/>
+          <p:cNvPr id="88" name="Shape 86"/>
           <p:cNvSpPr/>
           <p:nvPr/>
         </p:nvSpPr>
@@ -10821,7 +10942,7 @@
       </p:sp>
       <p:sp>
         <p:nvSpPr>
-          <p:cNvPr id="88" name="Text 86"/>
+          <p:cNvPr id="89" name="Text 87"/>
           <p:cNvSpPr/>
           <p:nvPr/>
         </p:nvSpPr>
@@ -10857,7 +10978,7 @@
       </p:sp>
       <p:sp>
         <p:nvSpPr>
-          <p:cNvPr id="89" name="Shape 87"/>
+          <p:cNvPr id="90" name="Shape 88"/>
           <p:cNvSpPr/>
           <p:nvPr/>
         </p:nvSpPr>
@@ -10882,7 +11003,7 @@
       </p:sp>
       <p:sp>
         <p:nvSpPr>
-          <p:cNvPr id="90" name="Text 88"/>
+          <p:cNvPr id="91" name="Text 89"/>
           <p:cNvSpPr/>
           <p:nvPr/>
         </p:nvSpPr>
@@ -10918,7 +11039,7 @@
       </p:sp>
       <p:sp>
         <p:nvSpPr>
-          <p:cNvPr id="91" name="Shape 89"/>
+          <p:cNvPr id="92" name="Shape 90"/>
           <p:cNvSpPr/>
           <p:nvPr/>
         </p:nvSpPr>
@@ -10943,7 +11064,7 @@
       </p:sp>
       <p:sp>
         <p:nvSpPr>
-          <p:cNvPr id="92" name="Text 90"/>
+          <p:cNvPr id="93" name="Text 91"/>
           <p:cNvSpPr/>
           <p:nvPr/>
         </p:nvSpPr>
@@ -10979,7 +11100,7 @@
       </p:sp>
       <p:sp>
         <p:nvSpPr>
-          <p:cNvPr id="93" name="Shape 91"/>
+          <p:cNvPr id="94" name="Shape 92"/>
           <p:cNvSpPr/>
           <p:nvPr/>
         </p:nvSpPr>
@@ -11004,7 +11125,7 @@
       </p:sp>
       <p:sp>
         <p:nvSpPr>
-          <p:cNvPr id="94" name="Text 92"/>
+          <p:cNvPr id="95" name="Text 93"/>
           <p:cNvSpPr/>
           <p:nvPr/>
         </p:nvSpPr>
@@ -11040,7 +11161,7 @@
       </p:sp>
       <p:sp>
         <p:nvSpPr>
-          <p:cNvPr id="95" name="Shape 93"/>
+          <p:cNvPr id="96" name="Shape 94"/>
           <p:cNvSpPr/>
           <p:nvPr/>
         </p:nvSpPr>
@@ -11065,7 +11186,7 @@
       </p:sp>
       <p:sp>
         <p:nvSpPr>
-          <p:cNvPr id="96" name="Text 94"/>
+          <p:cNvPr id="97" name="Text 95"/>
           <p:cNvSpPr/>
           <p:nvPr/>
         </p:nvSpPr>
@@ -11101,7 +11222,7 @@
       </p:sp>
       <p:sp>
         <p:nvSpPr>
-          <p:cNvPr id="97" name="Shape 95"/>
+          <p:cNvPr id="98" name="Shape 96"/>
           <p:cNvSpPr/>
           <p:nvPr/>
         </p:nvSpPr>
@@ -11126,7 +11247,7 @@
       </p:sp>
       <p:sp>
         <p:nvSpPr>
-          <p:cNvPr id="98" name="Text 96"/>
+          <p:cNvPr id="99" name="Text 97"/>
           <p:cNvSpPr/>
           <p:nvPr/>
         </p:nvSpPr>
@@ -11162,7 +11283,7 @@
       </p:sp>
       <p:sp>
         <p:nvSpPr>
-          <p:cNvPr id="99" name="Shape 97"/>
+          <p:cNvPr id="100" name="Shape 98"/>
           <p:cNvSpPr/>
           <p:nvPr/>
         </p:nvSpPr>
@@ -11187,7 +11308,7 @@
       </p:sp>
       <p:sp>
         <p:nvSpPr>
-          <p:cNvPr id="100" name="Text 98"/>
+          <p:cNvPr id="101" name="Text 99"/>
           <p:cNvSpPr/>
           <p:nvPr/>
         </p:nvSpPr>
@@ -11223,7 +11344,7 @@
       </p:sp>
       <p:sp>
         <p:nvSpPr>
-          <p:cNvPr id="101" name="Shape 99"/>
+          <p:cNvPr id="102" name="Shape 100"/>
           <p:cNvSpPr/>
           <p:nvPr/>
         </p:nvSpPr>
@@ -11248,7 +11369,7 @@
       </p:sp>
       <p:sp>
         <p:nvSpPr>
-          <p:cNvPr id="102" name="Text 100"/>
+          <p:cNvPr id="103" name="Text 101"/>
           <p:cNvSpPr/>
           <p:nvPr/>
         </p:nvSpPr>
@@ -11284,7 +11405,7 @@
       </p:sp>
       <p:sp>
         <p:nvSpPr>
-          <p:cNvPr id="103" name="Shape 101"/>
+          <p:cNvPr id="104" name="Shape 102"/>
           <p:cNvSpPr/>
           <p:nvPr/>
         </p:nvSpPr>
@@ -11309,7 +11430,7 @@
       </p:sp>
       <p:sp>
         <p:nvSpPr>
-          <p:cNvPr id="104" name="Text 102"/>
+          <p:cNvPr id="105" name="Text 103"/>
           <p:cNvSpPr/>
           <p:nvPr/>
         </p:nvSpPr>
@@ -11345,7 +11466,7 @@
       </p:sp>
       <p:sp>
         <p:nvSpPr>
-          <p:cNvPr id="105" name="Shape 103"/>
+          <p:cNvPr id="106" name="Shape 104"/>
           <p:cNvSpPr/>
           <p:nvPr/>
         </p:nvSpPr>
@@ -11370,7 +11491,7 @@
       </p:sp>
       <p:sp>
         <p:nvSpPr>
-          <p:cNvPr id="106" name="Text 104"/>
+          <p:cNvPr id="107" name="Text 105"/>
           <p:cNvSpPr/>
           <p:nvPr/>
         </p:nvSpPr>
@@ -11406,7 +11527,7 @@
       </p:sp>
       <p:sp>
         <p:nvSpPr>
-          <p:cNvPr id="107" name="Shape 105"/>
+          <p:cNvPr id="108" name="Shape 106"/>
           <p:cNvSpPr/>
           <p:nvPr/>
         </p:nvSpPr>
@@ -11431,7 +11552,7 @@
       </p:sp>
       <p:sp>
         <p:nvSpPr>
-          <p:cNvPr id="108" name="Text 106"/>
+          <p:cNvPr id="109" name="Text 107"/>
           <p:cNvSpPr/>
           <p:nvPr/>
         </p:nvSpPr>
@@ -11467,7 +11588,7 @@
       </p:sp>
       <p:sp>
         <p:nvSpPr>
-          <p:cNvPr id="109" name="Shape 107"/>
+          <p:cNvPr id="110" name="Shape 108"/>
           <p:cNvSpPr/>
           <p:nvPr/>
         </p:nvSpPr>
@@ -11492,7 +11613,7 @@
       </p:sp>
       <p:sp>
         <p:nvSpPr>
-          <p:cNvPr id="110" name="Text 108"/>
+          <p:cNvPr id="111" name="Text 109"/>
           <p:cNvSpPr/>
           <p:nvPr/>
         </p:nvSpPr>
@@ -11528,7 +11649,7 @@
       </p:sp>
       <p:sp>
         <p:nvSpPr>
-          <p:cNvPr id="111" name="Shape 109"/>
+          <p:cNvPr id="112" name="Shape 110"/>
           <p:cNvSpPr/>
           <p:nvPr/>
         </p:nvSpPr>
@@ -11553,7 +11674,7 @@
       </p:sp>
       <p:sp>
         <p:nvSpPr>
-          <p:cNvPr id="112" name="Text 110"/>
+          <p:cNvPr id="113" name="Text 111"/>
           <p:cNvSpPr/>
           <p:nvPr/>
         </p:nvSpPr>
@@ -11589,7 +11710,7 @@
       </p:sp>
       <p:sp>
         <p:nvSpPr>
-          <p:cNvPr id="113" name="Shape 111"/>
+          <p:cNvPr id="114" name="Shape 112"/>
           <p:cNvSpPr/>
           <p:nvPr/>
         </p:nvSpPr>
@@ -11614,7 +11735,7 @@
       </p:sp>
       <p:sp>
         <p:nvSpPr>
-          <p:cNvPr id="114" name="Text 112"/>
+          <p:cNvPr id="115" name="Text 113"/>
           <p:cNvSpPr/>
           <p:nvPr/>
         </p:nvSpPr>
@@ -11650,7 +11771,7 @@
       </p:sp>
       <p:sp>
         <p:nvSpPr>
-          <p:cNvPr id="115" name="Shape 113"/>
+          <p:cNvPr id="116" name="Shape 114"/>
           <p:cNvSpPr/>
           <p:nvPr/>
         </p:nvSpPr>
@@ -11675,7 +11796,7 @@
       </p:sp>
       <p:sp>
         <p:nvSpPr>
-          <p:cNvPr id="116" name="Text 114"/>
+          <p:cNvPr id="117" name="Text 115"/>
           <p:cNvSpPr/>
           <p:nvPr/>
         </p:nvSpPr>
@@ -11711,7 +11832,7 @@
       </p:sp>
       <p:sp>
         <p:nvSpPr>
-          <p:cNvPr id="117" name="Shape 115"/>
+          <p:cNvPr id="118" name="Shape 116"/>
           <p:cNvSpPr/>
           <p:nvPr/>
         </p:nvSpPr>
@@ -11736,7 +11857,7 @@
       </p:sp>
       <p:sp>
         <p:nvSpPr>
-          <p:cNvPr id="118" name="Text 116"/>
+          <p:cNvPr id="119" name="Text 117"/>
           <p:cNvSpPr/>
           <p:nvPr/>
         </p:nvSpPr>
@@ -11772,7 +11893,7 @@
       </p:sp>
       <p:sp>
         <p:nvSpPr>
-          <p:cNvPr id="119" name="Shape 117"/>
+          <p:cNvPr id="120" name="Shape 118"/>
           <p:cNvSpPr/>
           <p:nvPr/>
         </p:nvSpPr>
@@ -11797,7 +11918,7 @@
       </p:sp>
       <p:sp>
         <p:nvSpPr>
-          <p:cNvPr id="120" name="Text 118"/>
+          <p:cNvPr id="121" name="Text 119"/>
           <p:cNvSpPr/>
           <p:nvPr/>
         </p:nvSpPr>
@@ -11833,7 +11954,7 @@
       </p:sp>
       <p:sp>
         <p:nvSpPr>
-          <p:cNvPr id="121" name="Shape 119"/>
+          <p:cNvPr id="122" name="Shape 120"/>
           <p:cNvSpPr/>
           <p:nvPr/>
         </p:nvSpPr>
@@ -11858,7 +11979,7 @@
       </p:sp>
       <p:sp>
         <p:nvSpPr>
-          <p:cNvPr id="122" name="Text 120"/>
+          <p:cNvPr id="123" name="Text 121"/>
           <p:cNvSpPr/>
           <p:nvPr/>
         </p:nvSpPr>
@@ -11894,7 +12015,7 @@
       </p:sp>
       <p:sp>
         <p:nvSpPr>
-          <p:cNvPr id="123" name="Shape 121"/>
+          <p:cNvPr id="124" name="Shape 122"/>
           <p:cNvSpPr/>
           <p:nvPr/>
         </p:nvSpPr>
@@ -11919,7 +12040,7 @@
       </p:sp>
       <p:sp>
         <p:nvSpPr>
-          <p:cNvPr id="124" name="Text 122"/>
+          <p:cNvPr id="125" name="Text 123"/>
           <p:cNvSpPr/>
           <p:nvPr/>
         </p:nvSpPr>
@@ -11955,7 +12076,7 @@
       </p:sp>
       <p:sp>
         <p:nvSpPr>
-          <p:cNvPr id="125" name="Shape 123"/>
+          <p:cNvPr id="126" name="Shape 124"/>
           <p:cNvSpPr/>
           <p:nvPr/>
         </p:nvSpPr>
@@ -11980,7 +12101,7 @@
       </p:sp>
       <p:sp>
         <p:nvSpPr>
-          <p:cNvPr id="126" name="Text 124"/>
+          <p:cNvPr id="127" name="Text 125"/>
           <p:cNvSpPr/>
           <p:nvPr/>
         </p:nvSpPr>
@@ -12016,7 +12137,7 @@
       </p:sp>
       <p:sp>
         <p:nvSpPr>
-          <p:cNvPr id="127" name="Shape 125"/>
+          <p:cNvPr id="128" name="Shape 126"/>
           <p:cNvSpPr/>
           <p:nvPr/>
         </p:nvSpPr>
@@ -12041,7 +12162,7 @@
       </p:sp>
       <p:sp>
         <p:nvSpPr>
-          <p:cNvPr id="128" name="Text 126"/>
+          <p:cNvPr id="129" name="Text 127"/>
           <p:cNvSpPr/>
           <p:nvPr/>
         </p:nvSpPr>
@@ -12077,7 +12198,7 @@
       </p:sp>
       <p:sp>
         <p:nvSpPr>
-          <p:cNvPr id="129" name="Shape 127"/>
+          <p:cNvPr id="130" name="Shape 128"/>
           <p:cNvSpPr/>
           <p:nvPr/>
         </p:nvSpPr>
@@ -12102,7 +12223,7 @@
       </p:sp>
       <p:sp>
         <p:nvSpPr>
-          <p:cNvPr id="130" name="Text 128"/>
+          <p:cNvPr id="131" name="Text 129"/>
           <p:cNvSpPr/>
           <p:nvPr/>
         </p:nvSpPr>
@@ -12138,7 +12259,7 @@
       </p:sp>
       <p:sp>
         <p:nvSpPr>
-          <p:cNvPr id="131" name="Shape 129"/>
+          <p:cNvPr id="132" name="Shape 130"/>
           <p:cNvSpPr/>
           <p:nvPr/>
         </p:nvSpPr>
@@ -12163,7 +12284,7 @@
       </p:sp>
       <p:sp>
         <p:nvSpPr>
-          <p:cNvPr id="132" name="Text 130"/>
+          <p:cNvPr id="133" name="Text 131"/>
           <p:cNvSpPr/>
           <p:nvPr/>
         </p:nvSpPr>
@@ -12199,7 +12320,7 @@
       </p:sp>
       <p:sp>
         <p:nvSpPr>
-          <p:cNvPr id="133" name="Shape 131"/>
+          <p:cNvPr id="134" name="Shape 132"/>
           <p:cNvSpPr/>
           <p:nvPr/>
         </p:nvSpPr>
@@ -12224,7 +12345,7 @@
       </p:sp>
       <p:sp>
         <p:nvSpPr>
-          <p:cNvPr id="134" name="Text 132"/>
+          <p:cNvPr id="135" name="Text 133"/>
           <p:cNvSpPr/>
           <p:nvPr/>
         </p:nvSpPr>
@@ -12260,7 +12381,7 @@
       </p:sp>
       <p:sp>
         <p:nvSpPr>
-          <p:cNvPr id="135" name="Text 133"/>
+          <p:cNvPr id="136" name="Text 134"/>
           <p:cNvSpPr/>
           <p:nvPr/>
         </p:nvSpPr>
@@ -12296,7 +12417,7 @@
       </p:sp>
       <p:sp>
         <p:nvSpPr>
-          <p:cNvPr id="136" name="Text 134"/>
+          <p:cNvPr id="137" name="Text 135"/>
           <p:cNvSpPr/>
           <p:nvPr/>
         </p:nvSpPr>

--- a/02-INVESTOR-PRESENTATIONS/DLOOP_Pitch_Deck_2026.pptx
+++ b/02-INVESTOR-PRESENTATIONS/DLOOP_Pitch_Deck_2026.pptx
@@ -7912,8 +7912,8 @@
         </p:nvSpPr>
         <p:spPr>
           <a:xfrm>
-            <a:off x="457200" y="4434840"/>
-            <a:ext cx="5577840" cy="868680"/>
+            <a:off x="457200" y="4297680"/>
+            <a:ext cx="5577840" cy="1280160"/>
           </a:xfrm>
           <a:prstGeom prst="rect">
             <a:avLst/>
@@ -7937,8 +7937,8 @@
         </p:nvSpPr>
         <p:spPr>
           <a:xfrm>
-            <a:off x="640080" y="4480560"/>
-            <a:ext cx="5212080" cy="237744"/>
+            <a:off x="640080" y="4352544"/>
+            <a:ext cx="5212080" cy="256032"/>
           </a:xfrm>
           <a:prstGeom prst="rect">
             <a:avLst/>
@@ -8012,8 +8012,8 @@
         </p:nvSpPr>
         <p:spPr>
           <a:xfrm>
-            <a:off x="6309360" y="4434840"/>
-            <a:ext cx="5349240" cy="868680"/>
+            <a:off x="6309360" y="4297680"/>
+            <a:ext cx="5349240" cy="1280160"/>
           </a:xfrm>
           <a:prstGeom prst="rect">
             <a:avLst/>
@@ -8037,8 +8037,8 @@
         </p:nvSpPr>
         <p:spPr>
           <a:xfrm>
-            <a:off x="6492240" y="4480560"/>
-            <a:ext cx="4937760" cy="237744"/>
+            <a:off x="6492240" y="4352544"/>
+            <a:ext cx="4937760" cy="256032"/>
           </a:xfrm>
           <a:prstGeom prst="rect">
             <a:avLst/>
@@ -8073,8 +8073,8 @@
         </p:nvSpPr>
         <p:spPr>
           <a:xfrm>
-            <a:off x="6492240" y="4754880"/>
-            <a:ext cx="4937760" cy="502920"/>
+            <a:off x="6492240" y="4636008"/>
+            <a:ext cx="4937760" cy="822960"/>
           </a:xfrm>
           <a:prstGeom prst="rect">
             <a:avLst/>
@@ -8088,7 +8088,7 @@
           <a:p>
             <a:pPr indent="0" marL="0">
               <a:lnSpc>
-                <a:spcPct val="130000"/>
+                <a:spcPct val="145000"/>
               </a:lnSpc>
               <a:buNone/>
             </a:pPr>
@@ -8255,7 +8255,7 @@
         </p:nvSpPr>
         <p:spPr>
           <a:xfrm>
-            <a:off x="457200" y="1261872"/>
+            <a:off x="457200" y="1481328"/>
             <a:ext cx="11247120" cy="228600"/>
           </a:xfrm>
           <a:prstGeom prst="rect">
